--- a/SP ppt.pptx
+++ b/SP ppt.pptx
@@ -20,7 +20,8 @@
     <p:sldId id="260" r:id="rId14"/>
     <p:sldId id="261" r:id="rId15"/>
     <p:sldId id="262" r:id="rId16"/>
-    <p:sldId id="263" r:id="rId17"/>
+    <p:sldId id="272" r:id="rId17"/>
+    <p:sldId id="263" r:id="rId18"/>
   </p:sldIdLst>
   <p:sldSz cx="12192000" cy="6858000"/>
   <p:notesSz cx="6858000" cy="9144000"/>
@@ -3309,7 +3310,7 @@
           <a:p>
             <a:fld id="{1160EA64-D806-43AC-9DF2-F8C432F32B4C}" type="datetimeFigureOut">
               <a:rPr lang="en-US" dirty="0"/>
-              <a:t>12/2/2024</a:t>
+              <a:t>12/2/24</a:t>
             </a:fld>
             <a:endParaRPr lang="en-US" dirty="0"/>
           </a:p>
@@ -3475,7 +3476,7 @@
           <a:p>
             <a:fld id="{E9F9C37B-1D36-470B-8223-D6C91242EC14}" type="datetimeFigureOut">
               <a:rPr lang="en-US" dirty="0"/>
-              <a:t>12/2/2024</a:t>
+              <a:t>12/2/24</a:t>
             </a:fld>
             <a:endParaRPr lang="en-US" dirty="0"/>
           </a:p>
@@ -3650,7 +3651,7 @@
           <a:p>
             <a:fld id="{67C6F52A-A82B-47A2-A83A-8C4C91F2D59F}" type="datetimeFigureOut">
               <a:rPr lang="en-US" dirty="0"/>
-              <a:t>12/2/2024</a:t>
+              <a:t>12/2/24</a:t>
             </a:fld>
             <a:endParaRPr lang="en-US" dirty="0"/>
           </a:p>
@@ -3815,7 +3816,7 @@
           <a:p>
             <a:fld id="{F070A7B3-6521-4DCA-87E5-044747A908C1}" type="datetimeFigureOut">
               <a:rPr lang="en-US" dirty="0"/>
-              <a:t>12/2/2024</a:t>
+              <a:t>12/2/24</a:t>
             </a:fld>
             <a:endParaRPr lang="en-US" dirty="0"/>
           </a:p>
@@ -4079,7 +4080,7 @@
           <a:p>
             <a:fld id="{1160EA64-D806-43AC-9DF2-F8C432F32B4C}" type="datetimeFigureOut">
               <a:rPr lang="en-US" dirty="0"/>
-              <a:t>12/2/2024</a:t>
+              <a:t>12/2/24</a:t>
             </a:fld>
             <a:endParaRPr lang="en-US" dirty="0"/>
           </a:p>
@@ -4307,7 +4308,7 @@
           <a:p>
             <a:fld id="{AB134690-1557-4C89-A502-4959FE7FAD70}" type="datetimeFigureOut">
               <a:rPr lang="en-US" dirty="0"/>
-              <a:t>12/2/2024</a:t>
+              <a:t>12/2/24</a:t>
             </a:fld>
             <a:endParaRPr lang="en-US" dirty="0"/>
           </a:p>
@@ -4661,7 +4662,7 @@
           <a:p>
             <a:fld id="{4F7D4976-E339-4826-83B7-FBD03F55ECF8}" type="datetimeFigureOut">
               <a:rPr lang="en-US" dirty="0"/>
-              <a:t>12/2/2024</a:t>
+              <a:t>12/2/24</a:t>
             </a:fld>
             <a:endParaRPr lang="en-US" dirty="0"/>
           </a:p>
@@ -4797,7 +4798,7 @@
           <a:p>
             <a:fld id="{E1037C31-9E7A-4F99-8774-A0E530DE1A42}" type="datetimeFigureOut">
               <a:rPr lang="en-US" dirty="0"/>
-              <a:t>12/2/2024</a:t>
+              <a:t>12/2/24</a:t>
             </a:fld>
             <a:endParaRPr lang="en-US" dirty="0"/>
           </a:p>
@@ -4887,7 +4888,7 @@
           <a:p>
             <a:fld id="{C278504F-A551-4DE0-9316-4DCD1D8CC752}" type="datetimeFigureOut">
               <a:rPr lang="en-US" dirty="0"/>
-              <a:t>12/2/2024</a:t>
+              <a:t>12/2/24</a:t>
             </a:fld>
             <a:endParaRPr lang="en-US" dirty="0"/>
           </a:p>
@@ -5239,7 +5240,7 @@
           <a:p>
             <a:fld id="{D1BE4249-C0D0-4B06-8692-E8BB871AF643}" type="datetimeFigureOut">
               <a:rPr lang="en-US" dirty="0"/>
-              <a:t>12/2/2024</a:t>
+              <a:t>12/2/24</a:t>
             </a:fld>
             <a:endParaRPr lang="en-US" dirty="0"/>
           </a:p>
@@ -5591,7 +5592,7 @@
           <a:p>
             <a:fld id="{042B0DB6-F5C7-45FB-8CF3-31B45F9C2DAC}" type="datetimeFigureOut">
               <a:rPr lang="en-US" dirty="0"/>
-              <a:t>12/2/2024</a:t>
+              <a:t>12/2/24</a:t>
             </a:fld>
             <a:endParaRPr lang="en-US" dirty="0"/>
           </a:p>
@@ -5828,7 +5829,7 @@
           <a:p>
             <a:fld id="{1160EA64-D806-43AC-9DF2-F8C432F32B4C}" type="datetimeFigureOut">
               <a:rPr lang="en-US" dirty="0"/>
-              <a:t>12/2/2024</a:t>
+              <a:t>12/2/24</a:t>
             </a:fld>
             <a:endParaRPr lang="en-US" dirty="0"/>
           </a:p>
@@ -6263,6 +6264,14 @@
 <file path=ppt/slides/slide1.xml><?xml version="1.0" encoding="utf-8"?>
 <p:sld xmlns:a="http://schemas.openxmlformats.org/drawingml/2006/main" xmlns:r="http://schemas.openxmlformats.org/officeDocument/2006/relationships" xmlns:p="http://schemas.openxmlformats.org/presentationml/2006/main">
   <p:cSld>
+    <p:bg>
+      <p:bgPr>
+        <a:solidFill>
+          <a:schemeClr val="accent2"/>
+        </a:solidFill>
+        <a:effectLst/>
+      </p:bgPr>
+    </p:bg>
     <p:spTree>
       <p:nvGrpSpPr>
         <p:cNvPr id="1" name=""/>
@@ -6279,6 +6288,71 @@
       </p:grpSpPr>
       <p:sp>
         <p:nvSpPr>
+          <p:cNvPr id="8" name="Rectangle 7">
+            <a:extLst>
+              <a:ext uri="{FF2B5EF4-FFF2-40B4-BE49-F238E27FC236}">
+                <a16:creationId xmlns:a16="http://schemas.microsoft.com/office/drawing/2014/main" id="{87D3A4E0-C908-4EA9-ABDF-E82AD6BDEF9D}"/>
+              </a:ext>
+              <a:ext uri="{C183D7F6-B498-43B3-948B-1728B52AA6E4}">
+                <adec:decorative xmlns:adec="http://schemas.microsoft.com/office/drawing/2017/decorative" val="1"/>
+              </a:ext>
+            </a:extLst>
+          </p:cNvPr>
+          <p:cNvSpPr>
+            <a:spLocks noGrp="1" noRot="1" noChangeAspect="1" noMove="1" noResize="1" noEditPoints="1" noAdjustHandles="1" noChangeArrowheads="1" noChangeShapeType="1" noTextEdit="1"/>
+          </p:cNvSpPr>
+          <p:nvPr>
+            <p:extLst>
+              <p:ext uri="{386F3935-93C4-4BCD-93E2-E3B085C9AB24}">
+                <p16:designElem xmlns:p16="http://schemas.microsoft.com/office/powerpoint/2015/main" val="1"/>
+              </p:ext>
+            </p:extLst>
+          </p:nvPr>
+        </p:nvSpPr>
+        <p:spPr>
+          <a:xfrm>
+            <a:off x="6096000" y="0"/>
+            <a:ext cx="6096000" cy="6858000"/>
+          </a:xfrm>
+          <a:prstGeom prst="rect">
+            <a:avLst/>
+          </a:prstGeom>
+          <a:solidFill>
+            <a:schemeClr val="tx1">
+              <a:lumMod val="95000"/>
+            </a:schemeClr>
+          </a:solidFill>
+          <a:ln>
+            <a:noFill/>
+          </a:ln>
+        </p:spPr>
+        <p:style>
+          <a:lnRef idx="2">
+            <a:schemeClr val="accent1">
+              <a:shade val="50000"/>
+            </a:schemeClr>
+          </a:lnRef>
+          <a:fillRef idx="1">
+            <a:schemeClr val="accent1"/>
+          </a:fillRef>
+          <a:effectRef idx="0">
+            <a:schemeClr val="accent1"/>
+          </a:effectRef>
+          <a:fontRef idx="minor">
+            <a:schemeClr val="lt1"/>
+          </a:fontRef>
+        </p:style>
+        <p:txBody>
+          <a:bodyPr rtlCol="0" anchor="ctr"/>
+          <a:lstStyle/>
+          <a:p>
+            <a:pPr algn="ctr"/>
+            <a:endParaRPr lang="en-US"/>
+          </a:p>
+        </p:txBody>
+      </p:sp>
+      <p:sp>
+        <p:nvSpPr>
           <p:cNvPr id="2" name="Title 1">
             <a:extLst>
               <a:ext uri="{FF2B5EF4-FFF2-40B4-BE49-F238E27FC236}">
@@ -6295,12 +6369,14 @@
         </p:nvSpPr>
         <p:spPr>
           <a:xfrm>
-            <a:off x="1600200" y="1553497"/>
-            <a:ext cx="8991600" cy="1661651"/>
+            <a:off x="1600200" y="2363323"/>
+            <a:ext cx="8991600" cy="1692771"/>
           </a:xfrm>
         </p:spPr>
         <p:txBody>
-          <a:bodyPr/>
+          <a:bodyPr>
+            <a:normAutofit/>
+          </a:bodyPr>
           <a:lstStyle/>
           <a:p>
             <a:r>
@@ -6328,8 +6404,8 @@
         </p:nvSpPr>
         <p:spPr>
           <a:xfrm>
-            <a:off x="2695193" y="3642853"/>
-            <a:ext cx="7087904" cy="1949585"/>
+            <a:off x="6579220" y="5374888"/>
+            <a:ext cx="3995955" cy="758282"/>
           </a:xfrm>
         </p:spPr>
         <p:txBody>
@@ -6338,8 +6414,9 @@
           </a:bodyPr>
           <a:lstStyle/>
           <a:p>
-            <a:r>
-              <a:rPr lang="en-US" dirty="0" err="1">
+            <a:pPr algn="r"/>
+            <a:r>
+              <a:rPr lang="en-US" sz="2800" dirty="0" err="1">
                 <a:solidFill>
                   <a:schemeClr val="bg1"/>
                 </a:solidFill>
@@ -6347,36 +6424,13 @@
               <a:t>FourYear</a:t>
             </a:r>
             <a:r>
-              <a:rPr lang="en-US" dirty="0">
+              <a:rPr lang="en-US" sz="2800" dirty="0">
                 <a:solidFill>
                   <a:schemeClr val="bg1"/>
                 </a:solidFill>
               </a:rPr>
               <a:t> Transforms</a:t>
             </a:r>
-          </a:p>
-          <a:p>
-            <a:r>
-              <a:rPr lang="en-US" dirty="0"/>
-              <a:t>Soham Jahagirdar</a:t>
-            </a:r>
-          </a:p>
-          <a:p>
-            <a:r>
-              <a:rPr lang="en-US" dirty="0"/>
-              <a:t>Aryan Agrawal</a:t>
-            </a:r>
-          </a:p>
-          <a:p>
-            <a:r>
-              <a:rPr lang="en-US" dirty="0"/>
-              <a:t>A. Sai </a:t>
-            </a:r>
-            <a:r>
-              <a:rPr lang="en-US" dirty="0" err="1"/>
-              <a:t>Rithvik</a:t>
-            </a:r>
-            <a:endParaRPr lang="en-US" dirty="0"/>
           </a:p>
         </p:txBody>
       </p:sp>
@@ -7791,6 +7845,238 @@
     <p:bg>
       <p:bgPr>
         <a:solidFill>
+          <a:schemeClr val="bg1"/>
+        </a:solidFill>
+        <a:effectLst/>
+      </p:bgPr>
+    </p:bg>
+    <p:spTree>
+      <p:nvGrpSpPr>
+        <p:cNvPr id="1" name=""/>
+        <p:cNvGrpSpPr/>
+        <p:nvPr/>
+      </p:nvGrpSpPr>
+      <p:grpSpPr>
+        <a:xfrm>
+          <a:off x="0" y="0"/>
+          <a:ext cx="0" cy="0"/>
+          <a:chOff x="0" y="0"/>
+          <a:chExt cx="0" cy="0"/>
+        </a:xfrm>
+      </p:grpSpPr>
+      <p:pic>
+        <p:nvPicPr>
+          <p:cNvPr id="3" name="Picture 2" descr="A screenshot of a computer&#10;&#10;Description automatically generated">
+            <a:extLst>
+              <a:ext uri="{FF2B5EF4-FFF2-40B4-BE49-F238E27FC236}">
+                <a16:creationId xmlns:a16="http://schemas.microsoft.com/office/drawing/2014/main" id="{4E44F273-1DE8-1826-3A0F-7727B9516553}"/>
+              </a:ext>
+            </a:extLst>
+          </p:cNvPr>
+          <p:cNvPicPr>
+            <a:picLocks noChangeAspect="1"/>
+          </p:cNvPicPr>
+          <p:nvPr/>
+        </p:nvPicPr>
+        <p:blipFill>
+          <a:blip r:embed="rId2"/>
+          <a:stretch>
+            <a:fillRect/>
+          </a:stretch>
+        </p:blipFill>
+        <p:spPr>
+          <a:xfrm>
+            <a:off x="4312386" y="1838828"/>
+            <a:ext cx="3517119" cy="3200577"/>
+          </a:xfrm>
+          <a:prstGeom prst="rect">
+            <a:avLst/>
+          </a:prstGeom>
+        </p:spPr>
+      </p:pic>
+      <p:cxnSp>
+        <p:nvCxnSpPr>
+          <p:cNvPr id="12" name="Straight Connector 11">
+            <a:extLst>
+              <a:ext uri="{FF2B5EF4-FFF2-40B4-BE49-F238E27FC236}">
+                <a16:creationId xmlns:a16="http://schemas.microsoft.com/office/drawing/2014/main" id="{DCD67800-37AC-4E14-89B0-F79DCB3FB86D}"/>
+              </a:ext>
+              <a:ext uri="{C183D7F6-B498-43B3-948B-1728B52AA6E4}">
+                <adec:decorative xmlns:adec="http://schemas.microsoft.com/office/drawing/2017/decorative" val="1"/>
+              </a:ext>
+            </a:extLst>
+          </p:cNvPr>
+          <p:cNvCxnSpPr>
+            <a:cxnSpLocks noGrp="1" noRot="1" noChangeAspect="1" noMove="1" noResize="1" noEditPoints="1" noAdjustHandles="1" noChangeArrowheads="1" noChangeShapeType="1"/>
+          </p:cNvCxnSpPr>
+          <p:nvPr>
+            <p:extLst>
+              <p:ext uri="{386F3935-93C4-4BCD-93E2-E3B085C9AB24}">
+                <p16:designElem xmlns:p16="http://schemas.microsoft.com/office/powerpoint/2015/main" val="1"/>
+              </p:ext>
+            </p:extLst>
+          </p:nvPr>
+        </p:nvCxnSpPr>
+        <p:spPr>
+          <a:xfrm>
+            <a:off x="4165600" y="1573887"/>
+            <a:ext cx="0" cy="3710227"/>
+          </a:xfrm>
+          <a:prstGeom prst="line">
+            <a:avLst/>
+          </a:prstGeom>
+          <a:ln w="19050">
+            <a:solidFill>
+              <a:srgbClr val="7F7F7F"/>
+            </a:solidFill>
+          </a:ln>
+        </p:spPr>
+        <p:style>
+          <a:lnRef idx="1">
+            <a:schemeClr val="accent1"/>
+          </a:lnRef>
+          <a:fillRef idx="0">
+            <a:schemeClr val="accent1"/>
+          </a:fillRef>
+          <a:effectRef idx="0">
+            <a:schemeClr val="accent1"/>
+          </a:effectRef>
+          <a:fontRef idx="minor">
+            <a:schemeClr val="tx1"/>
+          </a:fontRef>
+        </p:style>
+      </p:cxnSp>
+      <p:pic>
+        <p:nvPicPr>
+          <p:cNvPr id="7" name="Picture 6" descr="A screenshot of a computer&#10;&#10;Description automatically generated">
+            <a:extLst>
+              <a:ext uri="{FF2B5EF4-FFF2-40B4-BE49-F238E27FC236}">
+                <a16:creationId xmlns:a16="http://schemas.microsoft.com/office/drawing/2014/main" id="{C5F90E5A-0EFB-1E7F-6946-3532D262F72D}"/>
+              </a:ext>
+            </a:extLst>
+          </p:cNvPr>
+          <p:cNvPicPr>
+            <a:picLocks noChangeAspect="1"/>
+          </p:cNvPicPr>
+          <p:nvPr/>
+        </p:nvPicPr>
+        <p:blipFill>
+          <a:blip r:embed="rId3"/>
+          <a:stretch>
+            <a:fillRect/>
+          </a:stretch>
+        </p:blipFill>
+        <p:spPr>
+          <a:xfrm>
+            <a:off x="335281" y="1846952"/>
+            <a:ext cx="3537345" cy="3192453"/>
+          </a:xfrm>
+          <a:prstGeom prst="rect">
+            <a:avLst/>
+          </a:prstGeom>
+        </p:spPr>
+      </p:pic>
+      <p:cxnSp>
+        <p:nvCxnSpPr>
+          <p:cNvPr id="14" name="Straight Connector 13">
+            <a:extLst>
+              <a:ext uri="{FF2B5EF4-FFF2-40B4-BE49-F238E27FC236}">
+                <a16:creationId xmlns:a16="http://schemas.microsoft.com/office/drawing/2014/main" id="{20F1788F-A5AE-4188-8274-F7F2E3833ECD}"/>
+              </a:ext>
+              <a:ext uri="{C183D7F6-B498-43B3-948B-1728B52AA6E4}">
+                <adec:decorative xmlns:adec="http://schemas.microsoft.com/office/drawing/2017/decorative" val="1"/>
+              </a:ext>
+            </a:extLst>
+          </p:cNvPr>
+          <p:cNvCxnSpPr>
+            <a:cxnSpLocks noGrp="1" noRot="1" noChangeAspect="1" noMove="1" noResize="1" noEditPoints="1" noAdjustHandles="1" noChangeArrowheads="1" noChangeShapeType="1"/>
+          </p:cNvCxnSpPr>
+          <p:nvPr>
+            <p:extLst>
+              <p:ext uri="{386F3935-93C4-4BCD-93E2-E3B085C9AB24}">
+                <p16:designElem xmlns:p16="http://schemas.microsoft.com/office/powerpoint/2015/main" val="1"/>
+              </p:ext>
+            </p:extLst>
+          </p:nvPr>
+        </p:nvCxnSpPr>
+        <p:spPr>
+          <a:xfrm>
+            <a:off x="7995920" y="1573887"/>
+            <a:ext cx="0" cy="3710227"/>
+          </a:xfrm>
+          <a:prstGeom prst="line">
+            <a:avLst/>
+          </a:prstGeom>
+          <a:ln w="19050">
+            <a:solidFill>
+              <a:srgbClr val="7F7F7F"/>
+            </a:solidFill>
+          </a:ln>
+        </p:spPr>
+        <p:style>
+          <a:lnRef idx="1">
+            <a:schemeClr val="accent1"/>
+          </a:lnRef>
+          <a:fillRef idx="0">
+            <a:schemeClr val="accent1"/>
+          </a:fillRef>
+          <a:effectRef idx="0">
+            <a:schemeClr val="accent1"/>
+          </a:effectRef>
+          <a:fontRef idx="minor">
+            <a:schemeClr val="tx1"/>
+          </a:fontRef>
+        </p:style>
+      </p:cxnSp>
+      <p:pic>
+        <p:nvPicPr>
+          <p:cNvPr id="5" name="Picture 4" descr="A screenshot of a computer&#10;&#10;Description automatically generated">
+            <a:extLst>
+              <a:ext uri="{FF2B5EF4-FFF2-40B4-BE49-F238E27FC236}">
+                <a16:creationId xmlns:a16="http://schemas.microsoft.com/office/drawing/2014/main" id="{B7A8EBC9-76D5-9A53-9E85-E2FA2620A6E2}"/>
+              </a:ext>
+            </a:extLst>
+          </p:cNvPr>
+          <p:cNvPicPr>
+            <a:picLocks noChangeAspect="1"/>
+          </p:cNvPicPr>
+          <p:nvPr/>
+        </p:nvPicPr>
+        <p:blipFill>
+          <a:blip r:embed="rId4"/>
+          <a:stretch>
+            <a:fillRect/>
+          </a:stretch>
+        </p:blipFill>
+        <p:spPr>
+          <a:xfrm>
+            <a:off x="8162336" y="1838828"/>
+            <a:ext cx="3517120" cy="3174200"/>
+          </a:xfrm>
+          <a:prstGeom prst="rect">
+            <a:avLst/>
+          </a:prstGeom>
+        </p:spPr>
+      </p:pic>
+    </p:spTree>
+    <p:extLst>
+      <p:ext uri="{BB962C8B-B14F-4D97-AF65-F5344CB8AC3E}">
+        <p14:creationId xmlns:p14="http://schemas.microsoft.com/office/powerpoint/2010/main" val="363523608"/>
+      </p:ext>
+    </p:extLst>
+  </p:cSld>
+  <p:clrMapOvr>
+    <a:masterClrMapping/>
+  </p:clrMapOvr>
+</p:sld>
+</file>
+
+<file path=ppt/slides/slide17.xml><?xml version="1.0" encoding="utf-8"?>
+<p:sld xmlns:a="http://schemas.openxmlformats.org/drawingml/2006/main" xmlns:r="http://schemas.openxmlformats.org/officeDocument/2006/relationships" xmlns:p="http://schemas.openxmlformats.org/presentationml/2006/main">
+  <p:cSld>
+    <p:bg>
+      <p:bgPr>
+        <a:solidFill>
           <a:schemeClr val="bg1">
             <a:lumMod val="95000"/>
           </a:schemeClr>
@@ -7943,6 +8229,14 @@
 <file path=ppt/slides/slide3.xml><?xml version="1.0" encoding="utf-8"?>
 <p:sld xmlns:a="http://schemas.openxmlformats.org/drawingml/2006/main" xmlns:r="http://schemas.openxmlformats.org/officeDocument/2006/relationships" xmlns:p="http://schemas.openxmlformats.org/presentationml/2006/main">
   <p:cSld>
+    <p:bg>
+      <p:bgPr>
+        <a:solidFill>
+          <a:schemeClr val="accent2"/>
+        </a:solidFill>
+        <a:effectLst/>
+      </p:bgPr>
+    </p:bg>
     <p:spTree>
       <p:nvGrpSpPr>
         <p:cNvPr id="1" name=""/>
@@ -7973,15 +8267,100 @@
             <p:ph type="title"/>
           </p:nvPr>
         </p:nvSpPr>
-        <p:spPr/>
-        <p:txBody>
-          <a:bodyPr/>
+        <p:spPr>
+          <a:xfrm>
+            <a:off x="829781" y="2708804"/>
+            <a:ext cx="3698803" cy="1440394"/>
+          </a:xfrm>
+          <a:noFill/>
+          <a:ln>
+            <a:solidFill>
+              <a:schemeClr val="tx1"/>
+            </a:solidFill>
+          </a:ln>
+        </p:spPr>
+        <p:txBody>
+          <a:bodyPr vert="horz" lIns="182880" tIns="182880" rIns="182880" bIns="182880" rtlCol="0" anchor="ctr">
+            <a:normAutofit/>
+          </a:bodyPr>
           <a:lstStyle/>
           <a:p>
             <a:r>
-              <a:rPr lang="en-IN" dirty="0"/>
+              <a:rPr lang="en-US" sz="2400" kern="1200" cap="all" spc="200" baseline="0">
+                <a:solidFill>
+                  <a:schemeClr val="tx1"/>
+                </a:solidFill>
+                <a:latin typeface="+mj-lt"/>
+                <a:ea typeface="+mj-ea"/>
+                <a:cs typeface="+mj-cs"/>
+              </a:rPr>
               <a:t>Problem statement</a:t>
             </a:r>
+          </a:p>
+        </p:txBody>
+      </p:sp>
+      <p:sp>
+        <p:nvSpPr>
+          <p:cNvPr id="8" name="Rectangle 7">
+            <a:extLst>
+              <a:ext uri="{FF2B5EF4-FFF2-40B4-BE49-F238E27FC236}">
+                <a16:creationId xmlns:a16="http://schemas.microsoft.com/office/drawing/2014/main" id="{FB403EBD-907E-4D59-98D4-A72CD1063C62}"/>
+              </a:ext>
+              <a:ext uri="{C183D7F6-B498-43B3-948B-1728B52AA6E4}">
+                <adec:decorative xmlns:adec="http://schemas.microsoft.com/office/drawing/2017/decorative" val="1"/>
+              </a:ext>
+            </a:extLst>
+          </p:cNvPr>
+          <p:cNvSpPr>
+            <a:spLocks noGrp="1" noRot="1" noChangeAspect="1" noMove="1" noResize="1" noEditPoints="1" noAdjustHandles="1" noChangeArrowheads="1" noChangeShapeType="1" noTextEdit="1"/>
+          </p:cNvSpPr>
+          <p:nvPr>
+            <p:extLst>
+              <p:ext uri="{386F3935-93C4-4BCD-93E2-E3B085C9AB24}">
+                <p16:designElem xmlns:p16="http://schemas.microsoft.com/office/powerpoint/2015/main" val="1"/>
+              </p:ext>
+            </p:extLst>
+          </p:nvPr>
+        </p:nvSpPr>
+        <p:spPr>
+          <a:xfrm>
+            <a:off x="5315061" y="-2"/>
+            <a:ext cx="6876939" cy="6858002"/>
+          </a:xfrm>
+          <a:prstGeom prst="rect">
+            <a:avLst/>
+          </a:prstGeom>
+          <a:solidFill>
+            <a:schemeClr val="tx1">
+              <a:lumMod val="95000"/>
+            </a:schemeClr>
+          </a:solidFill>
+          <a:ln>
+            <a:noFill/>
+          </a:ln>
+        </p:spPr>
+        <p:style>
+          <a:lnRef idx="2">
+            <a:schemeClr val="accent1">
+              <a:shade val="50000"/>
+            </a:schemeClr>
+          </a:lnRef>
+          <a:fillRef idx="1">
+            <a:schemeClr val="accent1"/>
+          </a:fillRef>
+          <a:effectRef idx="0">
+            <a:schemeClr val="accent1"/>
+          </a:effectRef>
+          <a:fontRef idx="minor">
+            <a:schemeClr val="lt1"/>
+          </a:fontRef>
+        </p:style>
+        <p:txBody>
+          <a:bodyPr rtlCol="0" anchor="ctr"/>
+          <a:lstStyle/>
+          <a:p>
+            <a:pPr algn="ctr"/>
+            <a:endParaRPr lang="en-US"/>
           </a:p>
         </p:txBody>
       </p:sp>
@@ -7999,22 +8378,35 @@
         </p:nvSpPr>
         <p:spPr>
           <a:xfrm>
-            <a:off x="2231136" y="2703871"/>
-            <a:ext cx="7729728" cy="707886"/>
+            <a:off x="6049182" y="802638"/>
+            <a:ext cx="5408696" cy="5252722"/>
           </a:xfrm>
           <a:prstGeom prst="rect">
             <a:avLst/>
           </a:prstGeom>
-          <a:noFill/>
         </p:spPr>
         <p:txBody>
-          <a:bodyPr wrap="square" rtlCol="0">
-            <a:spAutoFit/>
+          <a:bodyPr vert="horz" lIns="91440" tIns="45720" rIns="91440" bIns="45720" rtlCol="0" anchor="ctr">
+            <a:normAutofit/>
           </a:bodyPr>
           <a:lstStyle/>
           <a:p>
-            <a:r>
-              <a:rPr lang="en-IN" sz="2000" dirty="0"/>
+            <a:pPr indent="-228600" defTabSz="914400">
+              <a:spcBef>
+                <a:spcPts val="1000"/>
+              </a:spcBef>
+              <a:buClr>
+                <a:schemeClr val="accent2"/>
+              </a:buClr>
+              <a:buFont typeface="Arial" panose="020B0604020202020204" pitchFamily="34" charset="0"/>
+              <a:buChar char="•"/>
+            </a:pPr>
+            <a:r>
+              <a:rPr lang="en-US">
+                <a:solidFill>
+                  <a:schemeClr val="bg1"/>
+                </a:solidFill>
+              </a:rPr>
               <a:t>We are Given Audio Samples of 3 Birds and by Analysis of those that we have to Predict Bird in the Given Test Audios</a:t>
             </a:r>
           </a:p>
@@ -8028,7 +8420,7 @@
     </p:extLst>
   </p:cSld>
   <p:clrMapOvr>
-    <a:masterClrMapping/>
+    <a:overrideClrMapping bg1="dk1" tx1="lt1" bg2="dk2" tx2="lt2" accent1="accent1" accent2="accent2" accent3="accent3" accent4="accent4" accent5="accent5" accent6="accent6" hlink="hlink" folHlink="folHlink"/>
   </p:clrMapOvr>
 </p:sld>
 </file>

--- a/SP ppt.pptx
+++ b/SP ppt.pptx
@@ -11,10 +11,10 @@
     <p:sldId id="270" r:id="rId5"/>
     <p:sldId id="269" r:id="rId6"/>
     <p:sldId id="271" r:id="rId7"/>
-    <p:sldId id="258" r:id="rId8"/>
-    <p:sldId id="265" r:id="rId9"/>
-    <p:sldId id="266" r:id="rId10"/>
-    <p:sldId id="267" r:id="rId11"/>
+    <p:sldId id="265" r:id="rId8"/>
+    <p:sldId id="266" r:id="rId9"/>
+    <p:sldId id="267" r:id="rId10"/>
+    <p:sldId id="258" r:id="rId11"/>
     <p:sldId id="257" r:id="rId12"/>
     <p:sldId id="259" r:id="rId13"/>
     <p:sldId id="260" r:id="rId14"/>
@@ -22,6 +22,8 @@
     <p:sldId id="262" r:id="rId16"/>
     <p:sldId id="272" r:id="rId17"/>
     <p:sldId id="263" r:id="rId18"/>
+    <p:sldId id="273" r:id="rId19"/>
+    <p:sldId id="274" r:id="rId20"/>
   </p:sldIdLst>
   <p:sldSz cx="12192000" cy="6858000"/>
   <p:notesSz cx="6858000" cy="9144000"/>
@@ -6469,7 +6471,7 @@
           <p:cNvPr id="2" name="Title 1">
             <a:extLst>
               <a:ext uri="{FF2B5EF4-FFF2-40B4-BE49-F238E27FC236}">
-                <a16:creationId xmlns:a16="http://schemas.microsoft.com/office/drawing/2014/main" id="{89B4A73F-2D64-2ACF-DCAE-BD1E35E43A3B}"/>
+                <a16:creationId xmlns:a16="http://schemas.microsoft.com/office/drawing/2014/main" id="{5E762C3C-6F05-32A6-BB6F-D59A3C96C8DD}"/>
               </a:ext>
             </a:extLst>
           </p:cNvPr>
@@ -6486,97 +6488,41 @@
           <a:lstStyle/>
           <a:p>
             <a:r>
-              <a:rPr lang="en-IN" dirty="0"/>
-              <a:t>Method to distinguish</a:t>
-            </a:r>
-          </a:p>
-        </p:txBody>
-      </p:sp>
-      <p:sp>
-        <p:nvSpPr>
-          <p:cNvPr id="3" name="TextBox 2">
+              <a:rPr lang="en-US" dirty="0"/>
+              <a:t>Part-2</a:t>
+            </a:r>
+          </a:p>
+        </p:txBody>
+      </p:sp>
+      <p:sp>
+        <p:nvSpPr>
+          <p:cNvPr id="3" name="Text Placeholder 2">
             <a:extLst>
               <a:ext uri="{FF2B5EF4-FFF2-40B4-BE49-F238E27FC236}">
-                <a16:creationId xmlns:a16="http://schemas.microsoft.com/office/drawing/2014/main" id="{D5773C50-A0CF-B921-8608-82A2C2A774C8}"/>
+                <a16:creationId xmlns:a16="http://schemas.microsoft.com/office/drawing/2014/main" id="{725E0726-2C0C-FBF1-CDB1-4683CE38038D}"/>
               </a:ext>
             </a:extLst>
           </p:cNvPr>
-          <p:cNvSpPr txBox="1"/>
-          <p:nvPr/>
-        </p:nvSpPr>
-        <p:spPr>
-          <a:xfrm>
-            <a:off x="2231136" y="2772697"/>
-            <a:ext cx="6735883" cy="2031325"/>
-          </a:xfrm>
-          <a:prstGeom prst="rect">
-            <a:avLst/>
-          </a:prstGeom>
-          <a:noFill/>
-        </p:spPr>
-        <p:txBody>
-          <a:bodyPr wrap="square" rtlCol="0">
-            <a:spAutoFit/>
-          </a:bodyPr>
+          <p:cNvSpPr>
+            <a:spLocks noGrp="1"/>
+          </p:cNvSpPr>
+          <p:nvPr>
+            <p:ph type="body" idx="1"/>
+          </p:nvPr>
+        </p:nvSpPr>
+        <p:spPr/>
+        <p:txBody>
+          <a:bodyPr/>
           <a:lstStyle/>
           <a:p>
-            <a:pPr marL="285750" indent="-285750">
-              <a:buFont typeface="Arial" panose="020B0604020202020204" pitchFamily="34" charset="0"/>
-              <a:buChar char="•"/>
-            </a:pPr>
-            <a:r>
-              <a:rPr lang="en-IN" dirty="0"/>
-              <a:t>To distinguish we need to Compare the Nature of FFTs of given samples with the Test Samples and Identify the Bird</a:t>
-            </a:r>
-          </a:p>
-          <a:p>
-            <a:pPr marL="285750" indent="-285750">
-              <a:buFont typeface="Arial" panose="020B0604020202020204" pitchFamily="34" charset="0"/>
-              <a:buChar char="•"/>
-            </a:pPr>
-            <a:endParaRPr lang="en-IN" dirty="0"/>
-          </a:p>
-          <a:p>
-            <a:pPr marL="285750" indent="-285750">
-              <a:buFont typeface="Arial" panose="020B0604020202020204" pitchFamily="34" charset="0"/>
-              <a:buChar char="•"/>
-            </a:pPr>
-            <a:r>
-              <a:rPr lang="en-IN" dirty="0"/>
-              <a:t>So by </a:t>
-            </a:r>
-            <a:r>
-              <a:rPr lang="en-IN" dirty="0" err="1"/>
-              <a:t>oberseving</a:t>
-            </a:r>
-            <a:r>
-              <a:rPr lang="en-IN" dirty="0"/>
-              <a:t> the FFTs we can Differentiate them on the basis of Number of Peaks</a:t>
-            </a:r>
-          </a:p>
-          <a:p>
-            <a:pPr marL="285750" indent="-285750">
-              <a:buFont typeface="Arial" panose="020B0604020202020204" pitchFamily="34" charset="0"/>
-              <a:buChar char="•"/>
-            </a:pPr>
-            <a:endParaRPr lang="en-IN" dirty="0"/>
-          </a:p>
-          <a:p>
-            <a:pPr marL="285750" indent="-285750">
-              <a:buFont typeface="Arial" panose="020B0604020202020204" pitchFamily="34" charset="0"/>
-              <a:buChar char="•"/>
-            </a:pPr>
-            <a:r>
-              <a:rPr lang="en-IN" dirty="0"/>
-              <a:t>We normalise the FFT magnitude and </a:t>
-            </a:r>
+            <a:endParaRPr lang="en-US"/>
           </a:p>
         </p:txBody>
       </p:sp>
     </p:spTree>
     <p:extLst>
       <p:ext uri="{BB962C8B-B14F-4D97-AF65-F5344CB8AC3E}">
-        <p14:creationId xmlns:p14="http://schemas.microsoft.com/office/powerpoint/2010/main" val="3887563221"/>
+        <p14:creationId xmlns:p14="http://schemas.microsoft.com/office/powerpoint/2010/main" val="4159985837"/>
       </p:ext>
     </p:extLst>
   </p:cSld>
@@ -8143,6 +8089,169 @@
 </p:sld>
 </file>
 
+<file path=ppt/slides/slide18.xml><?xml version="1.0" encoding="utf-8"?>
+<p:sld xmlns:a="http://schemas.openxmlformats.org/drawingml/2006/main" xmlns:r="http://schemas.openxmlformats.org/officeDocument/2006/relationships" xmlns:p="http://schemas.openxmlformats.org/presentationml/2006/main">
+  <p:cSld>
+    <p:spTree>
+      <p:nvGrpSpPr>
+        <p:cNvPr id="1" name=""/>
+        <p:cNvGrpSpPr/>
+        <p:nvPr/>
+      </p:nvGrpSpPr>
+      <p:grpSpPr>
+        <a:xfrm>
+          <a:off x="0" y="0"/>
+          <a:ext cx="0" cy="0"/>
+          <a:chOff x="0" y="0"/>
+          <a:chExt cx="0" cy="0"/>
+        </a:xfrm>
+      </p:grpSpPr>
+      <p:sp>
+        <p:nvSpPr>
+          <p:cNvPr id="2" name="Title 1">
+            <a:extLst>
+              <a:ext uri="{FF2B5EF4-FFF2-40B4-BE49-F238E27FC236}">
+                <a16:creationId xmlns:a16="http://schemas.microsoft.com/office/drawing/2014/main" id="{3BE17349-0F77-5E69-F319-C5F6418700B7}"/>
+              </a:ext>
+            </a:extLst>
+          </p:cNvPr>
+          <p:cNvSpPr>
+            <a:spLocks noGrp="1"/>
+          </p:cNvSpPr>
+          <p:nvPr>
+            <p:ph type="title"/>
+          </p:nvPr>
+        </p:nvSpPr>
+        <p:spPr/>
+        <p:txBody>
+          <a:bodyPr/>
+          <a:lstStyle/>
+          <a:p>
+            <a:r>
+              <a:rPr lang="en-US" dirty="0"/>
+              <a:t>Part-3</a:t>
+            </a:r>
+          </a:p>
+        </p:txBody>
+      </p:sp>
+      <p:sp>
+        <p:nvSpPr>
+          <p:cNvPr id="3" name="Text Placeholder 2">
+            <a:extLst>
+              <a:ext uri="{FF2B5EF4-FFF2-40B4-BE49-F238E27FC236}">
+                <a16:creationId xmlns:a16="http://schemas.microsoft.com/office/drawing/2014/main" id="{72D14A97-C99E-440C-0654-805BFDB97246}"/>
+              </a:ext>
+            </a:extLst>
+          </p:cNvPr>
+          <p:cNvSpPr>
+            <a:spLocks noGrp="1"/>
+          </p:cNvSpPr>
+          <p:nvPr>
+            <p:ph type="body" idx="1"/>
+          </p:nvPr>
+        </p:nvSpPr>
+        <p:spPr/>
+        <p:txBody>
+          <a:bodyPr/>
+          <a:lstStyle/>
+          <a:p>
+            <a:endParaRPr lang="en-US"/>
+          </a:p>
+        </p:txBody>
+      </p:sp>
+    </p:spTree>
+    <p:extLst>
+      <p:ext uri="{BB962C8B-B14F-4D97-AF65-F5344CB8AC3E}">
+        <p14:creationId xmlns:p14="http://schemas.microsoft.com/office/powerpoint/2010/main" val="4179572421"/>
+      </p:ext>
+    </p:extLst>
+  </p:cSld>
+  <p:clrMapOvr>
+    <a:masterClrMapping/>
+  </p:clrMapOvr>
+</p:sld>
+</file>
+
+<file path=ppt/slides/slide19.xml><?xml version="1.0" encoding="utf-8"?>
+<p:sld xmlns:a="http://schemas.openxmlformats.org/drawingml/2006/main" xmlns:r="http://schemas.openxmlformats.org/officeDocument/2006/relationships" xmlns:p="http://schemas.openxmlformats.org/presentationml/2006/main">
+  <p:cSld>
+    <p:spTree>
+      <p:nvGrpSpPr>
+        <p:cNvPr id="1" name=""/>
+        <p:cNvGrpSpPr/>
+        <p:nvPr/>
+      </p:nvGrpSpPr>
+      <p:grpSpPr>
+        <a:xfrm>
+          <a:off x="0" y="0"/>
+          <a:ext cx="0" cy="0"/>
+          <a:chOff x="0" y="0"/>
+          <a:chExt cx="0" cy="0"/>
+        </a:xfrm>
+      </p:grpSpPr>
+      <p:sp>
+        <p:nvSpPr>
+          <p:cNvPr id="2" name="Title 1">
+            <a:extLst>
+              <a:ext uri="{FF2B5EF4-FFF2-40B4-BE49-F238E27FC236}">
+                <a16:creationId xmlns:a16="http://schemas.microsoft.com/office/drawing/2014/main" id="{FA68B098-D5CA-D743-E5BA-5291EF713412}"/>
+              </a:ext>
+            </a:extLst>
+          </p:cNvPr>
+          <p:cNvSpPr>
+            <a:spLocks noGrp="1"/>
+          </p:cNvSpPr>
+          <p:nvPr>
+            <p:ph type="title"/>
+          </p:nvPr>
+        </p:nvSpPr>
+        <p:spPr/>
+        <p:txBody>
+          <a:bodyPr/>
+          <a:lstStyle/>
+          <a:p>
+            <a:endParaRPr lang="en-US" dirty="0"/>
+          </a:p>
+        </p:txBody>
+      </p:sp>
+      <p:sp>
+        <p:nvSpPr>
+          <p:cNvPr id="3" name="Content Placeholder 2">
+            <a:extLst>
+              <a:ext uri="{FF2B5EF4-FFF2-40B4-BE49-F238E27FC236}">
+                <a16:creationId xmlns:a16="http://schemas.microsoft.com/office/drawing/2014/main" id="{D8124444-E88D-E26A-77DF-D17762253025}"/>
+              </a:ext>
+            </a:extLst>
+          </p:cNvPr>
+          <p:cNvSpPr>
+            <a:spLocks noGrp="1"/>
+          </p:cNvSpPr>
+          <p:nvPr>
+            <p:ph idx="1"/>
+          </p:nvPr>
+        </p:nvSpPr>
+        <p:spPr/>
+        <p:txBody>
+          <a:bodyPr/>
+          <a:lstStyle/>
+          <a:p>
+            <a:endParaRPr lang="en-US"/>
+          </a:p>
+        </p:txBody>
+      </p:sp>
+    </p:spTree>
+    <p:extLst>
+      <p:ext uri="{BB962C8B-B14F-4D97-AF65-F5344CB8AC3E}">
+        <p14:creationId xmlns:p14="http://schemas.microsoft.com/office/powerpoint/2010/main" val="3453257538"/>
+      </p:ext>
+    </p:extLst>
+  </p:cSld>
+  <p:clrMapOvr>
+    <a:masterClrMapping/>
+  </p:clrMapOvr>
+</p:sld>
+</file>
+
 <file path=ppt/slides/slide2.xml><?xml version="1.0" encoding="utf-8"?>
 <p:sld xmlns:a="http://schemas.openxmlformats.org/drawingml/2006/main" xmlns:r="http://schemas.openxmlformats.org/officeDocument/2006/relationships" xmlns:p="http://schemas.openxmlformats.org/presentationml/2006/main">
   <p:cSld>
@@ -8232,7 +8341,9 @@
     <p:bg>
       <p:bgPr>
         <a:solidFill>
-          <a:schemeClr val="accent2"/>
+          <a:schemeClr val="bg1">
+            <a:lumMod val="95000"/>
+          </a:schemeClr>
         </a:solidFill>
         <a:effectLst/>
       </p:bgPr>
@@ -8269,15 +8380,9 @@
         </p:nvSpPr>
         <p:spPr>
           <a:xfrm>
-            <a:off x="829781" y="2708804"/>
-            <a:ext cx="3698803" cy="1440394"/>
+            <a:off x="5445496" y="978776"/>
+            <a:ext cx="5925310" cy="1174991"/>
           </a:xfrm>
-          <a:noFill/>
-          <a:ln>
-            <a:solidFill>
-              <a:schemeClr val="tx1"/>
-            </a:solidFill>
-          </a:ln>
         </p:spPr>
         <p:txBody>
           <a:bodyPr vert="horz" lIns="182880" tIns="182880" rIns="182880" bIns="182880" rtlCol="0" anchor="ctr">
@@ -8286,25 +8391,138 @@
           <a:lstStyle/>
           <a:p>
             <a:r>
-              <a:rPr lang="en-US" sz="2400" kern="1200" cap="all" spc="200" baseline="0">
-                <a:solidFill>
-                  <a:schemeClr val="tx1"/>
-                </a:solidFill>
-                <a:latin typeface="+mj-lt"/>
-                <a:ea typeface="+mj-ea"/>
-                <a:cs typeface="+mj-cs"/>
-              </a:rPr>
+              <a:rPr lang="en-US" sz="2400"/>
               <a:t>Problem statement</a:t>
             </a:r>
           </a:p>
         </p:txBody>
       </p:sp>
-      <p:sp>
-        <p:nvSpPr>
-          <p:cNvPr id="8" name="Rectangle 7">
+      <p:pic>
+        <p:nvPicPr>
+          <p:cNvPr id="10" name="Picture 9" descr="Bird landing on a tree">
             <a:extLst>
               <a:ext uri="{FF2B5EF4-FFF2-40B4-BE49-F238E27FC236}">
-                <a16:creationId xmlns:a16="http://schemas.microsoft.com/office/drawing/2014/main" id="{FB403EBD-907E-4D59-98D4-A72CD1063C62}"/>
+                <a16:creationId xmlns:a16="http://schemas.microsoft.com/office/drawing/2014/main" id="{B2616EA0-77BD-A816-12E9-685106F8C80B}"/>
+              </a:ext>
+            </a:extLst>
+          </p:cNvPr>
+          <p:cNvPicPr>
+            <a:picLocks noChangeAspect="1"/>
+          </p:cNvPicPr>
+          <p:nvPr/>
+        </p:nvPicPr>
+        <p:blipFill>
+          <a:blip r:embed="rId2"/>
+          <a:srcRect l="17294" r="36357" b="1"/>
+          <a:stretch/>
+        </p:blipFill>
+        <p:spPr>
+          <a:xfrm>
+            <a:off x="20" y="10"/>
+            <a:ext cx="4657325" cy="6857990"/>
+          </a:xfrm>
+          <a:prstGeom prst="rect">
+            <a:avLst/>
+          </a:prstGeom>
+        </p:spPr>
+      </p:pic>
+      <p:sp>
+        <p:nvSpPr>
+          <p:cNvPr id="3" name="TextBox 2">
+            <a:extLst>
+              <a:ext uri="{FF2B5EF4-FFF2-40B4-BE49-F238E27FC236}">
+                <a16:creationId xmlns:a16="http://schemas.microsoft.com/office/drawing/2014/main" id="{08AD3961-354E-48FD-4416-79A3CF08C289}"/>
+              </a:ext>
+            </a:extLst>
+          </p:cNvPr>
+          <p:cNvSpPr txBox="1"/>
+          <p:nvPr/>
+        </p:nvSpPr>
+        <p:spPr>
+          <a:xfrm>
+            <a:off x="5445496" y="2640692"/>
+            <a:ext cx="5925310" cy="3255252"/>
+          </a:xfrm>
+          <a:prstGeom prst="rect">
+            <a:avLst/>
+          </a:prstGeom>
+        </p:spPr>
+        <p:txBody>
+          <a:bodyPr vert="horz" lIns="91440" tIns="45720" rIns="91440" bIns="45720" rtlCol="0">
+            <a:normAutofit/>
+          </a:bodyPr>
+          <a:lstStyle/>
+          <a:p>
+            <a:pPr indent="-228600" defTabSz="914400">
+              <a:spcBef>
+                <a:spcPts val="1000"/>
+              </a:spcBef>
+              <a:buClr>
+                <a:schemeClr val="accent2"/>
+              </a:buClr>
+              <a:buFont typeface="Arial" panose="020B0604020202020204" pitchFamily="34" charset="0"/>
+              <a:buChar char="•"/>
+            </a:pPr>
+            <a:r>
+              <a:rPr lang="en-US">
+                <a:solidFill>
+                  <a:schemeClr val="tx1">
+                    <a:lumMod val="85000"/>
+                    <a:lumOff val="15000"/>
+                  </a:schemeClr>
+                </a:solidFill>
+              </a:rPr>
+              <a:t>We are Given Audio Samples of 3 Birds and by Analysis of those that we have to Predict Bird in the Given Test Audios</a:t>
+            </a:r>
+          </a:p>
+        </p:txBody>
+      </p:sp>
+    </p:spTree>
+    <p:extLst>
+      <p:ext uri="{BB962C8B-B14F-4D97-AF65-F5344CB8AC3E}">
+        <p14:creationId xmlns:p14="http://schemas.microsoft.com/office/powerpoint/2010/main" val="2943980835"/>
+      </p:ext>
+    </p:extLst>
+  </p:cSld>
+  <p:clrMapOvr>
+    <a:masterClrMapping/>
+  </p:clrMapOvr>
+</p:sld>
+</file>
+
+<file path=ppt/slides/slide4.xml><?xml version="1.0" encoding="utf-8"?>
+<p:sld xmlns:a="http://schemas.openxmlformats.org/drawingml/2006/main" xmlns:r="http://schemas.openxmlformats.org/officeDocument/2006/relationships" xmlns:p="http://schemas.openxmlformats.org/presentationml/2006/main">
+  <p:cSld>
+    <p:bg>
+      <p:bgPr>
+        <a:solidFill>
+          <a:schemeClr val="bg1">
+            <a:lumMod val="95000"/>
+          </a:schemeClr>
+        </a:solidFill>
+        <a:effectLst/>
+      </p:bgPr>
+    </p:bg>
+    <p:spTree>
+      <p:nvGrpSpPr>
+        <p:cNvPr id="1" name=""/>
+        <p:cNvGrpSpPr/>
+        <p:nvPr/>
+      </p:nvGrpSpPr>
+      <p:grpSpPr>
+        <a:xfrm>
+          <a:off x="0" y="0"/>
+          <a:ext cx="0" cy="0"/>
+          <a:chOff x="0" y="0"/>
+          <a:chExt cx="0" cy="0"/>
+        </a:xfrm>
+      </p:grpSpPr>
+      <p:sp>
+        <p:nvSpPr>
+          <p:cNvPr id="10" name="Rectangle 9">
+            <a:extLst>
+              <a:ext uri="{FF2B5EF4-FFF2-40B4-BE49-F238E27FC236}">
+                <a16:creationId xmlns:a16="http://schemas.microsoft.com/office/drawing/2014/main" id="{5FA21C72-692C-49FD-9EB4-DDDDDEBD4BD6}"/>
               </a:ext>
               <a:ext uri="{C183D7F6-B498-43B3-948B-1728B52AA6E4}">
                 <adec:decorative xmlns:adec="http://schemas.microsoft.com/office/drawing/2017/decorative" val="1"/>
@@ -8324,18 +8542,113 @@
         </p:nvSpPr>
         <p:spPr>
           <a:xfrm>
-            <a:off x="5315061" y="-2"/>
-            <a:ext cx="6876939" cy="6858002"/>
+            <a:off x="1575405" y="950977"/>
+            <a:ext cx="9041190" cy="4956047"/>
           </a:xfrm>
           <a:prstGeom prst="rect">
             <a:avLst/>
           </a:prstGeom>
           <a:solidFill>
-            <a:schemeClr val="tx1">
-              <a:lumMod val="95000"/>
+            <a:srgbClr val="FFFFFF"/>
+          </a:solidFill>
+          <a:ln w="31750">
+            <a:solidFill>
+              <a:srgbClr val="404040"/>
+            </a:solidFill>
+          </a:ln>
+        </p:spPr>
+        <p:style>
+          <a:lnRef idx="2">
+            <a:schemeClr val="accent1">
+              <a:shade val="50000"/>
             </a:schemeClr>
+          </a:lnRef>
+          <a:fillRef idx="1">
+            <a:schemeClr val="accent1"/>
+          </a:fillRef>
+          <a:effectRef idx="0">
+            <a:schemeClr val="accent1"/>
+          </a:effectRef>
+          <a:fontRef idx="minor">
+            <a:schemeClr val="lt1"/>
+          </a:fontRef>
+        </p:style>
+        <p:txBody>
+          <a:bodyPr rtlCol="0" anchor="ctr"/>
+          <a:lstStyle/>
+          <a:p>
+            <a:pPr algn="ctr"/>
+            <a:endParaRPr lang="en-US"/>
+          </a:p>
+        </p:txBody>
+      </p:sp>
+      <p:pic>
+        <p:nvPicPr>
+          <p:cNvPr id="5" name="Content Placeholder 4">
+            <a:extLst>
+              <a:ext uri="{FF2B5EF4-FFF2-40B4-BE49-F238E27FC236}">
+                <a16:creationId xmlns:a16="http://schemas.microsoft.com/office/drawing/2014/main" id="{6C98D75E-433F-2BAC-C4CA-3041AB60945A}"/>
+              </a:ext>
+            </a:extLst>
+          </p:cNvPr>
+          <p:cNvPicPr>
+            <a:picLocks noGrp="1" noChangeAspect="1"/>
+          </p:cNvPicPr>
+          <p:nvPr>
+            <p:ph idx="1"/>
+          </p:nvPr>
+        </p:nvPicPr>
+        <p:blipFill>
+          <a:blip r:embed="rId2"/>
+          <a:stretch>
+            <a:fillRect/>
+          </a:stretch>
+        </p:blipFill>
+        <p:spPr>
+          <a:xfrm>
+            <a:off x="2366210" y="1519404"/>
+            <a:ext cx="7915425" cy="3819191"/>
+          </a:xfrm>
+          <a:prstGeom prst="rect">
+            <a:avLst/>
+          </a:prstGeom>
+        </p:spPr>
+      </p:pic>
+      <p:sp>
+        <p:nvSpPr>
+          <p:cNvPr id="12" name="Oval 11">
+            <a:extLst>
+              <a:ext uri="{FF2B5EF4-FFF2-40B4-BE49-F238E27FC236}">
+                <a16:creationId xmlns:a16="http://schemas.microsoft.com/office/drawing/2014/main" id="{FBAF941A-6830-47A3-B63C-7C7B66AEA73B}"/>
+              </a:ext>
+              <a:ext uri="{C183D7F6-B498-43B3-948B-1728B52AA6E4}">
+                <adec:decorative xmlns:adec="http://schemas.microsoft.com/office/drawing/2017/decorative" val="1"/>
+              </a:ext>
+            </a:extLst>
+          </p:cNvPr>
+          <p:cNvSpPr>
+            <a:spLocks noGrp="1" noRot="1" noChangeAspect="1" noMove="1" noResize="1" noEditPoints="1" noAdjustHandles="1" noChangeArrowheads="1" noChangeShapeType="1" noTextEdit="1"/>
+          </p:cNvSpPr>
+          <p:nvPr>
+            <p:extLst>
+              <p:ext uri="{386F3935-93C4-4BCD-93E2-E3B085C9AB24}">
+                <p16:designElem xmlns:p16="http://schemas.microsoft.com/office/powerpoint/2015/main" val="1"/>
+              </p:ext>
+            </p:extLst>
+          </p:nvPr>
+        </p:nvSpPr>
+        <p:spPr>
+          <a:xfrm>
+            <a:off x="632380" y="624518"/>
+            <a:ext cx="2157984" cy="2157984"/>
+          </a:xfrm>
+          <a:prstGeom prst="ellipse">
+            <a:avLst/>
+          </a:prstGeom>
+          <a:solidFill>
+            <a:srgbClr val="404040"/>
           </a:solidFill>
-          <a:ln>
+          <a:ln w="31750">
             <a:noFill/>
           </a:ln>
         </p:spPr>
@@ -8366,84 +8679,6 @@
       </p:sp>
       <p:sp>
         <p:nvSpPr>
-          <p:cNvPr id="3" name="TextBox 2">
-            <a:extLst>
-              <a:ext uri="{FF2B5EF4-FFF2-40B4-BE49-F238E27FC236}">
-                <a16:creationId xmlns:a16="http://schemas.microsoft.com/office/drawing/2014/main" id="{08AD3961-354E-48FD-4416-79A3CF08C289}"/>
-              </a:ext>
-            </a:extLst>
-          </p:cNvPr>
-          <p:cNvSpPr txBox="1"/>
-          <p:nvPr/>
-        </p:nvSpPr>
-        <p:spPr>
-          <a:xfrm>
-            <a:off x="6049182" y="802638"/>
-            <a:ext cx="5408696" cy="5252722"/>
-          </a:xfrm>
-          <a:prstGeom prst="rect">
-            <a:avLst/>
-          </a:prstGeom>
-        </p:spPr>
-        <p:txBody>
-          <a:bodyPr vert="horz" lIns="91440" tIns="45720" rIns="91440" bIns="45720" rtlCol="0" anchor="ctr">
-            <a:normAutofit/>
-          </a:bodyPr>
-          <a:lstStyle/>
-          <a:p>
-            <a:pPr indent="-228600" defTabSz="914400">
-              <a:spcBef>
-                <a:spcPts val="1000"/>
-              </a:spcBef>
-              <a:buClr>
-                <a:schemeClr val="accent2"/>
-              </a:buClr>
-              <a:buFont typeface="Arial" panose="020B0604020202020204" pitchFamily="34" charset="0"/>
-              <a:buChar char="•"/>
-            </a:pPr>
-            <a:r>
-              <a:rPr lang="en-US">
-                <a:solidFill>
-                  <a:schemeClr val="bg1"/>
-                </a:solidFill>
-              </a:rPr>
-              <a:t>We are Given Audio Samples of 3 Birds and by Analysis of those that we have to Predict Bird in the Given Test Audios</a:t>
-            </a:r>
-          </a:p>
-        </p:txBody>
-      </p:sp>
-    </p:spTree>
-    <p:extLst>
-      <p:ext uri="{BB962C8B-B14F-4D97-AF65-F5344CB8AC3E}">
-        <p14:creationId xmlns:p14="http://schemas.microsoft.com/office/powerpoint/2010/main" val="2943980835"/>
-      </p:ext>
-    </p:extLst>
-  </p:cSld>
-  <p:clrMapOvr>
-    <a:overrideClrMapping bg1="dk1" tx1="lt1" bg2="dk2" tx2="lt2" accent1="accent1" accent2="accent2" accent3="accent3" accent4="accent4" accent5="accent5" accent6="accent6" hlink="hlink" folHlink="folHlink"/>
-  </p:clrMapOvr>
-</p:sld>
-</file>
-
-<file path=ppt/slides/slide4.xml><?xml version="1.0" encoding="utf-8"?>
-<p:sld xmlns:a="http://schemas.openxmlformats.org/drawingml/2006/main" xmlns:r="http://schemas.openxmlformats.org/officeDocument/2006/relationships" xmlns:p="http://schemas.openxmlformats.org/presentationml/2006/main">
-  <p:cSld>
-    <p:spTree>
-      <p:nvGrpSpPr>
-        <p:cNvPr id="1" name=""/>
-        <p:cNvGrpSpPr/>
-        <p:nvPr/>
-      </p:nvGrpSpPr>
-      <p:grpSpPr>
-        <a:xfrm>
-          <a:off x="0" y="0"/>
-          <a:ext cx="0" cy="0"/>
-          <a:chOff x="0" y="0"/>
-          <a:chExt cx="0" cy="0"/>
-        </a:xfrm>
-      </p:grpSpPr>
-      <p:sp>
-        <p:nvSpPr>
           <p:cNvPr id="2" name="Title 1">
             <a:extLst>
               <a:ext uri="{FF2B5EF4-FFF2-40B4-BE49-F238E27FC236}">
@@ -8458,47 +8693,38 @@
             <p:ph type="title"/>
           </p:nvPr>
         </p:nvSpPr>
-        <p:spPr/>
-        <p:txBody>
-          <a:bodyPr/>
-          <a:lstStyle/>
-          <a:p>
-            <a:r>
-              <a:rPr lang="en-IN" dirty="0"/>
-              <a:t>FFT Plots of given samples</a:t>
-            </a:r>
-          </a:p>
-        </p:txBody>
-      </p:sp>
-      <p:pic>
-        <p:nvPicPr>
-          <p:cNvPr id="5" name="Content Placeholder 4">
-            <a:extLst>
-              <a:ext uri="{FF2B5EF4-FFF2-40B4-BE49-F238E27FC236}">
-                <a16:creationId xmlns:a16="http://schemas.microsoft.com/office/drawing/2014/main" id="{6C98D75E-433F-2BAC-C4CA-3041AB60945A}"/>
-              </a:ext>
-            </a:extLst>
-          </p:cNvPr>
-          <p:cNvPicPr>
-            <a:picLocks noGrp="1" noChangeAspect="1"/>
-          </p:cNvPicPr>
-          <p:nvPr>
-            <p:ph idx="1"/>
-          </p:nvPr>
-        </p:nvPicPr>
-        <p:blipFill>
-          <a:blip r:embed="rId2"/>
-          <a:stretch>
-            <a:fillRect/>
-          </a:stretch>
-        </p:blipFill>
         <p:spPr>
           <a:xfrm>
-            <a:off x="2231136" y="2325421"/>
-            <a:ext cx="7729727" cy="3727983"/>
+            <a:off x="796972" y="789110"/>
+            <a:ext cx="1828800" cy="1828800"/>
           </a:xfrm>
+          <a:prstGeom prst="ellipse">
+            <a:avLst/>
+          </a:prstGeom>
+          <a:noFill/>
+          <a:ln>
+            <a:solidFill>
+              <a:srgbClr val="FFFFFF"/>
+            </a:solidFill>
+          </a:ln>
         </p:spPr>
-      </p:pic>
+        <p:txBody>
+          <a:bodyPr vert="horz" lIns="182880" tIns="182880" rIns="182880" bIns="182880" rtlCol="0" anchor="ctr">
+            <a:normAutofit/>
+          </a:bodyPr>
+          <a:lstStyle/>
+          <a:p>
+            <a:r>
+              <a:rPr lang="en-US" sz="1300">
+                <a:solidFill>
+                  <a:srgbClr val="FFFFFF"/>
+                </a:solidFill>
+              </a:rPr>
+              <a:t>FFT Plots of given samples</a:t>
+            </a:r>
+          </a:p>
+        </p:txBody>
+      </p:sp>
     </p:spTree>
     <p:extLst>
       <p:ext uri="{BB962C8B-B14F-4D97-AF65-F5344CB8AC3E}">
@@ -8515,6 +8741,16 @@
 <file path=ppt/slides/slide5.xml><?xml version="1.0" encoding="utf-8"?>
 <p:sld xmlns:a="http://schemas.openxmlformats.org/drawingml/2006/main" xmlns:r="http://schemas.openxmlformats.org/officeDocument/2006/relationships" xmlns:p="http://schemas.openxmlformats.org/presentationml/2006/main">
   <p:cSld>
+    <p:bg>
+      <p:bgPr>
+        <a:solidFill>
+          <a:schemeClr val="bg1">
+            <a:lumMod val="95000"/>
+          </a:schemeClr>
+        </a:solidFill>
+        <a:effectLst/>
+      </p:bgPr>
+    </p:bg>
     <p:spTree>
       <p:nvGrpSpPr>
         <p:cNvPr id="1" name=""/>
@@ -8545,9 +8781,16 @@
             <p:ph type="title"/>
           </p:nvPr>
         </p:nvSpPr>
-        <p:spPr/>
-        <p:txBody>
-          <a:bodyPr/>
+        <p:spPr>
+          <a:xfrm>
+            <a:off x="640079" y="640079"/>
+            <a:ext cx="3402531" cy="5272242"/>
+          </a:xfrm>
+        </p:spPr>
+        <p:txBody>
+          <a:bodyPr>
+            <a:normAutofit/>
+          </a:bodyPr>
           <a:lstStyle/>
           <a:p>
             <a:r>
@@ -8573,9 +8816,16 @@
             <p:ph idx="1"/>
           </p:nvPr>
         </p:nvSpPr>
-        <p:spPr/>
-        <p:txBody>
-          <a:bodyPr/>
+        <p:spPr>
+          <a:xfrm>
+            <a:off x="4672103" y="640079"/>
+            <a:ext cx="6883072" cy="2834737"/>
+          </a:xfrm>
+        </p:spPr>
+        <p:txBody>
+          <a:bodyPr>
+            <a:normAutofit/>
+          </a:bodyPr>
           <a:lstStyle/>
           <a:p>
             <a:r>
@@ -8622,12 +8872,18 @@
         </p:blipFill>
         <p:spPr>
           <a:xfrm>
-            <a:off x="2573481" y="3302055"/>
-            <a:ext cx="3820058" cy="666843"/>
+            <a:off x="4672103" y="4187955"/>
+            <a:ext cx="6883071" cy="1201533"/>
           </a:xfrm>
           <a:prstGeom prst="rect">
             <a:avLst/>
           </a:prstGeom>
+          <a:ln w="31750" cap="sq">
+            <a:solidFill>
+              <a:srgbClr val="FFFFFF"/>
+            </a:solidFill>
+            <a:miter lim="800000"/>
+          </a:ln>
         </p:spPr>
       </p:pic>
     </p:spTree>
@@ -8646,6 +8902,16 @@
 <file path=ppt/slides/slide6.xml><?xml version="1.0" encoding="utf-8"?>
 <p:sld xmlns:a="http://schemas.openxmlformats.org/drawingml/2006/main" xmlns:r="http://schemas.openxmlformats.org/officeDocument/2006/relationships" xmlns:p="http://schemas.openxmlformats.org/presentationml/2006/main">
   <p:cSld>
+    <p:bg>
+      <p:bgPr>
+        <a:solidFill>
+          <a:schemeClr val="bg1">
+            <a:lumMod val="95000"/>
+          </a:schemeClr>
+        </a:solidFill>
+        <a:effectLst/>
+      </p:bgPr>
+    </p:bg>
     <p:spTree>
       <p:nvGrpSpPr>
         <p:cNvPr id="1" name=""/>
@@ -8660,6 +8926,127 @@
           <a:chExt cx="0" cy="0"/>
         </a:xfrm>
       </p:grpSpPr>
+      <p:sp useBgFill="1">
+        <p:nvSpPr>
+          <p:cNvPr id="17" name="Rectangle 16">
+            <a:extLst>
+              <a:ext uri="{FF2B5EF4-FFF2-40B4-BE49-F238E27FC236}">
+                <a16:creationId xmlns:a16="http://schemas.microsoft.com/office/drawing/2014/main" id="{930BC020-BDBF-49EB-9898-BAB5BF559317}"/>
+              </a:ext>
+              <a:ext uri="{C183D7F6-B498-43B3-948B-1728B52AA6E4}">
+                <adec:decorative xmlns:adec="http://schemas.microsoft.com/office/drawing/2017/decorative" val="1"/>
+              </a:ext>
+            </a:extLst>
+          </p:cNvPr>
+          <p:cNvSpPr>
+            <a:spLocks noGrp="1" noRot="1" noChangeAspect="1" noMove="1" noResize="1" noEditPoints="1" noAdjustHandles="1" noChangeArrowheads="1" noChangeShapeType="1" noTextEdit="1"/>
+          </p:cNvSpPr>
+          <p:nvPr>
+            <p:extLst>
+              <p:ext uri="{386F3935-93C4-4BCD-93E2-E3B085C9AB24}">
+                <p16:designElem xmlns:p16="http://schemas.microsoft.com/office/powerpoint/2015/main" val="1"/>
+              </p:ext>
+            </p:extLst>
+          </p:nvPr>
+        </p:nvSpPr>
+        <p:spPr>
+          <a:xfrm>
+            <a:off x="0" y="-2"/>
+            <a:ext cx="12192000" cy="6858001"/>
+          </a:xfrm>
+          <a:prstGeom prst="rect">
+            <a:avLst/>
+          </a:prstGeom>
+          <a:ln>
+            <a:noFill/>
+          </a:ln>
+        </p:spPr>
+        <p:style>
+          <a:lnRef idx="2">
+            <a:schemeClr val="accent1">
+              <a:shade val="50000"/>
+            </a:schemeClr>
+          </a:lnRef>
+          <a:fillRef idx="1">
+            <a:schemeClr val="accent1"/>
+          </a:fillRef>
+          <a:effectRef idx="0">
+            <a:schemeClr val="accent1"/>
+          </a:effectRef>
+          <a:fontRef idx="minor">
+            <a:schemeClr val="lt1"/>
+          </a:fontRef>
+        </p:style>
+        <p:txBody>
+          <a:bodyPr rtlCol="0" anchor="ctr"/>
+          <a:lstStyle/>
+          <a:p>
+            <a:pPr algn="ctr"/>
+            <a:endParaRPr lang="en-US"/>
+          </a:p>
+        </p:txBody>
+      </p:sp>
+      <p:sp>
+        <p:nvSpPr>
+          <p:cNvPr id="18" name="Rectangle 17">
+            <a:extLst>
+              <a:ext uri="{FF2B5EF4-FFF2-40B4-BE49-F238E27FC236}">
+                <a16:creationId xmlns:a16="http://schemas.microsoft.com/office/drawing/2014/main" id="{64950C64-5D81-40F1-9601-8BA0D63BAE74}"/>
+              </a:ext>
+              <a:ext uri="{C183D7F6-B498-43B3-948B-1728B52AA6E4}">
+                <adec:decorative xmlns:adec="http://schemas.microsoft.com/office/drawing/2017/decorative" val="1"/>
+              </a:ext>
+            </a:extLst>
+          </p:cNvPr>
+          <p:cNvSpPr>
+            <a:spLocks noGrp="1" noRot="1" noChangeAspect="1" noMove="1" noResize="1" noEditPoints="1" noAdjustHandles="1" noChangeArrowheads="1" noChangeShapeType="1" noTextEdit="1"/>
+          </p:cNvSpPr>
+          <p:nvPr>
+            <p:extLst>
+              <p:ext uri="{386F3935-93C4-4BCD-93E2-E3B085C9AB24}">
+                <p16:designElem xmlns:p16="http://schemas.microsoft.com/office/powerpoint/2015/main" val="1"/>
+              </p:ext>
+            </p:extLst>
+          </p:nvPr>
+        </p:nvSpPr>
+        <p:spPr>
+          <a:xfrm>
+            <a:off x="0" y="3429000"/>
+            <a:ext cx="12192000" cy="3429000"/>
+          </a:xfrm>
+          <a:prstGeom prst="rect">
+            <a:avLst/>
+          </a:prstGeom>
+          <a:solidFill>
+            <a:schemeClr val="tx2"/>
+          </a:solidFill>
+          <a:ln>
+            <a:noFill/>
+          </a:ln>
+        </p:spPr>
+        <p:style>
+          <a:lnRef idx="0">
+            <a:scrgbClr r="0" g="0" b="0"/>
+          </a:lnRef>
+          <a:fillRef idx="0">
+            <a:scrgbClr r="0" g="0" b="0"/>
+          </a:fillRef>
+          <a:effectRef idx="0">
+            <a:scrgbClr r="0" g="0" b="0"/>
+          </a:effectRef>
+          <a:fontRef idx="minor">
+            <a:schemeClr val="lt1"/>
+          </a:fontRef>
+        </p:style>
+        <p:txBody>
+          <a:bodyPr rtlCol="0" anchor="ctr"/>
+          <a:lstStyle/>
+          <a:p>
+            <a:pPr algn="ctr"/>
+            <a:endParaRPr lang="en-US"/>
+          </a:p>
+        </p:txBody>
+      </p:sp>
       <p:sp>
         <p:nvSpPr>
           <p:cNvPr id="2" name="Title 1">
@@ -8678,50 +9065,33 @@
         </p:nvSpPr>
         <p:spPr>
           <a:xfrm>
-            <a:off x="2388452" y="158447"/>
-            <a:ext cx="7729728" cy="1188720"/>
+            <a:off x="2231136" y="3781241"/>
+            <a:ext cx="7729729" cy="855406"/>
           </a:xfrm>
+          <a:noFill/>
+          <a:ln>
+            <a:solidFill>
+              <a:schemeClr val="bg1"/>
+            </a:solidFill>
+          </a:ln>
         </p:spPr>
         <p:txBody>
-          <a:bodyPr/>
+          <a:bodyPr vert="horz" lIns="182880" tIns="182880" rIns="182880" bIns="182880" rtlCol="0" anchor="ctr">
+            <a:normAutofit/>
+          </a:bodyPr>
           <a:lstStyle/>
           <a:p>
             <a:r>
-              <a:rPr lang="en-IN" dirty="0"/>
+              <a:rPr lang="en-US" sz="2400">
+                <a:solidFill>
+                  <a:schemeClr val="bg1"/>
+                </a:solidFill>
+              </a:rPr>
               <a:t>Final Result</a:t>
             </a:r>
           </a:p>
         </p:txBody>
       </p:sp>
-      <p:pic>
-        <p:nvPicPr>
-          <p:cNvPr id="5" name="Content Placeholder 4">
-            <a:extLst>
-              <a:ext uri="{FF2B5EF4-FFF2-40B4-BE49-F238E27FC236}">
-                <a16:creationId xmlns:a16="http://schemas.microsoft.com/office/drawing/2014/main" id="{7CA38EAB-94DE-7F27-B1A2-1E010C11840C}"/>
-              </a:ext>
-            </a:extLst>
-          </p:cNvPr>
-          <p:cNvPicPr>
-            <a:picLocks noGrp="1" noChangeAspect="1"/>
-          </p:cNvPicPr>
-          <p:nvPr>
-            <p:ph idx="1"/>
-          </p:nvPr>
-        </p:nvPicPr>
-        <p:blipFill>
-          <a:blip r:embed="rId2"/>
-          <a:stretch>
-            <a:fillRect/>
-          </a:stretch>
-        </p:blipFill>
-        <p:spPr>
-          <a:xfrm>
-            <a:off x="363072" y="1527380"/>
-            <a:ext cx="6431740" cy="3101975"/>
-          </a:xfrm>
-        </p:spPr>
-      </p:pic>
       <p:pic>
         <p:nvPicPr>
           <p:cNvPr id="7" name="Picture 6">
@@ -8737,6 +9107,38 @@
           <p:nvPr/>
         </p:nvPicPr>
         <p:blipFill>
+          <a:blip r:embed="rId2"/>
+          <a:stretch>
+            <a:fillRect/>
+          </a:stretch>
+        </p:blipFill>
+        <p:spPr>
+          <a:xfrm>
+            <a:off x="1600200" y="1249816"/>
+            <a:ext cx="4334934" cy="1363406"/>
+          </a:xfrm>
+          <a:prstGeom prst="rect">
+            <a:avLst/>
+          </a:prstGeom>
+        </p:spPr>
+      </p:pic>
+      <p:pic>
+        <p:nvPicPr>
+          <p:cNvPr id="5" name="Content Placeholder 4">
+            <a:extLst>
+              <a:ext uri="{FF2B5EF4-FFF2-40B4-BE49-F238E27FC236}">
+                <a16:creationId xmlns:a16="http://schemas.microsoft.com/office/drawing/2014/main" id="{7CA38EAB-94DE-7F27-B1A2-1E010C11840C}"/>
+              </a:ext>
+            </a:extLst>
+          </p:cNvPr>
+          <p:cNvPicPr>
+            <a:picLocks noGrp="1" noChangeAspect="1"/>
+          </p:cNvPicPr>
+          <p:nvPr>
+            <p:ph idx="1"/>
+          </p:nvPr>
+        </p:nvPicPr>
+        <p:blipFill>
           <a:blip r:embed="rId3"/>
           <a:stretch>
             <a:fillRect/>
@@ -8744,8 +9146,8 @@
         </p:blipFill>
         <p:spPr>
           <a:xfrm>
-            <a:off x="1341742" y="4952409"/>
-            <a:ext cx="4474399" cy="1407271"/>
+            <a:off x="6256867" y="885717"/>
+            <a:ext cx="4334934" cy="2091605"/>
           </a:xfrm>
           <a:prstGeom prst="rect">
             <a:avLst/>
@@ -8766,31 +9168,72 @@
         </p:nvSpPr>
         <p:spPr>
           <a:xfrm>
-            <a:off x="7384026" y="1927123"/>
-            <a:ext cx="3274142" cy="1754326"/>
+            <a:off x="2238412" y="4846076"/>
+            <a:ext cx="7715177" cy="1271556"/>
           </a:xfrm>
           <a:prstGeom prst="rect">
             <a:avLst/>
           </a:prstGeom>
-          <a:noFill/>
         </p:spPr>
         <p:txBody>
-          <a:bodyPr wrap="square" rtlCol="0">
-            <a:spAutoFit/>
+          <a:bodyPr vert="horz" lIns="91440" tIns="45720" rIns="91440" bIns="45720" rtlCol="0">
+            <a:normAutofit/>
           </a:bodyPr>
           <a:lstStyle/>
           <a:p>
-            <a:r>
-              <a:rPr lang="en-IN" dirty="0"/>
+            <a:pPr indent="-228600" defTabSz="914400">
+              <a:spcBef>
+                <a:spcPts val="1000"/>
+              </a:spcBef>
+              <a:buClr>
+                <a:schemeClr val="accent2"/>
+              </a:buClr>
+              <a:buFont typeface="Arial" panose="020B0604020202020204" pitchFamily="34" charset="0"/>
+              <a:buChar char="•"/>
+            </a:pPr>
+            <a:r>
+              <a:rPr lang="en-US">
+                <a:solidFill>
+                  <a:schemeClr val="bg1"/>
+                </a:solidFill>
+              </a:rPr>
               <a:t>Our Code has predicted the Species in Test Samples F1-F8</a:t>
             </a:r>
           </a:p>
           <a:p>
-            <a:endParaRPr lang="en-IN" dirty="0"/>
-          </a:p>
-          <a:p>
-            <a:r>
-              <a:rPr lang="en-IN" dirty="0"/>
+            <a:pPr indent="-228600" defTabSz="914400">
+              <a:spcBef>
+                <a:spcPts val="1000"/>
+              </a:spcBef>
+              <a:buClr>
+                <a:schemeClr val="accent2"/>
+              </a:buClr>
+              <a:buFont typeface="Arial" panose="020B0604020202020204" pitchFamily="34" charset="0"/>
+              <a:buChar char="•"/>
+            </a:pPr>
+            <a:endParaRPr lang="en-US">
+              <a:solidFill>
+                <a:schemeClr val="bg1"/>
+              </a:solidFill>
+            </a:endParaRPr>
+          </a:p>
+          <a:p>
+            <a:pPr indent="-228600" defTabSz="914400">
+              <a:spcBef>
+                <a:spcPts val="1000"/>
+              </a:spcBef>
+              <a:buClr>
+                <a:schemeClr val="accent2"/>
+              </a:buClr>
+              <a:buFont typeface="Arial" panose="020B0604020202020204" pitchFamily="34" charset="0"/>
+              <a:buChar char="•"/>
+            </a:pPr>
+            <a:r>
+              <a:rPr lang="en-US">
+                <a:solidFill>
+                  <a:schemeClr val="bg1"/>
+                </a:solidFill>
+              </a:rPr>
               <a:t>It can be verified by Observing The FFT plots of those Test Samples</a:t>
             </a:r>
           </a:p>
@@ -8812,6 +9255,16 @@
 <file path=ppt/slides/slide7.xml><?xml version="1.0" encoding="utf-8"?>
 <p:sld xmlns:a="http://schemas.openxmlformats.org/drawingml/2006/main" xmlns:r="http://schemas.openxmlformats.org/officeDocument/2006/relationships" xmlns:p="http://schemas.openxmlformats.org/presentationml/2006/main">
   <p:cSld>
+    <p:bg>
+      <p:bgPr>
+        <a:solidFill>
+          <a:schemeClr val="bg1">
+            <a:lumMod val="95000"/>
+          </a:schemeClr>
+        </a:solidFill>
+        <a:effectLst/>
+      </p:bgPr>
+    </p:bg>
     <p:spTree>
       <p:nvGrpSpPr>
         <p:cNvPr id="1" name=""/>
@@ -8831,7 +9284,7 @@
           <p:cNvPr id="2" name="Title 1">
             <a:extLst>
               <a:ext uri="{FF2B5EF4-FFF2-40B4-BE49-F238E27FC236}">
-                <a16:creationId xmlns:a16="http://schemas.microsoft.com/office/drawing/2014/main" id="{5E762C3C-6F05-32A6-BB6F-D59A3C96C8DD}"/>
+                <a16:creationId xmlns:a16="http://schemas.microsoft.com/office/drawing/2014/main" id="{0E04E9A5-49BE-0C15-9A3F-F08E63697ADF}"/>
               </a:ext>
             </a:extLst>
           </p:cNvPr>
@@ -8842,47 +9295,109 @@
             <p:ph type="title"/>
           </p:nvPr>
         </p:nvSpPr>
-        <p:spPr/>
-        <p:txBody>
-          <a:bodyPr/>
+        <p:spPr>
+          <a:xfrm>
+            <a:off x="5445496" y="978776"/>
+            <a:ext cx="5925310" cy="1174991"/>
+          </a:xfrm>
+        </p:spPr>
+        <p:txBody>
+          <a:bodyPr vert="horz" lIns="182880" tIns="182880" rIns="182880" bIns="182880" rtlCol="0" anchor="ctr">
+            <a:normAutofit/>
+          </a:bodyPr>
           <a:lstStyle/>
           <a:p>
             <a:r>
-              <a:rPr lang="en-US" dirty="0"/>
-              <a:t>Part-2</a:t>
-            </a:r>
-          </a:p>
-        </p:txBody>
-      </p:sp>
-      <p:sp>
-        <p:nvSpPr>
-          <p:cNvPr id="3" name="Text Placeholder 2">
+              <a:rPr lang="en-US" sz="2400"/>
+              <a:t>Problem statement</a:t>
+            </a:r>
+          </a:p>
+        </p:txBody>
+      </p:sp>
+      <p:pic>
+        <p:nvPicPr>
+          <p:cNvPr id="6" name="Picture 5" descr="Bird landing on a tree">
             <a:extLst>
               <a:ext uri="{FF2B5EF4-FFF2-40B4-BE49-F238E27FC236}">
-                <a16:creationId xmlns:a16="http://schemas.microsoft.com/office/drawing/2014/main" id="{725E0726-2C0C-FBF1-CDB1-4683CE38038D}"/>
+                <a16:creationId xmlns:a16="http://schemas.microsoft.com/office/drawing/2014/main" id="{1BCB604F-2141-42A9-5F42-CAEDE581DC44}"/>
               </a:ext>
             </a:extLst>
           </p:cNvPr>
-          <p:cNvSpPr>
-            <a:spLocks noGrp="1"/>
-          </p:cNvSpPr>
-          <p:nvPr>
-            <p:ph type="body" idx="1"/>
-          </p:nvPr>
-        </p:nvSpPr>
-        <p:spPr/>
-        <p:txBody>
-          <a:bodyPr/>
+          <p:cNvPicPr>
+            <a:picLocks noChangeAspect="1"/>
+          </p:cNvPicPr>
+          <p:nvPr/>
+        </p:nvPicPr>
+        <p:blipFill>
+          <a:blip r:embed="rId2"/>
+          <a:srcRect l="17513" r="36138" b="1"/>
+          <a:stretch/>
+        </p:blipFill>
+        <p:spPr>
+          <a:xfrm>
+            <a:off x="20" y="10"/>
+            <a:ext cx="4657325" cy="6857990"/>
+          </a:xfrm>
+          <a:prstGeom prst="rect">
+            <a:avLst/>
+          </a:prstGeom>
+        </p:spPr>
+      </p:pic>
+      <p:sp>
+        <p:nvSpPr>
+          <p:cNvPr id="4" name="TextBox 3">
+            <a:extLst>
+              <a:ext uri="{FF2B5EF4-FFF2-40B4-BE49-F238E27FC236}">
+                <a16:creationId xmlns:a16="http://schemas.microsoft.com/office/drawing/2014/main" id="{3558EB60-2B6B-08D9-E690-AD8C154C9DAE}"/>
+              </a:ext>
+            </a:extLst>
+          </p:cNvPr>
+          <p:cNvSpPr txBox="1"/>
+          <p:nvPr/>
+        </p:nvSpPr>
+        <p:spPr>
+          <a:xfrm>
+            <a:off x="5445496" y="2640692"/>
+            <a:ext cx="5925310" cy="3255252"/>
+          </a:xfrm>
+          <a:prstGeom prst="rect">
+            <a:avLst/>
+          </a:prstGeom>
+        </p:spPr>
+        <p:txBody>
+          <a:bodyPr vert="horz" lIns="91440" tIns="45720" rIns="91440" bIns="45720" rtlCol="0">
+            <a:normAutofit/>
+          </a:bodyPr>
           <a:lstStyle/>
           <a:p>
-            <a:endParaRPr lang="en-US"/>
+            <a:pPr marL="285750" indent="-228600" defTabSz="914400">
+              <a:spcBef>
+                <a:spcPts val="1000"/>
+              </a:spcBef>
+              <a:buClr>
+                <a:schemeClr val="accent2"/>
+              </a:buClr>
+              <a:buFont typeface="Arial" panose="020B0604020202020204" pitchFamily="34" charset="0"/>
+              <a:buChar char="•"/>
+            </a:pPr>
+            <a:r>
+              <a:rPr lang="en-US">
+                <a:solidFill>
+                  <a:schemeClr val="tx1">
+                    <a:lumMod val="85000"/>
+                    <a:lumOff val="15000"/>
+                  </a:schemeClr>
+                </a:solidFill>
+              </a:rPr>
+              <a:t>We are given Audio Samples of few Birds and our Task is to recongnise Bird whose Test Samples are Given</a:t>
+            </a:r>
           </a:p>
         </p:txBody>
       </p:sp>
     </p:spTree>
     <p:extLst>
       <p:ext uri="{BB962C8B-B14F-4D97-AF65-F5344CB8AC3E}">
-        <p14:creationId xmlns:p14="http://schemas.microsoft.com/office/powerpoint/2010/main" val="4159985837"/>
+        <p14:creationId xmlns:p14="http://schemas.microsoft.com/office/powerpoint/2010/main" val="2619882871"/>
       </p:ext>
     </p:extLst>
   </p:cSld>
@@ -8914,7 +9429,7 @@
           <p:cNvPr id="2" name="Title 1">
             <a:extLst>
               <a:ext uri="{FF2B5EF4-FFF2-40B4-BE49-F238E27FC236}">
-                <a16:creationId xmlns:a16="http://schemas.microsoft.com/office/drawing/2014/main" id="{0E04E9A5-49BE-0C15-9A3F-F08E63697ADF}"/>
+                <a16:creationId xmlns:a16="http://schemas.microsoft.com/office/drawing/2014/main" id="{43769DB5-5E56-52F9-D0BF-83E45E37D8CD}"/>
               </a:ext>
             </a:extLst>
           </p:cNvPr>
@@ -8932,62 +9447,44 @@
           <a:p>
             <a:r>
               <a:rPr lang="en-IN" dirty="0"/>
-              <a:t>Problem statement</a:t>
-            </a:r>
-          </a:p>
-        </p:txBody>
-      </p:sp>
-      <p:sp>
-        <p:nvSpPr>
-          <p:cNvPr id="4" name="TextBox 3">
+              <a:t>FFT of given samples</a:t>
+            </a:r>
+          </a:p>
+        </p:txBody>
+      </p:sp>
+      <p:pic>
+        <p:nvPicPr>
+          <p:cNvPr id="5" name="Content Placeholder 4">
             <a:extLst>
               <a:ext uri="{FF2B5EF4-FFF2-40B4-BE49-F238E27FC236}">
-                <a16:creationId xmlns:a16="http://schemas.microsoft.com/office/drawing/2014/main" id="{3558EB60-2B6B-08D9-E690-AD8C154C9DAE}"/>
+                <a16:creationId xmlns:a16="http://schemas.microsoft.com/office/drawing/2014/main" id="{6908A0F1-A53A-22D2-552B-E4B0147E745F}"/>
               </a:ext>
             </a:extLst>
           </p:cNvPr>
-          <p:cNvSpPr txBox="1"/>
-          <p:nvPr/>
-        </p:nvSpPr>
+          <p:cNvPicPr>
+            <a:picLocks noGrp="1" noChangeAspect="1"/>
+          </p:cNvPicPr>
+          <p:nvPr>
+            <p:ph idx="1"/>
+          </p:nvPr>
+        </p:nvPicPr>
+        <p:blipFill>
+          <a:blip r:embed="rId2"/>
+          <a:stretch>
+            <a:fillRect/>
+          </a:stretch>
+        </p:blipFill>
         <p:spPr>
           <a:xfrm>
-            <a:off x="2231137" y="2625213"/>
-            <a:ext cx="7729728" cy="646331"/>
+            <a:off x="2231135" y="2325421"/>
+            <a:ext cx="7716115" cy="3721418"/>
           </a:xfrm>
-          <a:prstGeom prst="rect">
-            <a:avLst/>
-          </a:prstGeom>
-          <a:noFill/>
         </p:spPr>
-        <p:txBody>
-          <a:bodyPr wrap="square" rtlCol="0">
-            <a:spAutoFit/>
-          </a:bodyPr>
-          <a:lstStyle/>
-          <a:p>
-            <a:pPr marL="285750" indent="-285750">
-              <a:buFont typeface="Arial" panose="020B0604020202020204" pitchFamily="34" charset="0"/>
-              <a:buChar char="•"/>
-            </a:pPr>
-            <a:r>
-              <a:rPr lang="en-IN" dirty="0"/>
-              <a:t>We are given Audio Samples of few Birds and our Task is to </a:t>
-            </a:r>
-            <a:r>
-              <a:rPr lang="en-IN" dirty="0" err="1"/>
-              <a:t>recongnise</a:t>
-            </a:r>
-            <a:r>
-              <a:rPr lang="en-IN" dirty="0"/>
-              <a:t> Bird whose Test Samples are Given</a:t>
-            </a:r>
-          </a:p>
-        </p:txBody>
-      </p:sp>
+      </p:pic>
     </p:spTree>
     <p:extLst>
       <p:ext uri="{BB962C8B-B14F-4D97-AF65-F5344CB8AC3E}">
-        <p14:creationId xmlns:p14="http://schemas.microsoft.com/office/powerpoint/2010/main" val="2619882871"/>
+        <p14:creationId xmlns:p14="http://schemas.microsoft.com/office/powerpoint/2010/main" val="1740160574"/>
       </p:ext>
     </p:extLst>
   </p:cSld>
@@ -9019,7 +9516,7 @@
           <p:cNvPr id="2" name="Title 1">
             <a:extLst>
               <a:ext uri="{FF2B5EF4-FFF2-40B4-BE49-F238E27FC236}">
-                <a16:creationId xmlns:a16="http://schemas.microsoft.com/office/drawing/2014/main" id="{43769DB5-5E56-52F9-D0BF-83E45E37D8CD}"/>
+                <a16:creationId xmlns:a16="http://schemas.microsoft.com/office/drawing/2014/main" id="{89B4A73F-2D64-2ACF-DCAE-BD1E35E43A3B}"/>
               </a:ext>
             </a:extLst>
           </p:cNvPr>
@@ -9037,44 +9534,96 @@
           <a:p>
             <a:r>
               <a:rPr lang="en-IN" dirty="0"/>
-              <a:t>FFT of given samples</a:t>
-            </a:r>
-          </a:p>
-        </p:txBody>
-      </p:sp>
-      <p:pic>
-        <p:nvPicPr>
-          <p:cNvPr id="5" name="Content Placeholder 4">
+              <a:t>Method to distinguish</a:t>
+            </a:r>
+          </a:p>
+        </p:txBody>
+      </p:sp>
+      <p:sp>
+        <p:nvSpPr>
+          <p:cNvPr id="3" name="TextBox 2">
             <a:extLst>
               <a:ext uri="{FF2B5EF4-FFF2-40B4-BE49-F238E27FC236}">
-                <a16:creationId xmlns:a16="http://schemas.microsoft.com/office/drawing/2014/main" id="{6908A0F1-A53A-22D2-552B-E4B0147E745F}"/>
+                <a16:creationId xmlns:a16="http://schemas.microsoft.com/office/drawing/2014/main" id="{D5773C50-A0CF-B921-8608-82A2C2A774C8}"/>
               </a:ext>
             </a:extLst>
           </p:cNvPr>
-          <p:cNvPicPr>
-            <a:picLocks noGrp="1" noChangeAspect="1"/>
-          </p:cNvPicPr>
-          <p:nvPr>
-            <p:ph idx="1"/>
-          </p:nvPr>
-        </p:nvPicPr>
-        <p:blipFill>
-          <a:blip r:embed="rId2"/>
-          <a:stretch>
-            <a:fillRect/>
-          </a:stretch>
-        </p:blipFill>
+          <p:cNvSpPr txBox="1"/>
+          <p:nvPr/>
+        </p:nvSpPr>
         <p:spPr>
           <a:xfrm>
-            <a:off x="2231135" y="2325421"/>
-            <a:ext cx="7716115" cy="3721418"/>
+            <a:off x="2231136" y="2772697"/>
+            <a:ext cx="6735883" cy="2031325"/>
           </a:xfrm>
+          <a:prstGeom prst="rect">
+            <a:avLst/>
+          </a:prstGeom>
+          <a:noFill/>
         </p:spPr>
-      </p:pic>
+        <p:txBody>
+          <a:bodyPr wrap="square" rtlCol="0">
+            <a:spAutoFit/>
+          </a:bodyPr>
+          <a:lstStyle/>
+          <a:p>
+            <a:pPr marL="285750" indent="-285750">
+              <a:buFont typeface="Arial" panose="020B0604020202020204" pitchFamily="34" charset="0"/>
+              <a:buChar char="•"/>
+            </a:pPr>
+            <a:r>
+              <a:rPr lang="en-IN" dirty="0"/>
+              <a:t>To distinguish we need to Compare the Nature of FFTs of given samples with the Test Samples and Identify the Bird</a:t>
+            </a:r>
+          </a:p>
+          <a:p>
+            <a:pPr marL="285750" indent="-285750">
+              <a:buFont typeface="Arial" panose="020B0604020202020204" pitchFamily="34" charset="0"/>
+              <a:buChar char="•"/>
+            </a:pPr>
+            <a:endParaRPr lang="en-IN" dirty="0"/>
+          </a:p>
+          <a:p>
+            <a:pPr marL="285750" indent="-285750">
+              <a:buFont typeface="Arial" panose="020B0604020202020204" pitchFamily="34" charset="0"/>
+              <a:buChar char="•"/>
+            </a:pPr>
+            <a:r>
+              <a:rPr lang="en-IN" dirty="0"/>
+              <a:t>So by </a:t>
+            </a:r>
+            <a:r>
+              <a:rPr lang="en-IN" dirty="0" err="1"/>
+              <a:t>oberseving</a:t>
+            </a:r>
+            <a:r>
+              <a:rPr lang="en-IN" dirty="0"/>
+              <a:t> the FFTs we can Differentiate them on the basis of Number of Peaks</a:t>
+            </a:r>
+          </a:p>
+          <a:p>
+            <a:pPr marL="285750" indent="-285750">
+              <a:buFont typeface="Arial" panose="020B0604020202020204" pitchFamily="34" charset="0"/>
+              <a:buChar char="•"/>
+            </a:pPr>
+            <a:endParaRPr lang="en-IN" dirty="0"/>
+          </a:p>
+          <a:p>
+            <a:pPr marL="285750" indent="-285750">
+              <a:buFont typeface="Arial" panose="020B0604020202020204" pitchFamily="34" charset="0"/>
+              <a:buChar char="•"/>
+            </a:pPr>
+            <a:r>
+              <a:rPr lang="en-IN" dirty="0"/>
+              <a:t>We normalise the FFT magnitude and </a:t>
+            </a:r>
+          </a:p>
+        </p:txBody>
+      </p:sp>
     </p:spTree>
     <p:extLst>
       <p:ext uri="{BB962C8B-B14F-4D97-AF65-F5344CB8AC3E}">
-        <p14:creationId xmlns:p14="http://schemas.microsoft.com/office/powerpoint/2010/main" val="1740160574"/>
+        <p14:creationId xmlns:p14="http://schemas.microsoft.com/office/powerpoint/2010/main" val="3887563221"/>
       </p:ext>
     </p:extLst>
   </p:cSld>

--- a/SP ppt.pptx
+++ b/SP ppt.pptx
@@ -4,26 +4,34 @@
   <p:sldMasterIdLst>
     <p:sldMasterId id="2147483696" r:id="rId1"/>
   </p:sldMasterIdLst>
+  <p:notesMasterIdLst>
+    <p:notesMasterId r:id="rId26"/>
+  </p:notesMasterIdLst>
   <p:sldIdLst>
     <p:sldId id="256" r:id="rId2"/>
     <p:sldId id="264" r:id="rId3"/>
     <p:sldId id="268" r:id="rId4"/>
-    <p:sldId id="270" r:id="rId5"/>
-    <p:sldId id="269" r:id="rId6"/>
-    <p:sldId id="271" r:id="rId7"/>
-    <p:sldId id="265" r:id="rId8"/>
-    <p:sldId id="266" r:id="rId9"/>
-    <p:sldId id="267" r:id="rId10"/>
-    <p:sldId id="258" r:id="rId11"/>
-    <p:sldId id="257" r:id="rId12"/>
-    <p:sldId id="259" r:id="rId13"/>
-    <p:sldId id="260" r:id="rId14"/>
-    <p:sldId id="261" r:id="rId15"/>
-    <p:sldId id="262" r:id="rId16"/>
-    <p:sldId id="272" r:id="rId17"/>
-    <p:sldId id="263" r:id="rId18"/>
-    <p:sldId id="273" r:id="rId19"/>
-    <p:sldId id="274" r:id="rId20"/>
+    <p:sldId id="266" r:id="rId5"/>
+    <p:sldId id="267" r:id="rId6"/>
+    <p:sldId id="269" r:id="rId7"/>
+    <p:sldId id="271" r:id="rId8"/>
+    <p:sldId id="258" r:id="rId9"/>
+    <p:sldId id="257" r:id="rId10"/>
+    <p:sldId id="259" r:id="rId11"/>
+    <p:sldId id="260" r:id="rId12"/>
+    <p:sldId id="261" r:id="rId13"/>
+    <p:sldId id="262" r:id="rId14"/>
+    <p:sldId id="272" r:id="rId15"/>
+    <p:sldId id="263" r:id="rId16"/>
+    <p:sldId id="273" r:id="rId17"/>
+    <p:sldId id="274" r:id="rId18"/>
+    <p:sldId id="281" r:id="rId19"/>
+    <p:sldId id="275" r:id="rId20"/>
+    <p:sldId id="280" r:id="rId21"/>
+    <p:sldId id="279" r:id="rId22"/>
+    <p:sldId id="278" r:id="rId23"/>
+    <p:sldId id="277" r:id="rId24"/>
+    <p:sldId id="276" r:id="rId25"/>
   </p:sldIdLst>
   <p:sldSz cx="12192000" cy="6858000"/>
   <p:notesSz cx="6858000" cy="9144000"/>
@@ -912,7 +920,1788 @@
 </dgm:colorsDef>
 </file>
 
+<file path=ppt/diagrams/colors2.xml><?xml version="1.0" encoding="utf-8"?>
+<dgm:colorsDef xmlns:dgm="http://schemas.openxmlformats.org/drawingml/2006/diagram" xmlns:a="http://schemas.openxmlformats.org/drawingml/2006/main" uniqueId="urn:microsoft.com/office/officeart/2005/8/colors/colorful2">
+  <dgm:title val=""/>
+  <dgm:desc val=""/>
+  <dgm:catLst>
+    <dgm:cat type="colorful" pri="10200"/>
+  </dgm:catLst>
+  <dgm:styleLbl name="node0">
+    <dgm:fillClrLst meth="repeat">
+      <a:schemeClr val="accent1"/>
+    </dgm:fillClrLst>
+    <dgm:linClrLst meth="repeat">
+      <a:schemeClr val="lt1"/>
+    </dgm:linClrLst>
+    <dgm:effectClrLst/>
+    <dgm:txLinClrLst/>
+    <dgm:txFillClrLst/>
+    <dgm:txEffectClrLst/>
+  </dgm:styleLbl>
+  <dgm:styleLbl name="node1">
+    <dgm:fillClrLst>
+      <a:schemeClr val="accent2"/>
+      <a:schemeClr val="accent3"/>
+    </dgm:fillClrLst>
+    <dgm:linClrLst meth="repeat">
+      <a:schemeClr val="lt1"/>
+    </dgm:linClrLst>
+    <dgm:effectClrLst/>
+    <dgm:txLinClrLst/>
+    <dgm:txFillClrLst/>
+    <dgm:txEffectClrLst/>
+  </dgm:styleLbl>
+  <dgm:styleLbl name="alignNode1">
+    <dgm:fillClrLst>
+      <a:schemeClr val="accent2"/>
+      <a:schemeClr val="accent3"/>
+    </dgm:fillClrLst>
+    <dgm:linClrLst>
+      <a:schemeClr val="accent2"/>
+      <a:schemeClr val="accent3"/>
+    </dgm:linClrLst>
+    <dgm:effectClrLst/>
+    <dgm:txLinClrLst/>
+    <dgm:txFillClrLst/>
+    <dgm:txEffectClrLst/>
+  </dgm:styleLbl>
+  <dgm:styleLbl name="lnNode1">
+    <dgm:fillClrLst>
+      <a:schemeClr val="accent2"/>
+      <a:schemeClr val="accent3"/>
+    </dgm:fillClrLst>
+    <dgm:linClrLst meth="repeat">
+      <a:schemeClr val="lt1"/>
+    </dgm:linClrLst>
+    <dgm:effectClrLst/>
+    <dgm:txLinClrLst/>
+    <dgm:txFillClrLst/>
+    <dgm:txEffectClrLst/>
+  </dgm:styleLbl>
+  <dgm:styleLbl name="vennNode1">
+    <dgm:fillClrLst>
+      <a:schemeClr val="accent2">
+        <a:alpha val="50000"/>
+      </a:schemeClr>
+      <a:schemeClr val="accent3">
+        <a:alpha val="50000"/>
+      </a:schemeClr>
+    </dgm:fillClrLst>
+    <dgm:linClrLst meth="repeat">
+      <a:schemeClr val="lt1"/>
+    </dgm:linClrLst>
+    <dgm:effectClrLst/>
+    <dgm:txLinClrLst/>
+    <dgm:txFillClrLst/>
+    <dgm:txEffectClrLst/>
+  </dgm:styleLbl>
+  <dgm:styleLbl name="node2">
+    <dgm:fillClrLst>
+      <a:schemeClr val="accent3"/>
+    </dgm:fillClrLst>
+    <dgm:linClrLst meth="repeat">
+      <a:schemeClr val="lt1"/>
+    </dgm:linClrLst>
+    <dgm:effectClrLst/>
+    <dgm:txLinClrLst/>
+    <dgm:txFillClrLst/>
+    <dgm:txEffectClrLst/>
+  </dgm:styleLbl>
+  <dgm:styleLbl name="node3">
+    <dgm:fillClrLst>
+      <a:schemeClr val="accent4"/>
+    </dgm:fillClrLst>
+    <dgm:linClrLst meth="repeat">
+      <a:schemeClr val="lt1"/>
+    </dgm:linClrLst>
+    <dgm:effectClrLst/>
+    <dgm:txLinClrLst/>
+    <dgm:txFillClrLst/>
+    <dgm:txEffectClrLst/>
+  </dgm:styleLbl>
+  <dgm:styleLbl name="node4">
+    <dgm:fillClrLst>
+      <a:schemeClr val="accent5"/>
+    </dgm:fillClrLst>
+    <dgm:linClrLst meth="repeat">
+      <a:schemeClr val="lt1"/>
+    </dgm:linClrLst>
+    <dgm:effectClrLst/>
+    <dgm:txLinClrLst/>
+    <dgm:txFillClrLst/>
+    <dgm:txEffectClrLst/>
+  </dgm:styleLbl>
+  <dgm:styleLbl name="fgImgPlace1">
+    <dgm:fillClrLst>
+      <a:schemeClr val="accent2">
+        <a:tint val="50000"/>
+      </a:schemeClr>
+      <a:schemeClr val="accent3">
+        <a:tint val="50000"/>
+      </a:schemeClr>
+    </dgm:fillClrLst>
+    <dgm:linClrLst meth="repeat">
+      <a:schemeClr val="lt1"/>
+    </dgm:linClrLst>
+    <dgm:effectClrLst/>
+    <dgm:txLinClrLst/>
+    <dgm:txFillClrLst meth="repeat">
+      <a:schemeClr val="lt1"/>
+    </dgm:txFillClrLst>
+    <dgm:txEffectClrLst/>
+  </dgm:styleLbl>
+  <dgm:styleLbl name="alignImgPlace1">
+    <dgm:fillClrLst>
+      <a:schemeClr val="accent2">
+        <a:tint val="50000"/>
+      </a:schemeClr>
+      <a:schemeClr val="accent3">
+        <a:tint val="20000"/>
+      </a:schemeClr>
+    </dgm:fillClrLst>
+    <dgm:linClrLst meth="repeat">
+      <a:schemeClr val="lt1"/>
+    </dgm:linClrLst>
+    <dgm:effectClrLst/>
+    <dgm:txLinClrLst/>
+    <dgm:txFillClrLst meth="repeat">
+      <a:schemeClr val="lt1"/>
+    </dgm:txFillClrLst>
+    <dgm:txEffectClrLst/>
+  </dgm:styleLbl>
+  <dgm:styleLbl name="bgImgPlace1">
+    <dgm:fillClrLst>
+      <a:schemeClr val="accent2">
+        <a:tint val="50000"/>
+      </a:schemeClr>
+      <a:schemeClr val="accent3">
+        <a:tint val="20000"/>
+      </a:schemeClr>
+    </dgm:fillClrLst>
+    <dgm:linClrLst meth="repeat">
+      <a:schemeClr val="lt1"/>
+    </dgm:linClrLst>
+    <dgm:effectClrLst/>
+    <dgm:txLinClrLst/>
+    <dgm:txFillClrLst meth="repeat">
+      <a:schemeClr val="lt1"/>
+    </dgm:txFillClrLst>
+    <dgm:txEffectClrLst/>
+  </dgm:styleLbl>
+  <dgm:styleLbl name="sibTrans2D1">
+    <dgm:fillClrLst>
+      <a:schemeClr val="accent2"/>
+      <a:schemeClr val="accent3"/>
+    </dgm:fillClrLst>
+    <dgm:linClrLst meth="repeat">
+      <a:schemeClr val="lt1"/>
+    </dgm:linClrLst>
+    <dgm:effectClrLst/>
+    <dgm:txLinClrLst/>
+    <dgm:txFillClrLst/>
+    <dgm:txEffectClrLst/>
+  </dgm:styleLbl>
+  <dgm:styleLbl name="fgSibTrans2D1">
+    <dgm:fillClrLst>
+      <a:schemeClr val="accent2"/>
+      <a:schemeClr val="accent3"/>
+    </dgm:fillClrLst>
+    <dgm:linClrLst meth="repeat">
+      <a:schemeClr val="lt1"/>
+    </dgm:linClrLst>
+    <dgm:effectClrLst/>
+    <dgm:txLinClrLst/>
+    <dgm:txFillClrLst meth="repeat">
+      <a:schemeClr val="lt1"/>
+    </dgm:txFillClrLst>
+    <dgm:txEffectClrLst/>
+  </dgm:styleLbl>
+  <dgm:styleLbl name="bgSibTrans2D1">
+    <dgm:fillClrLst>
+      <a:schemeClr val="accent2"/>
+      <a:schemeClr val="accent3"/>
+    </dgm:fillClrLst>
+    <dgm:linClrLst meth="repeat">
+      <a:schemeClr val="lt1"/>
+    </dgm:linClrLst>
+    <dgm:effectClrLst/>
+    <dgm:txLinClrLst/>
+    <dgm:txFillClrLst meth="repeat">
+      <a:schemeClr val="lt1"/>
+    </dgm:txFillClrLst>
+    <dgm:txEffectClrLst/>
+  </dgm:styleLbl>
+  <dgm:styleLbl name="sibTrans1D1">
+    <dgm:fillClrLst/>
+    <dgm:linClrLst>
+      <a:schemeClr val="accent2"/>
+      <a:schemeClr val="accent3"/>
+    </dgm:linClrLst>
+    <dgm:effectClrLst/>
+    <dgm:txLinClrLst/>
+    <dgm:txFillClrLst meth="repeat">
+      <a:schemeClr val="tx1"/>
+    </dgm:txFillClrLst>
+    <dgm:txEffectClrLst/>
+  </dgm:styleLbl>
+  <dgm:styleLbl name="callout">
+    <dgm:fillClrLst meth="repeat">
+      <a:schemeClr val="accent2"/>
+    </dgm:fillClrLst>
+    <dgm:linClrLst meth="repeat">
+      <a:schemeClr val="accent2">
+        <a:tint val="50000"/>
+      </a:schemeClr>
+    </dgm:linClrLst>
+    <dgm:effectClrLst/>
+    <dgm:txLinClrLst/>
+    <dgm:txFillClrLst meth="repeat">
+      <a:schemeClr val="tx1"/>
+    </dgm:txFillClrLst>
+    <dgm:txEffectClrLst/>
+  </dgm:styleLbl>
+  <dgm:styleLbl name="asst0">
+    <dgm:fillClrLst meth="repeat">
+      <a:schemeClr val="accent2"/>
+    </dgm:fillClrLst>
+    <dgm:linClrLst meth="repeat">
+      <a:schemeClr val="lt1">
+        <a:shade val="80000"/>
+      </a:schemeClr>
+    </dgm:linClrLst>
+    <dgm:effectClrLst/>
+    <dgm:txLinClrLst/>
+    <dgm:txFillClrLst/>
+    <dgm:txEffectClrLst/>
+  </dgm:styleLbl>
+  <dgm:styleLbl name="asst1">
+    <dgm:fillClrLst meth="repeat">
+      <a:schemeClr val="accent3"/>
+    </dgm:fillClrLst>
+    <dgm:linClrLst meth="repeat">
+      <a:schemeClr val="lt1">
+        <a:shade val="80000"/>
+      </a:schemeClr>
+    </dgm:linClrLst>
+    <dgm:effectClrLst/>
+    <dgm:txLinClrLst/>
+    <dgm:txFillClrLst/>
+    <dgm:txEffectClrLst/>
+  </dgm:styleLbl>
+  <dgm:styleLbl name="asst2">
+    <dgm:fillClrLst>
+      <a:schemeClr val="accent4"/>
+    </dgm:fillClrLst>
+    <dgm:linClrLst meth="repeat">
+      <a:schemeClr val="lt1"/>
+    </dgm:linClrLst>
+    <dgm:effectClrLst/>
+    <dgm:txLinClrLst/>
+    <dgm:txFillClrLst/>
+    <dgm:txEffectClrLst/>
+  </dgm:styleLbl>
+  <dgm:styleLbl name="asst3">
+    <dgm:fillClrLst>
+      <a:schemeClr val="accent5"/>
+    </dgm:fillClrLst>
+    <dgm:linClrLst meth="repeat">
+      <a:schemeClr val="lt1"/>
+    </dgm:linClrLst>
+    <dgm:effectClrLst/>
+    <dgm:txLinClrLst/>
+    <dgm:txFillClrLst/>
+    <dgm:txEffectClrLst/>
+  </dgm:styleLbl>
+  <dgm:styleLbl name="asst4">
+    <dgm:fillClrLst>
+      <a:schemeClr val="accent6"/>
+    </dgm:fillClrLst>
+    <dgm:linClrLst meth="repeat">
+      <a:schemeClr val="lt1"/>
+    </dgm:linClrLst>
+    <dgm:effectClrLst/>
+    <dgm:txLinClrLst/>
+    <dgm:txFillClrLst/>
+    <dgm:txEffectClrLst/>
+  </dgm:styleLbl>
+  <dgm:styleLbl name="parChTrans2D1">
+    <dgm:fillClrLst meth="repeat">
+      <a:schemeClr val="accent2"/>
+    </dgm:fillClrLst>
+    <dgm:linClrLst meth="repeat">
+      <a:schemeClr val="lt1"/>
+    </dgm:linClrLst>
+    <dgm:effectClrLst/>
+    <dgm:txLinClrLst/>
+    <dgm:txFillClrLst meth="repeat">
+      <a:schemeClr val="lt1"/>
+    </dgm:txFillClrLst>
+    <dgm:txEffectClrLst/>
+  </dgm:styleLbl>
+  <dgm:styleLbl name="parChTrans2D2">
+    <dgm:fillClrLst meth="repeat">
+      <a:schemeClr val="accent3"/>
+    </dgm:fillClrLst>
+    <dgm:linClrLst meth="repeat">
+      <a:schemeClr val="lt1"/>
+    </dgm:linClrLst>
+    <dgm:effectClrLst/>
+    <dgm:txLinClrLst/>
+    <dgm:txFillClrLst/>
+    <dgm:txEffectClrLst/>
+  </dgm:styleLbl>
+  <dgm:styleLbl name="parChTrans2D3">
+    <dgm:fillClrLst meth="repeat">
+      <a:schemeClr val="accent4"/>
+    </dgm:fillClrLst>
+    <dgm:linClrLst meth="repeat">
+      <a:schemeClr val="lt1"/>
+    </dgm:linClrLst>
+    <dgm:effectClrLst/>
+    <dgm:txLinClrLst/>
+    <dgm:txFillClrLst/>
+    <dgm:txEffectClrLst/>
+  </dgm:styleLbl>
+  <dgm:styleLbl name="parChTrans2D4">
+    <dgm:fillClrLst meth="repeat">
+      <a:schemeClr val="accent5"/>
+    </dgm:fillClrLst>
+    <dgm:linClrLst meth="repeat">
+      <a:schemeClr val="lt1"/>
+    </dgm:linClrLst>
+    <dgm:effectClrLst/>
+    <dgm:txLinClrLst/>
+    <dgm:txFillClrLst meth="repeat">
+      <a:schemeClr val="lt1"/>
+    </dgm:txFillClrLst>
+    <dgm:txEffectClrLst/>
+  </dgm:styleLbl>
+  <dgm:styleLbl name="parChTrans1D1">
+    <dgm:fillClrLst meth="repeat">
+      <a:schemeClr val="accent2"/>
+    </dgm:fillClrLst>
+    <dgm:linClrLst meth="repeat">
+      <a:schemeClr val="accent2"/>
+    </dgm:linClrLst>
+    <dgm:effectClrLst/>
+    <dgm:txLinClrLst/>
+    <dgm:txFillClrLst meth="repeat">
+      <a:schemeClr val="tx1"/>
+    </dgm:txFillClrLst>
+    <dgm:txEffectClrLst/>
+  </dgm:styleLbl>
+  <dgm:styleLbl name="parChTrans1D2">
+    <dgm:fillClrLst meth="repeat">
+      <a:schemeClr val="accent2">
+        <a:tint val="90000"/>
+      </a:schemeClr>
+    </dgm:fillClrLst>
+    <dgm:linClrLst meth="repeat">
+      <a:schemeClr val="accent3"/>
+    </dgm:linClrLst>
+    <dgm:effectClrLst/>
+    <dgm:txLinClrLst/>
+    <dgm:txFillClrLst meth="repeat">
+      <a:schemeClr val="tx1"/>
+    </dgm:txFillClrLst>
+    <dgm:txEffectClrLst/>
+  </dgm:styleLbl>
+  <dgm:styleLbl name="parChTrans1D3">
+    <dgm:fillClrLst meth="repeat">
+      <a:schemeClr val="accent2">
+        <a:tint val="70000"/>
+      </a:schemeClr>
+    </dgm:fillClrLst>
+    <dgm:linClrLst meth="repeat">
+      <a:schemeClr val="accent4"/>
+    </dgm:linClrLst>
+    <dgm:effectClrLst/>
+    <dgm:txLinClrLst/>
+    <dgm:txFillClrLst meth="repeat">
+      <a:schemeClr val="tx1"/>
+    </dgm:txFillClrLst>
+    <dgm:txEffectClrLst/>
+  </dgm:styleLbl>
+  <dgm:styleLbl name="parChTrans1D4">
+    <dgm:fillClrLst meth="repeat">
+      <a:schemeClr val="accent2">
+        <a:tint val="50000"/>
+      </a:schemeClr>
+    </dgm:fillClrLst>
+    <dgm:linClrLst meth="repeat">
+      <a:schemeClr val="accent5"/>
+    </dgm:linClrLst>
+    <dgm:effectClrLst/>
+    <dgm:txLinClrLst/>
+    <dgm:txFillClrLst meth="repeat">
+      <a:schemeClr val="tx1"/>
+    </dgm:txFillClrLst>
+    <dgm:txEffectClrLst/>
+  </dgm:styleLbl>
+  <dgm:styleLbl name="fgAcc1">
+    <dgm:fillClrLst meth="repeat">
+      <a:schemeClr val="lt1">
+        <a:alpha val="90000"/>
+      </a:schemeClr>
+    </dgm:fillClrLst>
+    <dgm:linClrLst>
+      <a:schemeClr val="accent2"/>
+      <a:schemeClr val="accent3"/>
+    </dgm:linClrLst>
+    <dgm:effectClrLst/>
+    <dgm:txLinClrLst/>
+    <dgm:txFillClrLst meth="repeat">
+      <a:schemeClr val="dk1"/>
+    </dgm:txFillClrLst>
+    <dgm:txEffectClrLst/>
+  </dgm:styleLbl>
+  <dgm:styleLbl name="conFgAcc1">
+    <dgm:fillClrLst meth="repeat">
+      <a:schemeClr val="lt1">
+        <a:alpha val="90000"/>
+      </a:schemeClr>
+    </dgm:fillClrLst>
+    <dgm:linClrLst>
+      <a:schemeClr val="accent2"/>
+      <a:schemeClr val="accent3"/>
+    </dgm:linClrLst>
+    <dgm:effectClrLst/>
+    <dgm:txLinClrLst/>
+    <dgm:txFillClrLst meth="repeat">
+      <a:schemeClr val="dk1"/>
+    </dgm:txFillClrLst>
+    <dgm:txEffectClrLst/>
+  </dgm:styleLbl>
+  <dgm:styleLbl name="alignAcc1">
+    <dgm:fillClrLst meth="repeat">
+      <a:schemeClr val="lt1">
+        <a:alpha val="90000"/>
+      </a:schemeClr>
+    </dgm:fillClrLst>
+    <dgm:linClrLst>
+      <a:schemeClr val="accent2"/>
+      <a:schemeClr val="accent3"/>
+    </dgm:linClrLst>
+    <dgm:effectClrLst/>
+    <dgm:txLinClrLst/>
+    <dgm:txFillClrLst meth="repeat">
+      <a:schemeClr val="dk1"/>
+    </dgm:txFillClrLst>
+    <dgm:txEffectClrLst/>
+  </dgm:styleLbl>
+  <dgm:styleLbl name="trAlignAcc1">
+    <dgm:fillClrLst meth="repeat">
+      <a:schemeClr val="lt1">
+        <a:alpha val="40000"/>
+      </a:schemeClr>
+    </dgm:fillClrLst>
+    <dgm:linClrLst meth="repeat">
+      <a:schemeClr val="accent2"/>
+    </dgm:linClrLst>
+    <dgm:effectClrLst/>
+    <dgm:txLinClrLst/>
+    <dgm:txFillClrLst meth="repeat">
+      <a:schemeClr val="dk1"/>
+    </dgm:txFillClrLst>
+    <dgm:txEffectClrLst/>
+  </dgm:styleLbl>
+  <dgm:styleLbl name="bgAcc1">
+    <dgm:fillClrLst meth="repeat">
+      <a:schemeClr val="lt1">
+        <a:alpha val="90000"/>
+      </a:schemeClr>
+    </dgm:fillClrLst>
+    <dgm:linClrLst>
+      <a:schemeClr val="accent2"/>
+      <a:schemeClr val="accent3"/>
+    </dgm:linClrLst>
+    <dgm:effectClrLst/>
+    <dgm:txLinClrLst/>
+    <dgm:txFillClrLst meth="repeat">
+      <a:schemeClr val="dk1"/>
+    </dgm:txFillClrLst>
+    <dgm:txEffectClrLst/>
+  </dgm:styleLbl>
+  <dgm:styleLbl name="solidFgAcc1">
+    <dgm:fillClrLst meth="repeat">
+      <a:schemeClr val="lt1"/>
+    </dgm:fillClrLst>
+    <dgm:linClrLst>
+      <a:schemeClr val="accent2"/>
+      <a:schemeClr val="accent3"/>
+    </dgm:linClrLst>
+    <dgm:effectClrLst/>
+    <dgm:txLinClrLst/>
+    <dgm:txFillClrLst meth="repeat">
+      <a:schemeClr val="dk1"/>
+    </dgm:txFillClrLst>
+    <dgm:txEffectClrLst/>
+  </dgm:styleLbl>
+  <dgm:styleLbl name="solidAlignAcc1">
+    <dgm:fillClrLst meth="repeat">
+      <a:schemeClr val="lt1"/>
+    </dgm:fillClrLst>
+    <dgm:linClrLst>
+      <a:schemeClr val="accent2"/>
+      <a:schemeClr val="accent3"/>
+    </dgm:linClrLst>
+    <dgm:effectClrLst/>
+    <dgm:txLinClrLst/>
+    <dgm:txFillClrLst meth="repeat">
+      <a:schemeClr val="dk1"/>
+    </dgm:txFillClrLst>
+    <dgm:txEffectClrLst/>
+  </dgm:styleLbl>
+  <dgm:styleLbl name="solidBgAcc1">
+    <dgm:fillClrLst meth="repeat">
+      <a:schemeClr val="lt1"/>
+    </dgm:fillClrLst>
+    <dgm:linClrLst>
+      <a:schemeClr val="accent2"/>
+      <a:schemeClr val="accent3"/>
+    </dgm:linClrLst>
+    <dgm:effectClrLst/>
+    <dgm:txLinClrLst/>
+    <dgm:txFillClrLst meth="repeat">
+      <a:schemeClr val="dk1"/>
+    </dgm:txFillClrLst>
+    <dgm:txEffectClrLst/>
+  </dgm:styleLbl>
+  <dgm:styleLbl name="fgAccFollowNode1">
+    <dgm:fillClrLst>
+      <a:schemeClr val="accent2">
+        <a:tint val="40000"/>
+        <a:alpha val="90000"/>
+      </a:schemeClr>
+      <a:schemeClr val="accent3">
+        <a:tint val="40000"/>
+        <a:alpha val="90000"/>
+      </a:schemeClr>
+    </dgm:fillClrLst>
+    <dgm:linClrLst>
+      <a:schemeClr val="accent2">
+        <a:tint val="40000"/>
+        <a:alpha val="90000"/>
+      </a:schemeClr>
+      <a:schemeClr val="accent3">
+        <a:tint val="40000"/>
+        <a:alpha val="90000"/>
+      </a:schemeClr>
+    </dgm:linClrLst>
+    <dgm:effectClrLst/>
+    <dgm:txLinClrLst/>
+    <dgm:txFillClrLst meth="repeat">
+      <a:schemeClr val="dk1"/>
+    </dgm:txFillClrLst>
+    <dgm:txEffectClrLst/>
+  </dgm:styleLbl>
+  <dgm:styleLbl name="alignAccFollowNode1">
+    <dgm:fillClrLst>
+      <a:schemeClr val="accent2">
+        <a:tint val="40000"/>
+        <a:alpha val="90000"/>
+      </a:schemeClr>
+      <a:schemeClr val="accent3">
+        <a:tint val="40000"/>
+        <a:alpha val="90000"/>
+      </a:schemeClr>
+    </dgm:fillClrLst>
+    <dgm:linClrLst>
+      <a:schemeClr val="accent2">
+        <a:tint val="40000"/>
+        <a:alpha val="90000"/>
+      </a:schemeClr>
+      <a:schemeClr val="accent3">
+        <a:tint val="40000"/>
+        <a:alpha val="90000"/>
+      </a:schemeClr>
+    </dgm:linClrLst>
+    <dgm:effectClrLst/>
+    <dgm:txLinClrLst/>
+    <dgm:txFillClrLst meth="repeat">
+      <a:schemeClr val="dk1"/>
+    </dgm:txFillClrLst>
+    <dgm:txEffectClrLst/>
+  </dgm:styleLbl>
+  <dgm:styleLbl name="bgAccFollowNode1">
+    <dgm:fillClrLst>
+      <a:schemeClr val="accent2">
+        <a:tint val="40000"/>
+        <a:alpha val="90000"/>
+      </a:schemeClr>
+      <a:schemeClr val="accent3">
+        <a:tint val="40000"/>
+        <a:alpha val="90000"/>
+      </a:schemeClr>
+    </dgm:fillClrLst>
+    <dgm:linClrLst>
+      <a:schemeClr val="accent2">
+        <a:tint val="40000"/>
+        <a:alpha val="90000"/>
+      </a:schemeClr>
+      <a:schemeClr val="accent3">
+        <a:tint val="40000"/>
+        <a:alpha val="90000"/>
+      </a:schemeClr>
+    </dgm:linClrLst>
+    <dgm:effectClrLst/>
+    <dgm:txLinClrLst/>
+    <dgm:txFillClrLst meth="repeat">
+      <a:schemeClr val="dk1"/>
+    </dgm:txFillClrLst>
+    <dgm:txEffectClrLst/>
+  </dgm:styleLbl>
+  <dgm:styleLbl name="fgAcc0">
+    <dgm:fillClrLst meth="repeat">
+      <a:schemeClr val="lt1">
+        <a:alpha val="90000"/>
+      </a:schemeClr>
+    </dgm:fillClrLst>
+    <dgm:linClrLst>
+      <a:schemeClr val="accent1"/>
+    </dgm:linClrLst>
+    <dgm:effectClrLst/>
+    <dgm:txLinClrLst/>
+    <dgm:txFillClrLst meth="repeat">
+      <a:schemeClr val="dk1"/>
+    </dgm:txFillClrLst>
+    <dgm:txEffectClrLst/>
+  </dgm:styleLbl>
+  <dgm:styleLbl name="fgAcc2">
+    <dgm:fillClrLst meth="repeat">
+      <a:schemeClr val="lt1">
+        <a:alpha val="90000"/>
+      </a:schemeClr>
+    </dgm:fillClrLst>
+    <dgm:linClrLst>
+      <a:schemeClr val="accent3"/>
+    </dgm:linClrLst>
+    <dgm:effectClrLst/>
+    <dgm:txLinClrLst/>
+    <dgm:txFillClrLst meth="repeat">
+      <a:schemeClr val="dk1"/>
+    </dgm:txFillClrLst>
+    <dgm:txEffectClrLst/>
+  </dgm:styleLbl>
+  <dgm:styleLbl name="fgAcc3">
+    <dgm:fillClrLst meth="repeat">
+      <a:schemeClr val="lt1">
+        <a:alpha val="90000"/>
+      </a:schemeClr>
+    </dgm:fillClrLst>
+    <dgm:linClrLst>
+      <a:schemeClr val="accent4"/>
+    </dgm:linClrLst>
+    <dgm:effectClrLst/>
+    <dgm:txLinClrLst/>
+    <dgm:txFillClrLst meth="repeat">
+      <a:schemeClr val="dk1"/>
+    </dgm:txFillClrLst>
+    <dgm:txEffectClrLst/>
+  </dgm:styleLbl>
+  <dgm:styleLbl name="fgAcc4">
+    <dgm:fillClrLst meth="repeat">
+      <a:schemeClr val="lt1">
+        <a:alpha val="90000"/>
+      </a:schemeClr>
+    </dgm:fillClrLst>
+    <dgm:linClrLst>
+      <a:schemeClr val="accent5"/>
+    </dgm:linClrLst>
+    <dgm:effectClrLst/>
+    <dgm:txLinClrLst/>
+    <dgm:txFillClrLst meth="repeat">
+      <a:schemeClr val="dk1"/>
+    </dgm:txFillClrLst>
+    <dgm:txEffectClrLst/>
+  </dgm:styleLbl>
+  <dgm:styleLbl name="bgShp">
+    <dgm:fillClrLst meth="repeat">
+      <a:schemeClr val="accent2">
+        <a:tint val="40000"/>
+      </a:schemeClr>
+    </dgm:fillClrLst>
+    <dgm:linClrLst meth="repeat">
+      <a:schemeClr val="dk1"/>
+    </dgm:linClrLst>
+    <dgm:effectClrLst/>
+    <dgm:txLinClrLst/>
+    <dgm:txFillClrLst meth="repeat">
+      <a:schemeClr val="dk1"/>
+    </dgm:txFillClrLst>
+    <dgm:txEffectClrLst/>
+  </dgm:styleLbl>
+  <dgm:styleLbl name="dkBgShp">
+    <dgm:fillClrLst meth="repeat">
+      <a:schemeClr val="accent2">
+        <a:shade val="90000"/>
+      </a:schemeClr>
+    </dgm:fillClrLst>
+    <dgm:linClrLst meth="repeat">
+      <a:schemeClr val="dk1"/>
+    </dgm:linClrLst>
+    <dgm:effectClrLst/>
+    <dgm:txLinClrLst/>
+    <dgm:txFillClrLst meth="repeat">
+      <a:schemeClr val="lt1"/>
+    </dgm:txFillClrLst>
+    <dgm:txEffectClrLst/>
+  </dgm:styleLbl>
+  <dgm:styleLbl name="trBgShp">
+    <dgm:fillClrLst meth="repeat">
+      <a:schemeClr val="accent2">
+        <a:tint val="50000"/>
+        <a:alpha val="40000"/>
+      </a:schemeClr>
+    </dgm:fillClrLst>
+    <dgm:linClrLst meth="repeat">
+      <a:schemeClr val="accent2"/>
+    </dgm:linClrLst>
+    <dgm:effectClrLst/>
+    <dgm:txLinClrLst/>
+    <dgm:txFillClrLst meth="repeat">
+      <a:schemeClr val="lt1"/>
+    </dgm:txFillClrLst>
+    <dgm:txEffectClrLst/>
+  </dgm:styleLbl>
+  <dgm:styleLbl name="fgShp">
+    <dgm:fillClrLst meth="repeat">
+      <a:schemeClr val="accent2">
+        <a:tint val="40000"/>
+      </a:schemeClr>
+    </dgm:fillClrLst>
+    <dgm:linClrLst meth="repeat">
+      <a:schemeClr val="lt1"/>
+    </dgm:linClrLst>
+    <dgm:effectClrLst/>
+    <dgm:txLinClrLst/>
+    <dgm:txFillClrLst meth="repeat">
+      <a:schemeClr val="dk1"/>
+    </dgm:txFillClrLst>
+    <dgm:txEffectClrLst/>
+  </dgm:styleLbl>
+  <dgm:styleLbl name="revTx">
+    <dgm:fillClrLst meth="repeat">
+      <a:schemeClr val="lt1">
+        <a:alpha val="0"/>
+      </a:schemeClr>
+    </dgm:fillClrLst>
+    <dgm:linClrLst meth="repeat">
+      <a:schemeClr val="dk1">
+        <a:alpha val="0"/>
+      </a:schemeClr>
+    </dgm:linClrLst>
+    <dgm:effectClrLst/>
+    <dgm:txLinClrLst/>
+    <dgm:txFillClrLst meth="repeat">
+      <a:schemeClr val="tx1"/>
+    </dgm:txFillClrLst>
+    <dgm:txEffectClrLst/>
+  </dgm:styleLbl>
+</dgm:colorsDef>
+</file>
+
+<file path=ppt/diagrams/colors3.xml><?xml version="1.0" encoding="utf-8"?>
+<dgm:colorsDef xmlns:dgm="http://schemas.openxmlformats.org/drawingml/2006/diagram" xmlns:a="http://schemas.openxmlformats.org/drawingml/2006/main" uniqueId="urn:microsoft.com/office/officeart/2005/8/colors/accent1_2">
+  <dgm:title val=""/>
+  <dgm:desc val=""/>
+  <dgm:catLst>
+    <dgm:cat type="accent1" pri="11200"/>
+  </dgm:catLst>
+  <dgm:styleLbl name="node0">
+    <dgm:fillClrLst meth="repeat">
+      <a:schemeClr val="accent1"/>
+    </dgm:fillClrLst>
+    <dgm:linClrLst meth="repeat">
+      <a:schemeClr val="lt1"/>
+    </dgm:linClrLst>
+    <dgm:effectClrLst/>
+    <dgm:txLinClrLst/>
+    <dgm:txFillClrLst/>
+    <dgm:txEffectClrLst/>
+  </dgm:styleLbl>
+  <dgm:styleLbl name="alignNode1">
+    <dgm:fillClrLst meth="repeat">
+      <a:schemeClr val="accent1"/>
+    </dgm:fillClrLst>
+    <dgm:linClrLst meth="repeat">
+      <a:schemeClr val="accent1"/>
+    </dgm:linClrLst>
+    <dgm:effectClrLst/>
+    <dgm:txLinClrLst/>
+    <dgm:txFillClrLst/>
+    <dgm:txEffectClrLst/>
+  </dgm:styleLbl>
+  <dgm:styleLbl name="node1">
+    <dgm:fillClrLst meth="repeat">
+      <a:schemeClr val="accent1"/>
+    </dgm:fillClrLst>
+    <dgm:linClrLst meth="repeat">
+      <a:schemeClr val="lt1"/>
+    </dgm:linClrLst>
+    <dgm:effectClrLst/>
+    <dgm:txLinClrLst/>
+    <dgm:txFillClrLst/>
+    <dgm:txEffectClrLst/>
+  </dgm:styleLbl>
+  <dgm:styleLbl name="lnNode1">
+    <dgm:fillClrLst meth="repeat">
+      <a:schemeClr val="accent1"/>
+    </dgm:fillClrLst>
+    <dgm:linClrLst meth="repeat">
+      <a:schemeClr val="lt1"/>
+    </dgm:linClrLst>
+    <dgm:effectClrLst/>
+    <dgm:txLinClrLst/>
+    <dgm:txFillClrLst/>
+    <dgm:txEffectClrLst/>
+  </dgm:styleLbl>
+  <dgm:styleLbl name="vennNode1">
+    <dgm:fillClrLst meth="repeat">
+      <a:schemeClr val="accent1">
+        <a:alpha val="50000"/>
+      </a:schemeClr>
+    </dgm:fillClrLst>
+    <dgm:linClrLst meth="repeat">
+      <a:schemeClr val="lt1"/>
+    </dgm:linClrLst>
+    <dgm:effectClrLst/>
+    <dgm:txLinClrLst/>
+    <dgm:txFillClrLst/>
+    <dgm:txEffectClrLst/>
+  </dgm:styleLbl>
+  <dgm:styleLbl name="node2">
+    <dgm:fillClrLst meth="repeat">
+      <a:schemeClr val="accent1"/>
+    </dgm:fillClrLst>
+    <dgm:linClrLst meth="repeat">
+      <a:schemeClr val="lt1"/>
+    </dgm:linClrLst>
+    <dgm:effectClrLst/>
+    <dgm:txLinClrLst/>
+    <dgm:txFillClrLst/>
+    <dgm:txEffectClrLst/>
+  </dgm:styleLbl>
+  <dgm:styleLbl name="node3">
+    <dgm:fillClrLst meth="repeat">
+      <a:schemeClr val="accent1"/>
+    </dgm:fillClrLst>
+    <dgm:linClrLst meth="repeat">
+      <a:schemeClr val="lt1"/>
+    </dgm:linClrLst>
+    <dgm:effectClrLst/>
+    <dgm:txLinClrLst/>
+    <dgm:txFillClrLst/>
+    <dgm:txEffectClrLst/>
+  </dgm:styleLbl>
+  <dgm:styleLbl name="node4">
+    <dgm:fillClrLst meth="repeat">
+      <a:schemeClr val="accent1"/>
+    </dgm:fillClrLst>
+    <dgm:linClrLst meth="repeat">
+      <a:schemeClr val="lt1"/>
+    </dgm:linClrLst>
+    <dgm:effectClrLst/>
+    <dgm:txLinClrLst/>
+    <dgm:txFillClrLst/>
+    <dgm:txEffectClrLst/>
+  </dgm:styleLbl>
+  <dgm:styleLbl name="fgImgPlace1">
+    <dgm:fillClrLst meth="repeat">
+      <a:schemeClr val="accent1">
+        <a:tint val="50000"/>
+      </a:schemeClr>
+    </dgm:fillClrLst>
+    <dgm:linClrLst meth="repeat">
+      <a:schemeClr val="lt1"/>
+    </dgm:linClrLst>
+    <dgm:effectClrLst/>
+    <dgm:txLinClrLst/>
+    <dgm:txFillClrLst meth="repeat">
+      <a:schemeClr val="lt1"/>
+    </dgm:txFillClrLst>
+    <dgm:txEffectClrLst/>
+  </dgm:styleLbl>
+  <dgm:styleLbl name="alignImgPlace1">
+    <dgm:fillClrLst meth="repeat">
+      <a:schemeClr val="accent1">
+        <a:tint val="50000"/>
+      </a:schemeClr>
+    </dgm:fillClrLst>
+    <dgm:linClrLst meth="repeat">
+      <a:schemeClr val="lt1"/>
+    </dgm:linClrLst>
+    <dgm:effectClrLst/>
+    <dgm:txLinClrLst/>
+    <dgm:txFillClrLst meth="repeat">
+      <a:schemeClr val="lt1"/>
+    </dgm:txFillClrLst>
+    <dgm:txEffectClrLst/>
+  </dgm:styleLbl>
+  <dgm:styleLbl name="bgImgPlace1">
+    <dgm:fillClrLst meth="repeat">
+      <a:schemeClr val="accent1">
+        <a:tint val="50000"/>
+      </a:schemeClr>
+    </dgm:fillClrLst>
+    <dgm:linClrLst meth="repeat">
+      <a:schemeClr val="lt1"/>
+    </dgm:linClrLst>
+    <dgm:effectClrLst/>
+    <dgm:txLinClrLst/>
+    <dgm:txFillClrLst meth="repeat">
+      <a:schemeClr val="lt1"/>
+    </dgm:txFillClrLst>
+    <dgm:txEffectClrLst/>
+  </dgm:styleLbl>
+  <dgm:styleLbl name="sibTrans2D1">
+    <dgm:fillClrLst meth="repeat">
+      <a:schemeClr val="accent1">
+        <a:tint val="60000"/>
+      </a:schemeClr>
+    </dgm:fillClrLst>
+    <dgm:linClrLst meth="repeat">
+      <a:schemeClr val="accent1">
+        <a:tint val="60000"/>
+      </a:schemeClr>
+    </dgm:linClrLst>
+    <dgm:effectClrLst/>
+    <dgm:txLinClrLst/>
+    <dgm:txFillClrLst/>
+    <dgm:txEffectClrLst/>
+  </dgm:styleLbl>
+  <dgm:styleLbl name="fgSibTrans2D1">
+    <dgm:fillClrLst meth="repeat">
+      <a:schemeClr val="accent1">
+        <a:tint val="60000"/>
+      </a:schemeClr>
+    </dgm:fillClrLst>
+    <dgm:linClrLst meth="repeat">
+      <a:schemeClr val="accent1">
+        <a:tint val="60000"/>
+      </a:schemeClr>
+    </dgm:linClrLst>
+    <dgm:effectClrLst/>
+    <dgm:txLinClrLst/>
+    <dgm:txFillClrLst/>
+    <dgm:txEffectClrLst/>
+  </dgm:styleLbl>
+  <dgm:styleLbl name="bgSibTrans2D1">
+    <dgm:fillClrLst meth="repeat">
+      <a:schemeClr val="accent1">
+        <a:tint val="60000"/>
+      </a:schemeClr>
+    </dgm:fillClrLst>
+    <dgm:linClrLst meth="repeat">
+      <a:schemeClr val="accent1">
+        <a:tint val="60000"/>
+      </a:schemeClr>
+    </dgm:linClrLst>
+    <dgm:effectClrLst/>
+    <dgm:txLinClrLst/>
+    <dgm:txFillClrLst/>
+    <dgm:txEffectClrLst/>
+  </dgm:styleLbl>
+  <dgm:styleLbl name="sibTrans1D1">
+    <dgm:fillClrLst meth="repeat">
+      <a:schemeClr val="accent1"/>
+    </dgm:fillClrLst>
+    <dgm:linClrLst meth="repeat">
+      <a:schemeClr val="accent1"/>
+    </dgm:linClrLst>
+    <dgm:effectClrLst/>
+    <dgm:txLinClrLst/>
+    <dgm:txFillClrLst meth="repeat">
+      <a:schemeClr val="tx1"/>
+    </dgm:txFillClrLst>
+    <dgm:txEffectClrLst/>
+  </dgm:styleLbl>
+  <dgm:styleLbl name="callout">
+    <dgm:fillClrLst meth="repeat">
+      <a:schemeClr val="accent1"/>
+    </dgm:fillClrLst>
+    <dgm:linClrLst meth="repeat">
+      <a:schemeClr val="accent1">
+        <a:tint val="50000"/>
+      </a:schemeClr>
+    </dgm:linClrLst>
+    <dgm:effectClrLst/>
+    <dgm:txLinClrLst/>
+    <dgm:txFillClrLst meth="repeat">
+      <a:schemeClr val="tx1"/>
+    </dgm:txFillClrLst>
+    <dgm:txEffectClrLst/>
+  </dgm:styleLbl>
+  <dgm:styleLbl name="asst0">
+    <dgm:fillClrLst meth="repeat">
+      <a:schemeClr val="accent1"/>
+    </dgm:fillClrLst>
+    <dgm:linClrLst meth="repeat">
+      <a:schemeClr val="lt1"/>
+    </dgm:linClrLst>
+    <dgm:effectClrLst/>
+    <dgm:txLinClrLst/>
+    <dgm:txFillClrLst/>
+    <dgm:txEffectClrLst/>
+  </dgm:styleLbl>
+  <dgm:styleLbl name="asst1">
+    <dgm:fillClrLst meth="repeat">
+      <a:schemeClr val="accent1"/>
+    </dgm:fillClrLst>
+    <dgm:linClrLst meth="repeat">
+      <a:schemeClr val="lt1"/>
+    </dgm:linClrLst>
+    <dgm:effectClrLst/>
+    <dgm:txLinClrLst/>
+    <dgm:txFillClrLst/>
+    <dgm:txEffectClrLst/>
+  </dgm:styleLbl>
+  <dgm:styleLbl name="asst2">
+    <dgm:fillClrLst meth="repeat">
+      <a:schemeClr val="accent1"/>
+    </dgm:fillClrLst>
+    <dgm:linClrLst meth="repeat">
+      <a:schemeClr val="lt1"/>
+    </dgm:linClrLst>
+    <dgm:effectClrLst/>
+    <dgm:txLinClrLst/>
+    <dgm:txFillClrLst/>
+    <dgm:txEffectClrLst/>
+  </dgm:styleLbl>
+  <dgm:styleLbl name="asst3">
+    <dgm:fillClrLst meth="repeat">
+      <a:schemeClr val="accent1"/>
+    </dgm:fillClrLst>
+    <dgm:linClrLst meth="repeat">
+      <a:schemeClr val="lt1"/>
+    </dgm:linClrLst>
+    <dgm:effectClrLst/>
+    <dgm:txLinClrLst/>
+    <dgm:txFillClrLst/>
+    <dgm:txEffectClrLst/>
+  </dgm:styleLbl>
+  <dgm:styleLbl name="asst4">
+    <dgm:fillClrLst meth="repeat">
+      <a:schemeClr val="accent1"/>
+    </dgm:fillClrLst>
+    <dgm:linClrLst meth="repeat">
+      <a:schemeClr val="lt1"/>
+    </dgm:linClrLst>
+    <dgm:effectClrLst/>
+    <dgm:txLinClrLst/>
+    <dgm:txFillClrLst/>
+    <dgm:txEffectClrLst/>
+  </dgm:styleLbl>
+  <dgm:styleLbl name="parChTrans2D1">
+    <dgm:fillClrLst meth="repeat">
+      <a:schemeClr val="accent1">
+        <a:tint val="60000"/>
+      </a:schemeClr>
+    </dgm:fillClrLst>
+    <dgm:linClrLst meth="repeat">
+      <a:schemeClr val="accent1">
+        <a:tint val="60000"/>
+      </a:schemeClr>
+    </dgm:linClrLst>
+    <dgm:effectClrLst/>
+    <dgm:txLinClrLst/>
+    <dgm:txFillClrLst meth="repeat">
+      <a:schemeClr val="lt1"/>
+    </dgm:txFillClrLst>
+    <dgm:txEffectClrLst/>
+  </dgm:styleLbl>
+  <dgm:styleLbl name="parChTrans2D2">
+    <dgm:fillClrLst meth="repeat">
+      <a:schemeClr val="accent1"/>
+    </dgm:fillClrLst>
+    <dgm:linClrLst meth="repeat">
+      <a:schemeClr val="accent1"/>
+    </dgm:linClrLst>
+    <dgm:effectClrLst/>
+    <dgm:txLinClrLst/>
+    <dgm:txFillClrLst meth="repeat">
+      <a:schemeClr val="lt1"/>
+    </dgm:txFillClrLst>
+    <dgm:txEffectClrLst/>
+  </dgm:styleLbl>
+  <dgm:styleLbl name="parChTrans2D3">
+    <dgm:fillClrLst meth="repeat">
+      <a:schemeClr val="accent1"/>
+    </dgm:fillClrLst>
+    <dgm:linClrLst meth="repeat">
+      <a:schemeClr val="accent1"/>
+    </dgm:linClrLst>
+    <dgm:effectClrLst/>
+    <dgm:txLinClrLst/>
+    <dgm:txFillClrLst meth="repeat">
+      <a:schemeClr val="lt1"/>
+    </dgm:txFillClrLst>
+    <dgm:txEffectClrLst/>
+  </dgm:styleLbl>
+  <dgm:styleLbl name="parChTrans2D4">
+    <dgm:fillClrLst meth="repeat">
+      <a:schemeClr val="accent1"/>
+    </dgm:fillClrLst>
+    <dgm:linClrLst meth="repeat">
+      <a:schemeClr val="accent1"/>
+    </dgm:linClrLst>
+    <dgm:effectClrLst/>
+    <dgm:txLinClrLst/>
+    <dgm:txFillClrLst meth="repeat">
+      <a:schemeClr val="lt1"/>
+    </dgm:txFillClrLst>
+    <dgm:txEffectClrLst/>
+  </dgm:styleLbl>
+  <dgm:styleLbl name="parChTrans1D1">
+    <dgm:fillClrLst meth="repeat">
+      <a:schemeClr val="accent1"/>
+    </dgm:fillClrLst>
+    <dgm:linClrLst meth="repeat">
+      <a:schemeClr val="accent1">
+        <a:shade val="60000"/>
+      </a:schemeClr>
+    </dgm:linClrLst>
+    <dgm:effectClrLst/>
+    <dgm:txLinClrLst/>
+    <dgm:txFillClrLst meth="repeat">
+      <a:schemeClr val="tx1"/>
+    </dgm:txFillClrLst>
+    <dgm:txEffectClrLst/>
+  </dgm:styleLbl>
+  <dgm:styleLbl name="parChTrans1D2">
+    <dgm:fillClrLst meth="repeat">
+      <a:schemeClr val="accent1"/>
+    </dgm:fillClrLst>
+    <dgm:linClrLst meth="repeat">
+      <a:schemeClr val="accent1">
+        <a:shade val="60000"/>
+      </a:schemeClr>
+    </dgm:linClrLst>
+    <dgm:effectClrLst/>
+    <dgm:txLinClrLst/>
+    <dgm:txFillClrLst meth="repeat">
+      <a:schemeClr val="tx1"/>
+    </dgm:txFillClrLst>
+    <dgm:txEffectClrLst/>
+  </dgm:styleLbl>
+  <dgm:styleLbl name="parChTrans1D3">
+    <dgm:fillClrLst meth="repeat">
+      <a:schemeClr val="accent1"/>
+    </dgm:fillClrLst>
+    <dgm:linClrLst meth="repeat">
+      <a:schemeClr val="accent1">
+        <a:shade val="80000"/>
+      </a:schemeClr>
+    </dgm:linClrLst>
+    <dgm:effectClrLst/>
+    <dgm:txLinClrLst/>
+    <dgm:txFillClrLst meth="repeat">
+      <a:schemeClr val="tx1"/>
+    </dgm:txFillClrLst>
+    <dgm:txEffectClrLst/>
+  </dgm:styleLbl>
+  <dgm:styleLbl name="parChTrans1D4">
+    <dgm:fillClrLst meth="repeat">
+      <a:schemeClr val="accent1"/>
+    </dgm:fillClrLst>
+    <dgm:linClrLst meth="repeat">
+      <a:schemeClr val="accent1">
+        <a:shade val="80000"/>
+      </a:schemeClr>
+    </dgm:linClrLst>
+    <dgm:effectClrLst/>
+    <dgm:txLinClrLst/>
+    <dgm:txFillClrLst meth="repeat">
+      <a:schemeClr val="tx1"/>
+    </dgm:txFillClrLst>
+    <dgm:txEffectClrLst/>
+  </dgm:styleLbl>
+  <dgm:styleLbl name="fgAcc1">
+    <dgm:fillClrLst meth="repeat">
+      <a:schemeClr val="lt1">
+        <a:alpha val="90000"/>
+      </a:schemeClr>
+    </dgm:fillClrLst>
+    <dgm:linClrLst meth="repeat">
+      <a:schemeClr val="accent1"/>
+    </dgm:linClrLst>
+    <dgm:effectClrLst/>
+    <dgm:txLinClrLst/>
+    <dgm:txFillClrLst meth="repeat">
+      <a:schemeClr val="dk1"/>
+    </dgm:txFillClrLst>
+    <dgm:txEffectClrLst/>
+  </dgm:styleLbl>
+  <dgm:styleLbl name="conFgAcc1">
+    <dgm:fillClrLst meth="repeat">
+      <a:schemeClr val="lt1">
+        <a:alpha val="90000"/>
+      </a:schemeClr>
+    </dgm:fillClrLst>
+    <dgm:linClrLst meth="repeat">
+      <a:schemeClr val="accent1"/>
+    </dgm:linClrLst>
+    <dgm:effectClrLst/>
+    <dgm:txLinClrLst/>
+    <dgm:txFillClrLst meth="repeat">
+      <a:schemeClr val="dk1"/>
+    </dgm:txFillClrLst>
+    <dgm:txEffectClrLst/>
+  </dgm:styleLbl>
+  <dgm:styleLbl name="alignAcc1">
+    <dgm:fillClrLst meth="repeat">
+      <a:schemeClr val="lt1">
+        <a:alpha val="90000"/>
+      </a:schemeClr>
+    </dgm:fillClrLst>
+    <dgm:linClrLst meth="repeat">
+      <a:schemeClr val="accent1"/>
+    </dgm:linClrLst>
+    <dgm:effectClrLst/>
+    <dgm:txLinClrLst/>
+    <dgm:txFillClrLst meth="repeat">
+      <a:schemeClr val="dk1"/>
+    </dgm:txFillClrLst>
+    <dgm:txEffectClrLst/>
+  </dgm:styleLbl>
+  <dgm:styleLbl name="trAlignAcc1">
+    <dgm:fillClrLst meth="repeat">
+      <a:schemeClr val="lt1">
+        <a:alpha val="40000"/>
+      </a:schemeClr>
+    </dgm:fillClrLst>
+    <dgm:linClrLst meth="repeat">
+      <a:schemeClr val="accent1"/>
+    </dgm:linClrLst>
+    <dgm:effectClrLst/>
+    <dgm:txLinClrLst/>
+    <dgm:txFillClrLst meth="repeat">
+      <a:schemeClr val="dk1"/>
+    </dgm:txFillClrLst>
+    <dgm:txEffectClrLst/>
+  </dgm:styleLbl>
+  <dgm:styleLbl name="bgAcc1">
+    <dgm:fillClrLst meth="repeat">
+      <a:schemeClr val="lt1">
+        <a:alpha val="90000"/>
+      </a:schemeClr>
+    </dgm:fillClrLst>
+    <dgm:linClrLst meth="repeat">
+      <a:schemeClr val="accent1"/>
+    </dgm:linClrLst>
+    <dgm:effectClrLst/>
+    <dgm:txLinClrLst/>
+    <dgm:txFillClrLst meth="repeat">
+      <a:schemeClr val="dk1"/>
+    </dgm:txFillClrLst>
+    <dgm:txEffectClrLst/>
+  </dgm:styleLbl>
+  <dgm:styleLbl name="solidFgAcc1">
+    <dgm:fillClrLst meth="repeat">
+      <a:schemeClr val="lt1"/>
+    </dgm:fillClrLst>
+    <dgm:linClrLst meth="repeat">
+      <a:schemeClr val="accent1"/>
+    </dgm:linClrLst>
+    <dgm:effectClrLst/>
+    <dgm:txLinClrLst/>
+    <dgm:txFillClrLst meth="repeat">
+      <a:schemeClr val="dk1"/>
+    </dgm:txFillClrLst>
+    <dgm:txEffectClrLst/>
+  </dgm:styleLbl>
+  <dgm:styleLbl name="solidAlignAcc1">
+    <dgm:fillClrLst meth="repeat">
+      <a:schemeClr val="lt1"/>
+    </dgm:fillClrLst>
+    <dgm:linClrLst meth="repeat">
+      <a:schemeClr val="accent1"/>
+    </dgm:linClrLst>
+    <dgm:effectClrLst/>
+    <dgm:txLinClrLst/>
+    <dgm:txFillClrLst meth="repeat">
+      <a:schemeClr val="dk1"/>
+    </dgm:txFillClrLst>
+    <dgm:txEffectClrLst/>
+  </dgm:styleLbl>
+  <dgm:styleLbl name="solidBgAcc1">
+    <dgm:fillClrLst meth="repeat">
+      <a:schemeClr val="lt1"/>
+    </dgm:fillClrLst>
+    <dgm:linClrLst meth="repeat">
+      <a:schemeClr val="accent1"/>
+    </dgm:linClrLst>
+    <dgm:effectClrLst/>
+    <dgm:txLinClrLst/>
+    <dgm:txFillClrLst meth="repeat">
+      <a:schemeClr val="dk1"/>
+    </dgm:txFillClrLst>
+    <dgm:txEffectClrLst/>
+  </dgm:styleLbl>
+  <dgm:styleLbl name="fgAccFollowNode1">
+    <dgm:fillClrLst meth="repeat">
+      <a:schemeClr val="accent1">
+        <a:alpha val="90000"/>
+        <a:tint val="40000"/>
+      </a:schemeClr>
+    </dgm:fillClrLst>
+    <dgm:linClrLst meth="repeat">
+      <a:schemeClr val="accent1">
+        <a:alpha val="90000"/>
+        <a:tint val="40000"/>
+      </a:schemeClr>
+    </dgm:linClrLst>
+    <dgm:effectClrLst/>
+    <dgm:txLinClrLst/>
+    <dgm:txFillClrLst meth="repeat">
+      <a:schemeClr val="dk1"/>
+    </dgm:txFillClrLst>
+    <dgm:txEffectClrLst/>
+  </dgm:styleLbl>
+  <dgm:styleLbl name="alignAccFollowNode1">
+    <dgm:fillClrLst meth="repeat">
+      <a:schemeClr val="accent1">
+        <a:alpha val="90000"/>
+        <a:tint val="40000"/>
+      </a:schemeClr>
+    </dgm:fillClrLst>
+    <dgm:linClrLst meth="repeat">
+      <a:schemeClr val="accent1">
+        <a:alpha val="90000"/>
+        <a:tint val="40000"/>
+      </a:schemeClr>
+    </dgm:linClrLst>
+    <dgm:effectClrLst/>
+    <dgm:txLinClrLst/>
+    <dgm:txFillClrLst meth="repeat">
+      <a:schemeClr val="dk1"/>
+    </dgm:txFillClrLst>
+    <dgm:txEffectClrLst/>
+  </dgm:styleLbl>
+  <dgm:styleLbl name="bgAccFollowNode1">
+    <dgm:fillClrLst meth="repeat">
+      <a:schemeClr val="accent1">
+        <a:alpha val="90000"/>
+        <a:tint val="40000"/>
+      </a:schemeClr>
+    </dgm:fillClrLst>
+    <dgm:linClrLst meth="repeat">
+      <a:schemeClr val="accent1">
+        <a:alpha val="90000"/>
+        <a:tint val="40000"/>
+      </a:schemeClr>
+    </dgm:linClrLst>
+    <dgm:effectClrLst/>
+    <dgm:txLinClrLst/>
+    <dgm:txFillClrLst meth="repeat">
+      <a:schemeClr val="dk1"/>
+    </dgm:txFillClrLst>
+    <dgm:txEffectClrLst/>
+  </dgm:styleLbl>
+  <dgm:styleLbl name="fgAcc0">
+    <dgm:fillClrLst meth="repeat">
+      <a:schemeClr val="lt1">
+        <a:alpha val="90000"/>
+      </a:schemeClr>
+    </dgm:fillClrLst>
+    <dgm:linClrLst meth="repeat">
+      <a:schemeClr val="accent1"/>
+    </dgm:linClrLst>
+    <dgm:effectClrLst/>
+    <dgm:txLinClrLst/>
+    <dgm:txFillClrLst meth="repeat">
+      <a:schemeClr val="dk1"/>
+    </dgm:txFillClrLst>
+    <dgm:txEffectClrLst/>
+  </dgm:styleLbl>
+  <dgm:styleLbl name="fgAcc2">
+    <dgm:fillClrLst meth="repeat">
+      <a:schemeClr val="lt1">
+        <a:alpha val="90000"/>
+      </a:schemeClr>
+    </dgm:fillClrLst>
+    <dgm:linClrLst meth="repeat">
+      <a:schemeClr val="accent1"/>
+    </dgm:linClrLst>
+    <dgm:effectClrLst/>
+    <dgm:txLinClrLst/>
+    <dgm:txFillClrLst meth="repeat">
+      <a:schemeClr val="dk1"/>
+    </dgm:txFillClrLst>
+    <dgm:txEffectClrLst/>
+  </dgm:styleLbl>
+  <dgm:styleLbl name="fgAcc3">
+    <dgm:fillClrLst meth="repeat">
+      <a:schemeClr val="lt1">
+        <a:alpha val="90000"/>
+      </a:schemeClr>
+    </dgm:fillClrLst>
+    <dgm:linClrLst meth="repeat">
+      <a:schemeClr val="accent1"/>
+    </dgm:linClrLst>
+    <dgm:effectClrLst/>
+    <dgm:txLinClrLst/>
+    <dgm:txFillClrLst meth="repeat">
+      <a:schemeClr val="dk1"/>
+    </dgm:txFillClrLst>
+    <dgm:txEffectClrLst/>
+  </dgm:styleLbl>
+  <dgm:styleLbl name="fgAcc4">
+    <dgm:fillClrLst meth="repeat">
+      <a:schemeClr val="lt1">
+        <a:alpha val="90000"/>
+      </a:schemeClr>
+    </dgm:fillClrLst>
+    <dgm:linClrLst meth="repeat">
+      <a:schemeClr val="accent1"/>
+    </dgm:linClrLst>
+    <dgm:effectClrLst/>
+    <dgm:txLinClrLst/>
+    <dgm:txFillClrLst meth="repeat">
+      <a:schemeClr val="dk1"/>
+    </dgm:txFillClrLst>
+    <dgm:txEffectClrLst/>
+  </dgm:styleLbl>
+  <dgm:styleLbl name="bgShp">
+    <dgm:fillClrLst meth="repeat">
+      <a:schemeClr val="accent1">
+        <a:tint val="40000"/>
+      </a:schemeClr>
+    </dgm:fillClrLst>
+    <dgm:linClrLst meth="repeat">
+      <a:schemeClr val="accent1"/>
+    </dgm:linClrLst>
+    <dgm:effectClrLst/>
+    <dgm:txLinClrLst/>
+    <dgm:txFillClrLst meth="repeat">
+      <a:schemeClr val="dk1"/>
+    </dgm:txFillClrLst>
+    <dgm:txEffectClrLst/>
+  </dgm:styleLbl>
+  <dgm:styleLbl name="dkBgShp">
+    <dgm:fillClrLst meth="repeat">
+      <a:schemeClr val="accent1">
+        <a:shade val="80000"/>
+      </a:schemeClr>
+    </dgm:fillClrLst>
+    <dgm:linClrLst meth="repeat">
+      <a:schemeClr val="accent1"/>
+    </dgm:linClrLst>
+    <dgm:effectClrLst/>
+    <dgm:txLinClrLst/>
+    <dgm:txFillClrLst meth="repeat">
+      <a:schemeClr val="lt1"/>
+    </dgm:txFillClrLst>
+    <dgm:txEffectClrLst/>
+  </dgm:styleLbl>
+  <dgm:styleLbl name="trBgShp">
+    <dgm:fillClrLst meth="repeat">
+      <a:schemeClr val="accent1">
+        <a:tint val="50000"/>
+        <a:alpha val="40000"/>
+      </a:schemeClr>
+    </dgm:fillClrLst>
+    <dgm:linClrLst meth="repeat">
+      <a:schemeClr val="accent1"/>
+    </dgm:linClrLst>
+    <dgm:effectClrLst/>
+    <dgm:txLinClrLst/>
+    <dgm:txFillClrLst meth="repeat">
+      <a:schemeClr val="lt1"/>
+    </dgm:txFillClrLst>
+    <dgm:txEffectClrLst/>
+  </dgm:styleLbl>
+  <dgm:styleLbl name="fgShp">
+    <dgm:fillClrLst meth="repeat">
+      <a:schemeClr val="accent1">
+        <a:tint val="60000"/>
+      </a:schemeClr>
+    </dgm:fillClrLst>
+    <dgm:linClrLst meth="repeat">
+      <a:schemeClr val="lt1"/>
+    </dgm:linClrLst>
+    <dgm:effectClrLst/>
+    <dgm:txLinClrLst/>
+    <dgm:txFillClrLst meth="repeat">
+      <a:schemeClr val="dk1"/>
+    </dgm:txFillClrLst>
+    <dgm:txEffectClrLst/>
+  </dgm:styleLbl>
+  <dgm:styleLbl name="revTx">
+    <dgm:fillClrLst meth="repeat">
+      <a:schemeClr val="lt1">
+        <a:alpha val="0"/>
+      </a:schemeClr>
+    </dgm:fillClrLst>
+    <dgm:linClrLst meth="repeat">
+      <a:schemeClr val="dk1">
+        <a:alpha val="0"/>
+      </a:schemeClr>
+    </dgm:linClrLst>
+    <dgm:effectClrLst/>
+    <dgm:txLinClrLst/>
+    <dgm:txFillClrLst meth="repeat">
+      <a:schemeClr val="tx1"/>
+    </dgm:txFillClrLst>
+    <dgm:txEffectClrLst/>
+  </dgm:styleLbl>
+</dgm:colorsDef>
+</file>
+
 <file path=ppt/diagrams/data1.xml><?xml version="1.0" encoding="utf-8"?>
+<dgm:dataModel xmlns:dgm="http://schemas.openxmlformats.org/drawingml/2006/diagram" xmlns:a="http://schemas.openxmlformats.org/drawingml/2006/main">
+  <dgm:ptLst>
+    <dgm:pt modelId="{7737B9D6-AACA-457D-804B-B5BB8751ADA4}" type="doc">
+      <dgm:prSet loTypeId="urn:microsoft.com/office/officeart/2005/8/layout/hierarchy1" loCatId="hierarchy" qsTypeId="urn:microsoft.com/office/officeart/2005/8/quickstyle/simple1" qsCatId="simple" csTypeId="urn:microsoft.com/office/officeart/2005/8/colors/colorful2" csCatId="colorful" phldr="1"/>
+      <dgm:spPr/>
+      <dgm:t>
+        <a:bodyPr/>
+        <a:lstStyle/>
+        <a:p>
+          <a:endParaRPr lang="en-US"/>
+        </a:p>
+      </dgm:t>
+    </dgm:pt>
+    <dgm:pt modelId="{26F5D415-5C4C-42B3-865E-6135BB83A8F5}">
+      <dgm:prSet/>
+      <dgm:spPr/>
+      <dgm:t>
+        <a:bodyPr/>
+        <a:lstStyle/>
+        <a:p>
+          <a:r>
+            <a:rPr lang="en-IN"/>
+            <a:t>To distinguish we need to Compare the Nature of FFTs of given samples with the Test Samples and Identify the Bird</a:t>
+          </a:r>
+          <a:endParaRPr lang="en-US"/>
+        </a:p>
+      </dgm:t>
+    </dgm:pt>
+    <dgm:pt modelId="{1C68AAB3-D8C9-4D11-8A7D-3324FFFA6E8E}" type="parTrans" cxnId="{AD186560-3DD0-44F6-93FB-3F77EC695631}">
+      <dgm:prSet/>
+      <dgm:spPr/>
+      <dgm:t>
+        <a:bodyPr/>
+        <a:lstStyle/>
+        <a:p>
+          <a:endParaRPr lang="en-US"/>
+        </a:p>
+      </dgm:t>
+    </dgm:pt>
+    <dgm:pt modelId="{87E7439A-0200-41CB-98AA-23475948FE9D}" type="sibTrans" cxnId="{AD186560-3DD0-44F6-93FB-3F77EC695631}">
+      <dgm:prSet/>
+      <dgm:spPr/>
+      <dgm:t>
+        <a:bodyPr/>
+        <a:lstStyle/>
+        <a:p>
+          <a:endParaRPr lang="en-US"/>
+        </a:p>
+      </dgm:t>
+    </dgm:pt>
+    <dgm:pt modelId="{00667AD8-0163-442E-8534-B5E91EE367E0}">
+      <dgm:prSet/>
+      <dgm:spPr/>
+      <dgm:t>
+        <a:bodyPr/>
+        <a:lstStyle/>
+        <a:p>
+          <a:r>
+            <a:rPr lang="en-IN" dirty="0"/>
+            <a:t>So by </a:t>
+          </a:r>
+          <a:r>
+            <a:rPr lang="en-IN" dirty="0" err="1"/>
+            <a:t>oberseving</a:t>
+          </a:r>
+          <a:r>
+            <a:rPr lang="en-IN" dirty="0"/>
+            <a:t> the FFTs we can Differentiate them on the basis of Peaks</a:t>
+          </a:r>
+          <a:endParaRPr lang="en-US" dirty="0"/>
+        </a:p>
+      </dgm:t>
+    </dgm:pt>
+    <dgm:pt modelId="{0788FFBD-B275-4738-A3E7-F22643A9486F}" type="parTrans" cxnId="{64DDC248-9A2B-44ED-963A-B8777113C701}">
+      <dgm:prSet/>
+      <dgm:spPr/>
+      <dgm:t>
+        <a:bodyPr/>
+        <a:lstStyle/>
+        <a:p>
+          <a:endParaRPr lang="en-US"/>
+        </a:p>
+      </dgm:t>
+    </dgm:pt>
+    <dgm:pt modelId="{7798BD75-92BD-4327-8590-E0E722D2B8A3}" type="sibTrans" cxnId="{64DDC248-9A2B-44ED-963A-B8777113C701}">
+      <dgm:prSet/>
+      <dgm:spPr/>
+      <dgm:t>
+        <a:bodyPr/>
+        <a:lstStyle/>
+        <a:p>
+          <a:endParaRPr lang="en-US"/>
+        </a:p>
+      </dgm:t>
+    </dgm:pt>
+    <dgm:pt modelId="{0A45A634-24DF-46DE-8FFA-BD5E5665C5AB}">
+      <dgm:prSet/>
+      <dgm:spPr/>
+      <dgm:t>
+        <a:bodyPr/>
+        <a:lstStyle/>
+        <a:p>
+          <a:r>
+            <a:rPr lang="en-IN" dirty="0"/>
+            <a:t>We normalise the FFT magnitude and Analyse no. of peaks above a certain threshold.</a:t>
+          </a:r>
+          <a:endParaRPr lang="en-US" dirty="0"/>
+        </a:p>
+      </dgm:t>
+    </dgm:pt>
+    <dgm:pt modelId="{75B360FC-D112-4DAA-9DF3-5E50C0EC6F20}" type="parTrans" cxnId="{21B6C493-BFDC-414C-8A5A-DAA40E31C744}">
+      <dgm:prSet/>
+      <dgm:spPr/>
+      <dgm:t>
+        <a:bodyPr/>
+        <a:lstStyle/>
+        <a:p>
+          <a:endParaRPr lang="en-US"/>
+        </a:p>
+      </dgm:t>
+    </dgm:pt>
+    <dgm:pt modelId="{8152285F-EC88-404B-8326-585322BAC943}" type="sibTrans" cxnId="{21B6C493-BFDC-414C-8A5A-DAA40E31C744}">
+      <dgm:prSet/>
+      <dgm:spPr/>
+      <dgm:t>
+        <a:bodyPr/>
+        <a:lstStyle/>
+        <a:p>
+          <a:endParaRPr lang="en-US"/>
+        </a:p>
+      </dgm:t>
+    </dgm:pt>
+    <dgm:pt modelId="{689243C9-471E-7244-AF40-67D502E4DFAE}" type="pres">
+      <dgm:prSet presAssocID="{7737B9D6-AACA-457D-804B-B5BB8751ADA4}" presName="hierChild1" presStyleCnt="0">
+        <dgm:presLayoutVars>
+          <dgm:chPref val="1"/>
+          <dgm:dir/>
+          <dgm:animOne val="branch"/>
+          <dgm:animLvl val="lvl"/>
+          <dgm:resizeHandles/>
+        </dgm:presLayoutVars>
+      </dgm:prSet>
+      <dgm:spPr/>
+    </dgm:pt>
+    <dgm:pt modelId="{115DD8DB-D81D-8544-8D19-A6A60E74A7BD}" type="pres">
+      <dgm:prSet presAssocID="{26F5D415-5C4C-42B3-865E-6135BB83A8F5}" presName="hierRoot1" presStyleCnt="0"/>
+      <dgm:spPr/>
+    </dgm:pt>
+    <dgm:pt modelId="{4FF7ED4C-4761-214E-AA5F-B993D1C2D9D9}" type="pres">
+      <dgm:prSet presAssocID="{26F5D415-5C4C-42B3-865E-6135BB83A8F5}" presName="composite" presStyleCnt="0"/>
+      <dgm:spPr/>
+    </dgm:pt>
+    <dgm:pt modelId="{65491A91-67B9-D245-8573-93ECEFF57078}" type="pres">
+      <dgm:prSet presAssocID="{26F5D415-5C4C-42B3-865E-6135BB83A8F5}" presName="background" presStyleLbl="node0" presStyleIdx="0" presStyleCnt="3"/>
+      <dgm:spPr/>
+    </dgm:pt>
+    <dgm:pt modelId="{7517FA45-A598-0A48-BAA4-1D42F26B1AFE}" type="pres">
+      <dgm:prSet presAssocID="{26F5D415-5C4C-42B3-865E-6135BB83A8F5}" presName="text" presStyleLbl="fgAcc0" presStyleIdx="0" presStyleCnt="3">
+        <dgm:presLayoutVars>
+          <dgm:chPref val="3"/>
+        </dgm:presLayoutVars>
+      </dgm:prSet>
+      <dgm:spPr/>
+    </dgm:pt>
+    <dgm:pt modelId="{EB7D77CD-1B71-BD4B-93F4-BE1696872901}" type="pres">
+      <dgm:prSet presAssocID="{26F5D415-5C4C-42B3-865E-6135BB83A8F5}" presName="hierChild2" presStyleCnt="0"/>
+      <dgm:spPr/>
+    </dgm:pt>
+    <dgm:pt modelId="{2E7AC68B-14D5-BA4D-9C0E-0B7A1B62C596}" type="pres">
+      <dgm:prSet presAssocID="{00667AD8-0163-442E-8534-B5E91EE367E0}" presName="hierRoot1" presStyleCnt="0"/>
+      <dgm:spPr/>
+    </dgm:pt>
+    <dgm:pt modelId="{1A981D0D-E460-6F42-A77E-5C865FBBA3E6}" type="pres">
+      <dgm:prSet presAssocID="{00667AD8-0163-442E-8534-B5E91EE367E0}" presName="composite" presStyleCnt="0"/>
+      <dgm:spPr/>
+    </dgm:pt>
+    <dgm:pt modelId="{1C8E5251-56D4-5441-9285-A69E9751F5A4}" type="pres">
+      <dgm:prSet presAssocID="{00667AD8-0163-442E-8534-B5E91EE367E0}" presName="background" presStyleLbl="node0" presStyleIdx="1" presStyleCnt="3"/>
+      <dgm:spPr/>
+    </dgm:pt>
+    <dgm:pt modelId="{2740F2ED-B734-8540-A931-6CFCD044C807}" type="pres">
+      <dgm:prSet presAssocID="{00667AD8-0163-442E-8534-B5E91EE367E0}" presName="text" presStyleLbl="fgAcc0" presStyleIdx="1" presStyleCnt="3">
+        <dgm:presLayoutVars>
+          <dgm:chPref val="3"/>
+        </dgm:presLayoutVars>
+      </dgm:prSet>
+      <dgm:spPr/>
+    </dgm:pt>
+    <dgm:pt modelId="{BBC3A774-847F-0D43-A004-C7912C2617ED}" type="pres">
+      <dgm:prSet presAssocID="{00667AD8-0163-442E-8534-B5E91EE367E0}" presName="hierChild2" presStyleCnt="0"/>
+      <dgm:spPr/>
+    </dgm:pt>
+    <dgm:pt modelId="{E51050A1-B09E-E546-9558-5A6D7ED7DBDA}" type="pres">
+      <dgm:prSet presAssocID="{0A45A634-24DF-46DE-8FFA-BD5E5665C5AB}" presName="hierRoot1" presStyleCnt="0"/>
+      <dgm:spPr/>
+    </dgm:pt>
+    <dgm:pt modelId="{F82E95AD-B35F-EF44-8EE5-86D10537B1A9}" type="pres">
+      <dgm:prSet presAssocID="{0A45A634-24DF-46DE-8FFA-BD5E5665C5AB}" presName="composite" presStyleCnt="0"/>
+      <dgm:spPr/>
+    </dgm:pt>
+    <dgm:pt modelId="{04D58D28-3560-6840-A8F3-DF7110EBFB11}" type="pres">
+      <dgm:prSet presAssocID="{0A45A634-24DF-46DE-8FFA-BD5E5665C5AB}" presName="background" presStyleLbl="node0" presStyleIdx="2" presStyleCnt="3"/>
+      <dgm:spPr/>
+    </dgm:pt>
+    <dgm:pt modelId="{F8DF32E2-D128-F94E-9867-45B0F7EC459B}" type="pres">
+      <dgm:prSet presAssocID="{0A45A634-24DF-46DE-8FFA-BD5E5665C5AB}" presName="text" presStyleLbl="fgAcc0" presStyleIdx="2" presStyleCnt="3">
+        <dgm:presLayoutVars>
+          <dgm:chPref val="3"/>
+        </dgm:presLayoutVars>
+      </dgm:prSet>
+      <dgm:spPr/>
+    </dgm:pt>
+    <dgm:pt modelId="{6881FD12-80B0-6549-8E76-A614C98AE67A}" type="pres">
+      <dgm:prSet presAssocID="{0A45A634-24DF-46DE-8FFA-BD5E5665C5AB}" presName="hierChild2" presStyleCnt="0"/>
+      <dgm:spPr/>
+    </dgm:pt>
+  </dgm:ptLst>
+  <dgm:cxnLst>
+    <dgm:cxn modelId="{858E483F-C45A-FC4F-A6AD-FADA94B6CEBA}" type="presOf" srcId="{26F5D415-5C4C-42B3-865E-6135BB83A8F5}" destId="{7517FA45-A598-0A48-BAA4-1D42F26B1AFE}" srcOrd="0" destOrd="0" presId="urn:microsoft.com/office/officeart/2005/8/layout/hierarchy1"/>
+    <dgm:cxn modelId="{64DDC248-9A2B-44ED-963A-B8777113C701}" srcId="{7737B9D6-AACA-457D-804B-B5BB8751ADA4}" destId="{00667AD8-0163-442E-8534-B5E91EE367E0}" srcOrd="1" destOrd="0" parTransId="{0788FFBD-B275-4738-A3E7-F22643A9486F}" sibTransId="{7798BD75-92BD-4327-8590-E0E722D2B8A3}"/>
+    <dgm:cxn modelId="{AD186560-3DD0-44F6-93FB-3F77EC695631}" srcId="{7737B9D6-AACA-457D-804B-B5BB8751ADA4}" destId="{26F5D415-5C4C-42B3-865E-6135BB83A8F5}" srcOrd="0" destOrd="0" parTransId="{1C68AAB3-D8C9-4D11-8A7D-3324FFFA6E8E}" sibTransId="{87E7439A-0200-41CB-98AA-23475948FE9D}"/>
+    <dgm:cxn modelId="{9D248993-5C1E-D74C-B366-504F7F86D50F}" type="presOf" srcId="{0A45A634-24DF-46DE-8FFA-BD5E5665C5AB}" destId="{F8DF32E2-D128-F94E-9867-45B0F7EC459B}" srcOrd="0" destOrd="0" presId="urn:microsoft.com/office/officeart/2005/8/layout/hierarchy1"/>
+    <dgm:cxn modelId="{21B6C493-BFDC-414C-8A5A-DAA40E31C744}" srcId="{7737B9D6-AACA-457D-804B-B5BB8751ADA4}" destId="{0A45A634-24DF-46DE-8FFA-BD5E5665C5AB}" srcOrd="2" destOrd="0" parTransId="{75B360FC-D112-4DAA-9DF3-5E50C0EC6F20}" sibTransId="{8152285F-EC88-404B-8326-585322BAC943}"/>
+    <dgm:cxn modelId="{07E1CDA0-564F-3E48-A5C3-2B8B918FE82E}" type="presOf" srcId="{7737B9D6-AACA-457D-804B-B5BB8751ADA4}" destId="{689243C9-471E-7244-AF40-67D502E4DFAE}" srcOrd="0" destOrd="0" presId="urn:microsoft.com/office/officeart/2005/8/layout/hierarchy1"/>
+    <dgm:cxn modelId="{D74DCDAA-3374-F046-B680-5BB11D8CDA1C}" type="presOf" srcId="{00667AD8-0163-442E-8534-B5E91EE367E0}" destId="{2740F2ED-B734-8540-A931-6CFCD044C807}" srcOrd="0" destOrd="0" presId="urn:microsoft.com/office/officeart/2005/8/layout/hierarchy1"/>
+    <dgm:cxn modelId="{85562182-8EBE-374C-8917-CBDF00BE73FD}" type="presParOf" srcId="{689243C9-471E-7244-AF40-67D502E4DFAE}" destId="{115DD8DB-D81D-8544-8D19-A6A60E74A7BD}" srcOrd="0" destOrd="0" presId="urn:microsoft.com/office/officeart/2005/8/layout/hierarchy1"/>
+    <dgm:cxn modelId="{7BC46622-F05D-224F-B18C-1A19DE15F34F}" type="presParOf" srcId="{115DD8DB-D81D-8544-8D19-A6A60E74A7BD}" destId="{4FF7ED4C-4761-214E-AA5F-B993D1C2D9D9}" srcOrd="0" destOrd="0" presId="urn:microsoft.com/office/officeart/2005/8/layout/hierarchy1"/>
+    <dgm:cxn modelId="{1C6BF6AF-044E-B145-9D5A-009BA1DDE436}" type="presParOf" srcId="{4FF7ED4C-4761-214E-AA5F-B993D1C2D9D9}" destId="{65491A91-67B9-D245-8573-93ECEFF57078}" srcOrd="0" destOrd="0" presId="urn:microsoft.com/office/officeart/2005/8/layout/hierarchy1"/>
+    <dgm:cxn modelId="{3CE952C5-392B-FF47-9E45-2E35433AB5D6}" type="presParOf" srcId="{4FF7ED4C-4761-214E-AA5F-B993D1C2D9D9}" destId="{7517FA45-A598-0A48-BAA4-1D42F26B1AFE}" srcOrd="1" destOrd="0" presId="urn:microsoft.com/office/officeart/2005/8/layout/hierarchy1"/>
+    <dgm:cxn modelId="{CDECC991-2B5B-8F4A-B67A-57CBC6D24146}" type="presParOf" srcId="{115DD8DB-D81D-8544-8D19-A6A60E74A7BD}" destId="{EB7D77CD-1B71-BD4B-93F4-BE1696872901}" srcOrd="1" destOrd="0" presId="urn:microsoft.com/office/officeart/2005/8/layout/hierarchy1"/>
+    <dgm:cxn modelId="{8F23564A-F0F3-7741-89A5-3FC42CB01E87}" type="presParOf" srcId="{689243C9-471E-7244-AF40-67D502E4DFAE}" destId="{2E7AC68B-14D5-BA4D-9C0E-0B7A1B62C596}" srcOrd="1" destOrd="0" presId="urn:microsoft.com/office/officeart/2005/8/layout/hierarchy1"/>
+    <dgm:cxn modelId="{0A079869-DCBD-1E4A-BC2A-A4DE9466C276}" type="presParOf" srcId="{2E7AC68B-14D5-BA4D-9C0E-0B7A1B62C596}" destId="{1A981D0D-E460-6F42-A77E-5C865FBBA3E6}" srcOrd="0" destOrd="0" presId="urn:microsoft.com/office/officeart/2005/8/layout/hierarchy1"/>
+    <dgm:cxn modelId="{C0618640-7ABB-1649-ACC2-B73A00BA87ED}" type="presParOf" srcId="{1A981D0D-E460-6F42-A77E-5C865FBBA3E6}" destId="{1C8E5251-56D4-5441-9285-A69E9751F5A4}" srcOrd="0" destOrd="0" presId="urn:microsoft.com/office/officeart/2005/8/layout/hierarchy1"/>
+    <dgm:cxn modelId="{9FE643D8-B118-8B4C-9F5E-F85115E60229}" type="presParOf" srcId="{1A981D0D-E460-6F42-A77E-5C865FBBA3E6}" destId="{2740F2ED-B734-8540-A931-6CFCD044C807}" srcOrd="1" destOrd="0" presId="urn:microsoft.com/office/officeart/2005/8/layout/hierarchy1"/>
+    <dgm:cxn modelId="{62F4BD13-0E77-EC47-8F28-E7CF1C32A8A5}" type="presParOf" srcId="{2E7AC68B-14D5-BA4D-9C0E-0B7A1B62C596}" destId="{BBC3A774-847F-0D43-A004-C7912C2617ED}" srcOrd="1" destOrd="0" presId="urn:microsoft.com/office/officeart/2005/8/layout/hierarchy1"/>
+    <dgm:cxn modelId="{3B0428B2-0DB7-894D-AAA1-B026BE8FAA04}" type="presParOf" srcId="{689243C9-471E-7244-AF40-67D502E4DFAE}" destId="{E51050A1-B09E-E546-9558-5A6D7ED7DBDA}" srcOrd="2" destOrd="0" presId="urn:microsoft.com/office/officeart/2005/8/layout/hierarchy1"/>
+    <dgm:cxn modelId="{D70106BA-7018-5743-BBF0-87BCDCA7760F}" type="presParOf" srcId="{E51050A1-B09E-E546-9558-5A6D7ED7DBDA}" destId="{F82E95AD-B35F-EF44-8EE5-86D10537B1A9}" srcOrd="0" destOrd="0" presId="urn:microsoft.com/office/officeart/2005/8/layout/hierarchy1"/>
+    <dgm:cxn modelId="{975FA5CB-53CC-7542-826D-E1792AA9850A}" type="presParOf" srcId="{F82E95AD-B35F-EF44-8EE5-86D10537B1A9}" destId="{04D58D28-3560-6840-A8F3-DF7110EBFB11}" srcOrd="0" destOrd="0" presId="urn:microsoft.com/office/officeart/2005/8/layout/hierarchy1"/>
+    <dgm:cxn modelId="{0202843F-9899-7949-9013-144A29DC86BB}" type="presParOf" srcId="{F82E95AD-B35F-EF44-8EE5-86D10537B1A9}" destId="{F8DF32E2-D128-F94E-9867-45B0F7EC459B}" srcOrd="1" destOrd="0" presId="urn:microsoft.com/office/officeart/2005/8/layout/hierarchy1"/>
+    <dgm:cxn modelId="{A0EF892C-9BAF-A344-B396-05A28C12DAF3}" type="presParOf" srcId="{E51050A1-B09E-E546-9558-5A6D7ED7DBDA}" destId="{6881FD12-80B0-6549-8E76-A614C98AE67A}" srcOrd="1" destOrd="0" presId="urn:microsoft.com/office/officeart/2005/8/layout/hierarchy1"/>
+  </dgm:cxnLst>
+  <dgm:bg/>
+  <dgm:whole/>
+  <dgm:extLst>
+    <a:ext uri="http://schemas.microsoft.com/office/drawing/2008/diagram">
+      <dsp:dataModelExt xmlns:dsp="http://schemas.microsoft.com/office/drawing/2008/diagram" relId="rId6" minVer="http://schemas.openxmlformats.org/drawingml/2006/diagram"/>
+    </a:ext>
+  </dgm:extLst>
+</dgm:dataModel>
+</file>
+
+<file path=ppt/diagrams/data2.xml><?xml version="1.0" encoding="utf-8"?>
 <dgm:dataModel xmlns:dgm="http://schemas.openxmlformats.org/drawingml/2006/diagram" xmlns:a="http://schemas.openxmlformats.org/drawingml/2006/main">
   <dgm:ptLst>
     <dgm:pt modelId="{27AFC76D-62C0-4093-A4AA-3BFBA5CC1E5D}" type="doc">
@@ -1153,7 +2942,637 @@
 </dgm:dataModel>
 </file>
 
+<file path=ppt/diagrams/data3.xml><?xml version="1.0" encoding="utf-8"?>
+<dgm:dataModel xmlns:dgm="http://schemas.openxmlformats.org/drawingml/2006/diagram" xmlns:a="http://schemas.openxmlformats.org/drawingml/2006/main">
+  <dgm:ptLst>
+    <dgm:pt modelId="{1A911FBE-9376-4313-8DC8-D2B0033400F6}" type="doc">
+      <dgm:prSet loTypeId="urn:microsoft.com/office/officeart/2018/2/layout/IconLabelList" loCatId="icon" qsTypeId="urn:microsoft.com/office/officeart/2005/8/quickstyle/simple1" qsCatId="simple" csTypeId="urn:microsoft.com/office/officeart/2005/8/colors/accent1_2" csCatId="accent1" phldr="1"/>
+      <dgm:spPr/>
+      <dgm:t>
+        <a:bodyPr/>
+        <a:lstStyle/>
+        <a:p>
+          <a:endParaRPr lang="en-US"/>
+        </a:p>
+      </dgm:t>
+    </dgm:pt>
+    <dgm:pt modelId="{1E36E705-FD2D-47C2-A30B-9F0DF4CD5E38}">
+      <dgm:prSet/>
+      <dgm:spPr/>
+      <dgm:t>
+        <a:bodyPr/>
+        <a:lstStyle/>
+        <a:p>
+          <a:pPr>
+            <a:lnSpc>
+              <a:spcPct val="100000"/>
+            </a:lnSpc>
+          </a:pPr>
+          <a:r>
+            <a:rPr lang="en-US"/>
+            <a:t>For Task-1, we are finding the louder words in the given audio samples using the start and end times.</a:t>
+          </a:r>
+        </a:p>
+      </dgm:t>
+    </dgm:pt>
+    <dgm:pt modelId="{2B590D55-D98E-46CE-A8D4-1A88A1E3F6D3}" type="parTrans" cxnId="{0EFD15F4-DFAC-4CB4-9510-19C502E1229D}">
+      <dgm:prSet/>
+      <dgm:spPr/>
+      <dgm:t>
+        <a:bodyPr/>
+        <a:lstStyle/>
+        <a:p>
+          <a:endParaRPr lang="en-US"/>
+        </a:p>
+      </dgm:t>
+    </dgm:pt>
+    <dgm:pt modelId="{CEFB9F7C-7934-4F64-AC60-3FC02D0F0F57}" type="sibTrans" cxnId="{0EFD15F4-DFAC-4CB4-9510-19C502E1229D}">
+      <dgm:prSet/>
+      <dgm:spPr/>
+      <dgm:t>
+        <a:bodyPr/>
+        <a:lstStyle/>
+        <a:p>
+          <a:endParaRPr lang="en-US"/>
+        </a:p>
+      </dgm:t>
+    </dgm:pt>
+    <dgm:pt modelId="{D1BD9F43-EE9B-492D-8735-6B11D569AE9E}">
+      <dgm:prSet/>
+      <dgm:spPr/>
+      <dgm:t>
+        <a:bodyPr/>
+        <a:lstStyle/>
+        <a:p>
+          <a:pPr>
+            <a:lnSpc>
+              <a:spcPct val="100000"/>
+            </a:lnSpc>
+          </a:pPr>
+          <a:r>
+            <a:rPr lang="en-US"/>
+            <a:t>For Task-2, we are finding the louder words in the given audio samples without using the start and end times. </a:t>
+          </a:r>
+        </a:p>
+      </dgm:t>
+    </dgm:pt>
+    <dgm:pt modelId="{A23EF9DE-A81D-441A-9271-CF08C8E9B21E}" type="parTrans" cxnId="{8E60851F-7721-46BF-A386-422CA4F62ED5}">
+      <dgm:prSet/>
+      <dgm:spPr/>
+      <dgm:t>
+        <a:bodyPr/>
+        <a:lstStyle/>
+        <a:p>
+          <a:endParaRPr lang="en-US"/>
+        </a:p>
+      </dgm:t>
+    </dgm:pt>
+    <dgm:pt modelId="{9A7F620F-FAB8-4F3B-A4F6-2F2735A60E53}" type="sibTrans" cxnId="{8E60851F-7721-46BF-A386-422CA4F62ED5}">
+      <dgm:prSet/>
+      <dgm:spPr/>
+      <dgm:t>
+        <a:bodyPr/>
+        <a:lstStyle/>
+        <a:p>
+          <a:endParaRPr lang="en-US"/>
+        </a:p>
+      </dgm:t>
+    </dgm:pt>
+    <dgm:pt modelId="{1C54EB0C-28D6-4032-AC81-6D32F5113B58}" type="pres">
+      <dgm:prSet presAssocID="{1A911FBE-9376-4313-8DC8-D2B0033400F6}" presName="root" presStyleCnt="0">
+        <dgm:presLayoutVars>
+          <dgm:dir/>
+          <dgm:resizeHandles val="exact"/>
+        </dgm:presLayoutVars>
+      </dgm:prSet>
+      <dgm:spPr/>
+    </dgm:pt>
+    <dgm:pt modelId="{1B98C7D0-552C-4EA9-BFE2-95A317984690}" type="pres">
+      <dgm:prSet presAssocID="{1E36E705-FD2D-47C2-A30B-9F0DF4CD5E38}" presName="compNode" presStyleCnt="0"/>
+      <dgm:spPr/>
+    </dgm:pt>
+    <dgm:pt modelId="{91D7CE65-6E24-4EDD-BB71-D50EA8C7AF66}" type="pres">
+      <dgm:prSet presAssocID="{1E36E705-FD2D-47C2-A30B-9F0DF4CD5E38}" presName="iconRect" presStyleLbl="node1" presStyleIdx="0" presStyleCnt="2"/>
+      <dgm:spPr>
+        <a:blipFill>
+          <a:blip xmlns:r="http://schemas.openxmlformats.org/officeDocument/2006/relationships" r:embed="rId1">
+            <a:extLst>
+              <a:ext uri="{28A0092B-C50C-407E-A947-70E740481C1C}">
+                <a14:useLocalDpi xmlns:a14="http://schemas.microsoft.com/office/drawing/2010/main" val="0"/>
+              </a:ext>
+              <a:ext uri="{96DAC541-7B7A-43D3-8B79-37D633B846F1}">
+                <asvg:svgBlip xmlns:asvg="http://schemas.microsoft.com/office/drawing/2016/SVG/main" r:embed="rId2"/>
+              </a:ext>
+            </a:extLst>
+          </a:blip>
+          <a:stretch>
+            <a:fillRect/>
+          </a:stretch>
+        </a:blipFill>
+      </dgm:spPr>
+      <dgm:extLst>
+        <a:ext uri="{E40237B7-FDA0-4F09-8148-C483321AD2D9}">
+          <dgm14:cNvPr xmlns:dgm14="http://schemas.microsoft.com/office/drawing/2010/diagram" id="0" name="" descr="Podcast"/>
+        </a:ext>
+      </dgm:extLst>
+    </dgm:pt>
+    <dgm:pt modelId="{C2012510-05D8-4077-81CD-02DFE011B3EF}" type="pres">
+      <dgm:prSet presAssocID="{1E36E705-FD2D-47C2-A30B-9F0DF4CD5E38}" presName="spaceRect" presStyleCnt="0"/>
+      <dgm:spPr/>
+    </dgm:pt>
+    <dgm:pt modelId="{EA2AB186-BCAB-46AF-B7E0-06CEFC35B7C8}" type="pres">
+      <dgm:prSet presAssocID="{1E36E705-FD2D-47C2-A30B-9F0DF4CD5E38}" presName="textRect" presStyleLbl="revTx" presStyleIdx="0" presStyleCnt="2">
+        <dgm:presLayoutVars>
+          <dgm:chMax val="1"/>
+          <dgm:chPref val="1"/>
+        </dgm:presLayoutVars>
+      </dgm:prSet>
+      <dgm:spPr/>
+    </dgm:pt>
+    <dgm:pt modelId="{9F63364E-5376-4DB1-A401-2CA9CD5344D2}" type="pres">
+      <dgm:prSet presAssocID="{CEFB9F7C-7934-4F64-AC60-3FC02D0F0F57}" presName="sibTrans" presStyleCnt="0"/>
+      <dgm:spPr/>
+    </dgm:pt>
+    <dgm:pt modelId="{B6BE4922-F361-4852-A498-C66BEA2F47A6}" type="pres">
+      <dgm:prSet presAssocID="{D1BD9F43-EE9B-492D-8735-6B11D569AE9E}" presName="compNode" presStyleCnt="0"/>
+      <dgm:spPr/>
+    </dgm:pt>
+    <dgm:pt modelId="{A6D2A9D8-BBDA-4419-8A61-56A0D9ADAF6B}" type="pres">
+      <dgm:prSet presAssocID="{D1BD9F43-EE9B-492D-8735-6B11D569AE9E}" presName="iconRect" presStyleLbl="node1" presStyleIdx="1" presStyleCnt="2"/>
+      <dgm:spPr>
+        <a:blipFill>
+          <a:blip xmlns:r="http://schemas.openxmlformats.org/officeDocument/2006/relationships" r:embed="rId3">
+            <a:extLst>
+              <a:ext uri="{28A0092B-C50C-407E-A947-70E740481C1C}">
+                <a14:useLocalDpi xmlns:a14="http://schemas.microsoft.com/office/drawing/2010/main" val="0"/>
+              </a:ext>
+              <a:ext uri="{96DAC541-7B7A-43D3-8B79-37D633B846F1}">
+                <asvg:svgBlip xmlns:asvg="http://schemas.microsoft.com/office/drawing/2016/SVG/main" r:embed="rId4"/>
+              </a:ext>
+            </a:extLst>
+          </a:blip>
+          <a:stretch>
+            <a:fillRect/>
+          </a:stretch>
+        </a:blipFill>
+      </dgm:spPr>
+      <dgm:extLst>
+        <a:ext uri="{E40237B7-FDA0-4F09-8148-C483321AD2D9}">
+          <dgm14:cNvPr xmlns:dgm14="http://schemas.microsoft.com/office/drawing/2010/diagram" id="0" name="" descr="DJ"/>
+        </a:ext>
+      </dgm:extLst>
+    </dgm:pt>
+    <dgm:pt modelId="{4F32478D-E727-49EC-8689-616CD45137F5}" type="pres">
+      <dgm:prSet presAssocID="{D1BD9F43-EE9B-492D-8735-6B11D569AE9E}" presName="spaceRect" presStyleCnt="0"/>
+      <dgm:spPr/>
+    </dgm:pt>
+    <dgm:pt modelId="{768343F6-2DE3-4212-8CAF-B3C057BCD0FC}" type="pres">
+      <dgm:prSet presAssocID="{D1BD9F43-EE9B-492D-8735-6B11D569AE9E}" presName="textRect" presStyleLbl="revTx" presStyleIdx="1" presStyleCnt="2">
+        <dgm:presLayoutVars>
+          <dgm:chMax val="1"/>
+          <dgm:chPref val="1"/>
+        </dgm:presLayoutVars>
+      </dgm:prSet>
+      <dgm:spPr/>
+    </dgm:pt>
+  </dgm:ptLst>
+  <dgm:cxnLst>
+    <dgm:cxn modelId="{8E60851F-7721-46BF-A386-422CA4F62ED5}" srcId="{1A911FBE-9376-4313-8DC8-D2B0033400F6}" destId="{D1BD9F43-EE9B-492D-8735-6B11D569AE9E}" srcOrd="1" destOrd="0" parTransId="{A23EF9DE-A81D-441A-9271-CF08C8E9B21E}" sibTransId="{9A7F620F-FAB8-4F3B-A4F6-2F2735A60E53}"/>
+    <dgm:cxn modelId="{06295E90-B162-4102-93B6-31BEC8BB0279}" type="presOf" srcId="{1A911FBE-9376-4313-8DC8-D2B0033400F6}" destId="{1C54EB0C-28D6-4032-AC81-6D32F5113B58}" srcOrd="0" destOrd="0" presId="urn:microsoft.com/office/officeart/2018/2/layout/IconLabelList"/>
+    <dgm:cxn modelId="{4A993499-63E9-45D9-AEA4-5933A9F909B6}" type="presOf" srcId="{1E36E705-FD2D-47C2-A30B-9F0DF4CD5E38}" destId="{EA2AB186-BCAB-46AF-B7E0-06CEFC35B7C8}" srcOrd="0" destOrd="0" presId="urn:microsoft.com/office/officeart/2018/2/layout/IconLabelList"/>
+    <dgm:cxn modelId="{D62525E6-45C8-443B-800D-DF27A01A7956}" type="presOf" srcId="{D1BD9F43-EE9B-492D-8735-6B11D569AE9E}" destId="{768343F6-2DE3-4212-8CAF-B3C057BCD0FC}" srcOrd="0" destOrd="0" presId="urn:microsoft.com/office/officeart/2018/2/layout/IconLabelList"/>
+    <dgm:cxn modelId="{0EFD15F4-DFAC-4CB4-9510-19C502E1229D}" srcId="{1A911FBE-9376-4313-8DC8-D2B0033400F6}" destId="{1E36E705-FD2D-47C2-A30B-9F0DF4CD5E38}" srcOrd="0" destOrd="0" parTransId="{2B590D55-D98E-46CE-A8D4-1A88A1E3F6D3}" sibTransId="{CEFB9F7C-7934-4F64-AC60-3FC02D0F0F57}"/>
+    <dgm:cxn modelId="{E40C206E-A7D7-4CBC-9519-72CD9BEE853A}" type="presParOf" srcId="{1C54EB0C-28D6-4032-AC81-6D32F5113B58}" destId="{1B98C7D0-552C-4EA9-BFE2-95A317984690}" srcOrd="0" destOrd="0" presId="urn:microsoft.com/office/officeart/2018/2/layout/IconLabelList"/>
+    <dgm:cxn modelId="{3F402C3E-E3CB-45B7-89F9-83D6FC9437B7}" type="presParOf" srcId="{1B98C7D0-552C-4EA9-BFE2-95A317984690}" destId="{91D7CE65-6E24-4EDD-BB71-D50EA8C7AF66}" srcOrd="0" destOrd="0" presId="urn:microsoft.com/office/officeart/2018/2/layout/IconLabelList"/>
+    <dgm:cxn modelId="{10607955-50F0-45FB-AA56-04C280811270}" type="presParOf" srcId="{1B98C7D0-552C-4EA9-BFE2-95A317984690}" destId="{C2012510-05D8-4077-81CD-02DFE011B3EF}" srcOrd="1" destOrd="0" presId="urn:microsoft.com/office/officeart/2018/2/layout/IconLabelList"/>
+    <dgm:cxn modelId="{87F57764-F98E-42D5-821D-65AD8E372151}" type="presParOf" srcId="{1B98C7D0-552C-4EA9-BFE2-95A317984690}" destId="{EA2AB186-BCAB-46AF-B7E0-06CEFC35B7C8}" srcOrd="2" destOrd="0" presId="urn:microsoft.com/office/officeart/2018/2/layout/IconLabelList"/>
+    <dgm:cxn modelId="{72FEF9AD-B246-4053-BB83-CC368CAD5945}" type="presParOf" srcId="{1C54EB0C-28D6-4032-AC81-6D32F5113B58}" destId="{9F63364E-5376-4DB1-A401-2CA9CD5344D2}" srcOrd="1" destOrd="0" presId="urn:microsoft.com/office/officeart/2018/2/layout/IconLabelList"/>
+    <dgm:cxn modelId="{124CBC1D-338E-4868-8789-C91EE2725326}" type="presParOf" srcId="{1C54EB0C-28D6-4032-AC81-6D32F5113B58}" destId="{B6BE4922-F361-4852-A498-C66BEA2F47A6}" srcOrd="2" destOrd="0" presId="urn:microsoft.com/office/officeart/2018/2/layout/IconLabelList"/>
+    <dgm:cxn modelId="{D64636D9-7FA8-4C92-9DAC-705B4DF41CD3}" type="presParOf" srcId="{B6BE4922-F361-4852-A498-C66BEA2F47A6}" destId="{A6D2A9D8-BBDA-4419-8A61-56A0D9ADAF6B}" srcOrd="0" destOrd="0" presId="urn:microsoft.com/office/officeart/2018/2/layout/IconLabelList"/>
+    <dgm:cxn modelId="{7FDDF1E6-88E1-42BD-8300-6F5C4B8E6F6F}" type="presParOf" srcId="{B6BE4922-F361-4852-A498-C66BEA2F47A6}" destId="{4F32478D-E727-49EC-8689-616CD45137F5}" srcOrd="1" destOrd="0" presId="urn:microsoft.com/office/officeart/2018/2/layout/IconLabelList"/>
+    <dgm:cxn modelId="{CCF0B5C2-849E-4D72-A6C2-E1CE246A8A87}" type="presParOf" srcId="{B6BE4922-F361-4852-A498-C66BEA2F47A6}" destId="{768343F6-2DE3-4212-8CAF-B3C057BCD0FC}" srcOrd="2" destOrd="0" presId="urn:microsoft.com/office/officeart/2018/2/layout/IconLabelList"/>
+  </dgm:cxnLst>
+  <dgm:bg/>
+  <dgm:whole/>
+  <dgm:extLst>
+    <a:ext uri="http://schemas.microsoft.com/office/drawing/2008/diagram">
+      <dsp:dataModelExt xmlns:dsp="http://schemas.microsoft.com/office/drawing/2008/diagram" relId="rId6" minVer="http://schemas.openxmlformats.org/drawingml/2006/diagram"/>
+    </a:ext>
+  </dgm:extLst>
+</dgm:dataModel>
+</file>
+
 <file path=ppt/diagrams/drawing1.xml><?xml version="1.0" encoding="utf-8"?>
+<dsp:drawing xmlns:dgm="http://schemas.openxmlformats.org/drawingml/2006/diagram" xmlns:dsp="http://schemas.microsoft.com/office/drawing/2008/diagram" xmlns:a="http://schemas.openxmlformats.org/drawingml/2006/main">
+  <dsp:spTree>
+    <dsp:nvGrpSpPr>
+      <dsp:cNvPr id="0" name=""/>
+      <dsp:cNvGrpSpPr/>
+    </dsp:nvGrpSpPr>
+    <dsp:grpSpPr/>
+    <dsp:sp modelId="{65491A91-67B9-D245-8573-93ECEFF57078}">
+      <dsp:nvSpPr>
+        <dsp:cNvPr id="0" name=""/>
+        <dsp:cNvSpPr/>
+      </dsp:nvSpPr>
+      <dsp:spPr>
+        <a:xfrm>
+          <a:off x="0" y="485224"/>
+          <a:ext cx="2886075" cy="1832657"/>
+        </a:xfrm>
+        <a:prstGeom prst="roundRect">
+          <a:avLst>
+            <a:gd name="adj" fmla="val 10000"/>
+          </a:avLst>
+        </a:prstGeom>
+        <a:solidFill>
+          <a:schemeClr val="accent1">
+            <a:hueOff val="0"/>
+            <a:satOff val="0"/>
+            <a:lumOff val="0"/>
+            <a:alphaOff val="0"/>
+          </a:schemeClr>
+        </a:solidFill>
+        <a:ln w="12700" cap="flat" cmpd="sng" algn="ctr">
+          <a:solidFill>
+            <a:schemeClr val="lt1">
+              <a:hueOff val="0"/>
+              <a:satOff val="0"/>
+              <a:lumOff val="0"/>
+              <a:alphaOff val="0"/>
+            </a:schemeClr>
+          </a:solidFill>
+          <a:prstDash val="solid"/>
+        </a:ln>
+        <a:effectLst/>
+      </dsp:spPr>
+      <dsp:style>
+        <a:lnRef idx="2">
+          <a:scrgbClr r="0" g="0" b="0"/>
+        </a:lnRef>
+        <a:fillRef idx="1">
+          <a:scrgbClr r="0" g="0" b="0"/>
+        </a:fillRef>
+        <a:effectRef idx="0">
+          <a:scrgbClr r="0" g="0" b="0"/>
+        </a:effectRef>
+        <a:fontRef idx="minor">
+          <a:schemeClr val="lt1"/>
+        </a:fontRef>
+      </dsp:style>
+    </dsp:sp>
+    <dsp:sp modelId="{7517FA45-A598-0A48-BAA4-1D42F26B1AFE}">
+      <dsp:nvSpPr>
+        <dsp:cNvPr id="0" name=""/>
+        <dsp:cNvSpPr/>
+      </dsp:nvSpPr>
+      <dsp:spPr>
+        <a:xfrm>
+          <a:off x="320675" y="789865"/>
+          <a:ext cx="2886075" cy="1832657"/>
+        </a:xfrm>
+        <a:prstGeom prst="roundRect">
+          <a:avLst>
+            <a:gd name="adj" fmla="val 10000"/>
+          </a:avLst>
+        </a:prstGeom>
+        <a:solidFill>
+          <a:schemeClr val="lt1">
+            <a:alpha val="90000"/>
+            <a:hueOff val="0"/>
+            <a:satOff val="0"/>
+            <a:lumOff val="0"/>
+            <a:alphaOff val="0"/>
+          </a:schemeClr>
+        </a:solidFill>
+        <a:ln w="12700" cap="flat" cmpd="sng" algn="ctr">
+          <a:solidFill>
+            <a:schemeClr val="accent1">
+              <a:hueOff val="0"/>
+              <a:satOff val="0"/>
+              <a:lumOff val="0"/>
+              <a:alphaOff val="0"/>
+            </a:schemeClr>
+          </a:solidFill>
+          <a:prstDash val="solid"/>
+        </a:ln>
+        <a:effectLst/>
+      </dsp:spPr>
+      <dsp:style>
+        <a:lnRef idx="2">
+          <a:scrgbClr r="0" g="0" b="0"/>
+        </a:lnRef>
+        <a:fillRef idx="1">
+          <a:scrgbClr r="0" g="0" b="0"/>
+        </a:fillRef>
+        <a:effectRef idx="0">
+          <a:scrgbClr r="0" g="0" b="0"/>
+        </a:effectRef>
+        <a:fontRef idx="minor"/>
+      </dsp:style>
+      <dsp:txBody>
+        <a:bodyPr spcFirstLastPara="0" vert="horz" wrap="square" lIns="76200" tIns="76200" rIns="76200" bIns="76200" numCol="1" spcCol="1270" anchor="ctr" anchorCtr="0">
+          <a:noAutofit/>
+        </a:bodyPr>
+        <a:lstStyle/>
+        <a:p>
+          <a:pPr marL="0" lvl="0" indent="0" algn="ctr" defTabSz="889000">
+            <a:lnSpc>
+              <a:spcPct val="90000"/>
+            </a:lnSpc>
+            <a:spcBef>
+              <a:spcPct val="0"/>
+            </a:spcBef>
+            <a:spcAft>
+              <a:spcPct val="35000"/>
+            </a:spcAft>
+            <a:buNone/>
+          </a:pPr>
+          <a:r>
+            <a:rPr lang="en-IN" sz="2000" kern="1200"/>
+            <a:t>To distinguish we need to Compare the Nature of FFTs of given samples with the Test Samples and Identify the Bird</a:t>
+          </a:r>
+          <a:endParaRPr lang="en-US" sz="2000" kern="1200"/>
+        </a:p>
+      </dsp:txBody>
+      <dsp:txXfrm>
+        <a:off x="374352" y="843542"/>
+        <a:ext cx="2778721" cy="1725303"/>
+      </dsp:txXfrm>
+    </dsp:sp>
+    <dsp:sp modelId="{1C8E5251-56D4-5441-9285-A69E9751F5A4}">
+      <dsp:nvSpPr>
+        <dsp:cNvPr id="0" name=""/>
+        <dsp:cNvSpPr/>
+      </dsp:nvSpPr>
+      <dsp:spPr>
+        <a:xfrm>
+          <a:off x="3527425" y="485224"/>
+          <a:ext cx="2886075" cy="1832657"/>
+        </a:xfrm>
+        <a:prstGeom prst="roundRect">
+          <a:avLst>
+            <a:gd name="adj" fmla="val 10000"/>
+          </a:avLst>
+        </a:prstGeom>
+        <a:solidFill>
+          <a:schemeClr val="accent1">
+            <a:hueOff val="0"/>
+            <a:satOff val="0"/>
+            <a:lumOff val="0"/>
+            <a:alphaOff val="0"/>
+          </a:schemeClr>
+        </a:solidFill>
+        <a:ln w="12700" cap="flat" cmpd="sng" algn="ctr">
+          <a:solidFill>
+            <a:schemeClr val="lt1">
+              <a:hueOff val="0"/>
+              <a:satOff val="0"/>
+              <a:lumOff val="0"/>
+              <a:alphaOff val="0"/>
+            </a:schemeClr>
+          </a:solidFill>
+          <a:prstDash val="solid"/>
+        </a:ln>
+        <a:effectLst/>
+      </dsp:spPr>
+      <dsp:style>
+        <a:lnRef idx="2">
+          <a:scrgbClr r="0" g="0" b="0"/>
+        </a:lnRef>
+        <a:fillRef idx="1">
+          <a:scrgbClr r="0" g="0" b="0"/>
+        </a:fillRef>
+        <a:effectRef idx="0">
+          <a:scrgbClr r="0" g="0" b="0"/>
+        </a:effectRef>
+        <a:fontRef idx="minor">
+          <a:schemeClr val="lt1"/>
+        </a:fontRef>
+      </dsp:style>
+    </dsp:sp>
+    <dsp:sp modelId="{2740F2ED-B734-8540-A931-6CFCD044C807}">
+      <dsp:nvSpPr>
+        <dsp:cNvPr id="0" name=""/>
+        <dsp:cNvSpPr/>
+      </dsp:nvSpPr>
+      <dsp:spPr>
+        <a:xfrm>
+          <a:off x="3848099" y="789865"/>
+          <a:ext cx="2886075" cy="1832657"/>
+        </a:xfrm>
+        <a:prstGeom prst="roundRect">
+          <a:avLst>
+            <a:gd name="adj" fmla="val 10000"/>
+          </a:avLst>
+        </a:prstGeom>
+        <a:solidFill>
+          <a:schemeClr val="lt1">
+            <a:alpha val="90000"/>
+            <a:hueOff val="0"/>
+            <a:satOff val="0"/>
+            <a:lumOff val="0"/>
+            <a:alphaOff val="0"/>
+          </a:schemeClr>
+        </a:solidFill>
+        <a:ln w="12700" cap="flat" cmpd="sng" algn="ctr">
+          <a:solidFill>
+            <a:schemeClr val="accent1">
+              <a:hueOff val="0"/>
+              <a:satOff val="0"/>
+              <a:lumOff val="0"/>
+              <a:alphaOff val="0"/>
+            </a:schemeClr>
+          </a:solidFill>
+          <a:prstDash val="solid"/>
+        </a:ln>
+        <a:effectLst/>
+      </dsp:spPr>
+      <dsp:style>
+        <a:lnRef idx="2">
+          <a:scrgbClr r="0" g="0" b="0"/>
+        </a:lnRef>
+        <a:fillRef idx="1">
+          <a:scrgbClr r="0" g="0" b="0"/>
+        </a:fillRef>
+        <a:effectRef idx="0">
+          <a:scrgbClr r="0" g="0" b="0"/>
+        </a:effectRef>
+        <a:fontRef idx="minor"/>
+      </dsp:style>
+      <dsp:txBody>
+        <a:bodyPr spcFirstLastPara="0" vert="horz" wrap="square" lIns="76200" tIns="76200" rIns="76200" bIns="76200" numCol="1" spcCol="1270" anchor="ctr" anchorCtr="0">
+          <a:noAutofit/>
+        </a:bodyPr>
+        <a:lstStyle/>
+        <a:p>
+          <a:pPr marL="0" lvl="0" indent="0" algn="ctr" defTabSz="889000">
+            <a:lnSpc>
+              <a:spcPct val="90000"/>
+            </a:lnSpc>
+            <a:spcBef>
+              <a:spcPct val="0"/>
+            </a:spcBef>
+            <a:spcAft>
+              <a:spcPct val="35000"/>
+            </a:spcAft>
+            <a:buNone/>
+          </a:pPr>
+          <a:r>
+            <a:rPr lang="en-IN" sz="2000" kern="1200" dirty="0"/>
+            <a:t>So by </a:t>
+          </a:r>
+          <a:r>
+            <a:rPr lang="en-IN" sz="2000" kern="1200" dirty="0" err="1"/>
+            <a:t>oberseving</a:t>
+          </a:r>
+          <a:r>
+            <a:rPr lang="en-IN" sz="2000" kern="1200" dirty="0"/>
+            <a:t> the FFTs we can Differentiate them on the basis of Peaks</a:t>
+          </a:r>
+          <a:endParaRPr lang="en-US" sz="2000" kern="1200" dirty="0"/>
+        </a:p>
+      </dsp:txBody>
+      <dsp:txXfrm>
+        <a:off x="3901776" y="843542"/>
+        <a:ext cx="2778721" cy="1725303"/>
+      </dsp:txXfrm>
+    </dsp:sp>
+    <dsp:sp modelId="{04D58D28-3560-6840-A8F3-DF7110EBFB11}">
+      <dsp:nvSpPr>
+        <dsp:cNvPr id="0" name=""/>
+        <dsp:cNvSpPr/>
+      </dsp:nvSpPr>
+      <dsp:spPr>
+        <a:xfrm>
+          <a:off x="7054850" y="485224"/>
+          <a:ext cx="2886075" cy="1832657"/>
+        </a:xfrm>
+        <a:prstGeom prst="roundRect">
+          <a:avLst>
+            <a:gd name="adj" fmla="val 10000"/>
+          </a:avLst>
+        </a:prstGeom>
+        <a:solidFill>
+          <a:schemeClr val="accent1">
+            <a:hueOff val="0"/>
+            <a:satOff val="0"/>
+            <a:lumOff val="0"/>
+            <a:alphaOff val="0"/>
+          </a:schemeClr>
+        </a:solidFill>
+        <a:ln w="12700" cap="flat" cmpd="sng" algn="ctr">
+          <a:solidFill>
+            <a:schemeClr val="lt1">
+              <a:hueOff val="0"/>
+              <a:satOff val="0"/>
+              <a:lumOff val="0"/>
+              <a:alphaOff val="0"/>
+            </a:schemeClr>
+          </a:solidFill>
+          <a:prstDash val="solid"/>
+        </a:ln>
+        <a:effectLst/>
+      </dsp:spPr>
+      <dsp:style>
+        <a:lnRef idx="2">
+          <a:scrgbClr r="0" g="0" b="0"/>
+        </a:lnRef>
+        <a:fillRef idx="1">
+          <a:scrgbClr r="0" g="0" b="0"/>
+        </a:fillRef>
+        <a:effectRef idx="0">
+          <a:scrgbClr r="0" g="0" b="0"/>
+        </a:effectRef>
+        <a:fontRef idx="minor">
+          <a:schemeClr val="lt1"/>
+        </a:fontRef>
+      </dsp:style>
+    </dsp:sp>
+    <dsp:sp modelId="{F8DF32E2-D128-F94E-9867-45B0F7EC459B}">
+      <dsp:nvSpPr>
+        <dsp:cNvPr id="0" name=""/>
+        <dsp:cNvSpPr/>
+      </dsp:nvSpPr>
+      <dsp:spPr>
+        <a:xfrm>
+          <a:off x="7375524" y="789865"/>
+          <a:ext cx="2886075" cy="1832657"/>
+        </a:xfrm>
+        <a:prstGeom prst="roundRect">
+          <a:avLst>
+            <a:gd name="adj" fmla="val 10000"/>
+          </a:avLst>
+        </a:prstGeom>
+        <a:solidFill>
+          <a:schemeClr val="lt1">
+            <a:alpha val="90000"/>
+            <a:hueOff val="0"/>
+            <a:satOff val="0"/>
+            <a:lumOff val="0"/>
+            <a:alphaOff val="0"/>
+          </a:schemeClr>
+        </a:solidFill>
+        <a:ln w="12700" cap="flat" cmpd="sng" algn="ctr">
+          <a:solidFill>
+            <a:schemeClr val="accent1">
+              <a:hueOff val="0"/>
+              <a:satOff val="0"/>
+              <a:lumOff val="0"/>
+              <a:alphaOff val="0"/>
+            </a:schemeClr>
+          </a:solidFill>
+          <a:prstDash val="solid"/>
+        </a:ln>
+        <a:effectLst/>
+      </dsp:spPr>
+      <dsp:style>
+        <a:lnRef idx="2">
+          <a:scrgbClr r="0" g="0" b="0"/>
+        </a:lnRef>
+        <a:fillRef idx="1">
+          <a:scrgbClr r="0" g="0" b="0"/>
+        </a:fillRef>
+        <a:effectRef idx="0">
+          <a:scrgbClr r="0" g="0" b="0"/>
+        </a:effectRef>
+        <a:fontRef idx="minor"/>
+      </dsp:style>
+      <dsp:txBody>
+        <a:bodyPr spcFirstLastPara="0" vert="horz" wrap="square" lIns="76200" tIns="76200" rIns="76200" bIns="76200" numCol="1" spcCol="1270" anchor="ctr" anchorCtr="0">
+          <a:noAutofit/>
+        </a:bodyPr>
+        <a:lstStyle/>
+        <a:p>
+          <a:pPr marL="0" lvl="0" indent="0" algn="ctr" defTabSz="889000">
+            <a:lnSpc>
+              <a:spcPct val="90000"/>
+            </a:lnSpc>
+            <a:spcBef>
+              <a:spcPct val="0"/>
+            </a:spcBef>
+            <a:spcAft>
+              <a:spcPct val="35000"/>
+            </a:spcAft>
+            <a:buNone/>
+          </a:pPr>
+          <a:r>
+            <a:rPr lang="en-IN" sz="2000" kern="1200" dirty="0"/>
+            <a:t>We normalise the FFT magnitude and Analyse no. of peaks above a certain threshold.</a:t>
+          </a:r>
+          <a:endParaRPr lang="en-US" sz="2000" kern="1200" dirty="0"/>
+        </a:p>
+      </dsp:txBody>
+      <dsp:txXfrm>
+        <a:off x="7429201" y="843542"/>
+        <a:ext cx="2778721" cy="1725303"/>
+      </dsp:txXfrm>
+    </dsp:sp>
+  </dsp:spTree>
+</dsp:drawing>
+</file>
+
+<file path=ppt/diagrams/drawing2.xml><?xml version="1.0" encoding="utf-8"?>
 <dsp:drawing xmlns:dgm="http://schemas.openxmlformats.org/drawingml/2006/diagram" xmlns:dsp="http://schemas.microsoft.com/office/drawing/2008/diagram" xmlns:a="http://schemas.openxmlformats.org/drawingml/2006/main">
   <dsp:spTree>
     <dsp:nvGrpSpPr>
@@ -1546,6 +3965,250 @@
       <dsp:txXfrm>
         <a:off x="7429201" y="843542"/>
         <a:ext cx="2778721" cy="1725303"/>
+      </dsp:txXfrm>
+    </dsp:sp>
+  </dsp:spTree>
+</dsp:drawing>
+</file>
+
+<file path=ppt/diagrams/drawing3.xml><?xml version="1.0" encoding="utf-8"?>
+<dsp:drawing xmlns:dgm="http://schemas.openxmlformats.org/drawingml/2006/diagram" xmlns:dsp="http://schemas.microsoft.com/office/drawing/2008/diagram" xmlns:a="http://schemas.openxmlformats.org/drawingml/2006/main">
+  <dsp:spTree>
+    <dsp:nvGrpSpPr>
+      <dsp:cNvPr id="0" name=""/>
+      <dsp:cNvGrpSpPr/>
+    </dsp:nvGrpSpPr>
+    <dsp:grpSpPr/>
+    <dsp:sp modelId="{91D7CE65-6E24-4EDD-BB71-D50EA8C7AF66}">
+      <dsp:nvSpPr>
+        <dsp:cNvPr id="0" name=""/>
+        <dsp:cNvSpPr/>
+      </dsp:nvSpPr>
+      <dsp:spPr>
+        <a:xfrm>
+          <a:off x="994707" y="192247"/>
+          <a:ext cx="1589625" cy="1589625"/>
+        </a:xfrm>
+        <a:prstGeom prst="rect">
+          <a:avLst/>
+        </a:prstGeom>
+        <a:blipFill>
+          <a:blip xmlns:r="http://schemas.openxmlformats.org/officeDocument/2006/relationships" r:embed="rId1">
+            <a:extLst>
+              <a:ext uri="{28A0092B-C50C-407E-A947-70E740481C1C}">
+                <a14:useLocalDpi xmlns:a14="http://schemas.microsoft.com/office/drawing/2010/main" val="0"/>
+              </a:ext>
+              <a:ext uri="{96DAC541-7B7A-43D3-8B79-37D633B846F1}">
+                <asvg:svgBlip xmlns:asvg="http://schemas.microsoft.com/office/drawing/2016/SVG/main" r:embed="rId2"/>
+              </a:ext>
+            </a:extLst>
+          </a:blip>
+          <a:stretch>
+            <a:fillRect/>
+          </a:stretch>
+        </a:blipFill>
+        <a:ln w="12700" cap="flat" cmpd="sng" algn="ctr">
+          <a:solidFill>
+            <a:schemeClr val="lt1">
+              <a:hueOff val="0"/>
+              <a:satOff val="0"/>
+              <a:lumOff val="0"/>
+              <a:alphaOff val="0"/>
+            </a:schemeClr>
+          </a:solidFill>
+          <a:prstDash val="solid"/>
+        </a:ln>
+        <a:effectLst/>
+      </dsp:spPr>
+      <dsp:style>
+        <a:lnRef idx="2">
+          <a:scrgbClr r="0" g="0" b="0"/>
+        </a:lnRef>
+        <a:fillRef idx="1">
+          <a:scrgbClr r="0" g="0" b="0"/>
+        </a:fillRef>
+        <a:effectRef idx="0">
+          <a:scrgbClr r="0" g="0" b="0"/>
+        </a:effectRef>
+        <a:fontRef idx="minor">
+          <a:schemeClr val="lt1"/>
+        </a:fontRef>
+      </dsp:style>
+    </dsp:sp>
+    <dsp:sp modelId="{EA2AB186-BCAB-46AF-B7E0-06CEFC35B7C8}">
+      <dsp:nvSpPr>
+        <dsp:cNvPr id="0" name=""/>
+        <dsp:cNvSpPr/>
+      </dsp:nvSpPr>
+      <dsp:spPr>
+        <a:xfrm>
+          <a:off x="23270" y="2189735"/>
+          <a:ext cx="3532500" cy="720000"/>
+        </a:xfrm>
+        <a:prstGeom prst="rect">
+          <a:avLst/>
+        </a:prstGeom>
+        <a:noFill/>
+        <a:ln>
+          <a:noFill/>
+        </a:ln>
+        <a:effectLst/>
+      </dsp:spPr>
+      <dsp:style>
+        <a:lnRef idx="0">
+          <a:scrgbClr r="0" g="0" b="0"/>
+        </a:lnRef>
+        <a:fillRef idx="0">
+          <a:scrgbClr r="0" g="0" b="0"/>
+        </a:fillRef>
+        <a:effectRef idx="0">
+          <a:scrgbClr r="0" g="0" b="0"/>
+        </a:effectRef>
+        <a:fontRef idx="minor"/>
+      </dsp:style>
+      <dsp:txBody>
+        <a:bodyPr spcFirstLastPara="0" vert="horz" wrap="square" lIns="0" tIns="0" rIns="0" bIns="0" numCol="1" spcCol="1270" anchor="t" anchorCtr="0">
+          <a:noAutofit/>
+        </a:bodyPr>
+        <a:lstStyle/>
+        <a:p>
+          <a:pPr marL="0" lvl="0" indent="0" algn="ctr" defTabSz="711200">
+            <a:lnSpc>
+              <a:spcPct val="100000"/>
+            </a:lnSpc>
+            <a:spcBef>
+              <a:spcPct val="0"/>
+            </a:spcBef>
+            <a:spcAft>
+              <a:spcPct val="35000"/>
+            </a:spcAft>
+            <a:buNone/>
+          </a:pPr>
+          <a:r>
+            <a:rPr lang="en-US" sz="1600" kern="1200"/>
+            <a:t>For Task-1, we are finding the louder words in the given audio samples using the start and end times.</a:t>
+          </a:r>
+        </a:p>
+      </dsp:txBody>
+      <dsp:txXfrm>
+        <a:off x="23270" y="2189735"/>
+        <a:ext cx="3532500" cy="720000"/>
+      </dsp:txXfrm>
+    </dsp:sp>
+    <dsp:sp modelId="{A6D2A9D8-BBDA-4419-8A61-56A0D9ADAF6B}">
+      <dsp:nvSpPr>
+        <dsp:cNvPr id="0" name=""/>
+        <dsp:cNvSpPr/>
+      </dsp:nvSpPr>
+      <dsp:spPr>
+        <a:xfrm>
+          <a:off x="5145395" y="192247"/>
+          <a:ext cx="1589625" cy="1589625"/>
+        </a:xfrm>
+        <a:prstGeom prst="rect">
+          <a:avLst/>
+        </a:prstGeom>
+        <a:blipFill>
+          <a:blip xmlns:r="http://schemas.openxmlformats.org/officeDocument/2006/relationships" r:embed="rId3">
+            <a:extLst>
+              <a:ext uri="{28A0092B-C50C-407E-A947-70E740481C1C}">
+                <a14:useLocalDpi xmlns:a14="http://schemas.microsoft.com/office/drawing/2010/main" val="0"/>
+              </a:ext>
+              <a:ext uri="{96DAC541-7B7A-43D3-8B79-37D633B846F1}">
+                <asvg:svgBlip xmlns:asvg="http://schemas.microsoft.com/office/drawing/2016/SVG/main" r:embed="rId4"/>
+              </a:ext>
+            </a:extLst>
+          </a:blip>
+          <a:stretch>
+            <a:fillRect/>
+          </a:stretch>
+        </a:blipFill>
+        <a:ln w="12700" cap="flat" cmpd="sng" algn="ctr">
+          <a:solidFill>
+            <a:schemeClr val="lt1">
+              <a:hueOff val="0"/>
+              <a:satOff val="0"/>
+              <a:lumOff val="0"/>
+              <a:alphaOff val="0"/>
+            </a:schemeClr>
+          </a:solidFill>
+          <a:prstDash val="solid"/>
+        </a:ln>
+        <a:effectLst/>
+      </dsp:spPr>
+      <dsp:style>
+        <a:lnRef idx="2">
+          <a:scrgbClr r="0" g="0" b="0"/>
+        </a:lnRef>
+        <a:fillRef idx="1">
+          <a:scrgbClr r="0" g="0" b="0"/>
+        </a:fillRef>
+        <a:effectRef idx="0">
+          <a:scrgbClr r="0" g="0" b="0"/>
+        </a:effectRef>
+        <a:fontRef idx="minor">
+          <a:schemeClr val="lt1"/>
+        </a:fontRef>
+      </dsp:style>
+    </dsp:sp>
+    <dsp:sp modelId="{768343F6-2DE3-4212-8CAF-B3C057BCD0FC}">
+      <dsp:nvSpPr>
+        <dsp:cNvPr id="0" name=""/>
+        <dsp:cNvSpPr/>
+      </dsp:nvSpPr>
+      <dsp:spPr>
+        <a:xfrm>
+          <a:off x="4173957" y="2189735"/>
+          <a:ext cx="3532500" cy="720000"/>
+        </a:xfrm>
+        <a:prstGeom prst="rect">
+          <a:avLst/>
+        </a:prstGeom>
+        <a:noFill/>
+        <a:ln>
+          <a:noFill/>
+        </a:ln>
+        <a:effectLst/>
+      </dsp:spPr>
+      <dsp:style>
+        <a:lnRef idx="0">
+          <a:scrgbClr r="0" g="0" b="0"/>
+        </a:lnRef>
+        <a:fillRef idx="0">
+          <a:scrgbClr r="0" g="0" b="0"/>
+        </a:fillRef>
+        <a:effectRef idx="0">
+          <a:scrgbClr r="0" g="0" b="0"/>
+        </a:effectRef>
+        <a:fontRef idx="minor"/>
+      </dsp:style>
+      <dsp:txBody>
+        <a:bodyPr spcFirstLastPara="0" vert="horz" wrap="square" lIns="0" tIns="0" rIns="0" bIns="0" numCol="1" spcCol="1270" anchor="t" anchorCtr="0">
+          <a:noAutofit/>
+        </a:bodyPr>
+        <a:lstStyle/>
+        <a:p>
+          <a:pPr marL="0" lvl="0" indent="0" algn="ctr" defTabSz="711200">
+            <a:lnSpc>
+              <a:spcPct val="100000"/>
+            </a:lnSpc>
+            <a:spcBef>
+              <a:spcPct val="0"/>
+            </a:spcBef>
+            <a:spcAft>
+              <a:spcPct val="35000"/>
+            </a:spcAft>
+            <a:buNone/>
+          </a:pPr>
+          <a:r>
+            <a:rPr lang="en-US" sz="1600" kern="1200"/>
+            <a:t>For Task-2, we are finding the louder words in the given audio samples without using the start and end times. </a:t>
+          </a:r>
+        </a:p>
+      </dsp:txBody>
+      <dsp:txXfrm>
+        <a:off x="4173957" y="2189735"/>
+        <a:ext cx="3532500" cy="720000"/>
       </dsp:txXfrm>
     </dsp:sp>
   </dsp:spTree>
@@ -2115,6 +4778,759 @@
 </dgm:layoutDef>
 </file>
 
+<file path=ppt/diagrams/layout2.xml><?xml version="1.0" encoding="utf-8"?>
+<dgm:layoutDef xmlns:dgm="http://schemas.openxmlformats.org/drawingml/2006/diagram" xmlns:a="http://schemas.openxmlformats.org/drawingml/2006/main" uniqueId="urn:microsoft.com/office/officeart/2005/8/layout/hierarchy1">
+  <dgm:title val=""/>
+  <dgm:desc val=""/>
+  <dgm:catLst>
+    <dgm:cat type="hierarchy" pri="2000"/>
+  </dgm:catLst>
+  <dgm:sampData>
+    <dgm:dataModel>
+      <dgm:ptLst>
+        <dgm:pt modelId="0" type="doc"/>
+        <dgm:pt modelId="1">
+          <dgm:prSet phldr="1"/>
+        </dgm:pt>
+        <dgm:pt modelId="2">
+          <dgm:prSet phldr="1"/>
+        </dgm:pt>
+        <dgm:pt modelId="21">
+          <dgm:prSet phldr="1"/>
+        </dgm:pt>
+        <dgm:pt modelId="22">
+          <dgm:prSet phldr="1"/>
+        </dgm:pt>
+        <dgm:pt modelId="3">
+          <dgm:prSet phldr="1"/>
+        </dgm:pt>
+        <dgm:pt modelId="31">
+          <dgm:prSet phldr="1"/>
+        </dgm:pt>
+      </dgm:ptLst>
+      <dgm:cxnLst>
+        <dgm:cxn modelId="4" srcId="0" destId="1" srcOrd="0" destOrd="0"/>
+        <dgm:cxn modelId="5" srcId="1" destId="2" srcOrd="0" destOrd="0"/>
+        <dgm:cxn modelId="6" srcId="1" destId="3" srcOrd="1" destOrd="0"/>
+        <dgm:cxn modelId="23" srcId="2" destId="21" srcOrd="0" destOrd="0"/>
+        <dgm:cxn modelId="24" srcId="2" destId="22" srcOrd="1" destOrd="0"/>
+        <dgm:cxn modelId="33" srcId="3" destId="31" srcOrd="0" destOrd="0"/>
+      </dgm:cxnLst>
+      <dgm:bg/>
+      <dgm:whole/>
+    </dgm:dataModel>
+  </dgm:sampData>
+  <dgm:styleData>
+    <dgm:dataModel>
+      <dgm:ptLst>
+        <dgm:pt modelId="0" type="doc"/>
+        <dgm:pt modelId="1"/>
+        <dgm:pt modelId="11"/>
+        <dgm:pt modelId="12"/>
+      </dgm:ptLst>
+      <dgm:cxnLst>
+        <dgm:cxn modelId="2" srcId="0" destId="1" srcOrd="0" destOrd="0"/>
+        <dgm:cxn modelId="13" srcId="1" destId="11" srcOrd="0" destOrd="0"/>
+        <dgm:cxn modelId="14" srcId="1" destId="12" srcOrd="1" destOrd="0"/>
+      </dgm:cxnLst>
+      <dgm:bg/>
+      <dgm:whole/>
+    </dgm:dataModel>
+  </dgm:styleData>
+  <dgm:clrData>
+    <dgm:dataModel>
+      <dgm:ptLst>
+        <dgm:pt modelId="0" type="doc"/>
+        <dgm:pt modelId="1"/>
+        <dgm:pt modelId="2"/>
+        <dgm:pt modelId="21"/>
+        <dgm:pt modelId="211"/>
+        <dgm:pt modelId="3"/>
+        <dgm:pt modelId="31"/>
+        <dgm:pt modelId="311"/>
+      </dgm:ptLst>
+      <dgm:cxnLst>
+        <dgm:cxn modelId="4" srcId="0" destId="1" srcOrd="0" destOrd="0"/>
+        <dgm:cxn modelId="5" srcId="1" destId="2" srcOrd="0" destOrd="0"/>
+        <dgm:cxn modelId="6" srcId="1" destId="3" srcOrd="1" destOrd="0"/>
+        <dgm:cxn modelId="23" srcId="2" destId="21" srcOrd="0" destOrd="0"/>
+        <dgm:cxn modelId="24" srcId="21" destId="211" srcOrd="0" destOrd="0"/>
+        <dgm:cxn modelId="33" srcId="3" destId="31" srcOrd="0" destOrd="0"/>
+        <dgm:cxn modelId="34" srcId="31" destId="311" srcOrd="0" destOrd="0"/>
+      </dgm:cxnLst>
+      <dgm:bg/>
+      <dgm:whole/>
+    </dgm:dataModel>
+  </dgm:clrData>
+  <dgm:layoutNode name="hierChild1">
+    <dgm:varLst>
+      <dgm:chPref val="1"/>
+      <dgm:dir/>
+      <dgm:animOne val="branch"/>
+      <dgm:animLvl val="lvl"/>
+      <dgm:resizeHandles/>
+    </dgm:varLst>
+    <dgm:choose name="Name0">
+      <dgm:if name="Name1" func="var" arg="dir" op="equ" val="norm">
+        <dgm:alg type="hierChild">
+          <dgm:param type="linDir" val="fromL"/>
+        </dgm:alg>
+      </dgm:if>
+      <dgm:else name="Name2">
+        <dgm:alg type="hierChild">
+          <dgm:param type="linDir" val="fromR"/>
+        </dgm:alg>
+      </dgm:else>
+    </dgm:choose>
+    <dgm:shape xmlns:r="http://schemas.openxmlformats.org/officeDocument/2006/relationships" r:blip="">
+      <dgm:adjLst/>
+    </dgm:shape>
+    <dgm:presOf/>
+    <dgm:constrLst>
+      <dgm:constr type="primFontSz" for="des" ptType="node" op="equ" val="65"/>
+      <dgm:constr type="w" for="des" forName="composite" refType="w"/>
+      <dgm:constr type="h" for="des" forName="composite" refType="w" refFor="des" refForName="composite" fact="0.667"/>
+      <dgm:constr type="w" for="des" forName="composite2" refType="w" refFor="des" refForName="composite"/>
+      <dgm:constr type="h" for="des" forName="composite2" refType="h" refFor="des" refForName="composite"/>
+      <dgm:constr type="w" for="des" forName="composite3" refType="w" refFor="des" refForName="composite"/>
+      <dgm:constr type="h" for="des" forName="composite3" refType="h" refFor="des" refForName="composite"/>
+      <dgm:constr type="w" for="des" forName="composite4" refType="w" refFor="des" refForName="composite"/>
+      <dgm:constr type="h" for="des" forName="composite4" refType="h" refFor="des" refForName="composite"/>
+      <dgm:constr type="w" for="des" forName="composite5" refType="w" refFor="des" refForName="composite"/>
+      <dgm:constr type="h" for="des" forName="composite5" refType="h" refFor="des" refForName="composite"/>
+      <dgm:constr type="sibSp" refType="w" refFor="des" refForName="composite" fact="0.1"/>
+      <dgm:constr type="sibSp" for="des" forName="hierChild2" refType="sibSp"/>
+      <dgm:constr type="sibSp" for="des" forName="hierChild3" refType="sibSp"/>
+      <dgm:constr type="sibSp" for="des" forName="hierChild4" refType="sibSp"/>
+      <dgm:constr type="sibSp" for="des" forName="hierChild5" refType="sibSp"/>
+      <dgm:constr type="sibSp" for="des" forName="hierChild6" refType="sibSp"/>
+      <dgm:constr type="sp" for="des" forName="hierRoot1" refType="h" refFor="des" refForName="composite" fact="0.25"/>
+      <dgm:constr type="sp" for="des" forName="hierRoot2" refType="sp" refFor="des" refForName="hierRoot1"/>
+      <dgm:constr type="sp" for="des" forName="hierRoot3" refType="sp" refFor="des" refForName="hierRoot1"/>
+      <dgm:constr type="sp" for="des" forName="hierRoot4" refType="sp" refFor="des" refForName="hierRoot1"/>
+      <dgm:constr type="sp" for="des" forName="hierRoot5" refType="sp" refFor="des" refForName="hierRoot1"/>
+    </dgm:constrLst>
+    <dgm:ruleLst/>
+    <dgm:forEach name="Name3" axis="ch">
+      <dgm:forEach name="Name4" axis="self" ptType="node">
+        <dgm:layoutNode name="hierRoot1">
+          <dgm:alg type="hierRoot"/>
+          <dgm:shape xmlns:r="http://schemas.openxmlformats.org/officeDocument/2006/relationships" r:blip="">
+            <dgm:adjLst/>
+          </dgm:shape>
+          <dgm:presOf/>
+          <dgm:constrLst>
+            <dgm:constr type="bendDist" for="des" ptType="parTrans" refType="sp" fact="0.5"/>
+          </dgm:constrLst>
+          <dgm:ruleLst/>
+          <dgm:layoutNode name="composite">
+            <dgm:alg type="composite"/>
+            <dgm:shape xmlns:r="http://schemas.openxmlformats.org/officeDocument/2006/relationships" r:blip="">
+              <dgm:adjLst/>
+            </dgm:shape>
+            <dgm:presOf/>
+            <dgm:constrLst>
+              <dgm:constr type="w" for="ch" forName="background" refType="w" fact="0.9"/>
+              <dgm:constr type="h" for="ch" forName="background" refType="w" refFor="ch" refForName="background" fact="0.635"/>
+              <dgm:constr type="t" for="ch" forName="background"/>
+              <dgm:constr type="l" for="ch" forName="background"/>
+              <dgm:constr type="w" for="ch" forName="text" refType="w" fact="0.9"/>
+              <dgm:constr type="h" for="ch" forName="text" refType="w" refFor="ch" refForName="text" fact="0.635"/>
+              <dgm:constr type="t" for="ch" forName="text" refType="w" fact="0.095"/>
+              <dgm:constr type="l" for="ch" forName="text" refType="w" fact="0.1"/>
+            </dgm:constrLst>
+            <dgm:ruleLst/>
+            <dgm:layoutNode name="background" styleLbl="node0" moveWith="text">
+              <dgm:alg type="sp"/>
+              <dgm:shape xmlns:r="http://schemas.openxmlformats.org/officeDocument/2006/relationships" type="roundRect" r:blip="">
+                <dgm:adjLst>
+                  <dgm:adj idx="1" val="0.1"/>
+                </dgm:adjLst>
+              </dgm:shape>
+              <dgm:presOf/>
+              <dgm:constrLst/>
+              <dgm:ruleLst/>
+            </dgm:layoutNode>
+            <dgm:layoutNode name="text" styleLbl="fgAcc0">
+              <dgm:varLst>
+                <dgm:chPref val="3"/>
+              </dgm:varLst>
+              <dgm:alg type="tx"/>
+              <dgm:shape xmlns:r="http://schemas.openxmlformats.org/officeDocument/2006/relationships" type="roundRect" r:blip="">
+                <dgm:adjLst>
+                  <dgm:adj idx="1" val="0.1"/>
+                </dgm:adjLst>
+              </dgm:shape>
+              <dgm:presOf axis="self"/>
+              <dgm:constrLst>
+                <dgm:constr type="tMarg" refType="primFontSz" fact="0.3"/>
+                <dgm:constr type="bMarg" refType="primFontSz" fact="0.3"/>
+                <dgm:constr type="lMarg" refType="primFontSz" fact="0.3"/>
+                <dgm:constr type="rMarg" refType="primFontSz" fact="0.3"/>
+              </dgm:constrLst>
+              <dgm:ruleLst>
+                <dgm:rule type="primFontSz" val="5" fact="NaN" max="NaN"/>
+              </dgm:ruleLst>
+            </dgm:layoutNode>
+          </dgm:layoutNode>
+          <dgm:layoutNode name="hierChild2">
+            <dgm:choose name="Name5">
+              <dgm:if name="Name6" func="var" arg="dir" op="equ" val="norm">
+                <dgm:alg type="hierChild">
+                  <dgm:param type="linDir" val="fromL"/>
+                </dgm:alg>
+              </dgm:if>
+              <dgm:else name="Name7">
+                <dgm:alg type="hierChild">
+                  <dgm:param type="linDir" val="fromR"/>
+                </dgm:alg>
+              </dgm:else>
+            </dgm:choose>
+            <dgm:shape xmlns:r="http://schemas.openxmlformats.org/officeDocument/2006/relationships" r:blip="">
+              <dgm:adjLst/>
+            </dgm:shape>
+            <dgm:presOf/>
+            <dgm:constrLst/>
+            <dgm:ruleLst/>
+            <dgm:forEach name="Name8" axis="ch">
+              <dgm:forEach name="Name9" axis="self" ptType="parTrans" cnt="1">
+                <dgm:layoutNode name="Name10">
+                  <dgm:alg type="conn">
+                    <dgm:param type="dim" val="1D"/>
+                    <dgm:param type="endSty" val="noArr"/>
+                    <dgm:param type="connRout" val="bend"/>
+                    <dgm:param type="bendPt" val="end"/>
+                    <dgm:param type="begPts" val="bCtr"/>
+                    <dgm:param type="endPts" val="tCtr"/>
+                    <dgm:param type="srcNode" val="background"/>
+                    <dgm:param type="dstNode" val="background2"/>
+                  </dgm:alg>
+                  <dgm:shape xmlns:r="http://schemas.openxmlformats.org/officeDocument/2006/relationships" type="conn" r:blip="" zOrderOff="-999">
+                    <dgm:adjLst/>
+                  </dgm:shape>
+                  <dgm:presOf axis="self"/>
+                  <dgm:constrLst>
+                    <dgm:constr type="begPad"/>
+                    <dgm:constr type="endPad"/>
+                  </dgm:constrLst>
+                  <dgm:ruleLst/>
+                </dgm:layoutNode>
+              </dgm:forEach>
+              <dgm:forEach name="Name11" axis="self" ptType="node">
+                <dgm:layoutNode name="hierRoot2">
+                  <dgm:alg type="hierRoot"/>
+                  <dgm:shape xmlns:r="http://schemas.openxmlformats.org/officeDocument/2006/relationships" r:blip="">
+                    <dgm:adjLst/>
+                  </dgm:shape>
+                  <dgm:presOf/>
+                  <dgm:constrLst>
+                    <dgm:constr type="bendDist" for="des" ptType="parTrans" refType="sp" fact="0.5"/>
+                  </dgm:constrLst>
+                  <dgm:ruleLst/>
+                  <dgm:layoutNode name="composite2">
+                    <dgm:alg type="composite"/>
+                    <dgm:shape xmlns:r="http://schemas.openxmlformats.org/officeDocument/2006/relationships" r:blip="">
+                      <dgm:adjLst/>
+                    </dgm:shape>
+                    <dgm:presOf/>
+                    <dgm:constrLst>
+                      <dgm:constr type="w" for="ch" forName="background2" refType="w" fact="0.9"/>
+                      <dgm:constr type="h" for="ch" forName="background2" refType="w" refFor="ch" refForName="background2" fact="0.635"/>
+                      <dgm:constr type="t" for="ch" forName="background2"/>
+                      <dgm:constr type="l" for="ch" forName="background2"/>
+                      <dgm:constr type="w" for="ch" forName="text2" refType="w" fact="0.9"/>
+                      <dgm:constr type="h" for="ch" forName="text2" refType="w" refFor="ch" refForName="text2" fact="0.635"/>
+                      <dgm:constr type="t" for="ch" forName="text2" refType="w" fact="0.095"/>
+                      <dgm:constr type="l" for="ch" forName="text2" refType="w" fact="0.1"/>
+                    </dgm:constrLst>
+                    <dgm:ruleLst/>
+                    <dgm:layoutNode name="background2" moveWith="text2">
+                      <dgm:alg type="sp"/>
+                      <dgm:shape xmlns:r="http://schemas.openxmlformats.org/officeDocument/2006/relationships" type="roundRect" r:blip="">
+                        <dgm:adjLst>
+                          <dgm:adj idx="1" val="0.1"/>
+                        </dgm:adjLst>
+                      </dgm:shape>
+                      <dgm:presOf/>
+                      <dgm:constrLst/>
+                      <dgm:ruleLst/>
+                    </dgm:layoutNode>
+                    <dgm:layoutNode name="text2" styleLbl="fgAcc2">
+                      <dgm:varLst>
+                        <dgm:chPref val="3"/>
+                      </dgm:varLst>
+                      <dgm:alg type="tx"/>
+                      <dgm:shape xmlns:r="http://schemas.openxmlformats.org/officeDocument/2006/relationships" type="roundRect" r:blip="">
+                        <dgm:adjLst>
+                          <dgm:adj idx="1" val="0.1"/>
+                        </dgm:adjLst>
+                      </dgm:shape>
+                      <dgm:presOf axis="self"/>
+                      <dgm:constrLst>
+                        <dgm:constr type="tMarg" refType="primFontSz" fact="0.3"/>
+                        <dgm:constr type="bMarg" refType="primFontSz" fact="0.3"/>
+                        <dgm:constr type="lMarg" refType="primFontSz" fact="0.3"/>
+                        <dgm:constr type="rMarg" refType="primFontSz" fact="0.3"/>
+                      </dgm:constrLst>
+                      <dgm:ruleLst>
+                        <dgm:rule type="primFontSz" val="5" fact="NaN" max="NaN"/>
+                      </dgm:ruleLst>
+                    </dgm:layoutNode>
+                  </dgm:layoutNode>
+                  <dgm:layoutNode name="hierChild3">
+                    <dgm:choose name="Name12">
+                      <dgm:if name="Name13" func="var" arg="dir" op="equ" val="norm">
+                        <dgm:alg type="hierChild">
+                          <dgm:param type="linDir" val="fromL"/>
+                        </dgm:alg>
+                      </dgm:if>
+                      <dgm:else name="Name14">
+                        <dgm:alg type="hierChild">
+                          <dgm:param type="linDir" val="fromR"/>
+                        </dgm:alg>
+                      </dgm:else>
+                    </dgm:choose>
+                    <dgm:shape xmlns:r="http://schemas.openxmlformats.org/officeDocument/2006/relationships" r:blip="">
+                      <dgm:adjLst/>
+                    </dgm:shape>
+                    <dgm:presOf/>
+                    <dgm:constrLst/>
+                    <dgm:ruleLst/>
+                    <dgm:forEach name="Name15" axis="ch">
+                      <dgm:forEach name="Name16" axis="self" ptType="parTrans" cnt="1">
+                        <dgm:layoutNode name="Name17">
+                          <dgm:alg type="conn">
+                            <dgm:param type="dim" val="1D"/>
+                            <dgm:param type="endSty" val="noArr"/>
+                            <dgm:param type="connRout" val="bend"/>
+                            <dgm:param type="bendPt" val="end"/>
+                            <dgm:param type="begPts" val="bCtr"/>
+                            <dgm:param type="endPts" val="tCtr"/>
+                            <dgm:param type="srcNode" val="background2"/>
+                            <dgm:param type="dstNode" val="background3"/>
+                          </dgm:alg>
+                          <dgm:shape xmlns:r="http://schemas.openxmlformats.org/officeDocument/2006/relationships" type="conn" r:blip="" zOrderOff="-999">
+                            <dgm:adjLst/>
+                          </dgm:shape>
+                          <dgm:presOf axis="self"/>
+                          <dgm:constrLst>
+                            <dgm:constr type="begPad"/>
+                            <dgm:constr type="endPad"/>
+                          </dgm:constrLst>
+                          <dgm:ruleLst/>
+                        </dgm:layoutNode>
+                      </dgm:forEach>
+                      <dgm:forEach name="Name18" axis="self" ptType="node">
+                        <dgm:layoutNode name="hierRoot3">
+                          <dgm:alg type="hierRoot"/>
+                          <dgm:shape xmlns:r="http://schemas.openxmlformats.org/officeDocument/2006/relationships" r:blip="">
+                            <dgm:adjLst/>
+                          </dgm:shape>
+                          <dgm:presOf/>
+                          <dgm:constrLst>
+                            <dgm:constr type="bendDist" for="des" ptType="parTrans" refType="sp" fact="0.5"/>
+                          </dgm:constrLst>
+                          <dgm:ruleLst/>
+                          <dgm:layoutNode name="composite3">
+                            <dgm:alg type="composite"/>
+                            <dgm:shape xmlns:r="http://schemas.openxmlformats.org/officeDocument/2006/relationships" r:blip="">
+                              <dgm:adjLst/>
+                            </dgm:shape>
+                            <dgm:presOf/>
+                            <dgm:constrLst>
+                              <dgm:constr type="w" for="ch" forName="background3" refType="w" fact="0.9"/>
+                              <dgm:constr type="h" for="ch" forName="background3" refType="w" refFor="ch" refForName="background3" fact="0.635"/>
+                              <dgm:constr type="t" for="ch" forName="background3"/>
+                              <dgm:constr type="l" for="ch" forName="background3"/>
+                              <dgm:constr type="w" for="ch" forName="text3" refType="w" fact="0.9"/>
+                              <dgm:constr type="h" for="ch" forName="text3" refType="w" refFor="ch" refForName="text3" fact="0.635"/>
+                              <dgm:constr type="t" for="ch" forName="text3" refType="w" fact="0.095"/>
+                              <dgm:constr type="l" for="ch" forName="text3" refType="w" fact="0.1"/>
+                            </dgm:constrLst>
+                            <dgm:ruleLst/>
+                            <dgm:layoutNode name="background3" moveWith="text3">
+                              <dgm:alg type="sp"/>
+                              <dgm:shape xmlns:r="http://schemas.openxmlformats.org/officeDocument/2006/relationships" type="roundRect" r:blip="">
+                                <dgm:adjLst>
+                                  <dgm:adj idx="1" val="0.1"/>
+                                </dgm:adjLst>
+                              </dgm:shape>
+                              <dgm:presOf/>
+                              <dgm:constrLst/>
+                              <dgm:ruleLst/>
+                            </dgm:layoutNode>
+                            <dgm:layoutNode name="text3" styleLbl="fgAcc3">
+                              <dgm:varLst>
+                                <dgm:chPref val="3"/>
+                              </dgm:varLst>
+                              <dgm:alg type="tx"/>
+                              <dgm:shape xmlns:r="http://schemas.openxmlformats.org/officeDocument/2006/relationships" type="roundRect" r:blip="">
+                                <dgm:adjLst>
+                                  <dgm:adj idx="1" val="0.1"/>
+                                </dgm:adjLst>
+                              </dgm:shape>
+                              <dgm:presOf axis="self"/>
+                              <dgm:constrLst>
+                                <dgm:constr type="tMarg" refType="primFontSz" fact="0.3"/>
+                                <dgm:constr type="bMarg" refType="primFontSz" fact="0.3"/>
+                                <dgm:constr type="lMarg" refType="primFontSz" fact="0.3"/>
+                                <dgm:constr type="rMarg" refType="primFontSz" fact="0.3"/>
+                              </dgm:constrLst>
+                              <dgm:ruleLst>
+                                <dgm:rule type="primFontSz" val="5" fact="NaN" max="NaN"/>
+                              </dgm:ruleLst>
+                            </dgm:layoutNode>
+                          </dgm:layoutNode>
+                          <dgm:layoutNode name="hierChild4">
+                            <dgm:choose name="Name19">
+                              <dgm:if name="Name20" func="var" arg="dir" op="equ" val="norm">
+                                <dgm:alg type="hierChild">
+                                  <dgm:param type="linDir" val="fromL"/>
+                                </dgm:alg>
+                              </dgm:if>
+                              <dgm:else name="Name21">
+                                <dgm:alg type="hierChild">
+                                  <dgm:param type="linDir" val="fromR"/>
+                                </dgm:alg>
+                              </dgm:else>
+                            </dgm:choose>
+                            <dgm:shape xmlns:r="http://schemas.openxmlformats.org/officeDocument/2006/relationships" r:blip="">
+                              <dgm:adjLst/>
+                            </dgm:shape>
+                            <dgm:presOf/>
+                            <dgm:constrLst/>
+                            <dgm:ruleLst/>
+                            <dgm:forEach name="repeat" axis="ch">
+                              <dgm:forEach name="Name22" axis="self" ptType="parTrans" cnt="1">
+                                <dgm:layoutNode name="Name23">
+                                  <dgm:choose name="Name24">
+                                    <dgm:if name="Name25" axis="self" func="depth" op="lte" val="4">
+                                      <dgm:alg type="conn">
+                                        <dgm:param type="dim" val="1D"/>
+                                        <dgm:param type="endSty" val="noArr"/>
+                                        <dgm:param type="connRout" val="bend"/>
+                                        <dgm:param type="bendPt" val="end"/>
+                                        <dgm:param type="begPts" val="bCtr"/>
+                                        <dgm:param type="endPts" val="tCtr"/>
+                                        <dgm:param type="srcNode" val="background3"/>
+                                        <dgm:param type="dstNode" val="background4"/>
+                                      </dgm:alg>
+                                    </dgm:if>
+                                    <dgm:else name="Name26">
+                                      <dgm:alg type="conn">
+                                        <dgm:param type="dim" val="1D"/>
+                                        <dgm:param type="endSty" val="noArr"/>
+                                        <dgm:param type="connRout" val="bend"/>
+                                        <dgm:param type="bendPt" val="end"/>
+                                        <dgm:param type="begPts" val="bCtr"/>
+                                        <dgm:param type="endPts" val="tCtr"/>
+                                        <dgm:param type="srcNode" val="background4"/>
+                                        <dgm:param type="dstNode" val="background4"/>
+                                      </dgm:alg>
+                                    </dgm:else>
+                                  </dgm:choose>
+                                  <dgm:shape xmlns:r="http://schemas.openxmlformats.org/officeDocument/2006/relationships" type="conn" r:blip="" zOrderOff="-999">
+                                    <dgm:adjLst/>
+                                  </dgm:shape>
+                                  <dgm:presOf axis="self"/>
+                                  <dgm:constrLst>
+                                    <dgm:constr type="begPad"/>
+                                    <dgm:constr type="endPad"/>
+                                  </dgm:constrLst>
+                                  <dgm:ruleLst/>
+                                </dgm:layoutNode>
+                              </dgm:forEach>
+                              <dgm:forEach name="Name27" axis="self" ptType="node">
+                                <dgm:layoutNode name="hierRoot4">
+                                  <dgm:alg type="hierRoot"/>
+                                  <dgm:shape xmlns:r="http://schemas.openxmlformats.org/officeDocument/2006/relationships" r:blip="">
+                                    <dgm:adjLst/>
+                                  </dgm:shape>
+                                  <dgm:presOf/>
+                                  <dgm:constrLst>
+                                    <dgm:constr type="bendDist" for="des" ptType="parTrans" refType="sp" fact="0.5"/>
+                                  </dgm:constrLst>
+                                  <dgm:ruleLst/>
+                                  <dgm:layoutNode name="composite4">
+                                    <dgm:alg type="composite"/>
+                                    <dgm:shape xmlns:r="http://schemas.openxmlformats.org/officeDocument/2006/relationships" r:blip="">
+                                      <dgm:adjLst/>
+                                    </dgm:shape>
+                                    <dgm:presOf/>
+                                    <dgm:constrLst>
+                                      <dgm:constr type="w" for="ch" forName="background4" refType="w" fact="0.9"/>
+                                      <dgm:constr type="h" for="ch" forName="background4" refType="w" refFor="ch" refForName="background4" fact="0.635"/>
+                                      <dgm:constr type="t" for="ch" forName="background4"/>
+                                      <dgm:constr type="l" for="ch" forName="background4"/>
+                                      <dgm:constr type="w" for="ch" forName="text4" refType="w" fact="0.9"/>
+                                      <dgm:constr type="h" for="ch" forName="text4" refType="w" refFor="ch" refForName="text4" fact="0.635"/>
+                                      <dgm:constr type="t" for="ch" forName="text4" refType="w" fact="0.095"/>
+                                      <dgm:constr type="l" for="ch" forName="text4" refType="w" fact="0.1"/>
+                                    </dgm:constrLst>
+                                    <dgm:ruleLst/>
+                                    <dgm:layoutNode name="background4" moveWith="text4">
+                                      <dgm:alg type="sp"/>
+                                      <dgm:shape xmlns:r="http://schemas.openxmlformats.org/officeDocument/2006/relationships" type="roundRect" r:blip="">
+                                        <dgm:adjLst>
+                                          <dgm:adj idx="1" val="0.1"/>
+                                        </dgm:adjLst>
+                                      </dgm:shape>
+                                      <dgm:presOf/>
+                                      <dgm:constrLst/>
+                                      <dgm:ruleLst/>
+                                    </dgm:layoutNode>
+                                    <dgm:layoutNode name="text4" styleLbl="fgAcc4">
+                                      <dgm:varLst>
+                                        <dgm:chPref val="3"/>
+                                      </dgm:varLst>
+                                      <dgm:alg type="tx"/>
+                                      <dgm:shape xmlns:r="http://schemas.openxmlformats.org/officeDocument/2006/relationships" type="roundRect" r:blip="">
+                                        <dgm:adjLst>
+                                          <dgm:adj idx="1" val="0.1"/>
+                                        </dgm:adjLst>
+                                      </dgm:shape>
+                                      <dgm:presOf axis="self"/>
+                                      <dgm:constrLst>
+                                        <dgm:constr type="tMarg" refType="primFontSz" fact="0.3"/>
+                                        <dgm:constr type="bMarg" refType="primFontSz" fact="0.3"/>
+                                        <dgm:constr type="lMarg" refType="primFontSz" fact="0.3"/>
+                                        <dgm:constr type="rMarg" refType="primFontSz" fact="0.3"/>
+                                      </dgm:constrLst>
+                                      <dgm:ruleLst>
+                                        <dgm:rule type="primFontSz" val="5" fact="NaN" max="NaN"/>
+                                      </dgm:ruleLst>
+                                    </dgm:layoutNode>
+                                  </dgm:layoutNode>
+                                  <dgm:layoutNode name="hierChild5">
+                                    <dgm:choose name="Name28">
+                                      <dgm:if name="Name29" func="var" arg="dir" op="equ" val="norm">
+                                        <dgm:alg type="hierChild">
+                                          <dgm:param type="linDir" val="fromL"/>
+                                        </dgm:alg>
+                                      </dgm:if>
+                                      <dgm:else name="Name30">
+                                        <dgm:alg type="hierChild">
+                                          <dgm:param type="linDir" val="fromR"/>
+                                        </dgm:alg>
+                                      </dgm:else>
+                                    </dgm:choose>
+                                    <dgm:shape xmlns:r="http://schemas.openxmlformats.org/officeDocument/2006/relationships" r:blip="">
+                                      <dgm:adjLst/>
+                                    </dgm:shape>
+                                    <dgm:presOf/>
+                                    <dgm:constrLst/>
+                                    <dgm:ruleLst/>
+                                    <dgm:forEach name="Name31" ref="repeat"/>
+                                  </dgm:layoutNode>
+                                </dgm:layoutNode>
+                              </dgm:forEach>
+                            </dgm:forEach>
+                          </dgm:layoutNode>
+                        </dgm:layoutNode>
+                      </dgm:forEach>
+                    </dgm:forEach>
+                  </dgm:layoutNode>
+                </dgm:layoutNode>
+              </dgm:forEach>
+            </dgm:forEach>
+          </dgm:layoutNode>
+        </dgm:layoutNode>
+      </dgm:forEach>
+    </dgm:forEach>
+  </dgm:layoutNode>
+</dgm:layoutDef>
+</file>
+
+<file path=ppt/diagrams/layout3.xml><?xml version="1.0" encoding="utf-8"?>
+<dgm:layoutDef xmlns:dgm="http://schemas.openxmlformats.org/drawingml/2006/diagram" xmlns:a="http://schemas.openxmlformats.org/drawingml/2006/main" uniqueId="urn:microsoft.com/office/officeart/2018/2/layout/IconLabelList">
+  <dgm:title val="Icon Label List"/>
+  <dgm:desc val="Use to show non-sequential or grouped chunks of information accompanied by a related visuals. Works best with icons or small pictures with short text captions."/>
+  <dgm:catLst>
+    <dgm:cat type="icon" pri="500"/>
+  </dgm:catLst>
+  <dgm:sampData useDef="1">
+    <dgm:dataModel>
+      <dgm:ptLst/>
+      <dgm:bg/>
+      <dgm:whole/>
+    </dgm:dataModel>
+  </dgm:sampData>
+  <dgm:styleData useDef="1">
+    <dgm:dataModel>
+      <dgm:ptLst/>
+      <dgm:bg/>
+      <dgm:whole/>
+    </dgm:dataModel>
+  </dgm:styleData>
+  <dgm:clrData useDef="1">
+    <dgm:dataModel>
+      <dgm:ptLst/>
+      <dgm:bg/>
+      <dgm:whole/>
+    </dgm:dataModel>
+  </dgm:clrData>
+  <dgm:layoutNode name="root">
+    <dgm:varLst>
+      <dgm:dir/>
+      <dgm:resizeHandles val="exact"/>
+    </dgm:varLst>
+    <dgm:choose name="Name0">
+      <dgm:if name="Name1" axis="self" func="var" arg="dir" op="equ" val="norm">
+        <dgm:alg type="snake">
+          <dgm:param type="grDir" val="tL"/>
+          <dgm:param type="flowDir" val="row"/>
+          <dgm:param type="contDir" val="sameDir"/>
+          <dgm:param type="off" val="ctr"/>
+          <dgm:param type="vertAlign" val="mid"/>
+          <dgm:param type="horzAlign" val="ctr"/>
+        </dgm:alg>
+      </dgm:if>
+      <dgm:else name="Name2">
+        <dgm:alg type="snake">
+          <dgm:param type="grDir" val="tR"/>
+          <dgm:param type="flowDir" val="row"/>
+          <dgm:param type="contDir" val="sameDir"/>
+          <dgm:param type="off" val="ctr"/>
+          <dgm:param type="vertAlign" val="mid"/>
+          <dgm:param type="horzAlign" val="ctr"/>
+        </dgm:alg>
+      </dgm:else>
+    </dgm:choose>
+    <dgm:shape xmlns:r="http://schemas.openxmlformats.org/officeDocument/2006/relationships" r:blip="">
+      <dgm:adjLst/>
+    </dgm:shape>
+    <dgm:presOf/>
+    <dgm:choose name="Name3">
+      <dgm:if name="Name4" axis="ch" ptType="node" func="cnt" op="lte" val="2">
+        <dgm:constrLst>
+          <dgm:constr type="h" for="ch" forName="compNode" refType="h" fact="0.4"/>
+          <dgm:constr type="w" for="ch" forName="compNode" val="120"/>
+          <dgm:constr type="w" for="ch" forName="sibTrans" refType="w" refFor="ch" refForName="compNode" fact="0.175"/>
+          <dgm:constr type="sp" refType="w" refFor="ch" refForName="compNode" op="equ" fact="0.25"/>
+          <dgm:constr type="primFontSz" for="des" ptType="node" op="equ" val="50"/>
+          <dgm:constr type="h" for="des" forName="compNode" op="equ"/>
+          <dgm:constr type="h" for="des" forName="textRect" op="equ"/>
+        </dgm:constrLst>
+      </dgm:if>
+      <dgm:if name="Name5" axis="ch" ptType="node" func="cnt" op="lte" val="4">
+        <dgm:constrLst>
+          <dgm:constr type="h" for="ch" forName="compNode" refType="h" fact="0.4"/>
+          <dgm:constr type="w" for="ch" forName="compNode" refType="w"/>
+          <dgm:constr type="w" for="ch" forName="sibTrans" refType="w" refFor="ch" refForName="compNode" fact="0.175"/>
+          <dgm:constr type="sp" refType="w" refFor="ch" refForName="compNode" op="equ" fact="0.25"/>
+          <dgm:constr type="primFontSz" for="des" ptType="node" op="equ" val="36"/>
+          <dgm:constr type="h" for="des" forName="compNode" op="equ"/>
+          <dgm:constr type="h" for="des" forName="textRect" op="equ"/>
+        </dgm:constrLst>
+      </dgm:if>
+      <dgm:else name="Name6">
+        <dgm:constrLst>
+          <dgm:constr type="h" for="ch" forName="compNode" refType="h" fact="0.4"/>
+          <dgm:constr type="w" for="ch" forName="compNode" refType="w"/>
+          <dgm:constr type="w" for="ch" forName="sibTrans" refType="w" refFor="ch" refForName="compNode" fact="0.175"/>
+          <dgm:constr type="sp" refType="w" refFor="ch" refForName="compNode" op="equ" fact="0.25"/>
+          <dgm:constr type="primFontSz" for="des" ptType="node" op="equ" val="24"/>
+          <dgm:constr type="h" for="des" forName="compNode" op="equ"/>
+          <dgm:constr type="h" for="des" forName="textRect" op="equ"/>
+        </dgm:constrLst>
+      </dgm:else>
+    </dgm:choose>
+    <dgm:ruleLst>
+      <dgm:rule type="w" for="ch" forName="compNode" val="50" fact="NaN" max="NaN"/>
+    </dgm:ruleLst>
+    <dgm:forEach name="Name7" axis="ch" ptType="node">
+      <dgm:layoutNode name="compNode">
+        <dgm:alg type="composite"/>
+        <dgm:shape xmlns:r="http://schemas.openxmlformats.org/officeDocument/2006/relationships" r:blip="">
+          <dgm:adjLst/>
+        </dgm:shape>
+        <dgm:presOf axis="self"/>
+        <dgm:constrLst>
+          <dgm:constr type="w" for="ch" forName="iconRect" refType="w" fact="0.45"/>
+          <dgm:constr type="h" for="ch" forName="iconRect" refType="w" refFor="ch" refForName="iconRect"/>
+          <dgm:constr type="ctrX" for="ch" forName="iconRect" refType="w" fact="0.5"/>
+          <dgm:constr type="t" for="ch" forName="iconRect"/>
+          <dgm:constr type="h" for="ch" forName="spaceRect" refType="h" fact="0.15"/>
+          <dgm:constr type="w" for="ch" forName="spaceRect" refType="w"/>
+          <dgm:constr type="l" for="ch" forName="spaceRect"/>
+          <dgm:constr type="t" for="ch" forName="spaceRect" refType="b" refFor="ch" refForName="iconRect"/>
+          <dgm:constr type="h" for="ch" forName="textRect" val="20"/>
+          <dgm:constr type="w" for="ch" forName="textRect" refType="w"/>
+          <dgm:constr type="l" for="ch" forName="textRect"/>
+          <dgm:constr type="t" for="ch" forName="textRect" refType="b" refFor="ch" refForName="spaceRect"/>
+        </dgm:constrLst>
+        <dgm:ruleLst>
+          <dgm:rule type="h" val="INF" fact="NaN" max="NaN"/>
+        </dgm:ruleLst>
+        <dgm:layoutNode name="iconRect" styleLbl="node1">
+          <dgm:alg type="sp"/>
+          <dgm:shape xmlns:r="http://schemas.openxmlformats.org/officeDocument/2006/relationships" type="rect" r:blip="" blipPhldr="1">
+            <dgm:adjLst/>
+          </dgm:shape>
+          <dgm:presOf/>
+          <dgm:constrLst/>
+          <dgm:ruleLst/>
+        </dgm:layoutNode>
+        <dgm:layoutNode name="spaceRect">
+          <dgm:alg type="sp"/>
+          <dgm:shape xmlns:r="http://schemas.openxmlformats.org/officeDocument/2006/relationships" r:blip="">
+            <dgm:adjLst/>
+          </dgm:shape>
+          <dgm:presOf/>
+          <dgm:constrLst/>
+          <dgm:ruleLst/>
+        </dgm:layoutNode>
+        <dgm:layoutNode name="textRect" styleLbl="revTx">
+          <dgm:varLst>
+            <dgm:chMax val="1"/>
+            <dgm:chPref val="1"/>
+          </dgm:varLst>
+          <dgm:alg type="tx">
+            <dgm:param type="txAnchorVert" val="t"/>
+          </dgm:alg>
+          <dgm:shape xmlns:r="http://schemas.openxmlformats.org/officeDocument/2006/relationships" type="rect" r:blip="">
+            <dgm:adjLst/>
+          </dgm:shape>
+          <dgm:presOf axis="self" ptType="node"/>
+          <dgm:constrLst>
+            <dgm:constr type="lMarg"/>
+            <dgm:constr type="rMarg"/>
+            <dgm:constr type="tMarg"/>
+            <dgm:constr type="bMarg"/>
+          </dgm:constrLst>
+          <dgm:ruleLst>
+            <dgm:rule type="primFontSz" val="11" fact="NaN" max="NaN"/>
+            <dgm:rule type="h" val="INF" fact="NaN" max="NaN"/>
+          </dgm:ruleLst>
+        </dgm:layoutNode>
+      </dgm:layoutNode>
+      <dgm:forEach name="Name8" axis="followSib" ptType="sibTrans" cnt="1">
+        <dgm:layoutNode name="sibTrans">
+          <dgm:alg type="sp"/>
+          <dgm:shape xmlns:r="http://schemas.openxmlformats.org/officeDocument/2006/relationships" r:blip="">
+            <dgm:adjLst/>
+          </dgm:shape>
+          <dgm:presOf axis="self"/>
+          <dgm:constrLst/>
+          <dgm:ruleLst/>
+        </dgm:layoutNode>
+      </dgm:forEach>
+    </dgm:forEach>
+  </dgm:layoutNode>
+  <dgm:extLst>
+    <a:ext uri="{68A01E43-0DF5-4B5B-8FA6-DAF915123BFB}">
+      <dgm1612:lstStyle xmlns:dgm1612="http://schemas.microsoft.com/office/drawing/2016/12/diagram">
+        <a:lvl1pPr>
+          <a:lnSpc>
+            <a:spcPct val="100000"/>
+          </a:lnSpc>
+        </a:lvl1pPr>
+      </dgm1612:lstStyle>
+    </a:ext>
+  </dgm:extLst>
+</dgm:layoutDef>
+</file>
+
 <file path=ppt/diagrams/quickStyle1.xml><?xml version="1.0" encoding="utf-8"?>
 <dgm:styleDef xmlns:dgm="http://schemas.openxmlformats.org/drawingml/2006/diagram" xmlns:a="http://schemas.openxmlformats.org/drawingml/2006/main" uniqueId="urn:microsoft.com/office/officeart/2005/8/quickstyle/simple1">
   <dgm:title val=""/>
@@ -3147,6 +6563,2508 @@
     </dgm:style>
   </dgm:styleLbl>
 </dgm:styleDef>
+</file>
+
+<file path=ppt/diagrams/quickStyle2.xml><?xml version="1.0" encoding="utf-8"?>
+<dgm:styleDef xmlns:dgm="http://schemas.openxmlformats.org/drawingml/2006/diagram" xmlns:a="http://schemas.openxmlformats.org/drawingml/2006/main" uniqueId="urn:microsoft.com/office/officeart/2005/8/quickstyle/simple1">
+  <dgm:title val=""/>
+  <dgm:desc val=""/>
+  <dgm:catLst>
+    <dgm:cat type="simple" pri="10100"/>
+  </dgm:catLst>
+  <dgm:scene3d>
+    <a:camera prst="orthographicFront"/>
+    <a:lightRig rig="threePt" dir="t"/>
+  </dgm:scene3d>
+  <dgm:styleLbl name="node0">
+    <dgm:scene3d>
+      <a:camera prst="orthographicFront"/>
+      <a:lightRig rig="threePt" dir="t"/>
+    </dgm:scene3d>
+    <dgm:sp3d/>
+    <dgm:txPr/>
+    <dgm:style>
+      <a:lnRef idx="2">
+        <a:scrgbClr r="0" g="0" b="0"/>
+      </a:lnRef>
+      <a:fillRef idx="1">
+        <a:scrgbClr r="0" g="0" b="0"/>
+      </a:fillRef>
+      <a:effectRef idx="0">
+        <a:scrgbClr r="0" g="0" b="0"/>
+      </a:effectRef>
+      <a:fontRef idx="minor">
+        <a:schemeClr val="lt1"/>
+      </a:fontRef>
+    </dgm:style>
+  </dgm:styleLbl>
+  <dgm:styleLbl name="lnNode1">
+    <dgm:scene3d>
+      <a:camera prst="orthographicFront"/>
+      <a:lightRig rig="threePt" dir="t"/>
+    </dgm:scene3d>
+    <dgm:sp3d/>
+    <dgm:txPr/>
+    <dgm:style>
+      <a:lnRef idx="2">
+        <a:scrgbClr r="0" g="0" b="0"/>
+      </a:lnRef>
+      <a:fillRef idx="1">
+        <a:scrgbClr r="0" g="0" b="0"/>
+      </a:fillRef>
+      <a:effectRef idx="0">
+        <a:scrgbClr r="0" g="0" b="0"/>
+      </a:effectRef>
+      <a:fontRef idx="minor">
+        <a:schemeClr val="lt1"/>
+      </a:fontRef>
+    </dgm:style>
+  </dgm:styleLbl>
+  <dgm:styleLbl name="vennNode1">
+    <dgm:scene3d>
+      <a:camera prst="orthographicFront"/>
+      <a:lightRig rig="threePt" dir="t"/>
+    </dgm:scene3d>
+    <dgm:sp3d/>
+    <dgm:txPr/>
+    <dgm:style>
+      <a:lnRef idx="2">
+        <a:scrgbClr r="0" g="0" b="0"/>
+      </a:lnRef>
+      <a:fillRef idx="1">
+        <a:scrgbClr r="0" g="0" b="0"/>
+      </a:fillRef>
+      <a:effectRef idx="0">
+        <a:scrgbClr r="0" g="0" b="0"/>
+      </a:effectRef>
+      <a:fontRef idx="minor">
+        <a:schemeClr val="tx1"/>
+      </a:fontRef>
+    </dgm:style>
+  </dgm:styleLbl>
+  <dgm:styleLbl name="alignNode1">
+    <dgm:scene3d>
+      <a:camera prst="orthographicFront"/>
+      <a:lightRig rig="threePt" dir="t"/>
+    </dgm:scene3d>
+    <dgm:sp3d/>
+    <dgm:txPr/>
+    <dgm:style>
+      <a:lnRef idx="2">
+        <a:scrgbClr r="0" g="0" b="0"/>
+      </a:lnRef>
+      <a:fillRef idx="1">
+        <a:scrgbClr r="0" g="0" b="0"/>
+      </a:fillRef>
+      <a:effectRef idx="0">
+        <a:scrgbClr r="0" g="0" b="0"/>
+      </a:effectRef>
+      <a:fontRef idx="minor">
+        <a:schemeClr val="lt1"/>
+      </a:fontRef>
+    </dgm:style>
+  </dgm:styleLbl>
+  <dgm:styleLbl name="node1">
+    <dgm:scene3d>
+      <a:camera prst="orthographicFront"/>
+      <a:lightRig rig="threePt" dir="t"/>
+    </dgm:scene3d>
+    <dgm:sp3d/>
+    <dgm:txPr/>
+    <dgm:style>
+      <a:lnRef idx="2">
+        <a:scrgbClr r="0" g="0" b="0"/>
+      </a:lnRef>
+      <a:fillRef idx="1">
+        <a:scrgbClr r="0" g="0" b="0"/>
+      </a:fillRef>
+      <a:effectRef idx="0">
+        <a:scrgbClr r="0" g="0" b="0"/>
+      </a:effectRef>
+      <a:fontRef idx="minor">
+        <a:schemeClr val="lt1"/>
+      </a:fontRef>
+    </dgm:style>
+  </dgm:styleLbl>
+  <dgm:styleLbl name="node2">
+    <dgm:scene3d>
+      <a:camera prst="orthographicFront"/>
+      <a:lightRig rig="threePt" dir="t"/>
+    </dgm:scene3d>
+    <dgm:sp3d/>
+    <dgm:txPr/>
+    <dgm:style>
+      <a:lnRef idx="2">
+        <a:scrgbClr r="0" g="0" b="0"/>
+      </a:lnRef>
+      <a:fillRef idx="1">
+        <a:scrgbClr r="0" g="0" b="0"/>
+      </a:fillRef>
+      <a:effectRef idx="0">
+        <a:scrgbClr r="0" g="0" b="0"/>
+      </a:effectRef>
+      <a:fontRef idx="minor">
+        <a:schemeClr val="lt1"/>
+      </a:fontRef>
+    </dgm:style>
+  </dgm:styleLbl>
+  <dgm:styleLbl name="node3">
+    <dgm:scene3d>
+      <a:camera prst="orthographicFront"/>
+      <a:lightRig rig="threePt" dir="t"/>
+    </dgm:scene3d>
+    <dgm:sp3d/>
+    <dgm:txPr/>
+    <dgm:style>
+      <a:lnRef idx="2">
+        <a:scrgbClr r="0" g="0" b="0"/>
+      </a:lnRef>
+      <a:fillRef idx="1">
+        <a:scrgbClr r="0" g="0" b="0"/>
+      </a:fillRef>
+      <a:effectRef idx="0">
+        <a:scrgbClr r="0" g="0" b="0"/>
+      </a:effectRef>
+      <a:fontRef idx="minor">
+        <a:schemeClr val="lt1"/>
+      </a:fontRef>
+    </dgm:style>
+  </dgm:styleLbl>
+  <dgm:styleLbl name="node4">
+    <dgm:scene3d>
+      <a:camera prst="orthographicFront"/>
+      <a:lightRig rig="threePt" dir="t"/>
+    </dgm:scene3d>
+    <dgm:sp3d/>
+    <dgm:txPr/>
+    <dgm:style>
+      <a:lnRef idx="2">
+        <a:scrgbClr r="0" g="0" b="0"/>
+      </a:lnRef>
+      <a:fillRef idx="1">
+        <a:scrgbClr r="0" g="0" b="0"/>
+      </a:fillRef>
+      <a:effectRef idx="0">
+        <a:scrgbClr r="0" g="0" b="0"/>
+      </a:effectRef>
+      <a:fontRef idx="minor">
+        <a:schemeClr val="lt1"/>
+      </a:fontRef>
+    </dgm:style>
+  </dgm:styleLbl>
+  <dgm:styleLbl name="fgImgPlace1">
+    <dgm:scene3d>
+      <a:camera prst="orthographicFront"/>
+      <a:lightRig rig="threePt" dir="t"/>
+    </dgm:scene3d>
+    <dgm:sp3d/>
+    <dgm:txPr/>
+    <dgm:style>
+      <a:lnRef idx="2">
+        <a:scrgbClr r="0" g="0" b="0"/>
+      </a:lnRef>
+      <a:fillRef idx="1">
+        <a:scrgbClr r="0" g="0" b="0"/>
+      </a:fillRef>
+      <a:effectRef idx="0">
+        <a:scrgbClr r="0" g="0" b="0"/>
+      </a:effectRef>
+      <a:fontRef idx="minor"/>
+    </dgm:style>
+  </dgm:styleLbl>
+  <dgm:styleLbl name="alignImgPlace1">
+    <dgm:scene3d>
+      <a:camera prst="orthographicFront"/>
+      <a:lightRig rig="threePt" dir="t"/>
+    </dgm:scene3d>
+    <dgm:sp3d/>
+    <dgm:txPr/>
+    <dgm:style>
+      <a:lnRef idx="2">
+        <a:scrgbClr r="0" g="0" b="0"/>
+      </a:lnRef>
+      <a:fillRef idx="1">
+        <a:scrgbClr r="0" g="0" b="0"/>
+      </a:fillRef>
+      <a:effectRef idx="0">
+        <a:scrgbClr r="0" g="0" b="0"/>
+      </a:effectRef>
+      <a:fontRef idx="minor"/>
+    </dgm:style>
+  </dgm:styleLbl>
+  <dgm:styleLbl name="bgImgPlace1">
+    <dgm:scene3d>
+      <a:camera prst="orthographicFront"/>
+      <a:lightRig rig="threePt" dir="t"/>
+    </dgm:scene3d>
+    <dgm:sp3d/>
+    <dgm:txPr/>
+    <dgm:style>
+      <a:lnRef idx="2">
+        <a:scrgbClr r="0" g="0" b="0"/>
+      </a:lnRef>
+      <a:fillRef idx="1">
+        <a:scrgbClr r="0" g="0" b="0"/>
+      </a:fillRef>
+      <a:effectRef idx="0">
+        <a:scrgbClr r="0" g="0" b="0"/>
+      </a:effectRef>
+      <a:fontRef idx="minor"/>
+    </dgm:style>
+  </dgm:styleLbl>
+  <dgm:styleLbl name="sibTrans2D1">
+    <dgm:scene3d>
+      <a:camera prst="orthographicFront"/>
+      <a:lightRig rig="threePt" dir="t"/>
+    </dgm:scene3d>
+    <dgm:sp3d/>
+    <dgm:txPr/>
+    <dgm:style>
+      <a:lnRef idx="0">
+        <a:scrgbClr r="0" g="0" b="0"/>
+      </a:lnRef>
+      <a:fillRef idx="1">
+        <a:scrgbClr r="0" g="0" b="0"/>
+      </a:fillRef>
+      <a:effectRef idx="0">
+        <a:scrgbClr r="0" g="0" b="0"/>
+      </a:effectRef>
+      <a:fontRef idx="minor">
+        <a:schemeClr val="lt1"/>
+      </a:fontRef>
+    </dgm:style>
+  </dgm:styleLbl>
+  <dgm:styleLbl name="fgSibTrans2D1">
+    <dgm:scene3d>
+      <a:camera prst="orthographicFront"/>
+      <a:lightRig rig="threePt" dir="t"/>
+    </dgm:scene3d>
+    <dgm:sp3d/>
+    <dgm:txPr/>
+    <dgm:style>
+      <a:lnRef idx="0">
+        <a:scrgbClr r="0" g="0" b="0"/>
+      </a:lnRef>
+      <a:fillRef idx="1">
+        <a:scrgbClr r="0" g="0" b="0"/>
+      </a:fillRef>
+      <a:effectRef idx="0">
+        <a:scrgbClr r="0" g="0" b="0"/>
+      </a:effectRef>
+      <a:fontRef idx="minor">
+        <a:schemeClr val="lt1"/>
+      </a:fontRef>
+    </dgm:style>
+  </dgm:styleLbl>
+  <dgm:styleLbl name="bgSibTrans2D1">
+    <dgm:scene3d>
+      <a:camera prst="orthographicFront"/>
+      <a:lightRig rig="threePt" dir="t"/>
+    </dgm:scene3d>
+    <dgm:sp3d/>
+    <dgm:txPr/>
+    <dgm:style>
+      <a:lnRef idx="0">
+        <a:scrgbClr r="0" g="0" b="0"/>
+      </a:lnRef>
+      <a:fillRef idx="1">
+        <a:scrgbClr r="0" g="0" b="0"/>
+      </a:fillRef>
+      <a:effectRef idx="0">
+        <a:scrgbClr r="0" g="0" b="0"/>
+      </a:effectRef>
+      <a:fontRef idx="minor">
+        <a:schemeClr val="lt1"/>
+      </a:fontRef>
+    </dgm:style>
+  </dgm:styleLbl>
+  <dgm:styleLbl name="sibTrans1D1">
+    <dgm:scene3d>
+      <a:camera prst="orthographicFront"/>
+      <a:lightRig rig="threePt" dir="t"/>
+    </dgm:scene3d>
+    <dgm:sp3d/>
+    <dgm:txPr/>
+    <dgm:style>
+      <a:lnRef idx="1">
+        <a:scrgbClr r="0" g="0" b="0"/>
+      </a:lnRef>
+      <a:fillRef idx="0">
+        <a:scrgbClr r="0" g="0" b="0"/>
+      </a:fillRef>
+      <a:effectRef idx="0">
+        <a:scrgbClr r="0" g="0" b="0"/>
+      </a:effectRef>
+      <a:fontRef idx="minor"/>
+    </dgm:style>
+  </dgm:styleLbl>
+  <dgm:styleLbl name="callout">
+    <dgm:scene3d>
+      <a:camera prst="orthographicFront"/>
+      <a:lightRig rig="threePt" dir="t"/>
+    </dgm:scene3d>
+    <dgm:sp3d/>
+    <dgm:txPr/>
+    <dgm:style>
+      <a:lnRef idx="2">
+        <a:scrgbClr r="0" g="0" b="0"/>
+      </a:lnRef>
+      <a:fillRef idx="1">
+        <a:scrgbClr r="0" g="0" b="0"/>
+      </a:fillRef>
+      <a:effectRef idx="0">
+        <a:scrgbClr r="0" g="0" b="0"/>
+      </a:effectRef>
+      <a:fontRef idx="minor"/>
+    </dgm:style>
+  </dgm:styleLbl>
+  <dgm:styleLbl name="asst0">
+    <dgm:scene3d>
+      <a:camera prst="orthographicFront"/>
+      <a:lightRig rig="threePt" dir="t"/>
+    </dgm:scene3d>
+    <dgm:sp3d/>
+    <dgm:txPr/>
+    <dgm:style>
+      <a:lnRef idx="2">
+        <a:scrgbClr r="0" g="0" b="0"/>
+      </a:lnRef>
+      <a:fillRef idx="1">
+        <a:scrgbClr r="0" g="0" b="0"/>
+      </a:fillRef>
+      <a:effectRef idx="0">
+        <a:scrgbClr r="0" g="0" b="0"/>
+      </a:effectRef>
+      <a:fontRef idx="minor">
+        <a:schemeClr val="lt1"/>
+      </a:fontRef>
+    </dgm:style>
+  </dgm:styleLbl>
+  <dgm:styleLbl name="asst1">
+    <dgm:scene3d>
+      <a:camera prst="orthographicFront"/>
+      <a:lightRig rig="threePt" dir="t"/>
+    </dgm:scene3d>
+    <dgm:sp3d/>
+    <dgm:txPr/>
+    <dgm:style>
+      <a:lnRef idx="2">
+        <a:scrgbClr r="0" g="0" b="0"/>
+      </a:lnRef>
+      <a:fillRef idx="1">
+        <a:scrgbClr r="0" g="0" b="0"/>
+      </a:fillRef>
+      <a:effectRef idx="0">
+        <a:scrgbClr r="0" g="0" b="0"/>
+      </a:effectRef>
+      <a:fontRef idx="minor">
+        <a:schemeClr val="lt1"/>
+      </a:fontRef>
+    </dgm:style>
+  </dgm:styleLbl>
+  <dgm:styleLbl name="asst2">
+    <dgm:scene3d>
+      <a:camera prst="orthographicFront"/>
+      <a:lightRig rig="threePt" dir="t"/>
+    </dgm:scene3d>
+    <dgm:sp3d/>
+    <dgm:txPr/>
+    <dgm:style>
+      <a:lnRef idx="2">
+        <a:scrgbClr r="0" g="0" b="0"/>
+      </a:lnRef>
+      <a:fillRef idx="1">
+        <a:scrgbClr r="0" g="0" b="0"/>
+      </a:fillRef>
+      <a:effectRef idx="0">
+        <a:scrgbClr r="0" g="0" b="0"/>
+      </a:effectRef>
+      <a:fontRef idx="minor">
+        <a:schemeClr val="lt1"/>
+      </a:fontRef>
+    </dgm:style>
+  </dgm:styleLbl>
+  <dgm:styleLbl name="asst3">
+    <dgm:scene3d>
+      <a:camera prst="orthographicFront"/>
+      <a:lightRig rig="threePt" dir="t"/>
+    </dgm:scene3d>
+    <dgm:sp3d/>
+    <dgm:txPr/>
+    <dgm:style>
+      <a:lnRef idx="2">
+        <a:scrgbClr r="0" g="0" b="0"/>
+      </a:lnRef>
+      <a:fillRef idx="1">
+        <a:scrgbClr r="0" g="0" b="0"/>
+      </a:fillRef>
+      <a:effectRef idx="0">
+        <a:scrgbClr r="0" g="0" b="0"/>
+      </a:effectRef>
+      <a:fontRef idx="minor">
+        <a:schemeClr val="lt1"/>
+      </a:fontRef>
+    </dgm:style>
+  </dgm:styleLbl>
+  <dgm:styleLbl name="asst4">
+    <dgm:scene3d>
+      <a:camera prst="orthographicFront"/>
+      <a:lightRig rig="threePt" dir="t"/>
+    </dgm:scene3d>
+    <dgm:sp3d/>
+    <dgm:txPr/>
+    <dgm:style>
+      <a:lnRef idx="2">
+        <a:scrgbClr r="0" g="0" b="0"/>
+      </a:lnRef>
+      <a:fillRef idx="1">
+        <a:scrgbClr r="0" g="0" b="0"/>
+      </a:fillRef>
+      <a:effectRef idx="0">
+        <a:scrgbClr r="0" g="0" b="0"/>
+      </a:effectRef>
+      <a:fontRef idx="minor">
+        <a:schemeClr val="lt1"/>
+      </a:fontRef>
+    </dgm:style>
+  </dgm:styleLbl>
+  <dgm:styleLbl name="parChTrans2D1">
+    <dgm:scene3d>
+      <a:camera prst="orthographicFront"/>
+      <a:lightRig rig="threePt" dir="t"/>
+    </dgm:scene3d>
+    <dgm:sp3d/>
+    <dgm:txPr/>
+    <dgm:style>
+      <a:lnRef idx="2">
+        <a:scrgbClr r="0" g="0" b="0"/>
+      </a:lnRef>
+      <a:fillRef idx="1">
+        <a:scrgbClr r="0" g="0" b="0"/>
+      </a:fillRef>
+      <a:effectRef idx="0">
+        <a:scrgbClr r="0" g="0" b="0"/>
+      </a:effectRef>
+      <a:fontRef idx="minor">
+        <a:schemeClr val="lt1"/>
+      </a:fontRef>
+    </dgm:style>
+  </dgm:styleLbl>
+  <dgm:styleLbl name="parChTrans2D2">
+    <dgm:scene3d>
+      <a:camera prst="orthographicFront"/>
+      <a:lightRig rig="threePt" dir="t"/>
+    </dgm:scene3d>
+    <dgm:sp3d/>
+    <dgm:txPr/>
+    <dgm:style>
+      <a:lnRef idx="2">
+        <a:scrgbClr r="0" g="0" b="0"/>
+      </a:lnRef>
+      <a:fillRef idx="1">
+        <a:scrgbClr r="0" g="0" b="0"/>
+      </a:fillRef>
+      <a:effectRef idx="0">
+        <a:scrgbClr r="0" g="0" b="0"/>
+      </a:effectRef>
+      <a:fontRef idx="minor">
+        <a:schemeClr val="lt1"/>
+      </a:fontRef>
+    </dgm:style>
+  </dgm:styleLbl>
+  <dgm:styleLbl name="parChTrans2D3">
+    <dgm:scene3d>
+      <a:camera prst="orthographicFront"/>
+      <a:lightRig rig="threePt" dir="t"/>
+    </dgm:scene3d>
+    <dgm:sp3d/>
+    <dgm:txPr/>
+    <dgm:style>
+      <a:lnRef idx="2">
+        <a:scrgbClr r="0" g="0" b="0"/>
+      </a:lnRef>
+      <a:fillRef idx="1">
+        <a:scrgbClr r="0" g="0" b="0"/>
+      </a:fillRef>
+      <a:effectRef idx="0">
+        <a:scrgbClr r="0" g="0" b="0"/>
+      </a:effectRef>
+      <a:fontRef idx="minor">
+        <a:schemeClr val="lt1"/>
+      </a:fontRef>
+    </dgm:style>
+  </dgm:styleLbl>
+  <dgm:styleLbl name="parChTrans2D4">
+    <dgm:scene3d>
+      <a:camera prst="orthographicFront"/>
+      <a:lightRig rig="threePt" dir="t"/>
+    </dgm:scene3d>
+    <dgm:sp3d/>
+    <dgm:txPr/>
+    <dgm:style>
+      <a:lnRef idx="2">
+        <a:scrgbClr r="0" g="0" b="0"/>
+      </a:lnRef>
+      <a:fillRef idx="1">
+        <a:scrgbClr r="0" g="0" b="0"/>
+      </a:fillRef>
+      <a:effectRef idx="0">
+        <a:scrgbClr r="0" g="0" b="0"/>
+      </a:effectRef>
+      <a:fontRef idx="minor">
+        <a:schemeClr val="lt1"/>
+      </a:fontRef>
+    </dgm:style>
+  </dgm:styleLbl>
+  <dgm:styleLbl name="parChTrans1D1">
+    <dgm:scene3d>
+      <a:camera prst="orthographicFront"/>
+      <a:lightRig rig="threePt" dir="t"/>
+    </dgm:scene3d>
+    <dgm:sp3d/>
+    <dgm:txPr/>
+    <dgm:style>
+      <a:lnRef idx="2">
+        <a:scrgbClr r="0" g="0" b="0"/>
+      </a:lnRef>
+      <a:fillRef idx="0">
+        <a:scrgbClr r="0" g="0" b="0"/>
+      </a:fillRef>
+      <a:effectRef idx="0">
+        <a:scrgbClr r="0" g="0" b="0"/>
+      </a:effectRef>
+      <a:fontRef idx="minor"/>
+    </dgm:style>
+  </dgm:styleLbl>
+  <dgm:styleLbl name="parChTrans1D2">
+    <dgm:scene3d>
+      <a:camera prst="orthographicFront"/>
+      <a:lightRig rig="threePt" dir="t"/>
+    </dgm:scene3d>
+    <dgm:sp3d/>
+    <dgm:txPr/>
+    <dgm:style>
+      <a:lnRef idx="2">
+        <a:scrgbClr r="0" g="0" b="0"/>
+      </a:lnRef>
+      <a:fillRef idx="0">
+        <a:scrgbClr r="0" g="0" b="0"/>
+      </a:fillRef>
+      <a:effectRef idx="0">
+        <a:scrgbClr r="0" g="0" b="0"/>
+      </a:effectRef>
+      <a:fontRef idx="minor"/>
+    </dgm:style>
+  </dgm:styleLbl>
+  <dgm:styleLbl name="parChTrans1D3">
+    <dgm:scene3d>
+      <a:camera prst="orthographicFront"/>
+      <a:lightRig rig="threePt" dir="t"/>
+    </dgm:scene3d>
+    <dgm:sp3d/>
+    <dgm:txPr/>
+    <dgm:style>
+      <a:lnRef idx="2">
+        <a:scrgbClr r="0" g="0" b="0"/>
+      </a:lnRef>
+      <a:fillRef idx="0">
+        <a:scrgbClr r="0" g="0" b="0"/>
+      </a:fillRef>
+      <a:effectRef idx="0">
+        <a:scrgbClr r="0" g="0" b="0"/>
+      </a:effectRef>
+      <a:fontRef idx="minor"/>
+    </dgm:style>
+  </dgm:styleLbl>
+  <dgm:styleLbl name="parChTrans1D4">
+    <dgm:scene3d>
+      <a:camera prst="orthographicFront"/>
+      <a:lightRig rig="threePt" dir="t"/>
+    </dgm:scene3d>
+    <dgm:sp3d/>
+    <dgm:txPr/>
+    <dgm:style>
+      <a:lnRef idx="2">
+        <a:scrgbClr r="0" g="0" b="0"/>
+      </a:lnRef>
+      <a:fillRef idx="0">
+        <a:scrgbClr r="0" g="0" b="0"/>
+      </a:fillRef>
+      <a:effectRef idx="0">
+        <a:scrgbClr r="0" g="0" b="0"/>
+      </a:effectRef>
+      <a:fontRef idx="minor"/>
+    </dgm:style>
+  </dgm:styleLbl>
+  <dgm:styleLbl name="fgAcc1">
+    <dgm:scene3d>
+      <a:camera prst="orthographicFront"/>
+      <a:lightRig rig="threePt" dir="t"/>
+    </dgm:scene3d>
+    <dgm:sp3d/>
+    <dgm:txPr/>
+    <dgm:style>
+      <a:lnRef idx="2">
+        <a:scrgbClr r="0" g="0" b="0"/>
+      </a:lnRef>
+      <a:fillRef idx="1">
+        <a:scrgbClr r="0" g="0" b="0"/>
+      </a:fillRef>
+      <a:effectRef idx="0">
+        <a:scrgbClr r="0" g="0" b="0"/>
+      </a:effectRef>
+      <a:fontRef idx="minor"/>
+    </dgm:style>
+  </dgm:styleLbl>
+  <dgm:styleLbl name="conFgAcc1">
+    <dgm:scene3d>
+      <a:camera prst="orthographicFront"/>
+      <a:lightRig rig="threePt" dir="t"/>
+    </dgm:scene3d>
+    <dgm:sp3d/>
+    <dgm:txPr/>
+    <dgm:style>
+      <a:lnRef idx="2">
+        <a:scrgbClr r="0" g="0" b="0"/>
+      </a:lnRef>
+      <a:fillRef idx="1">
+        <a:scrgbClr r="0" g="0" b="0"/>
+      </a:fillRef>
+      <a:effectRef idx="0">
+        <a:scrgbClr r="0" g="0" b="0"/>
+      </a:effectRef>
+      <a:fontRef idx="minor"/>
+    </dgm:style>
+  </dgm:styleLbl>
+  <dgm:styleLbl name="alignAcc1">
+    <dgm:scene3d>
+      <a:camera prst="orthographicFront"/>
+      <a:lightRig rig="threePt" dir="t"/>
+    </dgm:scene3d>
+    <dgm:sp3d/>
+    <dgm:txPr/>
+    <dgm:style>
+      <a:lnRef idx="2">
+        <a:scrgbClr r="0" g="0" b="0"/>
+      </a:lnRef>
+      <a:fillRef idx="1">
+        <a:scrgbClr r="0" g="0" b="0"/>
+      </a:fillRef>
+      <a:effectRef idx="0">
+        <a:scrgbClr r="0" g="0" b="0"/>
+      </a:effectRef>
+      <a:fontRef idx="minor"/>
+    </dgm:style>
+  </dgm:styleLbl>
+  <dgm:styleLbl name="trAlignAcc1">
+    <dgm:scene3d>
+      <a:camera prst="orthographicFront"/>
+      <a:lightRig rig="threePt" dir="t"/>
+    </dgm:scene3d>
+    <dgm:sp3d/>
+    <dgm:txPr/>
+    <dgm:style>
+      <a:lnRef idx="1">
+        <a:scrgbClr r="0" g="0" b="0"/>
+      </a:lnRef>
+      <a:fillRef idx="1">
+        <a:scrgbClr r="0" g="0" b="0"/>
+      </a:fillRef>
+      <a:effectRef idx="0">
+        <a:scrgbClr r="0" g="0" b="0"/>
+      </a:effectRef>
+      <a:fontRef idx="minor"/>
+    </dgm:style>
+  </dgm:styleLbl>
+  <dgm:styleLbl name="bgAcc1">
+    <dgm:scene3d>
+      <a:camera prst="orthographicFront"/>
+      <a:lightRig rig="threePt" dir="t"/>
+    </dgm:scene3d>
+    <dgm:sp3d/>
+    <dgm:txPr/>
+    <dgm:style>
+      <a:lnRef idx="2">
+        <a:scrgbClr r="0" g="0" b="0"/>
+      </a:lnRef>
+      <a:fillRef idx="1">
+        <a:scrgbClr r="0" g="0" b="0"/>
+      </a:fillRef>
+      <a:effectRef idx="0">
+        <a:scrgbClr r="0" g="0" b="0"/>
+      </a:effectRef>
+      <a:fontRef idx="minor"/>
+    </dgm:style>
+  </dgm:styleLbl>
+  <dgm:styleLbl name="solidFgAcc1">
+    <dgm:scene3d>
+      <a:camera prst="orthographicFront"/>
+      <a:lightRig rig="threePt" dir="t"/>
+    </dgm:scene3d>
+    <dgm:sp3d/>
+    <dgm:txPr/>
+    <dgm:style>
+      <a:lnRef idx="2">
+        <a:scrgbClr r="0" g="0" b="0"/>
+      </a:lnRef>
+      <a:fillRef idx="1">
+        <a:scrgbClr r="0" g="0" b="0"/>
+      </a:fillRef>
+      <a:effectRef idx="0">
+        <a:scrgbClr r="0" g="0" b="0"/>
+      </a:effectRef>
+      <a:fontRef idx="minor"/>
+    </dgm:style>
+  </dgm:styleLbl>
+  <dgm:styleLbl name="solidAlignAcc1">
+    <dgm:scene3d>
+      <a:camera prst="orthographicFront"/>
+      <a:lightRig rig="threePt" dir="t"/>
+    </dgm:scene3d>
+    <dgm:sp3d/>
+    <dgm:txPr/>
+    <dgm:style>
+      <a:lnRef idx="2">
+        <a:scrgbClr r="0" g="0" b="0"/>
+      </a:lnRef>
+      <a:fillRef idx="1">
+        <a:scrgbClr r="0" g="0" b="0"/>
+      </a:fillRef>
+      <a:effectRef idx="0">
+        <a:scrgbClr r="0" g="0" b="0"/>
+      </a:effectRef>
+      <a:fontRef idx="minor"/>
+    </dgm:style>
+  </dgm:styleLbl>
+  <dgm:styleLbl name="solidBgAcc1">
+    <dgm:scene3d>
+      <a:camera prst="orthographicFront"/>
+      <a:lightRig rig="threePt" dir="t"/>
+    </dgm:scene3d>
+    <dgm:sp3d/>
+    <dgm:txPr/>
+    <dgm:style>
+      <a:lnRef idx="2">
+        <a:scrgbClr r="0" g="0" b="0"/>
+      </a:lnRef>
+      <a:fillRef idx="1">
+        <a:scrgbClr r="0" g="0" b="0"/>
+      </a:fillRef>
+      <a:effectRef idx="0">
+        <a:scrgbClr r="0" g="0" b="0"/>
+      </a:effectRef>
+      <a:fontRef idx="minor"/>
+    </dgm:style>
+  </dgm:styleLbl>
+  <dgm:styleLbl name="fgAccFollowNode1">
+    <dgm:scene3d>
+      <a:camera prst="orthographicFront"/>
+      <a:lightRig rig="threePt" dir="t"/>
+    </dgm:scene3d>
+    <dgm:sp3d/>
+    <dgm:txPr/>
+    <dgm:style>
+      <a:lnRef idx="2">
+        <a:scrgbClr r="0" g="0" b="0"/>
+      </a:lnRef>
+      <a:fillRef idx="1">
+        <a:scrgbClr r="0" g="0" b="0"/>
+      </a:fillRef>
+      <a:effectRef idx="0">
+        <a:scrgbClr r="0" g="0" b="0"/>
+      </a:effectRef>
+      <a:fontRef idx="minor"/>
+    </dgm:style>
+  </dgm:styleLbl>
+  <dgm:styleLbl name="alignAccFollowNode1">
+    <dgm:scene3d>
+      <a:camera prst="orthographicFront"/>
+      <a:lightRig rig="threePt" dir="t"/>
+    </dgm:scene3d>
+    <dgm:sp3d/>
+    <dgm:txPr/>
+    <dgm:style>
+      <a:lnRef idx="2">
+        <a:scrgbClr r="0" g="0" b="0"/>
+      </a:lnRef>
+      <a:fillRef idx="1">
+        <a:scrgbClr r="0" g="0" b="0"/>
+      </a:fillRef>
+      <a:effectRef idx="0">
+        <a:scrgbClr r="0" g="0" b="0"/>
+      </a:effectRef>
+      <a:fontRef idx="minor"/>
+    </dgm:style>
+  </dgm:styleLbl>
+  <dgm:styleLbl name="bgAccFollowNode1">
+    <dgm:scene3d>
+      <a:camera prst="orthographicFront"/>
+      <a:lightRig rig="threePt" dir="t"/>
+    </dgm:scene3d>
+    <dgm:sp3d/>
+    <dgm:txPr/>
+    <dgm:style>
+      <a:lnRef idx="2">
+        <a:scrgbClr r="0" g="0" b="0"/>
+      </a:lnRef>
+      <a:fillRef idx="1">
+        <a:scrgbClr r="0" g="0" b="0"/>
+      </a:fillRef>
+      <a:effectRef idx="0">
+        <a:scrgbClr r="0" g="0" b="0"/>
+      </a:effectRef>
+      <a:fontRef idx="minor"/>
+    </dgm:style>
+  </dgm:styleLbl>
+  <dgm:styleLbl name="fgAcc0">
+    <dgm:scene3d>
+      <a:camera prst="orthographicFront"/>
+      <a:lightRig rig="threePt" dir="t"/>
+    </dgm:scene3d>
+    <dgm:sp3d/>
+    <dgm:txPr/>
+    <dgm:style>
+      <a:lnRef idx="2">
+        <a:scrgbClr r="0" g="0" b="0"/>
+      </a:lnRef>
+      <a:fillRef idx="1">
+        <a:scrgbClr r="0" g="0" b="0"/>
+      </a:fillRef>
+      <a:effectRef idx="0">
+        <a:scrgbClr r="0" g="0" b="0"/>
+      </a:effectRef>
+      <a:fontRef idx="minor"/>
+    </dgm:style>
+  </dgm:styleLbl>
+  <dgm:styleLbl name="fgAcc2">
+    <dgm:scene3d>
+      <a:camera prst="orthographicFront"/>
+      <a:lightRig rig="threePt" dir="t"/>
+    </dgm:scene3d>
+    <dgm:sp3d/>
+    <dgm:txPr/>
+    <dgm:style>
+      <a:lnRef idx="2">
+        <a:scrgbClr r="0" g="0" b="0"/>
+      </a:lnRef>
+      <a:fillRef idx="1">
+        <a:scrgbClr r="0" g="0" b="0"/>
+      </a:fillRef>
+      <a:effectRef idx="0">
+        <a:scrgbClr r="0" g="0" b="0"/>
+      </a:effectRef>
+      <a:fontRef idx="minor"/>
+    </dgm:style>
+  </dgm:styleLbl>
+  <dgm:styleLbl name="fgAcc3">
+    <dgm:scene3d>
+      <a:camera prst="orthographicFront"/>
+      <a:lightRig rig="threePt" dir="t"/>
+    </dgm:scene3d>
+    <dgm:sp3d/>
+    <dgm:txPr/>
+    <dgm:style>
+      <a:lnRef idx="2">
+        <a:scrgbClr r="0" g="0" b="0"/>
+      </a:lnRef>
+      <a:fillRef idx="1">
+        <a:scrgbClr r="0" g="0" b="0"/>
+      </a:fillRef>
+      <a:effectRef idx="0">
+        <a:scrgbClr r="0" g="0" b="0"/>
+      </a:effectRef>
+      <a:fontRef idx="minor"/>
+    </dgm:style>
+  </dgm:styleLbl>
+  <dgm:styleLbl name="fgAcc4">
+    <dgm:scene3d>
+      <a:camera prst="orthographicFront"/>
+      <a:lightRig rig="threePt" dir="t"/>
+    </dgm:scene3d>
+    <dgm:sp3d/>
+    <dgm:txPr/>
+    <dgm:style>
+      <a:lnRef idx="2">
+        <a:scrgbClr r="0" g="0" b="0"/>
+      </a:lnRef>
+      <a:fillRef idx="1">
+        <a:scrgbClr r="0" g="0" b="0"/>
+      </a:fillRef>
+      <a:effectRef idx="0">
+        <a:scrgbClr r="0" g="0" b="0"/>
+      </a:effectRef>
+      <a:fontRef idx="minor"/>
+    </dgm:style>
+  </dgm:styleLbl>
+  <dgm:styleLbl name="bgShp">
+    <dgm:scene3d>
+      <a:camera prst="orthographicFront"/>
+      <a:lightRig rig="threePt" dir="t"/>
+    </dgm:scene3d>
+    <dgm:sp3d/>
+    <dgm:txPr/>
+    <dgm:style>
+      <a:lnRef idx="0">
+        <a:scrgbClr r="0" g="0" b="0"/>
+      </a:lnRef>
+      <a:fillRef idx="1">
+        <a:scrgbClr r="0" g="0" b="0"/>
+      </a:fillRef>
+      <a:effectRef idx="0">
+        <a:scrgbClr r="0" g="0" b="0"/>
+      </a:effectRef>
+      <a:fontRef idx="minor"/>
+    </dgm:style>
+  </dgm:styleLbl>
+  <dgm:styleLbl name="dkBgShp">
+    <dgm:scene3d>
+      <a:camera prst="orthographicFront"/>
+      <a:lightRig rig="threePt" dir="t"/>
+    </dgm:scene3d>
+    <dgm:sp3d/>
+    <dgm:txPr/>
+    <dgm:style>
+      <a:lnRef idx="0">
+        <a:scrgbClr r="0" g="0" b="0"/>
+      </a:lnRef>
+      <a:fillRef idx="1">
+        <a:scrgbClr r="0" g="0" b="0"/>
+      </a:fillRef>
+      <a:effectRef idx="0">
+        <a:scrgbClr r="0" g="0" b="0"/>
+      </a:effectRef>
+      <a:fontRef idx="minor"/>
+    </dgm:style>
+  </dgm:styleLbl>
+  <dgm:styleLbl name="trBgShp">
+    <dgm:scene3d>
+      <a:camera prst="orthographicFront"/>
+      <a:lightRig rig="threePt" dir="t"/>
+    </dgm:scene3d>
+    <dgm:sp3d/>
+    <dgm:txPr/>
+    <dgm:style>
+      <a:lnRef idx="0">
+        <a:scrgbClr r="0" g="0" b="0"/>
+      </a:lnRef>
+      <a:fillRef idx="1">
+        <a:scrgbClr r="0" g="0" b="0"/>
+      </a:fillRef>
+      <a:effectRef idx="0">
+        <a:scrgbClr r="0" g="0" b="0"/>
+      </a:effectRef>
+      <a:fontRef idx="minor"/>
+    </dgm:style>
+  </dgm:styleLbl>
+  <dgm:styleLbl name="fgShp">
+    <dgm:scene3d>
+      <a:camera prst="orthographicFront"/>
+      <a:lightRig rig="threePt" dir="t"/>
+    </dgm:scene3d>
+    <dgm:sp3d/>
+    <dgm:txPr/>
+    <dgm:style>
+      <a:lnRef idx="2">
+        <a:scrgbClr r="0" g="0" b="0"/>
+      </a:lnRef>
+      <a:fillRef idx="1">
+        <a:scrgbClr r="0" g="0" b="0"/>
+      </a:fillRef>
+      <a:effectRef idx="0">
+        <a:scrgbClr r="0" g="0" b="0"/>
+      </a:effectRef>
+      <a:fontRef idx="minor"/>
+    </dgm:style>
+  </dgm:styleLbl>
+  <dgm:styleLbl name="revTx">
+    <dgm:scene3d>
+      <a:camera prst="orthographicFront"/>
+      <a:lightRig rig="threePt" dir="t"/>
+    </dgm:scene3d>
+    <dgm:sp3d/>
+    <dgm:txPr/>
+    <dgm:style>
+      <a:lnRef idx="0">
+        <a:scrgbClr r="0" g="0" b="0"/>
+      </a:lnRef>
+      <a:fillRef idx="0">
+        <a:scrgbClr r="0" g="0" b="0"/>
+      </a:fillRef>
+      <a:effectRef idx="0">
+        <a:scrgbClr r="0" g="0" b="0"/>
+      </a:effectRef>
+      <a:fontRef idx="minor"/>
+    </dgm:style>
+  </dgm:styleLbl>
+</dgm:styleDef>
+</file>
+
+<file path=ppt/diagrams/quickStyle3.xml><?xml version="1.0" encoding="utf-8"?>
+<dgm:styleDef xmlns:dgm="http://schemas.openxmlformats.org/drawingml/2006/diagram" xmlns:a="http://schemas.openxmlformats.org/drawingml/2006/main" uniqueId="urn:microsoft.com/office/officeart/2005/8/quickstyle/simple1">
+  <dgm:title val=""/>
+  <dgm:desc val=""/>
+  <dgm:catLst>
+    <dgm:cat type="simple" pri="10100"/>
+  </dgm:catLst>
+  <dgm:scene3d>
+    <a:camera prst="orthographicFront"/>
+    <a:lightRig rig="threePt" dir="t"/>
+  </dgm:scene3d>
+  <dgm:styleLbl name="node0">
+    <dgm:scene3d>
+      <a:camera prst="orthographicFront"/>
+      <a:lightRig rig="threePt" dir="t"/>
+    </dgm:scene3d>
+    <dgm:sp3d/>
+    <dgm:txPr/>
+    <dgm:style>
+      <a:lnRef idx="2">
+        <a:scrgbClr r="0" g="0" b="0"/>
+      </a:lnRef>
+      <a:fillRef idx="1">
+        <a:scrgbClr r="0" g="0" b="0"/>
+      </a:fillRef>
+      <a:effectRef idx="0">
+        <a:scrgbClr r="0" g="0" b="0"/>
+      </a:effectRef>
+      <a:fontRef idx="minor">
+        <a:schemeClr val="lt1"/>
+      </a:fontRef>
+    </dgm:style>
+  </dgm:styleLbl>
+  <dgm:styleLbl name="lnNode1">
+    <dgm:scene3d>
+      <a:camera prst="orthographicFront"/>
+      <a:lightRig rig="threePt" dir="t"/>
+    </dgm:scene3d>
+    <dgm:sp3d/>
+    <dgm:txPr/>
+    <dgm:style>
+      <a:lnRef idx="2">
+        <a:scrgbClr r="0" g="0" b="0"/>
+      </a:lnRef>
+      <a:fillRef idx="1">
+        <a:scrgbClr r="0" g="0" b="0"/>
+      </a:fillRef>
+      <a:effectRef idx="0">
+        <a:scrgbClr r="0" g="0" b="0"/>
+      </a:effectRef>
+      <a:fontRef idx="minor">
+        <a:schemeClr val="lt1"/>
+      </a:fontRef>
+    </dgm:style>
+  </dgm:styleLbl>
+  <dgm:styleLbl name="vennNode1">
+    <dgm:scene3d>
+      <a:camera prst="orthographicFront"/>
+      <a:lightRig rig="threePt" dir="t"/>
+    </dgm:scene3d>
+    <dgm:sp3d/>
+    <dgm:txPr/>
+    <dgm:style>
+      <a:lnRef idx="2">
+        <a:scrgbClr r="0" g="0" b="0"/>
+      </a:lnRef>
+      <a:fillRef idx="1">
+        <a:scrgbClr r="0" g="0" b="0"/>
+      </a:fillRef>
+      <a:effectRef idx="0">
+        <a:scrgbClr r="0" g="0" b="0"/>
+      </a:effectRef>
+      <a:fontRef idx="minor">
+        <a:schemeClr val="tx1"/>
+      </a:fontRef>
+    </dgm:style>
+  </dgm:styleLbl>
+  <dgm:styleLbl name="alignNode1">
+    <dgm:scene3d>
+      <a:camera prst="orthographicFront"/>
+      <a:lightRig rig="threePt" dir="t"/>
+    </dgm:scene3d>
+    <dgm:sp3d/>
+    <dgm:txPr/>
+    <dgm:style>
+      <a:lnRef idx="2">
+        <a:scrgbClr r="0" g="0" b="0"/>
+      </a:lnRef>
+      <a:fillRef idx="1">
+        <a:scrgbClr r="0" g="0" b="0"/>
+      </a:fillRef>
+      <a:effectRef idx="0">
+        <a:scrgbClr r="0" g="0" b="0"/>
+      </a:effectRef>
+      <a:fontRef idx="minor">
+        <a:schemeClr val="lt1"/>
+      </a:fontRef>
+    </dgm:style>
+  </dgm:styleLbl>
+  <dgm:styleLbl name="node1">
+    <dgm:scene3d>
+      <a:camera prst="orthographicFront"/>
+      <a:lightRig rig="threePt" dir="t"/>
+    </dgm:scene3d>
+    <dgm:sp3d/>
+    <dgm:txPr/>
+    <dgm:style>
+      <a:lnRef idx="2">
+        <a:scrgbClr r="0" g="0" b="0"/>
+      </a:lnRef>
+      <a:fillRef idx="1">
+        <a:scrgbClr r="0" g="0" b="0"/>
+      </a:fillRef>
+      <a:effectRef idx="0">
+        <a:scrgbClr r="0" g="0" b="0"/>
+      </a:effectRef>
+      <a:fontRef idx="minor">
+        <a:schemeClr val="lt1"/>
+      </a:fontRef>
+    </dgm:style>
+  </dgm:styleLbl>
+  <dgm:styleLbl name="node2">
+    <dgm:scene3d>
+      <a:camera prst="orthographicFront"/>
+      <a:lightRig rig="threePt" dir="t"/>
+    </dgm:scene3d>
+    <dgm:sp3d/>
+    <dgm:txPr/>
+    <dgm:style>
+      <a:lnRef idx="2">
+        <a:scrgbClr r="0" g="0" b="0"/>
+      </a:lnRef>
+      <a:fillRef idx="1">
+        <a:scrgbClr r="0" g="0" b="0"/>
+      </a:fillRef>
+      <a:effectRef idx="0">
+        <a:scrgbClr r="0" g="0" b="0"/>
+      </a:effectRef>
+      <a:fontRef idx="minor">
+        <a:schemeClr val="lt1"/>
+      </a:fontRef>
+    </dgm:style>
+  </dgm:styleLbl>
+  <dgm:styleLbl name="node3">
+    <dgm:scene3d>
+      <a:camera prst="orthographicFront"/>
+      <a:lightRig rig="threePt" dir="t"/>
+    </dgm:scene3d>
+    <dgm:sp3d/>
+    <dgm:txPr/>
+    <dgm:style>
+      <a:lnRef idx="2">
+        <a:scrgbClr r="0" g="0" b="0"/>
+      </a:lnRef>
+      <a:fillRef idx="1">
+        <a:scrgbClr r="0" g="0" b="0"/>
+      </a:fillRef>
+      <a:effectRef idx="0">
+        <a:scrgbClr r="0" g="0" b="0"/>
+      </a:effectRef>
+      <a:fontRef idx="minor">
+        <a:schemeClr val="lt1"/>
+      </a:fontRef>
+    </dgm:style>
+  </dgm:styleLbl>
+  <dgm:styleLbl name="node4">
+    <dgm:scene3d>
+      <a:camera prst="orthographicFront"/>
+      <a:lightRig rig="threePt" dir="t"/>
+    </dgm:scene3d>
+    <dgm:sp3d/>
+    <dgm:txPr/>
+    <dgm:style>
+      <a:lnRef idx="2">
+        <a:scrgbClr r="0" g="0" b="0"/>
+      </a:lnRef>
+      <a:fillRef idx="1">
+        <a:scrgbClr r="0" g="0" b="0"/>
+      </a:fillRef>
+      <a:effectRef idx="0">
+        <a:scrgbClr r="0" g="0" b="0"/>
+      </a:effectRef>
+      <a:fontRef idx="minor">
+        <a:schemeClr val="lt1"/>
+      </a:fontRef>
+    </dgm:style>
+  </dgm:styleLbl>
+  <dgm:styleLbl name="fgImgPlace1">
+    <dgm:scene3d>
+      <a:camera prst="orthographicFront"/>
+      <a:lightRig rig="threePt" dir="t"/>
+    </dgm:scene3d>
+    <dgm:sp3d/>
+    <dgm:txPr/>
+    <dgm:style>
+      <a:lnRef idx="2">
+        <a:scrgbClr r="0" g="0" b="0"/>
+      </a:lnRef>
+      <a:fillRef idx="1">
+        <a:scrgbClr r="0" g="0" b="0"/>
+      </a:fillRef>
+      <a:effectRef idx="0">
+        <a:scrgbClr r="0" g="0" b="0"/>
+      </a:effectRef>
+      <a:fontRef idx="minor"/>
+    </dgm:style>
+  </dgm:styleLbl>
+  <dgm:styleLbl name="alignImgPlace1">
+    <dgm:scene3d>
+      <a:camera prst="orthographicFront"/>
+      <a:lightRig rig="threePt" dir="t"/>
+    </dgm:scene3d>
+    <dgm:sp3d/>
+    <dgm:txPr/>
+    <dgm:style>
+      <a:lnRef idx="2">
+        <a:scrgbClr r="0" g="0" b="0"/>
+      </a:lnRef>
+      <a:fillRef idx="1">
+        <a:scrgbClr r="0" g="0" b="0"/>
+      </a:fillRef>
+      <a:effectRef idx="0">
+        <a:scrgbClr r="0" g="0" b="0"/>
+      </a:effectRef>
+      <a:fontRef idx="minor"/>
+    </dgm:style>
+  </dgm:styleLbl>
+  <dgm:styleLbl name="bgImgPlace1">
+    <dgm:scene3d>
+      <a:camera prst="orthographicFront"/>
+      <a:lightRig rig="threePt" dir="t"/>
+    </dgm:scene3d>
+    <dgm:sp3d/>
+    <dgm:txPr/>
+    <dgm:style>
+      <a:lnRef idx="2">
+        <a:scrgbClr r="0" g="0" b="0"/>
+      </a:lnRef>
+      <a:fillRef idx="1">
+        <a:scrgbClr r="0" g="0" b="0"/>
+      </a:fillRef>
+      <a:effectRef idx="0">
+        <a:scrgbClr r="0" g="0" b="0"/>
+      </a:effectRef>
+      <a:fontRef idx="minor"/>
+    </dgm:style>
+  </dgm:styleLbl>
+  <dgm:styleLbl name="sibTrans2D1">
+    <dgm:scene3d>
+      <a:camera prst="orthographicFront"/>
+      <a:lightRig rig="threePt" dir="t"/>
+    </dgm:scene3d>
+    <dgm:sp3d/>
+    <dgm:txPr/>
+    <dgm:style>
+      <a:lnRef idx="0">
+        <a:scrgbClr r="0" g="0" b="0"/>
+      </a:lnRef>
+      <a:fillRef idx="1">
+        <a:scrgbClr r="0" g="0" b="0"/>
+      </a:fillRef>
+      <a:effectRef idx="0">
+        <a:scrgbClr r="0" g="0" b="0"/>
+      </a:effectRef>
+      <a:fontRef idx="minor">
+        <a:schemeClr val="lt1"/>
+      </a:fontRef>
+    </dgm:style>
+  </dgm:styleLbl>
+  <dgm:styleLbl name="fgSibTrans2D1">
+    <dgm:scene3d>
+      <a:camera prst="orthographicFront"/>
+      <a:lightRig rig="threePt" dir="t"/>
+    </dgm:scene3d>
+    <dgm:sp3d/>
+    <dgm:txPr/>
+    <dgm:style>
+      <a:lnRef idx="0">
+        <a:scrgbClr r="0" g="0" b="0"/>
+      </a:lnRef>
+      <a:fillRef idx="1">
+        <a:scrgbClr r="0" g="0" b="0"/>
+      </a:fillRef>
+      <a:effectRef idx="0">
+        <a:scrgbClr r="0" g="0" b="0"/>
+      </a:effectRef>
+      <a:fontRef idx="minor">
+        <a:schemeClr val="lt1"/>
+      </a:fontRef>
+    </dgm:style>
+  </dgm:styleLbl>
+  <dgm:styleLbl name="bgSibTrans2D1">
+    <dgm:scene3d>
+      <a:camera prst="orthographicFront"/>
+      <a:lightRig rig="threePt" dir="t"/>
+    </dgm:scene3d>
+    <dgm:sp3d/>
+    <dgm:txPr/>
+    <dgm:style>
+      <a:lnRef idx="0">
+        <a:scrgbClr r="0" g="0" b="0"/>
+      </a:lnRef>
+      <a:fillRef idx="1">
+        <a:scrgbClr r="0" g="0" b="0"/>
+      </a:fillRef>
+      <a:effectRef idx="0">
+        <a:scrgbClr r="0" g="0" b="0"/>
+      </a:effectRef>
+      <a:fontRef idx="minor">
+        <a:schemeClr val="lt1"/>
+      </a:fontRef>
+    </dgm:style>
+  </dgm:styleLbl>
+  <dgm:styleLbl name="sibTrans1D1">
+    <dgm:scene3d>
+      <a:camera prst="orthographicFront"/>
+      <a:lightRig rig="threePt" dir="t"/>
+    </dgm:scene3d>
+    <dgm:sp3d/>
+    <dgm:txPr/>
+    <dgm:style>
+      <a:lnRef idx="1">
+        <a:scrgbClr r="0" g="0" b="0"/>
+      </a:lnRef>
+      <a:fillRef idx="0">
+        <a:scrgbClr r="0" g="0" b="0"/>
+      </a:fillRef>
+      <a:effectRef idx="0">
+        <a:scrgbClr r="0" g="0" b="0"/>
+      </a:effectRef>
+      <a:fontRef idx="minor"/>
+    </dgm:style>
+  </dgm:styleLbl>
+  <dgm:styleLbl name="callout">
+    <dgm:scene3d>
+      <a:camera prst="orthographicFront"/>
+      <a:lightRig rig="threePt" dir="t"/>
+    </dgm:scene3d>
+    <dgm:sp3d/>
+    <dgm:txPr/>
+    <dgm:style>
+      <a:lnRef idx="2">
+        <a:scrgbClr r="0" g="0" b="0"/>
+      </a:lnRef>
+      <a:fillRef idx="1">
+        <a:scrgbClr r="0" g="0" b="0"/>
+      </a:fillRef>
+      <a:effectRef idx="0">
+        <a:scrgbClr r="0" g="0" b="0"/>
+      </a:effectRef>
+      <a:fontRef idx="minor"/>
+    </dgm:style>
+  </dgm:styleLbl>
+  <dgm:styleLbl name="asst0">
+    <dgm:scene3d>
+      <a:camera prst="orthographicFront"/>
+      <a:lightRig rig="threePt" dir="t"/>
+    </dgm:scene3d>
+    <dgm:sp3d/>
+    <dgm:txPr/>
+    <dgm:style>
+      <a:lnRef idx="2">
+        <a:scrgbClr r="0" g="0" b="0"/>
+      </a:lnRef>
+      <a:fillRef idx="1">
+        <a:scrgbClr r="0" g="0" b="0"/>
+      </a:fillRef>
+      <a:effectRef idx="0">
+        <a:scrgbClr r="0" g="0" b="0"/>
+      </a:effectRef>
+      <a:fontRef idx="minor">
+        <a:schemeClr val="lt1"/>
+      </a:fontRef>
+    </dgm:style>
+  </dgm:styleLbl>
+  <dgm:styleLbl name="asst1">
+    <dgm:scene3d>
+      <a:camera prst="orthographicFront"/>
+      <a:lightRig rig="threePt" dir="t"/>
+    </dgm:scene3d>
+    <dgm:sp3d/>
+    <dgm:txPr/>
+    <dgm:style>
+      <a:lnRef idx="2">
+        <a:scrgbClr r="0" g="0" b="0"/>
+      </a:lnRef>
+      <a:fillRef idx="1">
+        <a:scrgbClr r="0" g="0" b="0"/>
+      </a:fillRef>
+      <a:effectRef idx="0">
+        <a:scrgbClr r="0" g="0" b="0"/>
+      </a:effectRef>
+      <a:fontRef idx="minor">
+        <a:schemeClr val="lt1"/>
+      </a:fontRef>
+    </dgm:style>
+  </dgm:styleLbl>
+  <dgm:styleLbl name="asst2">
+    <dgm:scene3d>
+      <a:camera prst="orthographicFront"/>
+      <a:lightRig rig="threePt" dir="t"/>
+    </dgm:scene3d>
+    <dgm:sp3d/>
+    <dgm:txPr/>
+    <dgm:style>
+      <a:lnRef idx="2">
+        <a:scrgbClr r="0" g="0" b="0"/>
+      </a:lnRef>
+      <a:fillRef idx="1">
+        <a:scrgbClr r="0" g="0" b="0"/>
+      </a:fillRef>
+      <a:effectRef idx="0">
+        <a:scrgbClr r="0" g="0" b="0"/>
+      </a:effectRef>
+      <a:fontRef idx="minor">
+        <a:schemeClr val="lt1"/>
+      </a:fontRef>
+    </dgm:style>
+  </dgm:styleLbl>
+  <dgm:styleLbl name="asst3">
+    <dgm:scene3d>
+      <a:camera prst="orthographicFront"/>
+      <a:lightRig rig="threePt" dir="t"/>
+    </dgm:scene3d>
+    <dgm:sp3d/>
+    <dgm:txPr/>
+    <dgm:style>
+      <a:lnRef idx="2">
+        <a:scrgbClr r="0" g="0" b="0"/>
+      </a:lnRef>
+      <a:fillRef idx="1">
+        <a:scrgbClr r="0" g="0" b="0"/>
+      </a:fillRef>
+      <a:effectRef idx="0">
+        <a:scrgbClr r="0" g="0" b="0"/>
+      </a:effectRef>
+      <a:fontRef idx="minor">
+        <a:schemeClr val="lt1"/>
+      </a:fontRef>
+    </dgm:style>
+  </dgm:styleLbl>
+  <dgm:styleLbl name="asst4">
+    <dgm:scene3d>
+      <a:camera prst="orthographicFront"/>
+      <a:lightRig rig="threePt" dir="t"/>
+    </dgm:scene3d>
+    <dgm:sp3d/>
+    <dgm:txPr/>
+    <dgm:style>
+      <a:lnRef idx="2">
+        <a:scrgbClr r="0" g="0" b="0"/>
+      </a:lnRef>
+      <a:fillRef idx="1">
+        <a:scrgbClr r="0" g="0" b="0"/>
+      </a:fillRef>
+      <a:effectRef idx="0">
+        <a:scrgbClr r="0" g="0" b="0"/>
+      </a:effectRef>
+      <a:fontRef idx="minor">
+        <a:schemeClr val="lt1"/>
+      </a:fontRef>
+    </dgm:style>
+  </dgm:styleLbl>
+  <dgm:styleLbl name="parChTrans2D1">
+    <dgm:scene3d>
+      <a:camera prst="orthographicFront"/>
+      <a:lightRig rig="threePt" dir="t"/>
+    </dgm:scene3d>
+    <dgm:sp3d/>
+    <dgm:txPr/>
+    <dgm:style>
+      <a:lnRef idx="2">
+        <a:scrgbClr r="0" g="0" b="0"/>
+      </a:lnRef>
+      <a:fillRef idx="1">
+        <a:scrgbClr r="0" g="0" b="0"/>
+      </a:fillRef>
+      <a:effectRef idx="0">
+        <a:scrgbClr r="0" g="0" b="0"/>
+      </a:effectRef>
+      <a:fontRef idx="minor">
+        <a:schemeClr val="lt1"/>
+      </a:fontRef>
+    </dgm:style>
+  </dgm:styleLbl>
+  <dgm:styleLbl name="parChTrans2D2">
+    <dgm:scene3d>
+      <a:camera prst="orthographicFront"/>
+      <a:lightRig rig="threePt" dir="t"/>
+    </dgm:scene3d>
+    <dgm:sp3d/>
+    <dgm:txPr/>
+    <dgm:style>
+      <a:lnRef idx="2">
+        <a:scrgbClr r="0" g="0" b="0"/>
+      </a:lnRef>
+      <a:fillRef idx="1">
+        <a:scrgbClr r="0" g="0" b="0"/>
+      </a:fillRef>
+      <a:effectRef idx="0">
+        <a:scrgbClr r="0" g="0" b="0"/>
+      </a:effectRef>
+      <a:fontRef idx="minor">
+        <a:schemeClr val="lt1"/>
+      </a:fontRef>
+    </dgm:style>
+  </dgm:styleLbl>
+  <dgm:styleLbl name="parChTrans2D3">
+    <dgm:scene3d>
+      <a:camera prst="orthographicFront"/>
+      <a:lightRig rig="threePt" dir="t"/>
+    </dgm:scene3d>
+    <dgm:sp3d/>
+    <dgm:txPr/>
+    <dgm:style>
+      <a:lnRef idx="2">
+        <a:scrgbClr r="0" g="0" b="0"/>
+      </a:lnRef>
+      <a:fillRef idx="1">
+        <a:scrgbClr r="0" g="0" b="0"/>
+      </a:fillRef>
+      <a:effectRef idx="0">
+        <a:scrgbClr r="0" g="0" b="0"/>
+      </a:effectRef>
+      <a:fontRef idx="minor">
+        <a:schemeClr val="lt1"/>
+      </a:fontRef>
+    </dgm:style>
+  </dgm:styleLbl>
+  <dgm:styleLbl name="parChTrans2D4">
+    <dgm:scene3d>
+      <a:camera prst="orthographicFront"/>
+      <a:lightRig rig="threePt" dir="t"/>
+    </dgm:scene3d>
+    <dgm:sp3d/>
+    <dgm:txPr/>
+    <dgm:style>
+      <a:lnRef idx="2">
+        <a:scrgbClr r="0" g="0" b="0"/>
+      </a:lnRef>
+      <a:fillRef idx="1">
+        <a:scrgbClr r="0" g="0" b="0"/>
+      </a:fillRef>
+      <a:effectRef idx="0">
+        <a:scrgbClr r="0" g="0" b="0"/>
+      </a:effectRef>
+      <a:fontRef idx="minor">
+        <a:schemeClr val="lt1"/>
+      </a:fontRef>
+    </dgm:style>
+  </dgm:styleLbl>
+  <dgm:styleLbl name="parChTrans1D1">
+    <dgm:scene3d>
+      <a:camera prst="orthographicFront"/>
+      <a:lightRig rig="threePt" dir="t"/>
+    </dgm:scene3d>
+    <dgm:sp3d/>
+    <dgm:txPr/>
+    <dgm:style>
+      <a:lnRef idx="2">
+        <a:scrgbClr r="0" g="0" b="0"/>
+      </a:lnRef>
+      <a:fillRef idx="0">
+        <a:scrgbClr r="0" g="0" b="0"/>
+      </a:fillRef>
+      <a:effectRef idx="0">
+        <a:scrgbClr r="0" g="0" b="0"/>
+      </a:effectRef>
+      <a:fontRef idx="minor"/>
+    </dgm:style>
+  </dgm:styleLbl>
+  <dgm:styleLbl name="parChTrans1D2">
+    <dgm:scene3d>
+      <a:camera prst="orthographicFront"/>
+      <a:lightRig rig="threePt" dir="t"/>
+    </dgm:scene3d>
+    <dgm:sp3d/>
+    <dgm:txPr/>
+    <dgm:style>
+      <a:lnRef idx="2">
+        <a:scrgbClr r="0" g="0" b="0"/>
+      </a:lnRef>
+      <a:fillRef idx="0">
+        <a:scrgbClr r="0" g="0" b="0"/>
+      </a:fillRef>
+      <a:effectRef idx="0">
+        <a:scrgbClr r="0" g="0" b="0"/>
+      </a:effectRef>
+      <a:fontRef idx="minor"/>
+    </dgm:style>
+  </dgm:styleLbl>
+  <dgm:styleLbl name="parChTrans1D3">
+    <dgm:scene3d>
+      <a:camera prst="orthographicFront"/>
+      <a:lightRig rig="threePt" dir="t"/>
+    </dgm:scene3d>
+    <dgm:sp3d/>
+    <dgm:txPr/>
+    <dgm:style>
+      <a:lnRef idx="2">
+        <a:scrgbClr r="0" g="0" b="0"/>
+      </a:lnRef>
+      <a:fillRef idx="0">
+        <a:scrgbClr r="0" g="0" b="0"/>
+      </a:fillRef>
+      <a:effectRef idx="0">
+        <a:scrgbClr r="0" g="0" b="0"/>
+      </a:effectRef>
+      <a:fontRef idx="minor"/>
+    </dgm:style>
+  </dgm:styleLbl>
+  <dgm:styleLbl name="parChTrans1D4">
+    <dgm:scene3d>
+      <a:camera prst="orthographicFront"/>
+      <a:lightRig rig="threePt" dir="t"/>
+    </dgm:scene3d>
+    <dgm:sp3d/>
+    <dgm:txPr/>
+    <dgm:style>
+      <a:lnRef idx="2">
+        <a:scrgbClr r="0" g="0" b="0"/>
+      </a:lnRef>
+      <a:fillRef idx="0">
+        <a:scrgbClr r="0" g="0" b="0"/>
+      </a:fillRef>
+      <a:effectRef idx="0">
+        <a:scrgbClr r="0" g="0" b="0"/>
+      </a:effectRef>
+      <a:fontRef idx="minor"/>
+    </dgm:style>
+  </dgm:styleLbl>
+  <dgm:styleLbl name="fgAcc1">
+    <dgm:scene3d>
+      <a:camera prst="orthographicFront"/>
+      <a:lightRig rig="threePt" dir="t"/>
+    </dgm:scene3d>
+    <dgm:sp3d/>
+    <dgm:txPr/>
+    <dgm:style>
+      <a:lnRef idx="2">
+        <a:scrgbClr r="0" g="0" b="0"/>
+      </a:lnRef>
+      <a:fillRef idx="1">
+        <a:scrgbClr r="0" g="0" b="0"/>
+      </a:fillRef>
+      <a:effectRef idx="0">
+        <a:scrgbClr r="0" g="0" b="0"/>
+      </a:effectRef>
+      <a:fontRef idx="minor"/>
+    </dgm:style>
+  </dgm:styleLbl>
+  <dgm:styleLbl name="conFgAcc1">
+    <dgm:scene3d>
+      <a:camera prst="orthographicFront"/>
+      <a:lightRig rig="threePt" dir="t"/>
+    </dgm:scene3d>
+    <dgm:sp3d/>
+    <dgm:txPr/>
+    <dgm:style>
+      <a:lnRef idx="2">
+        <a:scrgbClr r="0" g="0" b="0"/>
+      </a:lnRef>
+      <a:fillRef idx="1">
+        <a:scrgbClr r="0" g="0" b="0"/>
+      </a:fillRef>
+      <a:effectRef idx="0">
+        <a:scrgbClr r="0" g="0" b="0"/>
+      </a:effectRef>
+      <a:fontRef idx="minor"/>
+    </dgm:style>
+  </dgm:styleLbl>
+  <dgm:styleLbl name="alignAcc1">
+    <dgm:scene3d>
+      <a:camera prst="orthographicFront"/>
+      <a:lightRig rig="threePt" dir="t"/>
+    </dgm:scene3d>
+    <dgm:sp3d/>
+    <dgm:txPr/>
+    <dgm:style>
+      <a:lnRef idx="2">
+        <a:scrgbClr r="0" g="0" b="0"/>
+      </a:lnRef>
+      <a:fillRef idx="1">
+        <a:scrgbClr r="0" g="0" b="0"/>
+      </a:fillRef>
+      <a:effectRef idx="0">
+        <a:scrgbClr r="0" g="0" b="0"/>
+      </a:effectRef>
+      <a:fontRef idx="minor"/>
+    </dgm:style>
+  </dgm:styleLbl>
+  <dgm:styleLbl name="trAlignAcc1">
+    <dgm:scene3d>
+      <a:camera prst="orthographicFront"/>
+      <a:lightRig rig="threePt" dir="t"/>
+    </dgm:scene3d>
+    <dgm:sp3d/>
+    <dgm:txPr/>
+    <dgm:style>
+      <a:lnRef idx="1">
+        <a:scrgbClr r="0" g="0" b="0"/>
+      </a:lnRef>
+      <a:fillRef idx="1">
+        <a:scrgbClr r="0" g="0" b="0"/>
+      </a:fillRef>
+      <a:effectRef idx="0">
+        <a:scrgbClr r="0" g="0" b="0"/>
+      </a:effectRef>
+      <a:fontRef idx="minor"/>
+    </dgm:style>
+  </dgm:styleLbl>
+  <dgm:styleLbl name="bgAcc1">
+    <dgm:scene3d>
+      <a:camera prst="orthographicFront"/>
+      <a:lightRig rig="threePt" dir="t"/>
+    </dgm:scene3d>
+    <dgm:sp3d/>
+    <dgm:txPr/>
+    <dgm:style>
+      <a:lnRef idx="2">
+        <a:scrgbClr r="0" g="0" b="0"/>
+      </a:lnRef>
+      <a:fillRef idx="1">
+        <a:scrgbClr r="0" g="0" b="0"/>
+      </a:fillRef>
+      <a:effectRef idx="0">
+        <a:scrgbClr r="0" g="0" b="0"/>
+      </a:effectRef>
+      <a:fontRef idx="minor"/>
+    </dgm:style>
+  </dgm:styleLbl>
+  <dgm:styleLbl name="solidFgAcc1">
+    <dgm:scene3d>
+      <a:camera prst="orthographicFront"/>
+      <a:lightRig rig="threePt" dir="t"/>
+    </dgm:scene3d>
+    <dgm:sp3d/>
+    <dgm:txPr/>
+    <dgm:style>
+      <a:lnRef idx="2">
+        <a:scrgbClr r="0" g="0" b="0"/>
+      </a:lnRef>
+      <a:fillRef idx="1">
+        <a:scrgbClr r="0" g="0" b="0"/>
+      </a:fillRef>
+      <a:effectRef idx="0">
+        <a:scrgbClr r="0" g="0" b="0"/>
+      </a:effectRef>
+      <a:fontRef idx="minor"/>
+    </dgm:style>
+  </dgm:styleLbl>
+  <dgm:styleLbl name="solidAlignAcc1">
+    <dgm:scene3d>
+      <a:camera prst="orthographicFront"/>
+      <a:lightRig rig="threePt" dir="t"/>
+    </dgm:scene3d>
+    <dgm:sp3d/>
+    <dgm:txPr/>
+    <dgm:style>
+      <a:lnRef idx="2">
+        <a:scrgbClr r="0" g="0" b="0"/>
+      </a:lnRef>
+      <a:fillRef idx="1">
+        <a:scrgbClr r="0" g="0" b="0"/>
+      </a:fillRef>
+      <a:effectRef idx="0">
+        <a:scrgbClr r="0" g="0" b="0"/>
+      </a:effectRef>
+      <a:fontRef idx="minor"/>
+    </dgm:style>
+  </dgm:styleLbl>
+  <dgm:styleLbl name="solidBgAcc1">
+    <dgm:scene3d>
+      <a:camera prst="orthographicFront"/>
+      <a:lightRig rig="threePt" dir="t"/>
+    </dgm:scene3d>
+    <dgm:sp3d/>
+    <dgm:txPr/>
+    <dgm:style>
+      <a:lnRef idx="2">
+        <a:scrgbClr r="0" g="0" b="0"/>
+      </a:lnRef>
+      <a:fillRef idx="1">
+        <a:scrgbClr r="0" g="0" b="0"/>
+      </a:fillRef>
+      <a:effectRef idx="0">
+        <a:scrgbClr r="0" g="0" b="0"/>
+      </a:effectRef>
+      <a:fontRef idx="minor"/>
+    </dgm:style>
+  </dgm:styleLbl>
+  <dgm:styleLbl name="fgAccFollowNode1">
+    <dgm:scene3d>
+      <a:camera prst="orthographicFront"/>
+      <a:lightRig rig="threePt" dir="t"/>
+    </dgm:scene3d>
+    <dgm:sp3d/>
+    <dgm:txPr/>
+    <dgm:style>
+      <a:lnRef idx="2">
+        <a:scrgbClr r="0" g="0" b="0"/>
+      </a:lnRef>
+      <a:fillRef idx="1">
+        <a:scrgbClr r="0" g="0" b="0"/>
+      </a:fillRef>
+      <a:effectRef idx="0">
+        <a:scrgbClr r="0" g="0" b="0"/>
+      </a:effectRef>
+      <a:fontRef idx="minor"/>
+    </dgm:style>
+  </dgm:styleLbl>
+  <dgm:styleLbl name="alignAccFollowNode1">
+    <dgm:scene3d>
+      <a:camera prst="orthographicFront"/>
+      <a:lightRig rig="threePt" dir="t"/>
+    </dgm:scene3d>
+    <dgm:sp3d/>
+    <dgm:txPr/>
+    <dgm:style>
+      <a:lnRef idx="2">
+        <a:scrgbClr r="0" g="0" b="0"/>
+      </a:lnRef>
+      <a:fillRef idx="1">
+        <a:scrgbClr r="0" g="0" b="0"/>
+      </a:fillRef>
+      <a:effectRef idx="0">
+        <a:scrgbClr r="0" g="0" b="0"/>
+      </a:effectRef>
+      <a:fontRef idx="minor"/>
+    </dgm:style>
+  </dgm:styleLbl>
+  <dgm:styleLbl name="bgAccFollowNode1">
+    <dgm:scene3d>
+      <a:camera prst="orthographicFront"/>
+      <a:lightRig rig="threePt" dir="t"/>
+    </dgm:scene3d>
+    <dgm:sp3d/>
+    <dgm:txPr/>
+    <dgm:style>
+      <a:lnRef idx="2">
+        <a:scrgbClr r="0" g="0" b="0"/>
+      </a:lnRef>
+      <a:fillRef idx="1">
+        <a:scrgbClr r="0" g="0" b="0"/>
+      </a:fillRef>
+      <a:effectRef idx="0">
+        <a:scrgbClr r="0" g="0" b="0"/>
+      </a:effectRef>
+      <a:fontRef idx="minor"/>
+    </dgm:style>
+  </dgm:styleLbl>
+  <dgm:styleLbl name="fgAcc0">
+    <dgm:scene3d>
+      <a:camera prst="orthographicFront"/>
+      <a:lightRig rig="threePt" dir="t"/>
+    </dgm:scene3d>
+    <dgm:sp3d/>
+    <dgm:txPr/>
+    <dgm:style>
+      <a:lnRef idx="2">
+        <a:scrgbClr r="0" g="0" b="0"/>
+      </a:lnRef>
+      <a:fillRef idx="1">
+        <a:scrgbClr r="0" g="0" b="0"/>
+      </a:fillRef>
+      <a:effectRef idx="0">
+        <a:scrgbClr r="0" g="0" b="0"/>
+      </a:effectRef>
+      <a:fontRef idx="minor"/>
+    </dgm:style>
+  </dgm:styleLbl>
+  <dgm:styleLbl name="fgAcc2">
+    <dgm:scene3d>
+      <a:camera prst="orthographicFront"/>
+      <a:lightRig rig="threePt" dir="t"/>
+    </dgm:scene3d>
+    <dgm:sp3d/>
+    <dgm:txPr/>
+    <dgm:style>
+      <a:lnRef idx="2">
+        <a:scrgbClr r="0" g="0" b="0"/>
+      </a:lnRef>
+      <a:fillRef idx="1">
+        <a:scrgbClr r="0" g="0" b="0"/>
+      </a:fillRef>
+      <a:effectRef idx="0">
+        <a:scrgbClr r="0" g="0" b="0"/>
+      </a:effectRef>
+      <a:fontRef idx="minor"/>
+    </dgm:style>
+  </dgm:styleLbl>
+  <dgm:styleLbl name="fgAcc3">
+    <dgm:scene3d>
+      <a:camera prst="orthographicFront"/>
+      <a:lightRig rig="threePt" dir="t"/>
+    </dgm:scene3d>
+    <dgm:sp3d/>
+    <dgm:txPr/>
+    <dgm:style>
+      <a:lnRef idx="2">
+        <a:scrgbClr r="0" g="0" b="0"/>
+      </a:lnRef>
+      <a:fillRef idx="1">
+        <a:scrgbClr r="0" g="0" b="0"/>
+      </a:fillRef>
+      <a:effectRef idx="0">
+        <a:scrgbClr r="0" g="0" b="0"/>
+      </a:effectRef>
+      <a:fontRef idx="minor"/>
+    </dgm:style>
+  </dgm:styleLbl>
+  <dgm:styleLbl name="fgAcc4">
+    <dgm:scene3d>
+      <a:camera prst="orthographicFront"/>
+      <a:lightRig rig="threePt" dir="t"/>
+    </dgm:scene3d>
+    <dgm:sp3d/>
+    <dgm:txPr/>
+    <dgm:style>
+      <a:lnRef idx="2">
+        <a:scrgbClr r="0" g="0" b="0"/>
+      </a:lnRef>
+      <a:fillRef idx="1">
+        <a:scrgbClr r="0" g="0" b="0"/>
+      </a:fillRef>
+      <a:effectRef idx="0">
+        <a:scrgbClr r="0" g="0" b="0"/>
+      </a:effectRef>
+      <a:fontRef idx="minor"/>
+    </dgm:style>
+  </dgm:styleLbl>
+  <dgm:styleLbl name="bgShp">
+    <dgm:scene3d>
+      <a:camera prst="orthographicFront"/>
+      <a:lightRig rig="threePt" dir="t"/>
+    </dgm:scene3d>
+    <dgm:sp3d/>
+    <dgm:txPr/>
+    <dgm:style>
+      <a:lnRef idx="0">
+        <a:scrgbClr r="0" g="0" b="0"/>
+      </a:lnRef>
+      <a:fillRef idx="1">
+        <a:scrgbClr r="0" g="0" b="0"/>
+      </a:fillRef>
+      <a:effectRef idx="0">
+        <a:scrgbClr r="0" g="0" b="0"/>
+      </a:effectRef>
+      <a:fontRef idx="minor"/>
+    </dgm:style>
+  </dgm:styleLbl>
+  <dgm:styleLbl name="dkBgShp">
+    <dgm:scene3d>
+      <a:camera prst="orthographicFront"/>
+      <a:lightRig rig="threePt" dir="t"/>
+    </dgm:scene3d>
+    <dgm:sp3d/>
+    <dgm:txPr/>
+    <dgm:style>
+      <a:lnRef idx="0">
+        <a:scrgbClr r="0" g="0" b="0"/>
+      </a:lnRef>
+      <a:fillRef idx="1">
+        <a:scrgbClr r="0" g="0" b="0"/>
+      </a:fillRef>
+      <a:effectRef idx="0">
+        <a:scrgbClr r="0" g="0" b="0"/>
+      </a:effectRef>
+      <a:fontRef idx="minor"/>
+    </dgm:style>
+  </dgm:styleLbl>
+  <dgm:styleLbl name="trBgShp">
+    <dgm:scene3d>
+      <a:camera prst="orthographicFront"/>
+      <a:lightRig rig="threePt" dir="t"/>
+    </dgm:scene3d>
+    <dgm:sp3d/>
+    <dgm:txPr/>
+    <dgm:style>
+      <a:lnRef idx="0">
+        <a:scrgbClr r="0" g="0" b="0"/>
+      </a:lnRef>
+      <a:fillRef idx="1">
+        <a:scrgbClr r="0" g="0" b="0"/>
+      </a:fillRef>
+      <a:effectRef idx="0">
+        <a:scrgbClr r="0" g="0" b="0"/>
+      </a:effectRef>
+      <a:fontRef idx="minor"/>
+    </dgm:style>
+  </dgm:styleLbl>
+  <dgm:styleLbl name="fgShp">
+    <dgm:scene3d>
+      <a:camera prst="orthographicFront"/>
+      <a:lightRig rig="threePt" dir="t"/>
+    </dgm:scene3d>
+    <dgm:sp3d/>
+    <dgm:txPr/>
+    <dgm:style>
+      <a:lnRef idx="2">
+        <a:scrgbClr r="0" g="0" b="0"/>
+      </a:lnRef>
+      <a:fillRef idx="1">
+        <a:scrgbClr r="0" g="0" b="0"/>
+      </a:fillRef>
+      <a:effectRef idx="0">
+        <a:scrgbClr r="0" g="0" b="0"/>
+      </a:effectRef>
+      <a:fontRef idx="minor"/>
+    </dgm:style>
+  </dgm:styleLbl>
+  <dgm:styleLbl name="revTx">
+    <dgm:scene3d>
+      <a:camera prst="orthographicFront"/>
+      <a:lightRig rig="threePt" dir="t"/>
+    </dgm:scene3d>
+    <dgm:sp3d/>
+    <dgm:txPr/>
+    <dgm:style>
+      <a:lnRef idx="0">
+        <a:scrgbClr r="0" g="0" b="0"/>
+      </a:lnRef>
+      <a:fillRef idx="0">
+        <a:scrgbClr r="0" g="0" b="0"/>
+      </a:fillRef>
+      <a:effectRef idx="0">
+        <a:scrgbClr r="0" g="0" b="0"/>
+      </a:effectRef>
+      <a:fontRef idx="minor"/>
+    </dgm:style>
+  </dgm:styleLbl>
+</dgm:styleDef>
+</file>
+
+<file path=ppt/notesMasters/notesMaster1.xml><?xml version="1.0" encoding="utf-8"?>
+<p:notesMaster xmlns:a="http://schemas.openxmlformats.org/drawingml/2006/main" xmlns:r="http://schemas.openxmlformats.org/officeDocument/2006/relationships" xmlns:p="http://schemas.openxmlformats.org/presentationml/2006/main">
+  <p:cSld>
+    <p:bg>
+      <p:bgRef idx="1001">
+        <a:schemeClr val="bg1"/>
+      </p:bgRef>
+    </p:bg>
+    <p:spTree>
+      <p:nvGrpSpPr>
+        <p:cNvPr id="1" name=""/>
+        <p:cNvGrpSpPr/>
+        <p:nvPr/>
+      </p:nvGrpSpPr>
+      <p:grpSpPr>
+        <a:xfrm>
+          <a:off x="0" y="0"/>
+          <a:ext cx="0" cy="0"/>
+          <a:chOff x="0" y="0"/>
+          <a:chExt cx="0" cy="0"/>
+        </a:xfrm>
+      </p:grpSpPr>
+      <p:sp>
+        <p:nvSpPr>
+          <p:cNvPr id="2" name="Header Placeholder 1"/>
+          <p:cNvSpPr>
+            <a:spLocks noGrp="1"/>
+          </p:cNvSpPr>
+          <p:nvPr>
+            <p:ph type="hdr" sz="quarter"/>
+          </p:nvPr>
+        </p:nvSpPr>
+        <p:spPr>
+          <a:xfrm>
+            <a:off x="0" y="0"/>
+            <a:ext cx="2971800" cy="458788"/>
+          </a:xfrm>
+          <a:prstGeom prst="rect">
+            <a:avLst/>
+          </a:prstGeom>
+        </p:spPr>
+        <p:txBody>
+          <a:bodyPr vert="horz" lIns="91440" tIns="45720" rIns="91440" bIns="45720" rtlCol="0"/>
+          <a:lstStyle>
+            <a:lvl1pPr algn="l">
+              <a:defRPr sz="1200"/>
+            </a:lvl1pPr>
+          </a:lstStyle>
+          <a:p>
+            <a:endParaRPr lang="en-US"/>
+          </a:p>
+        </p:txBody>
+      </p:sp>
+      <p:sp>
+        <p:nvSpPr>
+          <p:cNvPr id="3" name="Date Placeholder 2"/>
+          <p:cNvSpPr>
+            <a:spLocks noGrp="1"/>
+          </p:cNvSpPr>
+          <p:nvPr>
+            <p:ph type="dt" idx="1"/>
+          </p:nvPr>
+        </p:nvSpPr>
+        <p:spPr>
+          <a:xfrm>
+            <a:off x="3884613" y="0"/>
+            <a:ext cx="2971800" cy="458788"/>
+          </a:xfrm>
+          <a:prstGeom prst="rect">
+            <a:avLst/>
+          </a:prstGeom>
+        </p:spPr>
+        <p:txBody>
+          <a:bodyPr vert="horz" lIns="91440" tIns="45720" rIns="91440" bIns="45720" rtlCol="0"/>
+          <a:lstStyle>
+            <a:lvl1pPr algn="r">
+              <a:defRPr sz="1200"/>
+            </a:lvl1pPr>
+          </a:lstStyle>
+          <a:p>
+            <a:fld id="{FAC35922-7916-2140-A362-96EFA98B78E8}" type="datetimeFigureOut">
+              <a:rPr lang="en-US" smtClean="0"/>
+              <a:t>12/2/24</a:t>
+            </a:fld>
+            <a:endParaRPr lang="en-US"/>
+          </a:p>
+        </p:txBody>
+      </p:sp>
+      <p:sp>
+        <p:nvSpPr>
+          <p:cNvPr id="4" name="Slide Image Placeholder 3"/>
+          <p:cNvSpPr>
+            <a:spLocks noGrp="1" noRot="1" noChangeAspect="1"/>
+          </p:cNvSpPr>
+          <p:nvPr>
+            <p:ph type="sldImg" idx="2"/>
+          </p:nvPr>
+        </p:nvSpPr>
+        <p:spPr>
+          <a:xfrm>
+            <a:off x="685800" y="1143000"/>
+            <a:ext cx="5486400" cy="3086100"/>
+          </a:xfrm>
+          <a:prstGeom prst="rect">
+            <a:avLst/>
+          </a:prstGeom>
+          <a:noFill/>
+          <a:ln w="12700">
+            <a:solidFill>
+              <a:prstClr val="black"/>
+            </a:solidFill>
+          </a:ln>
+        </p:spPr>
+        <p:txBody>
+          <a:bodyPr vert="horz" lIns="91440" tIns="45720" rIns="91440" bIns="45720" rtlCol="0" anchor="ctr"/>
+          <a:lstStyle/>
+          <a:p>
+            <a:endParaRPr lang="en-US"/>
+          </a:p>
+        </p:txBody>
+      </p:sp>
+      <p:sp>
+        <p:nvSpPr>
+          <p:cNvPr id="5" name="Notes Placeholder 4"/>
+          <p:cNvSpPr>
+            <a:spLocks noGrp="1"/>
+          </p:cNvSpPr>
+          <p:nvPr>
+            <p:ph type="body" sz="quarter" idx="3"/>
+          </p:nvPr>
+        </p:nvSpPr>
+        <p:spPr>
+          <a:xfrm>
+            <a:off x="685800" y="4400550"/>
+            <a:ext cx="5486400" cy="3600450"/>
+          </a:xfrm>
+          <a:prstGeom prst="rect">
+            <a:avLst/>
+          </a:prstGeom>
+        </p:spPr>
+        <p:txBody>
+          <a:bodyPr vert="horz" lIns="91440" tIns="45720" rIns="91440" bIns="45720" rtlCol="0"/>
+          <a:lstStyle/>
+          <a:p>
+            <a:pPr lvl="0"/>
+            <a:r>
+              <a:rPr lang="en-GB"/>
+              <a:t>Click to edit Master text styles</a:t>
+            </a:r>
+          </a:p>
+          <a:p>
+            <a:pPr lvl="1"/>
+            <a:r>
+              <a:rPr lang="en-GB"/>
+              <a:t>Second level</a:t>
+            </a:r>
+          </a:p>
+          <a:p>
+            <a:pPr lvl="2"/>
+            <a:r>
+              <a:rPr lang="en-GB"/>
+              <a:t>Third level</a:t>
+            </a:r>
+          </a:p>
+          <a:p>
+            <a:pPr lvl="3"/>
+            <a:r>
+              <a:rPr lang="en-GB"/>
+              <a:t>Fourth level</a:t>
+            </a:r>
+          </a:p>
+          <a:p>
+            <a:pPr lvl="4"/>
+            <a:r>
+              <a:rPr lang="en-GB"/>
+              <a:t>Fifth level</a:t>
+            </a:r>
+            <a:endParaRPr lang="en-US"/>
+          </a:p>
+        </p:txBody>
+      </p:sp>
+      <p:sp>
+        <p:nvSpPr>
+          <p:cNvPr id="6" name="Footer Placeholder 5"/>
+          <p:cNvSpPr>
+            <a:spLocks noGrp="1"/>
+          </p:cNvSpPr>
+          <p:nvPr>
+            <p:ph type="ftr" sz="quarter" idx="4"/>
+          </p:nvPr>
+        </p:nvSpPr>
+        <p:spPr>
+          <a:xfrm>
+            <a:off x="0" y="8685213"/>
+            <a:ext cx="2971800" cy="458787"/>
+          </a:xfrm>
+          <a:prstGeom prst="rect">
+            <a:avLst/>
+          </a:prstGeom>
+        </p:spPr>
+        <p:txBody>
+          <a:bodyPr vert="horz" lIns="91440" tIns="45720" rIns="91440" bIns="45720" rtlCol="0" anchor="b"/>
+          <a:lstStyle>
+            <a:lvl1pPr algn="l">
+              <a:defRPr sz="1200"/>
+            </a:lvl1pPr>
+          </a:lstStyle>
+          <a:p>
+            <a:endParaRPr lang="en-US"/>
+          </a:p>
+        </p:txBody>
+      </p:sp>
+      <p:sp>
+        <p:nvSpPr>
+          <p:cNvPr id="7" name="Slide Number Placeholder 6"/>
+          <p:cNvSpPr>
+            <a:spLocks noGrp="1"/>
+          </p:cNvSpPr>
+          <p:nvPr>
+            <p:ph type="sldNum" sz="quarter" idx="5"/>
+          </p:nvPr>
+        </p:nvSpPr>
+        <p:spPr>
+          <a:xfrm>
+            <a:off x="3884613" y="8685213"/>
+            <a:ext cx="2971800" cy="458787"/>
+          </a:xfrm>
+          <a:prstGeom prst="rect">
+            <a:avLst/>
+          </a:prstGeom>
+        </p:spPr>
+        <p:txBody>
+          <a:bodyPr vert="horz" lIns="91440" tIns="45720" rIns="91440" bIns="45720" rtlCol="0" anchor="b"/>
+          <a:lstStyle>
+            <a:lvl1pPr algn="r">
+              <a:defRPr sz="1200"/>
+            </a:lvl1pPr>
+          </a:lstStyle>
+          <a:p>
+            <a:fld id="{879F33CD-E639-E34C-9ACB-BE6AD0766D13}" type="slidenum">
+              <a:rPr lang="en-US" smtClean="0"/>
+              <a:t>‹#›</a:t>
+            </a:fld>
+            <a:endParaRPr lang="en-US"/>
+          </a:p>
+        </p:txBody>
+      </p:sp>
+    </p:spTree>
+    <p:extLst>
+      <p:ext uri="{BB962C8B-B14F-4D97-AF65-F5344CB8AC3E}">
+        <p14:creationId xmlns:p14="http://schemas.microsoft.com/office/powerpoint/2010/main" val="26704786"/>
+      </p:ext>
+    </p:extLst>
+  </p:cSld>
+  <p:clrMap bg1="lt1" tx1="dk1" bg2="lt2" tx2="dk2" accent1="accent1" accent2="accent2" accent3="accent3" accent4="accent4" accent5="accent5" accent6="accent6" hlink="hlink" folHlink="folHlink"/>
+  <p:notesStyle>
+    <a:lvl1pPr marL="0" algn="l" defTabSz="914400" rtl="0" eaLnBrk="1" latinLnBrk="0" hangingPunct="1">
+      <a:defRPr sz="1200" kern="1200">
+        <a:solidFill>
+          <a:schemeClr val="tx1"/>
+        </a:solidFill>
+        <a:latin typeface="+mn-lt"/>
+        <a:ea typeface="+mn-ea"/>
+        <a:cs typeface="+mn-cs"/>
+      </a:defRPr>
+    </a:lvl1pPr>
+    <a:lvl2pPr marL="457200" algn="l" defTabSz="914400" rtl="0" eaLnBrk="1" latinLnBrk="0" hangingPunct="1">
+      <a:defRPr sz="1200" kern="1200">
+        <a:solidFill>
+          <a:schemeClr val="tx1"/>
+        </a:solidFill>
+        <a:latin typeface="+mn-lt"/>
+        <a:ea typeface="+mn-ea"/>
+        <a:cs typeface="+mn-cs"/>
+      </a:defRPr>
+    </a:lvl2pPr>
+    <a:lvl3pPr marL="914400" algn="l" defTabSz="914400" rtl="0" eaLnBrk="1" latinLnBrk="0" hangingPunct="1">
+      <a:defRPr sz="1200" kern="1200">
+        <a:solidFill>
+          <a:schemeClr val="tx1"/>
+        </a:solidFill>
+        <a:latin typeface="+mn-lt"/>
+        <a:ea typeface="+mn-ea"/>
+        <a:cs typeface="+mn-cs"/>
+      </a:defRPr>
+    </a:lvl3pPr>
+    <a:lvl4pPr marL="1371600" algn="l" defTabSz="914400" rtl="0" eaLnBrk="1" latinLnBrk="0" hangingPunct="1">
+      <a:defRPr sz="1200" kern="1200">
+        <a:solidFill>
+          <a:schemeClr val="tx1"/>
+        </a:solidFill>
+        <a:latin typeface="+mn-lt"/>
+        <a:ea typeface="+mn-ea"/>
+        <a:cs typeface="+mn-cs"/>
+      </a:defRPr>
+    </a:lvl4pPr>
+    <a:lvl5pPr marL="1828800" algn="l" defTabSz="914400" rtl="0" eaLnBrk="1" latinLnBrk="0" hangingPunct="1">
+      <a:defRPr sz="1200" kern="1200">
+        <a:solidFill>
+          <a:schemeClr val="tx1"/>
+        </a:solidFill>
+        <a:latin typeface="+mn-lt"/>
+        <a:ea typeface="+mn-ea"/>
+        <a:cs typeface="+mn-cs"/>
+      </a:defRPr>
+    </a:lvl5pPr>
+    <a:lvl6pPr marL="2286000" algn="l" defTabSz="914400" rtl="0" eaLnBrk="1" latinLnBrk="0" hangingPunct="1">
+      <a:defRPr sz="1200" kern="1200">
+        <a:solidFill>
+          <a:schemeClr val="tx1"/>
+        </a:solidFill>
+        <a:latin typeface="+mn-lt"/>
+        <a:ea typeface="+mn-ea"/>
+        <a:cs typeface="+mn-cs"/>
+      </a:defRPr>
+    </a:lvl6pPr>
+    <a:lvl7pPr marL="2743200" algn="l" defTabSz="914400" rtl="0" eaLnBrk="1" latinLnBrk="0" hangingPunct="1">
+      <a:defRPr sz="1200" kern="1200">
+        <a:solidFill>
+          <a:schemeClr val="tx1"/>
+        </a:solidFill>
+        <a:latin typeface="+mn-lt"/>
+        <a:ea typeface="+mn-ea"/>
+        <a:cs typeface="+mn-cs"/>
+      </a:defRPr>
+    </a:lvl7pPr>
+    <a:lvl8pPr marL="3200400" algn="l" defTabSz="914400" rtl="0" eaLnBrk="1" latinLnBrk="0" hangingPunct="1">
+      <a:defRPr sz="1200" kern="1200">
+        <a:solidFill>
+          <a:schemeClr val="tx1"/>
+        </a:solidFill>
+        <a:latin typeface="+mn-lt"/>
+        <a:ea typeface="+mn-ea"/>
+        <a:cs typeface="+mn-cs"/>
+      </a:defRPr>
+    </a:lvl8pPr>
+    <a:lvl9pPr marL="3657600" algn="l" defTabSz="914400" rtl="0" eaLnBrk="1" latinLnBrk="0" hangingPunct="1">
+      <a:defRPr sz="1200" kern="1200">
+        <a:solidFill>
+          <a:schemeClr val="tx1"/>
+        </a:solidFill>
+        <a:latin typeface="+mn-lt"/>
+        <a:ea typeface="+mn-ea"/>
+        <a:cs typeface="+mn-cs"/>
+      </a:defRPr>
+    </a:lvl9pPr>
+  </p:notesStyle>
+</p:notesMaster>
+</file>
+
+<file path=ppt/notesSlides/notesSlide1.xml><?xml version="1.0" encoding="utf-8"?>
+<p:notes xmlns:a="http://schemas.openxmlformats.org/drawingml/2006/main" xmlns:r="http://schemas.openxmlformats.org/officeDocument/2006/relationships" xmlns:p="http://schemas.openxmlformats.org/presentationml/2006/main">
+  <p:cSld>
+    <p:spTree>
+      <p:nvGrpSpPr>
+        <p:cNvPr id="1" name=""/>
+        <p:cNvGrpSpPr/>
+        <p:nvPr/>
+      </p:nvGrpSpPr>
+      <p:grpSpPr>
+        <a:xfrm>
+          <a:off x="0" y="0"/>
+          <a:ext cx="0" cy="0"/>
+          <a:chOff x="0" y="0"/>
+          <a:chExt cx="0" cy="0"/>
+        </a:xfrm>
+      </p:grpSpPr>
+      <p:sp>
+        <p:nvSpPr>
+          <p:cNvPr id="2" name="Slide Image Placeholder 1"/>
+          <p:cNvSpPr>
+            <a:spLocks noGrp="1" noRot="1" noChangeAspect="1"/>
+          </p:cNvSpPr>
+          <p:nvPr>
+            <p:ph type="sldImg"/>
+          </p:nvPr>
+        </p:nvSpPr>
+        <p:spPr/>
+      </p:sp>
+      <p:sp>
+        <p:nvSpPr>
+          <p:cNvPr id="3" name="Notes Placeholder 2"/>
+          <p:cNvSpPr>
+            <a:spLocks noGrp="1"/>
+          </p:cNvSpPr>
+          <p:nvPr>
+            <p:ph type="body" idx="1"/>
+          </p:nvPr>
+        </p:nvSpPr>
+        <p:spPr/>
+        <p:txBody>
+          <a:bodyPr/>
+          <a:lstStyle/>
+          <a:p>
+            <a:endParaRPr lang="en-US" dirty="0"/>
+          </a:p>
+        </p:txBody>
+      </p:sp>
+      <p:sp>
+        <p:nvSpPr>
+          <p:cNvPr id="4" name="Slide Number Placeholder 3"/>
+          <p:cNvSpPr>
+            <a:spLocks noGrp="1"/>
+          </p:cNvSpPr>
+          <p:nvPr>
+            <p:ph type="sldNum" sz="quarter" idx="5"/>
+          </p:nvPr>
+        </p:nvSpPr>
+        <p:spPr/>
+        <p:txBody>
+          <a:bodyPr/>
+          <a:lstStyle/>
+          <a:p>
+            <a:fld id="{879F33CD-E639-E34C-9ACB-BE6AD0766D13}" type="slidenum">
+              <a:rPr lang="en-US" smtClean="0"/>
+              <a:t>23</a:t>
+            </a:fld>
+            <a:endParaRPr lang="en-US"/>
+          </a:p>
+        </p:txBody>
+      </p:sp>
+    </p:spTree>
+    <p:extLst>
+      <p:ext uri="{BB962C8B-B14F-4D97-AF65-F5344CB8AC3E}">
+        <p14:creationId xmlns:p14="http://schemas.microsoft.com/office/powerpoint/2010/main" val="1288974354"/>
+      </p:ext>
+    </p:extLst>
+  </p:cSld>
+  <p:clrMapOvr>
+    <a:masterClrMapping/>
+  </p:clrMapOvr>
+</p:notes>
 </file>
 
 <file path=ppt/slideLayouts/slideLayout1.xml><?xml version="1.0" encoding="utf-8"?>
@@ -6452,368 +12370,6 @@
 <file path=ppt/slides/slide10.xml><?xml version="1.0" encoding="utf-8"?>
 <p:sld xmlns:a="http://schemas.openxmlformats.org/drawingml/2006/main" xmlns:r="http://schemas.openxmlformats.org/officeDocument/2006/relationships" xmlns:p="http://schemas.openxmlformats.org/presentationml/2006/main">
   <p:cSld>
-    <p:spTree>
-      <p:nvGrpSpPr>
-        <p:cNvPr id="1" name=""/>
-        <p:cNvGrpSpPr/>
-        <p:nvPr/>
-      </p:nvGrpSpPr>
-      <p:grpSpPr>
-        <a:xfrm>
-          <a:off x="0" y="0"/>
-          <a:ext cx="0" cy="0"/>
-          <a:chOff x="0" y="0"/>
-          <a:chExt cx="0" cy="0"/>
-        </a:xfrm>
-      </p:grpSpPr>
-      <p:sp>
-        <p:nvSpPr>
-          <p:cNvPr id="2" name="Title 1">
-            <a:extLst>
-              <a:ext uri="{FF2B5EF4-FFF2-40B4-BE49-F238E27FC236}">
-                <a16:creationId xmlns:a16="http://schemas.microsoft.com/office/drawing/2014/main" id="{5E762C3C-6F05-32A6-BB6F-D59A3C96C8DD}"/>
-              </a:ext>
-            </a:extLst>
-          </p:cNvPr>
-          <p:cNvSpPr>
-            <a:spLocks noGrp="1"/>
-          </p:cNvSpPr>
-          <p:nvPr>
-            <p:ph type="title"/>
-          </p:nvPr>
-        </p:nvSpPr>
-        <p:spPr/>
-        <p:txBody>
-          <a:bodyPr/>
-          <a:lstStyle/>
-          <a:p>
-            <a:r>
-              <a:rPr lang="en-US" dirty="0"/>
-              <a:t>Part-2</a:t>
-            </a:r>
-          </a:p>
-        </p:txBody>
-      </p:sp>
-      <p:sp>
-        <p:nvSpPr>
-          <p:cNvPr id="3" name="Text Placeholder 2">
-            <a:extLst>
-              <a:ext uri="{FF2B5EF4-FFF2-40B4-BE49-F238E27FC236}">
-                <a16:creationId xmlns:a16="http://schemas.microsoft.com/office/drawing/2014/main" id="{725E0726-2C0C-FBF1-CDB1-4683CE38038D}"/>
-              </a:ext>
-            </a:extLst>
-          </p:cNvPr>
-          <p:cNvSpPr>
-            <a:spLocks noGrp="1"/>
-          </p:cNvSpPr>
-          <p:nvPr>
-            <p:ph type="body" idx="1"/>
-          </p:nvPr>
-        </p:nvSpPr>
-        <p:spPr/>
-        <p:txBody>
-          <a:bodyPr/>
-          <a:lstStyle/>
-          <a:p>
-            <a:endParaRPr lang="en-US"/>
-          </a:p>
-        </p:txBody>
-      </p:sp>
-    </p:spTree>
-    <p:extLst>
-      <p:ext uri="{BB962C8B-B14F-4D97-AF65-F5344CB8AC3E}">
-        <p14:creationId xmlns:p14="http://schemas.microsoft.com/office/powerpoint/2010/main" val="4159985837"/>
-      </p:ext>
-    </p:extLst>
-  </p:cSld>
-  <p:clrMapOvr>
-    <a:masterClrMapping/>
-  </p:clrMapOvr>
-</p:sld>
-</file>
-
-<file path=ppt/slides/slide11.xml><?xml version="1.0" encoding="utf-8"?>
-<p:sld xmlns:a="http://schemas.openxmlformats.org/drawingml/2006/main" xmlns:r="http://schemas.openxmlformats.org/officeDocument/2006/relationships" xmlns:p="http://schemas.openxmlformats.org/presentationml/2006/main">
-  <p:cSld>
-    <p:bg>
-      <p:bgPr>
-        <a:solidFill>
-          <a:schemeClr val="bg1">
-            <a:lumMod val="95000"/>
-          </a:schemeClr>
-        </a:solidFill>
-        <a:effectLst/>
-      </p:bgPr>
-    </p:bg>
-    <p:spTree>
-      <p:nvGrpSpPr>
-        <p:cNvPr id="1" name=""/>
-        <p:cNvGrpSpPr/>
-        <p:nvPr/>
-      </p:nvGrpSpPr>
-      <p:grpSpPr>
-        <a:xfrm>
-          <a:off x="0" y="0"/>
-          <a:ext cx="0" cy="0"/>
-          <a:chOff x="0" y="0"/>
-          <a:chExt cx="0" cy="0"/>
-        </a:xfrm>
-      </p:grpSpPr>
-      <p:sp>
-        <p:nvSpPr>
-          <p:cNvPr id="2" name="Title 1">
-            <a:extLst>
-              <a:ext uri="{FF2B5EF4-FFF2-40B4-BE49-F238E27FC236}">
-                <a16:creationId xmlns:a16="http://schemas.microsoft.com/office/drawing/2014/main" id="{FD5272CE-A3D0-04C5-1086-BDB9D0965631}"/>
-              </a:ext>
-            </a:extLst>
-          </p:cNvPr>
-          <p:cNvSpPr>
-            <a:spLocks noGrp="1"/>
-          </p:cNvSpPr>
-          <p:nvPr>
-            <p:ph type="title"/>
-          </p:nvPr>
-        </p:nvSpPr>
-        <p:spPr>
-          <a:xfrm>
-            <a:off x="804672" y="964692"/>
-            <a:ext cx="5894832" cy="1188720"/>
-          </a:xfrm>
-        </p:spPr>
-        <p:txBody>
-          <a:bodyPr>
-            <a:normAutofit/>
-          </a:bodyPr>
-          <a:lstStyle/>
-          <a:p>
-            <a:r>
-              <a:rPr lang="en-US" dirty="0"/>
-              <a:t>Problem statement</a:t>
-            </a:r>
-          </a:p>
-        </p:txBody>
-      </p:sp>
-      <p:sp>
-        <p:nvSpPr>
-          <p:cNvPr id="3" name="Content Placeholder 2">
-            <a:extLst>
-              <a:ext uri="{FF2B5EF4-FFF2-40B4-BE49-F238E27FC236}">
-                <a16:creationId xmlns:a16="http://schemas.microsoft.com/office/drawing/2014/main" id="{1A0B4FA2-E46D-5FA7-224F-1C8A0EF49858}"/>
-              </a:ext>
-            </a:extLst>
-          </p:cNvPr>
-          <p:cNvSpPr>
-            <a:spLocks noGrp="1"/>
-          </p:cNvSpPr>
-          <p:nvPr>
-            <p:ph idx="1"/>
-          </p:nvPr>
-        </p:nvSpPr>
-        <p:spPr>
-          <a:xfrm>
-            <a:off x="803243" y="2638044"/>
-            <a:ext cx="5963317" cy="3263206"/>
-          </a:xfrm>
-        </p:spPr>
-        <p:txBody>
-          <a:bodyPr>
-            <a:normAutofit/>
-          </a:bodyPr>
-          <a:lstStyle/>
-          <a:p>
-            <a:r>
-              <a:rPr lang="en-US" dirty="0"/>
-              <a:t>We are given 3 ECG waves, out of which 2 are noisy</a:t>
-            </a:r>
-          </a:p>
-          <a:p>
-            <a:r>
-              <a:rPr lang="en-US" dirty="0"/>
-              <a:t>We are tasked to find out the heart rate estimations per minute for each of these ECG waves.</a:t>
-            </a:r>
-          </a:p>
-        </p:txBody>
-      </p:sp>
-      <p:sp>
-        <p:nvSpPr>
-          <p:cNvPr id="10" name="Rectangle 9">
-            <a:extLst>
-              <a:ext uri="{FF2B5EF4-FFF2-40B4-BE49-F238E27FC236}">
-                <a16:creationId xmlns:a16="http://schemas.microsoft.com/office/drawing/2014/main" id="{879398A9-0D0D-4901-BDDF-B3D93CECA7B9}"/>
-              </a:ext>
-              <a:ext uri="{C183D7F6-B498-43B3-948B-1728B52AA6E4}">
-                <adec:decorative xmlns:adec="http://schemas.microsoft.com/office/drawing/2017/decorative" val="1"/>
-              </a:ext>
-            </a:extLst>
-          </p:cNvPr>
-          <p:cNvSpPr>
-            <a:spLocks noGrp="1" noRot="1" noChangeAspect="1" noMove="1" noResize="1" noEditPoints="1" noAdjustHandles="1" noChangeArrowheads="1" noChangeShapeType="1" noTextEdit="1"/>
-          </p:cNvSpPr>
-          <p:nvPr>
-            <p:extLst>
-              <p:ext uri="{386F3935-93C4-4BCD-93E2-E3B085C9AB24}">
-                <p16:designElem xmlns:p16="http://schemas.microsoft.com/office/powerpoint/2015/main" val="1"/>
-              </p:ext>
-            </p:extLst>
-          </p:nvPr>
-        </p:nvSpPr>
-        <p:spPr>
-          <a:xfrm>
-            <a:off x="7386706" y="964692"/>
-            <a:ext cx="3986784" cy="4936558"/>
-          </a:xfrm>
-          <a:prstGeom prst="rect">
-            <a:avLst/>
-          </a:prstGeom>
-          <a:noFill/>
-          <a:ln w="31750" cap="sq">
-            <a:solidFill>
-              <a:srgbClr val="FFFFFF"/>
-            </a:solidFill>
-            <a:miter lim="800000"/>
-          </a:ln>
-        </p:spPr>
-        <p:style>
-          <a:lnRef idx="2">
-            <a:schemeClr val="accent1">
-              <a:shade val="50000"/>
-            </a:schemeClr>
-          </a:lnRef>
-          <a:fillRef idx="1">
-            <a:schemeClr val="accent1"/>
-          </a:fillRef>
-          <a:effectRef idx="0">
-            <a:schemeClr val="accent1"/>
-          </a:effectRef>
-          <a:fontRef idx="minor">
-            <a:schemeClr val="lt1"/>
-          </a:fontRef>
-        </p:style>
-        <p:txBody>
-          <a:bodyPr rtlCol="0" anchor="ctr"/>
-          <a:lstStyle/>
-          <a:p>
-            <a:pPr algn="ctr"/>
-            <a:endParaRPr lang="en-US" dirty="0"/>
-          </a:p>
-        </p:txBody>
-      </p:sp>
-      <p:sp>
-        <p:nvSpPr>
-          <p:cNvPr id="12" name="Rectangle 11">
-            <a:extLst>
-              <a:ext uri="{FF2B5EF4-FFF2-40B4-BE49-F238E27FC236}">
-                <a16:creationId xmlns:a16="http://schemas.microsoft.com/office/drawing/2014/main" id="{011FEC3B-E514-4E21-B2CB-7903A73569E2}"/>
-              </a:ext>
-              <a:ext uri="{C183D7F6-B498-43B3-948B-1728B52AA6E4}">
-                <adec:decorative xmlns:adec="http://schemas.microsoft.com/office/drawing/2017/decorative" val="1"/>
-              </a:ext>
-            </a:extLst>
-          </p:cNvPr>
-          <p:cNvSpPr>
-            <a:spLocks noGrp="1" noRot="1" noChangeAspect="1" noMove="1" noResize="1" noEditPoints="1" noAdjustHandles="1" noChangeArrowheads="1" noChangeShapeType="1" noTextEdit="1"/>
-          </p:cNvSpPr>
-          <p:nvPr>
-            <p:extLst>
-              <p:ext uri="{386F3935-93C4-4BCD-93E2-E3B085C9AB24}">
-                <p16:designElem xmlns:p16="http://schemas.microsoft.com/office/powerpoint/2015/main" val="1"/>
-              </p:ext>
-            </p:extLst>
-          </p:nvPr>
-        </p:nvSpPr>
-        <p:spPr>
-          <a:xfrm>
-            <a:off x="7551298" y="1128683"/>
-            <a:ext cx="3657600" cy="4608576"/>
-          </a:xfrm>
-          <a:prstGeom prst="rect">
-            <a:avLst/>
-          </a:prstGeom>
-          <a:solidFill>
-            <a:srgbClr val="FFFFFF"/>
-          </a:solidFill>
-          <a:ln>
-            <a:noFill/>
-          </a:ln>
-        </p:spPr>
-        <p:style>
-          <a:lnRef idx="2">
-            <a:schemeClr val="accent1">
-              <a:shade val="50000"/>
-            </a:schemeClr>
-          </a:lnRef>
-          <a:fillRef idx="1">
-            <a:schemeClr val="accent1"/>
-          </a:fillRef>
-          <a:effectRef idx="0">
-            <a:schemeClr val="accent1"/>
-          </a:effectRef>
-          <a:fontRef idx="minor">
-            <a:schemeClr val="lt1"/>
-          </a:fontRef>
-        </p:style>
-        <p:txBody>
-          <a:bodyPr rtlCol="0" anchor="ctr"/>
-          <a:lstStyle/>
-          <a:p>
-            <a:pPr algn="ctr"/>
-            <a:endParaRPr lang="en-US"/>
-          </a:p>
-        </p:txBody>
-      </p:sp>
-      <p:pic>
-        <p:nvPicPr>
-          <p:cNvPr id="5" name="Picture 4" descr="A graph with a line&#10;&#10;Description automatically generated">
-            <a:extLst>
-              <a:ext uri="{FF2B5EF4-FFF2-40B4-BE49-F238E27FC236}">
-                <a16:creationId xmlns:a16="http://schemas.microsoft.com/office/drawing/2014/main" id="{5C741E80-20E5-D66D-FC33-877DAFF0C084}"/>
-              </a:ext>
-            </a:extLst>
-          </p:cNvPr>
-          <p:cNvPicPr>
-            <a:picLocks noChangeAspect="1"/>
-          </p:cNvPicPr>
-          <p:nvPr/>
-        </p:nvPicPr>
-        <p:blipFill>
-          <a:blip r:embed="rId2">
-            <a:extLst>
-              <a:ext uri="{837473B0-CC2E-450A-ABE3-18F120FF3D39}">
-                <a1611:picAttrSrcUrl xmlns:a1611="http://schemas.microsoft.com/office/drawing/2016/11/main" r:id="rId3"/>
-              </a:ext>
-            </a:extLst>
-          </a:blip>
-          <a:stretch>
-            <a:fillRect/>
-          </a:stretch>
-        </p:blipFill>
-        <p:spPr>
-          <a:xfrm>
-            <a:off x="7715890" y="1768763"/>
-            <a:ext cx="3328416" cy="3328416"/>
-          </a:xfrm>
-          <a:prstGeom prst="rect">
-            <a:avLst/>
-          </a:prstGeom>
-        </p:spPr>
-      </p:pic>
-    </p:spTree>
-    <p:extLst>
-      <p:ext uri="{BB962C8B-B14F-4D97-AF65-F5344CB8AC3E}">
-        <p14:creationId xmlns:p14="http://schemas.microsoft.com/office/powerpoint/2010/main" val="2103096484"/>
-      </p:ext>
-    </p:extLst>
-  </p:cSld>
-  <p:clrMapOvr>
-    <a:masterClrMapping/>
-  </p:clrMapOvr>
-</p:sld>
-</file>
-
-<file path=ppt/slides/slide12.xml><?xml version="1.0" encoding="utf-8"?>
-<p:sld xmlns:a="http://schemas.openxmlformats.org/drawingml/2006/main" xmlns:r="http://schemas.openxmlformats.org/officeDocument/2006/relationships" xmlns:p="http://schemas.openxmlformats.org/presentationml/2006/main">
-  <p:cSld>
     <p:bg>
       <p:bgPr>
         <a:solidFill>
@@ -7132,7 +12688,7 @@
 </p:sld>
 </file>
 
-<file path=ppt/slides/slide13.xml><?xml version="1.0" encoding="utf-8"?>
+<file path=ppt/slides/slide11.xml><?xml version="1.0" encoding="utf-8"?>
 <p:sld xmlns:a="http://schemas.openxmlformats.org/drawingml/2006/main" xmlns:r="http://schemas.openxmlformats.org/officeDocument/2006/relationships" xmlns:p="http://schemas.openxmlformats.org/presentationml/2006/main">
   <p:cSld>
     <p:bg>
@@ -7239,7 +12795,7 @@
 </p:sld>
 </file>
 
-<file path=ppt/slides/slide14.xml><?xml version="1.0" encoding="utf-8"?>
+<file path=ppt/slides/slide12.xml><?xml version="1.0" encoding="utf-8"?>
 <p:sld xmlns:a="http://schemas.openxmlformats.org/drawingml/2006/main" xmlns:r="http://schemas.openxmlformats.org/officeDocument/2006/relationships" xmlns:p="http://schemas.openxmlformats.org/presentationml/2006/main">
   <p:cSld>
     <p:bg>
@@ -7384,7 +12940,7 @@
 </p:sld>
 </file>
 
-<file path=ppt/slides/slide15.xml><?xml version="1.0" encoding="utf-8"?>
+<file path=ppt/slides/slide13.xml><?xml version="1.0" encoding="utf-8"?>
 <p:sld xmlns:a="http://schemas.openxmlformats.org/drawingml/2006/main" xmlns:r="http://schemas.openxmlformats.org/officeDocument/2006/relationships" xmlns:p="http://schemas.openxmlformats.org/presentationml/2006/main">
   <p:cSld>
     <p:bg>
@@ -7785,7 +13341,7 @@
 </p:sld>
 </file>
 
-<file path=ppt/slides/slide16.xml><?xml version="1.0" encoding="utf-8"?>
+<file path=ppt/slides/slide14.xml><?xml version="1.0" encoding="utf-8"?>
 <p:sld xmlns:a="http://schemas.openxmlformats.org/drawingml/2006/main" xmlns:r="http://schemas.openxmlformats.org/officeDocument/2006/relationships" xmlns:p="http://schemas.openxmlformats.org/presentationml/2006/main">
   <p:cSld>
     <p:bg>
@@ -8017,7 +13573,7 @@
 </p:sld>
 </file>
 
-<file path=ppt/slides/slide17.xml><?xml version="1.0" encoding="utf-8"?>
+<file path=ppt/slides/slide15.xml><?xml version="1.0" encoding="utf-8"?>
 <p:sld xmlns:a="http://schemas.openxmlformats.org/drawingml/2006/main" xmlns:r="http://schemas.openxmlformats.org/officeDocument/2006/relationships" xmlns:p="http://schemas.openxmlformats.org/presentationml/2006/main">
   <p:cSld>
     <p:bg>
@@ -8089,7 +13645,7 @@
 </p:sld>
 </file>
 
-<file path=ppt/slides/slide18.xml><?xml version="1.0" encoding="utf-8"?>
+<file path=ppt/slides/slide16.xml><?xml version="1.0" encoding="utf-8"?>
 <p:sld xmlns:a="http://schemas.openxmlformats.org/drawingml/2006/main" xmlns:r="http://schemas.openxmlformats.org/officeDocument/2006/relationships" xmlns:p="http://schemas.openxmlformats.org/presentationml/2006/main">
   <p:cSld>
     <p:spTree>
@@ -8172,7 +13728,7 @@
 </p:sld>
 </file>
 
-<file path=ppt/slides/slide19.xml><?xml version="1.0" encoding="utf-8"?>
+<file path=ppt/slides/slide17.xml><?xml version="1.0" encoding="utf-8"?>
 <p:sld xmlns:a="http://schemas.openxmlformats.org/drawingml/2006/main" xmlns:r="http://schemas.openxmlformats.org/officeDocument/2006/relationships" xmlns:p="http://schemas.openxmlformats.org/presentationml/2006/main">
   <p:cSld>
     <p:spTree>
@@ -8210,7 +13766,94 @@
           <a:bodyPr/>
           <a:lstStyle/>
           <a:p>
-            <a:endParaRPr lang="en-US" dirty="0"/>
+            <a:r>
+              <a:rPr lang="en-US" dirty="0"/>
+              <a:t>Problem statement</a:t>
+            </a:r>
+          </a:p>
+        </p:txBody>
+      </p:sp>
+      <p:graphicFrame>
+        <p:nvGraphicFramePr>
+          <p:cNvPr id="7" name="Content Placeholder 2">
+            <a:extLst>
+              <a:ext uri="{FF2B5EF4-FFF2-40B4-BE49-F238E27FC236}">
+                <a16:creationId xmlns:a16="http://schemas.microsoft.com/office/drawing/2014/main" id="{7F3DE4D8-37BD-42FB-BE08-505C2F3C1A96}"/>
+              </a:ext>
+            </a:extLst>
+          </p:cNvPr>
+          <p:cNvGraphicFramePr>
+            <a:graphicFrameLocks noGrp="1"/>
+          </p:cNvGraphicFramePr>
+          <p:nvPr>
+            <p:ph idx="1"/>
+          </p:nvPr>
+        </p:nvGraphicFramePr>
+        <p:xfrm>
+          <a:off x="2231136" y="2638044"/>
+          <a:ext cx="7729728" cy="3101983"/>
+        </p:xfrm>
+        <a:graphic>
+          <a:graphicData uri="http://schemas.openxmlformats.org/drawingml/2006/diagram">
+            <dgm:relIds xmlns:dgm="http://schemas.openxmlformats.org/drawingml/2006/diagram" xmlns:r="http://schemas.openxmlformats.org/officeDocument/2006/relationships" r:dm="rId2" r:lo="rId3" r:qs="rId4" r:cs="rId5"/>
+          </a:graphicData>
+        </a:graphic>
+      </p:graphicFrame>
+    </p:spTree>
+    <p:extLst>
+      <p:ext uri="{BB962C8B-B14F-4D97-AF65-F5344CB8AC3E}">
+        <p14:creationId xmlns:p14="http://schemas.microsoft.com/office/powerpoint/2010/main" val="3453257538"/>
+      </p:ext>
+    </p:extLst>
+  </p:cSld>
+  <p:clrMapOvr>
+    <a:masterClrMapping/>
+  </p:clrMapOvr>
+</p:sld>
+</file>
+
+<file path=ppt/slides/slide18.xml><?xml version="1.0" encoding="utf-8"?>
+<p:sld xmlns:a="http://schemas.openxmlformats.org/drawingml/2006/main" xmlns:r="http://schemas.openxmlformats.org/officeDocument/2006/relationships" xmlns:p="http://schemas.openxmlformats.org/presentationml/2006/main">
+  <p:cSld>
+    <p:spTree>
+      <p:nvGrpSpPr>
+        <p:cNvPr id="1" name=""/>
+        <p:cNvGrpSpPr/>
+        <p:nvPr/>
+      </p:nvGrpSpPr>
+      <p:grpSpPr>
+        <a:xfrm>
+          <a:off x="0" y="0"/>
+          <a:ext cx="0" cy="0"/>
+          <a:chOff x="0" y="0"/>
+          <a:chExt cx="0" cy="0"/>
+        </a:xfrm>
+      </p:grpSpPr>
+      <p:sp>
+        <p:nvSpPr>
+          <p:cNvPr id="2" name="Title 1">
+            <a:extLst>
+              <a:ext uri="{FF2B5EF4-FFF2-40B4-BE49-F238E27FC236}">
+                <a16:creationId xmlns:a16="http://schemas.microsoft.com/office/drawing/2014/main" id="{FF3EEE9C-BC13-8BFA-B89C-AA97ACF3734F}"/>
+              </a:ext>
+            </a:extLst>
+          </p:cNvPr>
+          <p:cNvSpPr>
+            <a:spLocks noGrp="1"/>
+          </p:cNvSpPr>
+          <p:nvPr>
+            <p:ph type="title"/>
+          </p:nvPr>
+        </p:nvSpPr>
+        <p:spPr/>
+        <p:txBody>
+          <a:bodyPr/>
+          <a:lstStyle/>
+          <a:p>
+            <a:r>
+              <a:rPr lang="en-US" dirty="0"/>
+              <a:t>Task-1</a:t>
+            </a:r>
           </a:p>
         </p:txBody>
       </p:sp>
@@ -8219,7 +13862,7 @@
           <p:cNvPr id="3" name="Content Placeholder 2">
             <a:extLst>
               <a:ext uri="{FF2B5EF4-FFF2-40B4-BE49-F238E27FC236}">
-                <a16:creationId xmlns:a16="http://schemas.microsoft.com/office/drawing/2014/main" id="{D8124444-E88D-E26A-77DF-D17762253025}"/>
+                <a16:creationId xmlns:a16="http://schemas.microsoft.com/office/drawing/2014/main" id="{9BE9C946-B5B4-04F3-B05D-58EAD7694D6E}"/>
               </a:ext>
             </a:extLst>
           </p:cNvPr>
@@ -8235,14 +13878,117 @@
           <a:bodyPr/>
           <a:lstStyle/>
           <a:p>
-            <a:endParaRPr lang="en-US"/>
+            <a:r>
+              <a:rPr lang="en-US" dirty="0"/>
+              <a:t>For first subtask I am first finding rms energy of each word using its start time and end time .</a:t>
+            </a:r>
+          </a:p>
+          <a:p>
+            <a:r>
+              <a:rPr lang="en-US" dirty="0"/>
+              <a:t>Then I am setting a threshold value which filters out the loud words from other words.</a:t>
+            </a:r>
+          </a:p>
+          <a:p>
+            <a:r>
+              <a:rPr lang="en-US" dirty="0"/>
+              <a:t>Then I have plotted all the words in a histogram where words marked red are having high sounds</a:t>
+            </a:r>
           </a:p>
         </p:txBody>
       </p:sp>
     </p:spTree>
     <p:extLst>
       <p:ext uri="{BB962C8B-B14F-4D97-AF65-F5344CB8AC3E}">
-        <p14:creationId xmlns:p14="http://schemas.microsoft.com/office/powerpoint/2010/main" val="3453257538"/>
+        <p14:creationId xmlns:p14="http://schemas.microsoft.com/office/powerpoint/2010/main" val="3581505998"/>
+      </p:ext>
+    </p:extLst>
+  </p:cSld>
+  <p:clrMapOvr>
+    <a:masterClrMapping/>
+  </p:clrMapOvr>
+</p:sld>
+</file>
+
+<file path=ppt/slides/slide19.xml><?xml version="1.0" encoding="utf-8"?>
+<p:sld xmlns:a="http://schemas.openxmlformats.org/drawingml/2006/main" xmlns:r="http://schemas.openxmlformats.org/officeDocument/2006/relationships" xmlns:p="http://schemas.openxmlformats.org/presentationml/2006/main">
+  <p:cSld>
+    <p:spTree>
+      <p:nvGrpSpPr>
+        <p:cNvPr id="1" name=""/>
+        <p:cNvGrpSpPr/>
+        <p:nvPr/>
+      </p:nvGrpSpPr>
+      <p:grpSpPr>
+        <a:xfrm>
+          <a:off x="0" y="0"/>
+          <a:ext cx="0" cy="0"/>
+          <a:chOff x="0" y="0"/>
+          <a:chExt cx="0" cy="0"/>
+        </a:xfrm>
+      </p:grpSpPr>
+      <p:sp>
+        <p:nvSpPr>
+          <p:cNvPr id="2" name="Title 1">
+            <a:extLst>
+              <a:ext uri="{FF2B5EF4-FFF2-40B4-BE49-F238E27FC236}">
+                <a16:creationId xmlns:a16="http://schemas.microsoft.com/office/drawing/2014/main" id="{F07E05D0-47FA-51E8-D747-B8B0197C48F9}"/>
+              </a:ext>
+            </a:extLst>
+          </p:cNvPr>
+          <p:cNvSpPr>
+            <a:spLocks noGrp="1"/>
+          </p:cNvSpPr>
+          <p:nvPr>
+            <p:ph type="title"/>
+          </p:nvPr>
+        </p:nvSpPr>
+        <p:spPr/>
+        <p:txBody>
+          <a:bodyPr/>
+          <a:lstStyle/>
+          <a:p>
+            <a:r>
+              <a:rPr lang="en-US" dirty="0"/>
+              <a:t>task-1 results</a:t>
+            </a:r>
+          </a:p>
+        </p:txBody>
+      </p:sp>
+      <p:pic>
+        <p:nvPicPr>
+          <p:cNvPr id="14" name="Picture 13" descr="A screenshot of a computer&#10;&#10;Description automatically generated">
+            <a:extLst>
+              <a:ext uri="{FF2B5EF4-FFF2-40B4-BE49-F238E27FC236}">
+                <a16:creationId xmlns:a16="http://schemas.microsoft.com/office/drawing/2014/main" id="{C3F74195-F2F8-82B3-8F14-710493DC768D}"/>
+              </a:ext>
+            </a:extLst>
+          </p:cNvPr>
+          <p:cNvPicPr>
+            <a:picLocks noChangeAspect="1"/>
+          </p:cNvPicPr>
+          <p:nvPr/>
+        </p:nvPicPr>
+        <p:blipFill>
+          <a:blip r:embed="rId2"/>
+          <a:stretch>
+            <a:fillRect/>
+          </a:stretch>
+        </p:blipFill>
+        <p:spPr>
+          <a:xfrm>
+            <a:off x="3332053" y="2100189"/>
+            <a:ext cx="5527893" cy="5208800"/>
+          </a:xfrm>
+          <a:prstGeom prst="rect">
+            <a:avLst/>
+          </a:prstGeom>
+        </p:spPr>
+      </p:pic>
+    </p:spTree>
+    <p:extLst>
+      <p:ext uri="{BB962C8B-B14F-4D97-AF65-F5344CB8AC3E}">
+        <p14:creationId xmlns:p14="http://schemas.microsoft.com/office/powerpoint/2010/main" val="3524039356"/>
       </p:ext>
     </p:extLst>
   </p:cSld>
@@ -8326,6 +14072,446 @@
     <p:extLst>
       <p:ext uri="{BB962C8B-B14F-4D97-AF65-F5344CB8AC3E}">
         <p14:creationId xmlns:p14="http://schemas.microsoft.com/office/powerpoint/2010/main" val="4074350568"/>
+      </p:ext>
+    </p:extLst>
+  </p:cSld>
+  <p:clrMapOvr>
+    <a:masterClrMapping/>
+  </p:clrMapOvr>
+</p:sld>
+</file>
+
+<file path=ppt/slides/slide20.xml><?xml version="1.0" encoding="utf-8"?>
+<p:sld xmlns:a="http://schemas.openxmlformats.org/drawingml/2006/main" xmlns:r="http://schemas.openxmlformats.org/officeDocument/2006/relationships" xmlns:p="http://schemas.openxmlformats.org/presentationml/2006/main">
+  <p:cSld>
+    <p:spTree>
+      <p:nvGrpSpPr>
+        <p:cNvPr id="1" name=""/>
+        <p:cNvGrpSpPr/>
+        <p:nvPr/>
+      </p:nvGrpSpPr>
+      <p:grpSpPr>
+        <a:xfrm>
+          <a:off x="0" y="0"/>
+          <a:ext cx="0" cy="0"/>
+          <a:chOff x="0" y="0"/>
+          <a:chExt cx="0" cy="0"/>
+        </a:xfrm>
+      </p:grpSpPr>
+      <p:sp>
+        <p:nvSpPr>
+          <p:cNvPr id="2" name="Title 1">
+            <a:extLst>
+              <a:ext uri="{FF2B5EF4-FFF2-40B4-BE49-F238E27FC236}">
+                <a16:creationId xmlns:a16="http://schemas.microsoft.com/office/drawing/2014/main" id="{1E59FB46-0D01-E929-DE41-CFA638B32051}"/>
+              </a:ext>
+            </a:extLst>
+          </p:cNvPr>
+          <p:cNvSpPr>
+            <a:spLocks noGrp="1"/>
+          </p:cNvSpPr>
+          <p:nvPr>
+            <p:ph type="title"/>
+          </p:nvPr>
+        </p:nvSpPr>
+        <p:spPr/>
+        <p:txBody>
+          <a:bodyPr/>
+          <a:lstStyle/>
+          <a:p>
+            <a:r>
+              <a:rPr lang="en-US" dirty="0"/>
+              <a:t>Task-1 results</a:t>
+            </a:r>
+          </a:p>
+        </p:txBody>
+      </p:sp>
+      <p:pic>
+        <p:nvPicPr>
+          <p:cNvPr id="4" name="Picture 3" descr="A screenshot of a computer&#10;&#10;Description automatically generated">
+            <a:extLst>
+              <a:ext uri="{FF2B5EF4-FFF2-40B4-BE49-F238E27FC236}">
+                <a16:creationId xmlns:a16="http://schemas.microsoft.com/office/drawing/2014/main" id="{0B30A6EF-560D-D181-2D37-68250BFC31D8}"/>
+              </a:ext>
+            </a:extLst>
+          </p:cNvPr>
+          <p:cNvPicPr>
+            <a:picLocks noChangeAspect="1"/>
+          </p:cNvPicPr>
+          <p:nvPr/>
+        </p:nvPicPr>
+        <p:blipFill>
+          <a:blip r:embed="rId2"/>
+          <a:stretch>
+            <a:fillRect/>
+          </a:stretch>
+        </p:blipFill>
+        <p:spPr>
+          <a:xfrm>
+            <a:off x="3174358" y="1996440"/>
+            <a:ext cx="5843283" cy="5196839"/>
+          </a:xfrm>
+          <a:prstGeom prst="rect">
+            <a:avLst/>
+          </a:prstGeom>
+        </p:spPr>
+      </p:pic>
+    </p:spTree>
+    <p:extLst>
+      <p:ext uri="{BB962C8B-B14F-4D97-AF65-F5344CB8AC3E}">
+        <p14:creationId xmlns:p14="http://schemas.microsoft.com/office/powerpoint/2010/main" val="407772433"/>
+      </p:ext>
+    </p:extLst>
+  </p:cSld>
+  <p:clrMapOvr>
+    <a:masterClrMapping/>
+  </p:clrMapOvr>
+</p:sld>
+</file>
+
+<file path=ppt/slides/slide21.xml><?xml version="1.0" encoding="utf-8"?>
+<p:sld xmlns:a="http://schemas.openxmlformats.org/drawingml/2006/main" xmlns:r="http://schemas.openxmlformats.org/officeDocument/2006/relationships" xmlns:p="http://schemas.openxmlformats.org/presentationml/2006/main">
+  <p:cSld>
+    <p:spTree>
+      <p:nvGrpSpPr>
+        <p:cNvPr id="1" name=""/>
+        <p:cNvGrpSpPr/>
+        <p:nvPr/>
+      </p:nvGrpSpPr>
+      <p:grpSpPr>
+        <a:xfrm>
+          <a:off x="0" y="0"/>
+          <a:ext cx="0" cy="0"/>
+          <a:chOff x="0" y="0"/>
+          <a:chExt cx="0" cy="0"/>
+        </a:xfrm>
+      </p:grpSpPr>
+      <p:sp>
+        <p:nvSpPr>
+          <p:cNvPr id="2" name="Title 1">
+            <a:extLst>
+              <a:ext uri="{FF2B5EF4-FFF2-40B4-BE49-F238E27FC236}">
+                <a16:creationId xmlns:a16="http://schemas.microsoft.com/office/drawing/2014/main" id="{D02AB64B-CB99-1FB9-64C0-A93A7006748D}"/>
+              </a:ext>
+            </a:extLst>
+          </p:cNvPr>
+          <p:cNvSpPr>
+            <a:spLocks noGrp="1"/>
+          </p:cNvSpPr>
+          <p:nvPr>
+            <p:ph type="title"/>
+          </p:nvPr>
+        </p:nvSpPr>
+        <p:spPr/>
+        <p:txBody>
+          <a:bodyPr/>
+          <a:lstStyle/>
+          <a:p>
+            <a:r>
+              <a:rPr lang="en-US" dirty="0"/>
+              <a:t>Task-1 results</a:t>
+            </a:r>
+          </a:p>
+        </p:txBody>
+      </p:sp>
+      <p:pic>
+        <p:nvPicPr>
+          <p:cNvPr id="4" name="Picture 3" descr="A screenshot of a computer&#10;&#10;Description automatically generated">
+            <a:extLst>
+              <a:ext uri="{FF2B5EF4-FFF2-40B4-BE49-F238E27FC236}">
+                <a16:creationId xmlns:a16="http://schemas.microsoft.com/office/drawing/2014/main" id="{3F6E851E-62EC-CDC2-5C4D-EA1C2DBE5D6E}"/>
+              </a:ext>
+            </a:extLst>
+          </p:cNvPr>
+          <p:cNvPicPr>
+            <a:picLocks noChangeAspect="1"/>
+          </p:cNvPicPr>
+          <p:nvPr/>
+        </p:nvPicPr>
+        <p:blipFill>
+          <a:blip r:embed="rId2"/>
+          <a:stretch>
+            <a:fillRect/>
+          </a:stretch>
+        </p:blipFill>
+        <p:spPr>
+          <a:xfrm>
+            <a:off x="3362465" y="2153412"/>
+            <a:ext cx="5467070" cy="4970803"/>
+          </a:xfrm>
+          <a:prstGeom prst="rect">
+            <a:avLst/>
+          </a:prstGeom>
+        </p:spPr>
+      </p:pic>
+    </p:spTree>
+    <p:extLst>
+      <p:ext uri="{BB962C8B-B14F-4D97-AF65-F5344CB8AC3E}">
+        <p14:creationId xmlns:p14="http://schemas.microsoft.com/office/powerpoint/2010/main" val="2370968054"/>
+      </p:ext>
+    </p:extLst>
+  </p:cSld>
+  <p:clrMapOvr>
+    <a:masterClrMapping/>
+  </p:clrMapOvr>
+</p:sld>
+</file>
+
+<file path=ppt/slides/slide22.xml><?xml version="1.0" encoding="utf-8"?>
+<p:sld xmlns:a="http://schemas.openxmlformats.org/drawingml/2006/main" xmlns:r="http://schemas.openxmlformats.org/officeDocument/2006/relationships" xmlns:p="http://schemas.openxmlformats.org/presentationml/2006/main">
+  <p:cSld>
+    <p:spTree>
+      <p:nvGrpSpPr>
+        <p:cNvPr id="1" name=""/>
+        <p:cNvGrpSpPr/>
+        <p:nvPr/>
+      </p:nvGrpSpPr>
+      <p:grpSpPr>
+        <a:xfrm>
+          <a:off x="0" y="0"/>
+          <a:ext cx="0" cy="0"/>
+          <a:chOff x="0" y="0"/>
+          <a:chExt cx="0" cy="0"/>
+        </a:xfrm>
+      </p:grpSpPr>
+      <p:sp>
+        <p:nvSpPr>
+          <p:cNvPr id="2" name="Title 1">
+            <a:extLst>
+              <a:ext uri="{FF2B5EF4-FFF2-40B4-BE49-F238E27FC236}">
+                <a16:creationId xmlns:a16="http://schemas.microsoft.com/office/drawing/2014/main" id="{4B74B15D-395B-CB44-C568-C069BD8FBE3A}"/>
+              </a:ext>
+            </a:extLst>
+          </p:cNvPr>
+          <p:cNvSpPr>
+            <a:spLocks noGrp="1"/>
+          </p:cNvSpPr>
+          <p:nvPr>
+            <p:ph type="title"/>
+          </p:nvPr>
+        </p:nvSpPr>
+        <p:spPr/>
+        <p:txBody>
+          <a:bodyPr/>
+          <a:lstStyle/>
+          <a:p>
+            <a:r>
+              <a:rPr lang="en-US" dirty="0"/>
+              <a:t>Task-1 results</a:t>
+            </a:r>
+          </a:p>
+        </p:txBody>
+      </p:sp>
+      <p:pic>
+        <p:nvPicPr>
+          <p:cNvPr id="4" name="Picture 3" descr="A screenshot of a computer&#10;&#10;Description automatically generated">
+            <a:extLst>
+              <a:ext uri="{FF2B5EF4-FFF2-40B4-BE49-F238E27FC236}">
+                <a16:creationId xmlns:a16="http://schemas.microsoft.com/office/drawing/2014/main" id="{5D6BE67C-B6EB-41E9-76AE-9FB3A775FA0A}"/>
+              </a:ext>
+            </a:extLst>
+          </p:cNvPr>
+          <p:cNvPicPr>
+            <a:picLocks noChangeAspect="1"/>
+          </p:cNvPicPr>
+          <p:nvPr/>
+        </p:nvPicPr>
+        <p:blipFill>
+          <a:blip r:embed="rId2"/>
+          <a:stretch>
+            <a:fillRect/>
+          </a:stretch>
+        </p:blipFill>
+        <p:spPr>
+          <a:xfrm>
+            <a:off x="3322320" y="2153412"/>
+            <a:ext cx="5486400" cy="5009388"/>
+          </a:xfrm>
+          <a:prstGeom prst="rect">
+            <a:avLst/>
+          </a:prstGeom>
+        </p:spPr>
+      </p:pic>
+    </p:spTree>
+    <p:extLst>
+      <p:ext uri="{BB962C8B-B14F-4D97-AF65-F5344CB8AC3E}">
+        <p14:creationId xmlns:p14="http://schemas.microsoft.com/office/powerpoint/2010/main" val="1506024000"/>
+      </p:ext>
+    </p:extLst>
+  </p:cSld>
+  <p:clrMapOvr>
+    <a:masterClrMapping/>
+  </p:clrMapOvr>
+</p:sld>
+</file>
+
+<file path=ppt/slides/slide23.xml><?xml version="1.0" encoding="utf-8"?>
+<p:sld xmlns:a="http://schemas.openxmlformats.org/drawingml/2006/main" xmlns:r="http://schemas.openxmlformats.org/officeDocument/2006/relationships" xmlns:p="http://schemas.openxmlformats.org/presentationml/2006/main">
+  <p:cSld>
+    <p:spTree>
+      <p:nvGrpSpPr>
+        <p:cNvPr id="1" name=""/>
+        <p:cNvGrpSpPr/>
+        <p:nvPr/>
+      </p:nvGrpSpPr>
+      <p:grpSpPr>
+        <a:xfrm>
+          <a:off x="0" y="0"/>
+          <a:ext cx="0" cy="0"/>
+          <a:chOff x="0" y="0"/>
+          <a:chExt cx="0" cy="0"/>
+        </a:xfrm>
+      </p:grpSpPr>
+      <p:sp>
+        <p:nvSpPr>
+          <p:cNvPr id="2" name="Title 1">
+            <a:extLst>
+              <a:ext uri="{FF2B5EF4-FFF2-40B4-BE49-F238E27FC236}">
+                <a16:creationId xmlns:a16="http://schemas.microsoft.com/office/drawing/2014/main" id="{37B0C069-0FFC-5EC3-0E19-1D8362E5C0D9}"/>
+              </a:ext>
+            </a:extLst>
+          </p:cNvPr>
+          <p:cNvSpPr>
+            <a:spLocks noGrp="1"/>
+          </p:cNvSpPr>
+          <p:nvPr>
+            <p:ph type="title"/>
+          </p:nvPr>
+        </p:nvSpPr>
+        <p:spPr/>
+        <p:txBody>
+          <a:bodyPr/>
+          <a:lstStyle/>
+          <a:p>
+            <a:r>
+              <a:rPr lang="en-US" dirty="0"/>
+              <a:t>Task-1 results</a:t>
+            </a:r>
+          </a:p>
+        </p:txBody>
+      </p:sp>
+      <p:pic>
+        <p:nvPicPr>
+          <p:cNvPr id="4" name="Picture 3" descr="A screenshot of a computer&#10;&#10;Description automatically generated">
+            <a:extLst>
+              <a:ext uri="{FF2B5EF4-FFF2-40B4-BE49-F238E27FC236}">
+                <a16:creationId xmlns:a16="http://schemas.microsoft.com/office/drawing/2014/main" id="{6D03C96A-45A7-1DB9-099D-CFE716F38489}"/>
+              </a:ext>
+            </a:extLst>
+          </p:cNvPr>
+          <p:cNvPicPr>
+            <a:picLocks noChangeAspect="1"/>
+          </p:cNvPicPr>
+          <p:nvPr/>
+        </p:nvPicPr>
+        <p:blipFill>
+          <a:blip r:embed="rId3"/>
+          <a:stretch>
+            <a:fillRect/>
+          </a:stretch>
+        </p:blipFill>
+        <p:spPr>
+          <a:xfrm>
+            <a:off x="3185160" y="2042161"/>
+            <a:ext cx="5669280" cy="5257800"/>
+          </a:xfrm>
+          <a:prstGeom prst="rect">
+            <a:avLst/>
+          </a:prstGeom>
+        </p:spPr>
+      </p:pic>
+    </p:spTree>
+    <p:extLst>
+      <p:ext uri="{BB962C8B-B14F-4D97-AF65-F5344CB8AC3E}">
+        <p14:creationId xmlns:p14="http://schemas.microsoft.com/office/powerpoint/2010/main" val="3931420003"/>
+      </p:ext>
+    </p:extLst>
+  </p:cSld>
+  <p:clrMapOvr>
+    <a:masterClrMapping/>
+  </p:clrMapOvr>
+</p:sld>
+</file>
+
+<file path=ppt/slides/slide24.xml><?xml version="1.0" encoding="utf-8"?>
+<p:sld xmlns:a="http://schemas.openxmlformats.org/drawingml/2006/main" xmlns:r="http://schemas.openxmlformats.org/officeDocument/2006/relationships" xmlns:p="http://schemas.openxmlformats.org/presentationml/2006/main">
+  <p:cSld>
+    <p:spTree>
+      <p:nvGrpSpPr>
+        <p:cNvPr id="1" name=""/>
+        <p:cNvGrpSpPr/>
+        <p:nvPr/>
+      </p:nvGrpSpPr>
+      <p:grpSpPr>
+        <a:xfrm>
+          <a:off x="0" y="0"/>
+          <a:ext cx="0" cy="0"/>
+          <a:chOff x="0" y="0"/>
+          <a:chExt cx="0" cy="0"/>
+        </a:xfrm>
+      </p:grpSpPr>
+      <p:sp>
+        <p:nvSpPr>
+          <p:cNvPr id="2" name="Title 1">
+            <a:extLst>
+              <a:ext uri="{FF2B5EF4-FFF2-40B4-BE49-F238E27FC236}">
+                <a16:creationId xmlns:a16="http://schemas.microsoft.com/office/drawing/2014/main" id="{0D5CE438-038A-7C40-64F9-F930C2547D3E}"/>
+              </a:ext>
+            </a:extLst>
+          </p:cNvPr>
+          <p:cNvSpPr>
+            <a:spLocks noGrp="1"/>
+          </p:cNvSpPr>
+          <p:nvPr>
+            <p:ph type="title"/>
+          </p:nvPr>
+        </p:nvSpPr>
+        <p:spPr/>
+        <p:txBody>
+          <a:bodyPr/>
+          <a:lstStyle/>
+          <a:p>
+            <a:r>
+              <a:rPr lang="en-US" dirty="0"/>
+              <a:t>Task-1 results</a:t>
+            </a:r>
+          </a:p>
+        </p:txBody>
+      </p:sp>
+      <p:pic>
+        <p:nvPicPr>
+          <p:cNvPr id="4" name="Picture 3" descr="A screenshot of a computer&#10;&#10;Description automatically generated">
+            <a:extLst>
+              <a:ext uri="{FF2B5EF4-FFF2-40B4-BE49-F238E27FC236}">
+                <a16:creationId xmlns:a16="http://schemas.microsoft.com/office/drawing/2014/main" id="{2C18ECE6-3B01-16B9-1D71-E781424B4BA9}"/>
+              </a:ext>
+            </a:extLst>
+          </p:cNvPr>
+          <p:cNvPicPr>
+            <a:picLocks noChangeAspect="1"/>
+          </p:cNvPicPr>
+          <p:nvPr/>
+        </p:nvPicPr>
+        <p:blipFill>
+          <a:blip r:embed="rId2"/>
+          <a:stretch>
+            <a:fillRect/>
+          </a:stretch>
+        </p:blipFill>
+        <p:spPr>
+          <a:xfrm>
+            <a:off x="3398520" y="2146555"/>
+            <a:ext cx="5471160" cy="5116068"/>
+          </a:xfrm>
+          <a:prstGeom prst="rect">
+            <a:avLst/>
+          </a:prstGeom>
+        </p:spPr>
+      </p:pic>
+    </p:spTree>
+    <p:extLst>
+      <p:ext uri="{BB962C8B-B14F-4D97-AF65-F5344CB8AC3E}">
+        <p14:creationId xmlns:p14="http://schemas.microsoft.com/office/powerpoint/2010/main" val="3489249907"/>
       </p:ext>
     </p:extLst>
   </p:cSld>
@@ -8493,6 +14679,93 @@
 <file path=ppt/slides/slide4.xml><?xml version="1.0" encoding="utf-8"?>
 <p:sld xmlns:a="http://schemas.openxmlformats.org/drawingml/2006/main" xmlns:r="http://schemas.openxmlformats.org/officeDocument/2006/relationships" xmlns:p="http://schemas.openxmlformats.org/presentationml/2006/main">
   <p:cSld>
+    <p:spTree>
+      <p:nvGrpSpPr>
+        <p:cNvPr id="1" name=""/>
+        <p:cNvGrpSpPr/>
+        <p:nvPr/>
+      </p:nvGrpSpPr>
+      <p:grpSpPr>
+        <a:xfrm>
+          <a:off x="0" y="0"/>
+          <a:ext cx="0" cy="0"/>
+          <a:chOff x="0" y="0"/>
+          <a:chExt cx="0" cy="0"/>
+        </a:xfrm>
+      </p:grpSpPr>
+      <p:sp>
+        <p:nvSpPr>
+          <p:cNvPr id="2" name="Title 1">
+            <a:extLst>
+              <a:ext uri="{FF2B5EF4-FFF2-40B4-BE49-F238E27FC236}">
+                <a16:creationId xmlns:a16="http://schemas.microsoft.com/office/drawing/2014/main" id="{43769DB5-5E56-52F9-D0BF-83E45E37D8CD}"/>
+              </a:ext>
+            </a:extLst>
+          </p:cNvPr>
+          <p:cNvSpPr>
+            <a:spLocks noGrp="1"/>
+          </p:cNvSpPr>
+          <p:nvPr>
+            <p:ph type="title"/>
+          </p:nvPr>
+        </p:nvSpPr>
+        <p:spPr/>
+        <p:txBody>
+          <a:bodyPr/>
+          <a:lstStyle/>
+          <a:p>
+            <a:r>
+              <a:rPr lang="en-IN" dirty="0"/>
+              <a:t>FFT of given samples</a:t>
+            </a:r>
+          </a:p>
+        </p:txBody>
+      </p:sp>
+      <p:pic>
+        <p:nvPicPr>
+          <p:cNvPr id="5" name="Content Placeholder 4">
+            <a:extLst>
+              <a:ext uri="{FF2B5EF4-FFF2-40B4-BE49-F238E27FC236}">
+                <a16:creationId xmlns:a16="http://schemas.microsoft.com/office/drawing/2014/main" id="{6908A0F1-A53A-22D2-552B-E4B0147E745F}"/>
+              </a:ext>
+            </a:extLst>
+          </p:cNvPr>
+          <p:cNvPicPr>
+            <a:picLocks noGrp="1" noChangeAspect="1"/>
+          </p:cNvPicPr>
+          <p:nvPr>
+            <p:ph idx="1"/>
+          </p:nvPr>
+        </p:nvPicPr>
+        <p:blipFill>
+          <a:blip r:embed="rId2"/>
+          <a:stretch>
+            <a:fillRect/>
+          </a:stretch>
+        </p:blipFill>
+        <p:spPr>
+          <a:xfrm>
+            <a:off x="2231135" y="2325421"/>
+            <a:ext cx="7716115" cy="3721418"/>
+          </a:xfrm>
+        </p:spPr>
+      </p:pic>
+    </p:spTree>
+    <p:extLst>
+      <p:ext uri="{BB962C8B-B14F-4D97-AF65-F5344CB8AC3E}">
+        <p14:creationId xmlns:p14="http://schemas.microsoft.com/office/powerpoint/2010/main" val="1740160574"/>
+      </p:ext>
+    </p:extLst>
+  </p:cSld>
+  <p:clrMapOvr>
+    <a:masterClrMapping/>
+  </p:clrMapOvr>
+</p:sld>
+</file>
+
+<file path=ppt/slides/slide5.xml><?xml version="1.0" encoding="utf-8"?>
+<p:sld xmlns:a="http://schemas.openxmlformats.org/drawingml/2006/main" xmlns:r="http://schemas.openxmlformats.org/officeDocument/2006/relationships" xmlns:p="http://schemas.openxmlformats.org/presentationml/2006/main">
+  <p:cSld>
     <p:bg>
       <p:bgPr>
         <a:solidFill>
@@ -8519,170 +14792,10 @@
       </p:grpSpPr>
       <p:sp>
         <p:nvSpPr>
-          <p:cNvPr id="10" name="Rectangle 9">
-            <a:extLst>
-              <a:ext uri="{FF2B5EF4-FFF2-40B4-BE49-F238E27FC236}">
-                <a16:creationId xmlns:a16="http://schemas.microsoft.com/office/drawing/2014/main" id="{5FA21C72-692C-49FD-9EB4-DDDDDEBD4BD6}"/>
-              </a:ext>
-              <a:ext uri="{C183D7F6-B498-43B3-948B-1728B52AA6E4}">
-                <adec:decorative xmlns:adec="http://schemas.microsoft.com/office/drawing/2017/decorative" val="1"/>
-              </a:ext>
-            </a:extLst>
-          </p:cNvPr>
-          <p:cNvSpPr>
-            <a:spLocks noGrp="1" noRot="1" noChangeAspect="1" noMove="1" noResize="1" noEditPoints="1" noAdjustHandles="1" noChangeArrowheads="1" noChangeShapeType="1" noTextEdit="1"/>
-          </p:cNvSpPr>
-          <p:nvPr>
-            <p:extLst>
-              <p:ext uri="{386F3935-93C4-4BCD-93E2-E3B085C9AB24}">
-                <p16:designElem xmlns:p16="http://schemas.microsoft.com/office/powerpoint/2015/main" val="1"/>
-              </p:ext>
-            </p:extLst>
-          </p:nvPr>
-        </p:nvSpPr>
-        <p:spPr>
-          <a:xfrm>
-            <a:off x="1575405" y="950977"/>
-            <a:ext cx="9041190" cy="4956047"/>
-          </a:xfrm>
-          <a:prstGeom prst="rect">
-            <a:avLst/>
-          </a:prstGeom>
-          <a:solidFill>
-            <a:srgbClr val="FFFFFF"/>
-          </a:solidFill>
-          <a:ln w="31750">
-            <a:solidFill>
-              <a:srgbClr val="404040"/>
-            </a:solidFill>
-          </a:ln>
-        </p:spPr>
-        <p:style>
-          <a:lnRef idx="2">
-            <a:schemeClr val="accent1">
-              <a:shade val="50000"/>
-            </a:schemeClr>
-          </a:lnRef>
-          <a:fillRef idx="1">
-            <a:schemeClr val="accent1"/>
-          </a:fillRef>
-          <a:effectRef idx="0">
-            <a:schemeClr val="accent1"/>
-          </a:effectRef>
-          <a:fontRef idx="minor">
-            <a:schemeClr val="lt1"/>
-          </a:fontRef>
-        </p:style>
-        <p:txBody>
-          <a:bodyPr rtlCol="0" anchor="ctr"/>
-          <a:lstStyle/>
-          <a:p>
-            <a:pPr algn="ctr"/>
-            <a:endParaRPr lang="en-US"/>
-          </a:p>
-        </p:txBody>
-      </p:sp>
-      <p:pic>
-        <p:nvPicPr>
-          <p:cNvPr id="5" name="Content Placeholder 4">
-            <a:extLst>
-              <a:ext uri="{FF2B5EF4-FFF2-40B4-BE49-F238E27FC236}">
-                <a16:creationId xmlns:a16="http://schemas.microsoft.com/office/drawing/2014/main" id="{6C98D75E-433F-2BAC-C4CA-3041AB60945A}"/>
-              </a:ext>
-            </a:extLst>
-          </p:cNvPr>
-          <p:cNvPicPr>
-            <a:picLocks noGrp="1" noChangeAspect="1"/>
-          </p:cNvPicPr>
-          <p:nvPr>
-            <p:ph idx="1"/>
-          </p:nvPr>
-        </p:nvPicPr>
-        <p:blipFill>
-          <a:blip r:embed="rId2"/>
-          <a:stretch>
-            <a:fillRect/>
-          </a:stretch>
-        </p:blipFill>
-        <p:spPr>
-          <a:xfrm>
-            <a:off x="2366210" y="1519404"/>
-            <a:ext cx="7915425" cy="3819191"/>
-          </a:xfrm>
-          <a:prstGeom prst="rect">
-            <a:avLst/>
-          </a:prstGeom>
-        </p:spPr>
-      </p:pic>
-      <p:sp>
-        <p:nvSpPr>
-          <p:cNvPr id="12" name="Oval 11">
-            <a:extLst>
-              <a:ext uri="{FF2B5EF4-FFF2-40B4-BE49-F238E27FC236}">
-                <a16:creationId xmlns:a16="http://schemas.microsoft.com/office/drawing/2014/main" id="{FBAF941A-6830-47A3-B63C-7C7B66AEA73B}"/>
-              </a:ext>
-              <a:ext uri="{C183D7F6-B498-43B3-948B-1728B52AA6E4}">
-                <adec:decorative xmlns:adec="http://schemas.microsoft.com/office/drawing/2017/decorative" val="1"/>
-              </a:ext>
-            </a:extLst>
-          </p:cNvPr>
-          <p:cNvSpPr>
-            <a:spLocks noGrp="1" noRot="1" noChangeAspect="1" noMove="1" noResize="1" noEditPoints="1" noAdjustHandles="1" noChangeArrowheads="1" noChangeShapeType="1" noTextEdit="1"/>
-          </p:cNvSpPr>
-          <p:nvPr>
-            <p:extLst>
-              <p:ext uri="{386F3935-93C4-4BCD-93E2-E3B085C9AB24}">
-                <p16:designElem xmlns:p16="http://schemas.microsoft.com/office/powerpoint/2015/main" val="1"/>
-              </p:ext>
-            </p:extLst>
-          </p:nvPr>
-        </p:nvSpPr>
-        <p:spPr>
-          <a:xfrm>
-            <a:off x="632380" y="624518"/>
-            <a:ext cx="2157984" cy="2157984"/>
-          </a:xfrm>
-          <a:prstGeom prst="ellipse">
-            <a:avLst/>
-          </a:prstGeom>
-          <a:solidFill>
-            <a:srgbClr val="404040"/>
-          </a:solidFill>
-          <a:ln w="31750">
-            <a:noFill/>
-          </a:ln>
-        </p:spPr>
-        <p:style>
-          <a:lnRef idx="2">
-            <a:schemeClr val="accent1">
-              <a:shade val="50000"/>
-            </a:schemeClr>
-          </a:lnRef>
-          <a:fillRef idx="1">
-            <a:schemeClr val="accent1"/>
-          </a:fillRef>
-          <a:effectRef idx="0">
-            <a:schemeClr val="accent1"/>
-          </a:effectRef>
-          <a:fontRef idx="minor">
-            <a:schemeClr val="lt1"/>
-          </a:fontRef>
-        </p:style>
-        <p:txBody>
-          <a:bodyPr rtlCol="0" anchor="ctr"/>
-          <a:lstStyle/>
-          <a:p>
-            <a:pPr algn="ctr"/>
-            <a:endParaRPr lang="en-US"/>
-          </a:p>
-        </p:txBody>
-      </p:sp>
-      <p:sp>
-        <p:nvSpPr>
           <p:cNvPr id="2" name="Title 1">
             <a:extLst>
               <a:ext uri="{FF2B5EF4-FFF2-40B4-BE49-F238E27FC236}">
-                <a16:creationId xmlns:a16="http://schemas.microsoft.com/office/drawing/2014/main" id="{BBEA03B0-0C34-8ACE-D173-5BE2C36B523E}"/>
+                <a16:creationId xmlns:a16="http://schemas.microsoft.com/office/drawing/2014/main" id="{89B4A73F-2D64-2ACF-DCAE-BD1E35E43A3B}"/>
               </a:ext>
             </a:extLst>
           </p:cNvPr>
@@ -8695,18 +14808,9 @@
         </p:nvSpPr>
         <p:spPr>
           <a:xfrm>
-            <a:off x="796972" y="789110"/>
-            <a:ext cx="1828800" cy="1828800"/>
+            <a:off x="2231136" y="964692"/>
+            <a:ext cx="7729728" cy="1188720"/>
           </a:xfrm>
-          <a:prstGeom prst="ellipse">
-            <a:avLst/>
-          </a:prstGeom>
-          <a:noFill/>
-          <a:ln>
-            <a:solidFill>
-              <a:srgbClr val="FFFFFF"/>
-            </a:solidFill>
-          </a:ln>
         </p:spPr>
         <p:txBody>
           <a:bodyPr vert="horz" lIns="182880" tIns="182880" rIns="182880" bIns="182880" rtlCol="0" anchor="ctr">
@@ -8715,20 +14819,44 @@
           <a:lstStyle/>
           <a:p>
             <a:r>
-              <a:rPr lang="en-US" sz="1300">
-                <a:solidFill>
-                  <a:srgbClr val="FFFFFF"/>
-                </a:solidFill>
-              </a:rPr>
-              <a:t>FFT Plots of given samples</a:t>
+              <a:rPr lang="en-US"/>
+              <a:t>Method to distinguish</a:t>
             </a:r>
           </a:p>
         </p:txBody>
       </p:sp>
+      <p:graphicFrame>
+        <p:nvGraphicFramePr>
+          <p:cNvPr id="5" name="TextBox 2">
+            <a:extLst>
+              <a:ext uri="{FF2B5EF4-FFF2-40B4-BE49-F238E27FC236}">
+                <a16:creationId xmlns:a16="http://schemas.microsoft.com/office/drawing/2014/main" id="{631C892C-9AA6-5410-B634-51CDFD5B31E8}"/>
+              </a:ext>
+            </a:extLst>
+          </p:cNvPr>
+          <p:cNvGraphicFramePr/>
+          <p:nvPr>
+            <p:extLst>
+              <p:ext uri="{D42A27DB-BD31-4B8C-83A1-F6EECF244321}">
+                <p14:modId xmlns:p14="http://schemas.microsoft.com/office/powerpoint/2010/main" val="1136039695"/>
+              </p:ext>
+            </p:extLst>
+          </p:nvPr>
+        </p:nvGraphicFramePr>
+        <p:xfrm>
+          <a:off x="965200" y="2638425"/>
+          <a:ext cx="10261600" cy="3107748"/>
+        </p:xfrm>
+        <a:graphic>
+          <a:graphicData uri="http://schemas.openxmlformats.org/drawingml/2006/diagram">
+            <dgm:relIds xmlns:dgm="http://schemas.openxmlformats.org/drawingml/2006/diagram" xmlns:r="http://schemas.openxmlformats.org/officeDocument/2006/relationships" r:dm="rId2" r:lo="rId3" r:qs="rId4" r:cs="rId5"/>
+          </a:graphicData>
+        </a:graphic>
+      </p:graphicFrame>
     </p:spTree>
     <p:extLst>
       <p:ext uri="{BB962C8B-B14F-4D97-AF65-F5344CB8AC3E}">
-        <p14:creationId xmlns:p14="http://schemas.microsoft.com/office/powerpoint/2010/main" val="2528564958"/>
+        <p14:creationId xmlns:p14="http://schemas.microsoft.com/office/powerpoint/2010/main" val="3887563221"/>
       </p:ext>
     </p:extLst>
   </p:cSld>
@@ -8738,7 +14866,7 @@
 </p:sld>
 </file>
 
-<file path=ppt/slides/slide5.xml><?xml version="1.0" encoding="utf-8"?>
+<file path=ppt/slides/slide6.xml><?xml version="1.0" encoding="utf-8"?>
 <p:sld xmlns:a="http://schemas.openxmlformats.org/drawingml/2006/main" xmlns:r="http://schemas.openxmlformats.org/officeDocument/2006/relationships" xmlns:p="http://schemas.openxmlformats.org/presentationml/2006/main">
   <p:cSld>
     <p:bg>
@@ -8828,15 +14956,18 @@
           </a:bodyPr>
           <a:lstStyle/>
           <a:p>
+            <a:endParaRPr lang="en-IN" dirty="0"/>
+          </a:p>
+          <a:p>
             <a:r>
               <a:rPr lang="en-IN" dirty="0"/>
               <a:t>After Plotting FFT of given Samples, we observe that we can distinguish them based Number of Peaks in Normalised FFT</a:t>
             </a:r>
           </a:p>
           <a:p>
-            <a:endParaRPr lang="en-IN" dirty="0"/>
-          </a:p>
-          <a:p>
+            <a:pPr marL="0" indent="0">
+              <a:buNone/>
+            </a:pPr>
             <a:endParaRPr lang="en-IN" dirty="0"/>
           </a:p>
           <a:p>
@@ -8872,7 +15003,7 @@
         </p:blipFill>
         <p:spPr>
           <a:xfrm>
-            <a:off x="4672103" y="4187955"/>
+            <a:off x="4707856" y="4129640"/>
             <a:ext cx="6883071" cy="1201533"/>
           </a:xfrm>
           <a:prstGeom prst="rect">
@@ -8899,7 +15030,7 @@
 </p:sld>
 </file>
 
-<file path=ppt/slides/slide6.xml><?xml version="1.0" encoding="utf-8"?>
+<file path=ppt/slides/slide7.xml><?xml version="1.0" encoding="utf-8"?>
 <p:sld xmlns:a="http://schemas.openxmlformats.org/drawingml/2006/main" xmlns:r="http://schemas.openxmlformats.org/officeDocument/2006/relationships" xmlns:p="http://schemas.openxmlformats.org/presentationml/2006/main">
   <p:cSld>
     <p:bg>
@@ -9252,7 +15383,90 @@
 </p:sld>
 </file>
 
-<file path=ppt/slides/slide7.xml><?xml version="1.0" encoding="utf-8"?>
+<file path=ppt/slides/slide8.xml><?xml version="1.0" encoding="utf-8"?>
+<p:sld xmlns:a="http://schemas.openxmlformats.org/drawingml/2006/main" xmlns:r="http://schemas.openxmlformats.org/officeDocument/2006/relationships" xmlns:p="http://schemas.openxmlformats.org/presentationml/2006/main">
+  <p:cSld>
+    <p:spTree>
+      <p:nvGrpSpPr>
+        <p:cNvPr id="1" name=""/>
+        <p:cNvGrpSpPr/>
+        <p:nvPr/>
+      </p:nvGrpSpPr>
+      <p:grpSpPr>
+        <a:xfrm>
+          <a:off x="0" y="0"/>
+          <a:ext cx="0" cy="0"/>
+          <a:chOff x="0" y="0"/>
+          <a:chExt cx="0" cy="0"/>
+        </a:xfrm>
+      </p:grpSpPr>
+      <p:sp>
+        <p:nvSpPr>
+          <p:cNvPr id="2" name="Title 1">
+            <a:extLst>
+              <a:ext uri="{FF2B5EF4-FFF2-40B4-BE49-F238E27FC236}">
+                <a16:creationId xmlns:a16="http://schemas.microsoft.com/office/drawing/2014/main" id="{5E762C3C-6F05-32A6-BB6F-D59A3C96C8DD}"/>
+              </a:ext>
+            </a:extLst>
+          </p:cNvPr>
+          <p:cNvSpPr>
+            <a:spLocks noGrp="1"/>
+          </p:cNvSpPr>
+          <p:nvPr>
+            <p:ph type="title"/>
+          </p:nvPr>
+        </p:nvSpPr>
+        <p:spPr/>
+        <p:txBody>
+          <a:bodyPr/>
+          <a:lstStyle/>
+          <a:p>
+            <a:r>
+              <a:rPr lang="en-US" dirty="0"/>
+              <a:t>Part-2</a:t>
+            </a:r>
+          </a:p>
+        </p:txBody>
+      </p:sp>
+      <p:sp>
+        <p:nvSpPr>
+          <p:cNvPr id="3" name="Text Placeholder 2">
+            <a:extLst>
+              <a:ext uri="{FF2B5EF4-FFF2-40B4-BE49-F238E27FC236}">
+                <a16:creationId xmlns:a16="http://schemas.microsoft.com/office/drawing/2014/main" id="{725E0726-2C0C-FBF1-CDB1-4683CE38038D}"/>
+              </a:ext>
+            </a:extLst>
+          </p:cNvPr>
+          <p:cNvSpPr>
+            <a:spLocks noGrp="1"/>
+          </p:cNvSpPr>
+          <p:nvPr>
+            <p:ph type="body" idx="1"/>
+          </p:nvPr>
+        </p:nvSpPr>
+        <p:spPr/>
+        <p:txBody>
+          <a:bodyPr/>
+          <a:lstStyle/>
+          <a:p>
+            <a:endParaRPr lang="en-US"/>
+          </a:p>
+        </p:txBody>
+      </p:sp>
+    </p:spTree>
+    <p:extLst>
+      <p:ext uri="{BB962C8B-B14F-4D97-AF65-F5344CB8AC3E}">
+        <p14:creationId xmlns:p14="http://schemas.microsoft.com/office/powerpoint/2010/main" val="4159985837"/>
+      </p:ext>
+    </p:extLst>
+  </p:cSld>
+  <p:clrMapOvr>
+    <a:masterClrMapping/>
+  </p:clrMapOvr>
+</p:sld>
+</file>
+
+<file path=ppt/slides/slide9.xml><?xml version="1.0" encoding="utf-8"?>
 <p:sld xmlns:a="http://schemas.openxmlformats.org/drawingml/2006/main" xmlns:r="http://schemas.openxmlformats.org/officeDocument/2006/relationships" xmlns:p="http://schemas.openxmlformats.org/presentationml/2006/main">
   <p:cSld>
     <p:bg>
@@ -9284,7 +15498,7 @@
           <p:cNvPr id="2" name="Title 1">
             <a:extLst>
               <a:ext uri="{FF2B5EF4-FFF2-40B4-BE49-F238E27FC236}">
-                <a16:creationId xmlns:a16="http://schemas.microsoft.com/office/drawing/2014/main" id="{0E04E9A5-49BE-0C15-9A3F-F08E63697ADF}"/>
+                <a16:creationId xmlns:a16="http://schemas.microsoft.com/office/drawing/2014/main" id="{FD5272CE-A3D0-04C5-1086-BDB9D0965631}"/>
               </a:ext>
             </a:extLst>
           </p:cNvPr>
@@ -9297,29 +15511,197 @@
         </p:nvSpPr>
         <p:spPr>
           <a:xfrm>
-            <a:off x="5445496" y="978776"/>
-            <a:ext cx="5925310" cy="1174991"/>
+            <a:off x="804672" y="964692"/>
+            <a:ext cx="5894832" cy="1188720"/>
           </a:xfrm>
         </p:spPr>
         <p:txBody>
-          <a:bodyPr vert="horz" lIns="182880" tIns="182880" rIns="182880" bIns="182880" rtlCol="0" anchor="ctr">
+          <a:bodyPr>
             <a:normAutofit/>
           </a:bodyPr>
           <a:lstStyle/>
           <a:p>
             <a:r>
-              <a:rPr lang="en-US" sz="2400"/>
+              <a:rPr lang="en-US" dirty="0"/>
               <a:t>Problem statement</a:t>
             </a:r>
+          </a:p>
+        </p:txBody>
+      </p:sp>
+      <p:sp>
+        <p:nvSpPr>
+          <p:cNvPr id="3" name="Content Placeholder 2">
+            <a:extLst>
+              <a:ext uri="{FF2B5EF4-FFF2-40B4-BE49-F238E27FC236}">
+                <a16:creationId xmlns:a16="http://schemas.microsoft.com/office/drawing/2014/main" id="{1A0B4FA2-E46D-5FA7-224F-1C8A0EF49858}"/>
+              </a:ext>
+            </a:extLst>
+          </p:cNvPr>
+          <p:cNvSpPr>
+            <a:spLocks noGrp="1"/>
+          </p:cNvSpPr>
+          <p:nvPr>
+            <p:ph idx="1"/>
+          </p:nvPr>
+        </p:nvSpPr>
+        <p:spPr>
+          <a:xfrm>
+            <a:off x="803243" y="2638044"/>
+            <a:ext cx="5963317" cy="3263206"/>
+          </a:xfrm>
+        </p:spPr>
+        <p:txBody>
+          <a:bodyPr>
+            <a:normAutofit/>
+          </a:bodyPr>
+          <a:lstStyle/>
+          <a:p>
+            <a:r>
+              <a:rPr lang="en-US" dirty="0"/>
+              <a:t>We are given 3 ECG waves, out of which 2 are noisy</a:t>
+            </a:r>
+          </a:p>
+          <a:p>
+            <a:r>
+              <a:rPr lang="en-US" dirty="0"/>
+              <a:t>We are tasked to find out the heart rate estimations per minute for each of these ECG waves.</a:t>
+            </a:r>
+          </a:p>
+        </p:txBody>
+      </p:sp>
+      <p:sp>
+        <p:nvSpPr>
+          <p:cNvPr id="10" name="Rectangle 9">
+            <a:extLst>
+              <a:ext uri="{FF2B5EF4-FFF2-40B4-BE49-F238E27FC236}">
+                <a16:creationId xmlns:a16="http://schemas.microsoft.com/office/drawing/2014/main" id="{879398A9-0D0D-4901-BDDF-B3D93CECA7B9}"/>
+              </a:ext>
+              <a:ext uri="{C183D7F6-B498-43B3-948B-1728B52AA6E4}">
+                <adec:decorative xmlns:adec="http://schemas.microsoft.com/office/drawing/2017/decorative" val="1"/>
+              </a:ext>
+            </a:extLst>
+          </p:cNvPr>
+          <p:cNvSpPr>
+            <a:spLocks noGrp="1" noRot="1" noChangeAspect="1" noMove="1" noResize="1" noEditPoints="1" noAdjustHandles="1" noChangeArrowheads="1" noChangeShapeType="1" noTextEdit="1"/>
+          </p:cNvSpPr>
+          <p:nvPr>
+            <p:extLst>
+              <p:ext uri="{386F3935-93C4-4BCD-93E2-E3B085C9AB24}">
+                <p16:designElem xmlns:p16="http://schemas.microsoft.com/office/powerpoint/2015/main" val="1"/>
+              </p:ext>
+            </p:extLst>
+          </p:nvPr>
+        </p:nvSpPr>
+        <p:spPr>
+          <a:xfrm>
+            <a:off x="7386706" y="964692"/>
+            <a:ext cx="3986784" cy="4936558"/>
+          </a:xfrm>
+          <a:prstGeom prst="rect">
+            <a:avLst/>
+          </a:prstGeom>
+          <a:noFill/>
+          <a:ln w="31750" cap="sq">
+            <a:solidFill>
+              <a:srgbClr val="FFFFFF"/>
+            </a:solidFill>
+            <a:miter lim="800000"/>
+          </a:ln>
+        </p:spPr>
+        <p:style>
+          <a:lnRef idx="2">
+            <a:schemeClr val="accent1">
+              <a:shade val="50000"/>
+            </a:schemeClr>
+          </a:lnRef>
+          <a:fillRef idx="1">
+            <a:schemeClr val="accent1"/>
+          </a:fillRef>
+          <a:effectRef idx="0">
+            <a:schemeClr val="accent1"/>
+          </a:effectRef>
+          <a:fontRef idx="minor">
+            <a:schemeClr val="lt1"/>
+          </a:fontRef>
+        </p:style>
+        <p:txBody>
+          <a:bodyPr rtlCol="0" anchor="ctr"/>
+          <a:lstStyle/>
+          <a:p>
+            <a:pPr algn="ctr"/>
+            <a:endParaRPr lang="en-US" dirty="0"/>
+          </a:p>
+        </p:txBody>
+      </p:sp>
+      <p:sp>
+        <p:nvSpPr>
+          <p:cNvPr id="12" name="Rectangle 11">
+            <a:extLst>
+              <a:ext uri="{FF2B5EF4-FFF2-40B4-BE49-F238E27FC236}">
+                <a16:creationId xmlns:a16="http://schemas.microsoft.com/office/drawing/2014/main" id="{011FEC3B-E514-4E21-B2CB-7903A73569E2}"/>
+              </a:ext>
+              <a:ext uri="{C183D7F6-B498-43B3-948B-1728B52AA6E4}">
+                <adec:decorative xmlns:adec="http://schemas.microsoft.com/office/drawing/2017/decorative" val="1"/>
+              </a:ext>
+            </a:extLst>
+          </p:cNvPr>
+          <p:cNvSpPr>
+            <a:spLocks noGrp="1" noRot="1" noChangeAspect="1" noMove="1" noResize="1" noEditPoints="1" noAdjustHandles="1" noChangeArrowheads="1" noChangeShapeType="1" noTextEdit="1"/>
+          </p:cNvSpPr>
+          <p:nvPr>
+            <p:extLst>
+              <p:ext uri="{386F3935-93C4-4BCD-93E2-E3B085C9AB24}">
+                <p16:designElem xmlns:p16="http://schemas.microsoft.com/office/powerpoint/2015/main" val="1"/>
+              </p:ext>
+            </p:extLst>
+          </p:nvPr>
+        </p:nvSpPr>
+        <p:spPr>
+          <a:xfrm>
+            <a:off x="7551298" y="1128683"/>
+            <a:ext cx="3657600" cy="4608576"/>
+          </a:xfrm>
+          <a:prstGeom prst="rect">
+            <a:avLst/>
+          </a:prstGeom>
+          <a:solidFill>
+            <a:srgbClr val="FFFFFF"/>
+          </a:solidFill>
+          <a:ln>
+            <a:noFill/>
+          </a:ln>
+        </p:spPr>
+        <p:style>
+          <a:lnRef idx="2">
+            <a:schemeClr val="accent1">
+              <a:shade val="50000"/>
+            </a:schemeClr>
+          </a:lnRef>
+          <a:fillRef idx="1">
+            <a:schemeClr val="accent1"/>
+          </a:fillRef>
+          <a:effectRef idx="0">
+            <a:schemeClr val="accent1"/>
+          </a:effectRef>
+          <a:fontRef idx="minor">
+            <a:schemeClr val="lt1"/>
+          </a:fontRef>
+        </p:style>
+        <p:txBody>
+          <a:bodyPr rtlCol="0" anchor="ctr"/>
+          <a:lstStyle/>
+          <a:p>
+            <a:pPr algn="ctr"/>
+            <a:endParaRPr lang="en-US"/>
           </a:p>
         </p:txBody>
       </p:sp>
       <p:pic>
         <p:nvPicPr>
-          <p:cNvPr id="6" name="Picture 5" descr="Bird landing on a tree">
+          <p:cNvPr id="5" name="Picture 4" descr="A graph with a line&#10;&#10;Description automatically generated">
             <a:extLst>
               <a:ext uri="{FF2B5EF4-FFF2-40B4-BE49-F238E27FC236}">
-                <a16:creationId xmlns:a16="http://schemas.microsoft.com/office/drawing/2014/main" id="{1BCB604F-2141-42A9-5F42-CAEDE581DC44}"/>
+                <a16:creationId xmlns:a16="http://schemas.microsoft.com/office/drawing/2014/main" id="{5C741E80-20E5-D66D-FC33-877DAFF0C084}"/>
               </a:ext>
             </a:extLst>
           </p:cNvPr>
@@ -9329,301 +15711,31 @@
           <p:nvPr/>
         </p:nvPicPr>
         <p:blipFill>
-          <a:blip r:embed="rId2"/>
-          <a:srcRect l="17513" r="36138" b="1"/>
-          <a:stretch/>
+          <a:blip r:embed="rId2">
+            <a:extLst>
+              <a:ext uri="{837473B0-CC2E-450A-ABE3-18F120FF3D39}">
+                <a1611:picAttrSrcUrl xmlns:a1611="http://schemas.microsoft.com/office/drawing/2016/11/main" r:id="rId3"/>
+              </a:ext>
+            </a:extLst>
+          </a:blip>
+          <a:stretch>
+            <a:fillRect/>
+          </a:stretch>
         </p:blipFill>
         <p:spPr>
           <a:xfrm>
-            <a:off x="20" y="10"/>
-            <a:ext cx="4657325" cy="6857990"/>
+            <a:off x="7715890" y="1768763"/>
+            <a:ext cx="3328416" cy="3328416"/>
           </a:xfrm>
           <a:prstGeom prst="rect">
             <a:avLst/>
           </a:prstGeom>
         </p:spPr>
       </p:pic>
-      <p:sp>
-        <p:nvSpPr>
-          <p:cNvPr id="4" name="TextBox 3">
-            <a:extLst>
-              <a:ext uri="{FF2B5EF4-FFF2-40B4-BE49-F238E27FC236}">
-                <a16:creationId xmlns:a16="http://schemas.microsoft.com/office/drawing/2014/main" id="{3558EB60-2B6B-08D9-E690-AD8C154C9DAE}"/>
-              </a:ext>
-            </a:extLst>
-          </p:cNvPr>
-          <p:cNvSpPr txBox="1"/>
-          <p:nvPr/>
-        </p:nvSpPr>
-        <p:spPr>
-          <a:xfrm>
-            <a:off x="5445496" y="2640692"/>
-            <a:ext cx="5925310" cy="3255252"/>
-          </a:xfrm>
-          <a:prstGeom prst="rect">
-            <a:avLst/>
-          </a:prstGeom>
-        </p:spPr>
-        <p:txBody>
-          <a:bodyPr vert="horz" lIns="91440" tIns="45720" rIns="91440" bIns="45720" rtlCol="0">
-            <a:normAutofit/>
-          </a:bodyPr>
-          <a:lstStyle/>
-          <a:p>
-            <a:pPr marL="285750" indent="-228600" defTabSz="914400">
-              <a:spcBef>
-                <a:spcPts val="1000"/>
-              </a:spcBef>
-              <a:buClr>
-                <a:schemeClr val="accent2"/>
-              </a:buClr>
-              <a:buFont typeface="Arial" panose="020B0604020202020204" pitchFamily="34" charset="0"/>
-              <a:buChar char="•"/>
-            </a:pPr>
-            <a:r>
-              <a:rPr lang="en-US">
-                <a:solidFill>
-                  <a:schemeClr val="tx1">
-                    <a:lumMod val="85000"/>
-                    <a:lumOff val="15000"/>
-                  </a:schemeClr>
-                </a:solidFill>
-              </a:rPr>
-              <a:t>We are given Audio Samples of few Birds and our Task is to recongnise Bird whose Test Samples are Given</a:t>
-            </a:r>
-          </a:p>
-        </p:txBody>
-      </p:sp>
     </p:spTree>
     <p:extLst>
       <p:ext uri="{BB962C8B-B14F-4D97-AF65-F5344CB8AC3E}">
-        <p14:creationId xmlns:p14="http://schemas.microsoft.com/office/powerpoint/2010/main" val="2619882871"/>
-      </p:ext>
-    </p:extLst>
-  </p:cSld>
-  <p:clrMapOvr>
-    <a:masterClrMapping/>
-  </p:clrMapOvr>
-</p:sld>
-</file>
-
-<file path=ppt/slides/slide8.xml><?xml version="1.0" encoding="utf-8"?>
-<p:sld xmlns:a="http://schemas.openxmlformats.org/drawingml/2006/main" xmlns:r="http://schemas.openxmlformats.org/officeDocument/2006/relationships" xmlns:p="http://schemas.openxmlformats.org/presentationml/2006/main">
-  <p:cSld>
-    <p:spTree>
-      <p:nvGrpSpPr>
-        <p:cNvPr id="1" name=""/>
-        <p:cNvGrpSpPr/>
-        <p:nvPr/>
-      </p:nvGrpSpPr>
-      <p:grpSpPr>
-        <a:xfrm>
-          <a:off x="0" y="0"/>
-          <a:ext cx="0" cy="0"/>
-          <a:chOff x="0" y="0"/>
-          <a:chExt cx="0" cy="0"/>
-        </a:xfrm>
-      </p:grpSpPr>
-      <p:sp>
-        <p:nvSpPr>
-          <p:cNvPr id="2" name="Title 1">
-            <a:extLst>
-              <a:ext uri="{FF2B5EF4-FFF2-40B4-BE49-F238E27FC236}">
-                <a16:creationId xmlns:a16="http://schemas.microsoft.com/office/drawing/2014/main" id="{43769DB5-5E56-52F9-D0BF-83E45E37D8CD}"/>
-              </a:ext>
-            </a:extLst>
-          </p:cNvPr>
-          <p:cNvSpPr>
-            <a:spLocks noGrp="1"/>
-          </p:cNvSpPr>
-          <p:nvPr>
-            <p:ph type="title"/>
-          </p:nvPr>
-        </p:nvSpPr>
-        <p:spPr/>
-        <p:txBody>
-          <a:bodyPr/>
-          <a:lstStyle/>
-          <a:p>
-            <a:r>
-              <a:rPr lang="en-IN" dirty="0"/>
-              <a:t>FFT of given samples</a:t>
-            </a:r>
-          </a:p>
-        </p:txBody>
-      </p:sp>
-      <p:pic>
-        <p:nvPicPr>
-          <p:cNvPr id="5" name="Content Placeholder 4">
-            <a:extLst>
-              <a:ext uri="{FF2B5EF4-FFF2-40B4-BE49-F238E27FC236}">
-                <a16:creationId xmlns:a16="http://schemas.microsoft.com/office/drawing/2014/main" id="{6908A0F1-A53A-22D2-552B-E4B0147E745F}"/>
-              </a:ext>
-            </a:extLst>
-          </p:cNvPr>
-          <p:cNvPicPr>
-            <a:picLocks noGrp="1" noChangeAspect="1"/>
-          </p:cNvPicPr>
-          <p:nvPr>
-            <p:ph idx="1"/>
-          </p:nvPr>
-        </p:nvPicPr>
-        <p:blipFill>
-          <a:blip r:embed="rId2"/>
-          <a:stretch>
-            <a:fillRect/>
-          </a:stretch>
-        </p:blipFill>
-        <p:spPr>
-          <a:xfrm>
-            <a:off x="2231135" y="2325421"/>
-            <a:ext cx="7716115" cy="3721418"/>
-          </a:xfrm>
-        </p:spPr>
-      </p:pic>
-    </p:spTree>
-    <p:extLst>
-      <p:ext uri="{BB962C8B-B14F-4D97-AF65-F5344CB8AC3E}">
-        <p14:creationId xmlns:p14="http://schemas.microsoft.com/office/powerpoint/2010/main" val="1740160574"/>
-      </p:ext>
-    </p:extLst>
-  </p:cSld>
-  <p:clrMapOvr>
-    <a:masterClrMapping/>
-  </p:clrMapOvr>
-</p:sld>
-</file>
-
-<file path=ppt/slides/slide9.xml><?xml version="1.0" encoding="utf-8"?>
-<p:sld xmlns:a="http://schemas.openxmlformats.org/drawingml/2006/main" xmlns:r="http://schemas.openxmlformats.org/officeDocument/2006/relationships" xmlns:p="http://schemas.openxmlformats.org/presentationml/2006/main">
-  <p:cSld>
-    <p:spTree>
-      <p:nvGrpSpPr>
-        <p:cNvPr id="1" name=""/>
-        <p:cNvGrpSpPr/>
-        <p:nvPr/>
-      </p:nvGrpSpPr>
-      <p:grpSpPr>
-        <a:xfrm>
-          <a:off x="0" y="0"/>
-          <a:ext cx="0" cy="0"/>
-          <a:chOff x="0" y="0"/>
-          <a:chExt cx="0" cy="0"/>
-        </a:xfrm>
-      </p:grpSpPr>
-      <p:sp>
-        <p:nvSpPr>
-          <p:cNvPr id="2" name="Title 1">
-            <a:extLst>
-              <a:ext uri="{FF2B5EF4-FFF2-40B4-BE49-F238E27FC236}">
-                <a16:creationId xmlns:a16="http://schemas.microsoft.com/office/drawing/2014/main" id="{89B4A73F-2D64-2ACF-DCAE-BD1E35E43A3B}"/>
-              </a:ext>
-            </a:extLst>
-          </p:cNvPr>
-          <p:cNvSpPr>
-            <a:spLocks noGrp="1"/>
-          </p:cNvSpPr>
-          <p:nvPr>
-            <p:ph type="title"/>
-          </p:nvPr>
-        </p:nvSpPr>
-        <p:spPr/>
-        <p:txBody>
-          <a:bodyPr/>
-          <a:lstStyle/>
-          <a:p>
-            <a:r>
-              <a:rPr lang="en-IN" dirty="0"/>
-              <a:t>Method to distinguish</a:t>
-            </a:r>
-          </a:p>
-        </p:txBody>
-      </p:sp>
-      <p:sp>
-        <p:nvSpPr>
-          <p:cNvPr id="3" name="TextBox 2">
-            <a:extLst>
-              <a:ext uri="{FF2B5EF4-FFF2-40B4-BE49-F238E27FC236}">
-                <a16:creationId xmlns:a16="http://schemas.microsoft.com/office/drawing/2014/main" id="{D5773C50-A0CF-B921-8608-82A2C2A774C8}"/>
-              </a:ext>
-            </a:extLst>
-          </p:cNvPr>
-          <p:cNvSpPr txBox="1"/>
-          <p:nvPr/>
-        </p:nvSpPr>
-        <p:spPr>
-          <a:xfrm>
-            <a:off x="2231136" y="2772697"/>
-            <a:ext cx="6735883" cy="2031325"/>
-          </a:xfrm>
-          <a:prstGeom prst="rect">
-            <a:avLst/>
-          </a:prstGeom>
-          <a:noFill/>
-        </p:spPr>
-        <p:txBody>
-          <a:bodyPr wrap="square" rtlCol="0">
-            <a:spAutoFit/>
-          </a:bodyPr>
-          <a:lstStyle/>
-          <a:p>
-            <a:pPr marL="285750" indent="-285750">
-              <a:buFont typeface="Arial" panose="020B0604020202020204" pitchFamily="34" charset="0"/>
-              <a:buChar char="•"/>
-            </a:pPr>
-            <a:r>
-              <a:rPr lang="en-IN" dirty="0"/>
-              <a:t>To distinguish we need to Compare the Nature of FFTs of given samples with the Test Samples and Identify the Bird</a:t>
-            </a:r>
-          </a:p>
-          <a:p>
-            <a:pPr marL="285750" indent="-285750">
-              <a:buFont typeface="Arial" panose="020B0604020202020204" pitchFamily="34" charset="0"/>
-              <a:buChar char="•"/>
-            </a:pPr>
-            <a:endParaRPr lang="en-IN" dirty="0"/>
-          </a:p>
-          <a:p>
-            <a:pPr marL="285750" indent="-285750">
-              <a:buFont typeface="Arial" panose="020B0604020202020204" pitchFamily="34" charset="0"/>
-              <a:buChar char="•"/>
-            </a:pPr>
-            <a:r>
-              <a:rPr lang="en-IN" dirty="0"/>
-              <a:t>So by </a:t>
-            </a:r>
-            <a:r>
-              <a:rPr lang="en-IN" dirty="0" err="1"/>
-              <a:t>oberseving</a:t>
-            </a:r>
-            <a:r>
-              <a:rPr lang="en-IN" dirty="0"/>
-              <a:t> the FFTs we can Differentiate them on the basis of Number of Peaks</a:t>
-            </a:r>
-          </a:p>
-          <a:p>
-            <a:pPr marL="285750" indent="-285750">
-              <a:buFont typeface="Arial" panose="020B0604020202020204" pitchFamily="34" charset="0"/>
-              <a:buChar char="•"/>
-            </a:pPr>
-            <a:endParaRPr lang="en-IN" dirty="0"/>
-          </a:p>
-          <a:p>
-            <a:pPr marL="285750" indent="-285750">
-              <a:buFont typeface="Arial" panose="020B0604020202020204" pitchFamily="34" charset="0"/>
-              <a:buChar char="•"/>
-            </a:pPr>
-            <a:r>
-              <a:rPr lang="en-IN" dirty="0"/>
-              <a:t>We normalise the FFT magnitude and </a:t>
-            </a:r>
-          </a:p>
-        </p:txBody>
-      </p:sp>
-    </p:spTree>
-    <p:extLst>
-      <p:ext uri="{BB962C8B-B14F-4D97-AF65-F5344CB8AC3E}">
-        <p14:creationId xmlns:p14="http://schemas.microsoft.com/office/powerpoint/2010/main" val="3887563221"/>
+        <p14:creationId xmlns:p14="http://schemas.microsoft.com/office/powerpoint/2010/main" val="2103096484"/>
       </p:ext>
     </p:extLst>
   </p:cSld>
@@ -9891,4 +16003,319 @@
     </a:ext>
   </a:extLst>
 </a:theme>
+</file>
+
+<file path=ppt/theme/theme2.xml><?xml version="1.0" encoding="utf-8"?>
+<a:theme xmlns:a="http://schemas.openxmlformats.org/drawingml/2006/main" name="Office Theme">
+  <a:themeElements>
+    <a:clrScheme name="Office">
+      <a:dk1>
+        <a:sysClr val="windowText" lastClr="000000"/>
+      </a:dk1>
+      <a:lt1>
+        <a:sysClr val="window" lastClr="FFFFFF"/>
+      </a:lt1>
+      <a:dk2>
+        <a:srgbClr val="0E2841"/>
+      </a:dk2>
+      <a:lt2>
+        <a:srgbClr val="E8E8E8"/>
+      </a:lt2>
+      <a:accent1>
+        <a:srgbClr val="156082"/>
+      </a:accent1>
+      <a:accent2>
+        <a:srgbClr val="E97132"/>
+      </a:accent2>
+      <a:accent3>
+        <a:srgbClr val="196B24"/>
+      </a:accent3>
+      <a:accent4>
+        <a:srgbClr val="0F9ED5"/>
+      </a:accent4>
+      <a:accent5>
+        <a:srgbClr val="A02B93"/>
+      </a:accent5>
+      <a:accent6>
+        <a:srgbClr val="4EA72E"/>
+      </a:accent6>
+      <a:hlink>
+        <a:srgbClr val="467886"/>
+      </a:hlink>
+      <a:folHlink>
+        <a:srgbClr val="96607D"/>
+      </a:folHlink>
+    </a:clrScheme>
+    <a:fontScheme name="Office">
+      <a:majorFont>
+        <a:latin typeface="Aptos Display" panose="02110004020202020204"/>
+        <a:ea typeface=""/>
+        <a:cs typeface=""/>
+        <a:font script="Jpan" typeface="游ゴシック Light"/>
+        <a:font script="Hang" typeface="맑은 고딕"/>
+        <a:font script="Hans" typeface="等线 Light"/>
+        <a:font script="Hant" typeface="新細明體"/>
+        <a:font script="Arab" typeface="Times New Roman"/>
+        <a:font script="Hebr" typeface="Times New Roman"/>
+        <a:font script="Thai" typeface="Angsana New"/>
+        <a:font script="Ethi" typeface="Nyala"/>
+        <a:font script="Beng" typeface="Vrinda"/>
+        <a:font script="Gujr" typeface="Shruti"/>
+        <a:font script="Khmr" typeface="MoolBoran"/>
+        <a:font script="Knda" typeface="Tunga"/>
+        <a:font script="Guru" typeface="Raavi"/>
+        <a:font script="Cans" typeface="Euphemia"/>
+        <a:font script="Cher" typeface="Plantagenet Cherokee"/>
+        <a:font script="Yiii" typeface="Microsoft Yi Baiti"/>
+        <a:font script="Tibt" typeface="Microsoft Himalaya"/>
+        <a:font script="Thaa" typeface="MV Boli"/>
+        <a:font script="Deva" typeface="Mangal"/>
+        <a:font script="Telu" typeface="Gautami"/>
+        <a:font script="Taml" typeface="Latha"/>
+        <a:font script="Syrc" typeface="Estrangelo Edessa"/>
+        <a:font script="Orya" typeface="Kalinga"/>
+        <a:font script="Mlym" typeface="Kartika"/>
+        <a:font script="Laoo" typeface="DokChampa"/>
+        <a:font script="Sinh" typeface="Iskoola Pota"/>
+        <a:font script="Mong" typeface="Mongolian Baiti"/>
+        <a:font script="Viet" typeface="Times New Roman"/>
+        <a:font script="Uigh" typeface="Microsoft Uighur"/>
+        <a:font script="Geor" typeface="Sylfaen"/>
+        <a:font script="Armn" typeface="Arial"/>
+        <a:font script="Bugi" typeface="Leelawadee UI"/>
+        <a:font script="Bopo" typeface="Microsoft JhengHei"/>
+        <a:font script="Java" typeface="Javanese Text"/>
+        <a:font script="Lisu" typeface="Segoe UI"/>
+        <a:font script="Mymr" typeface="Myanmar Text"/>
+        <a:font script="Nkoo" typeface="Ebrima"/>
+        <a:font script="Olck" typeface="Nirmala UI"/>
+        <a:font script="Osma" typeface="Ebrima"/>
+        <a:font script="Phag" typeface="Phagspa"/>
+        <a:font script="Syrn" typeface="Estrangelo Edessa"/>
+        <a:font script="Syrj" typeface="Estrangelo Edessa"/>
+        <a:font script="Syre" typeface="Estrangelo Edessa"/>
+        <a:font script="Sora" typeface="Nirmala UI"/>
+        <a:font script="Tale" typeface="Microsoft Tai Le"/>
+        <a:font script="Talu" typeface="Microsoft New Tai Lue"/>
+        <a:font script="Tfng" typeface="Ebrima"/>
+      </a:majorFont>
+      <a:minorFont>
+        <a:latin typeface="Aptos" panose="02110004020202020204"/>
+        <a:ea typeface=""/>
+        <a:cs typeface=""/>
+        <a:font script="Jpan" typeface="游ゴシック"/>
+        <a:font script="Hang" typeface="맑은 고딕"/>
+        <a:font script="Hans" typeface="等线"/>
+        <a:font script="Hant" typeface="新細明體"/>
+        <a:font script="Arab" typeface="Arial"/>
+        <a:font script="Hebr" typeface="Arial"/>
+        <a:font script="Thai" typeface="Cordia New"/>
+        <a:font script="Ethi" typeface="Nyala"/>
+        <a:font script="Beng" typeface="Vrinda"/>
+        <a:font script="Gujr" typeface="Shruti"/>
+        <a:font script="Khmr" typeface="DaunPenh"/>
+        <a:font script="Knda" typeface="Tunga"/>
+        <a:font script="Guru" typeface="Raavi"/>
+        <a:font script="Cans" typeface="Euphemia"/>
+        <a:font script="Cher" typeface="Plantagenet Cherokee"/>
+        <a:font script="Yiii" typeface="Microsoft Yi Baiti"/>
+        <a:font script="Tibt" typeface="Microsoft Himalaya"/>
+        <a:font script="Thaa" typeface="MV Boli"/>
+        <a:font script="Deva" typeface="Mangal"/>
+        <a:font script="Telu" typeface="Gautami"/>
+        <a:font script="Taml" typeface="Latha"/>
+        <a:font script="Syrc" typeface="Estrangelo Edessa"/>
+        <a:font script="Orya" typeface="Kalinga"/>
+        <a:font script="Mlym" typeface="Kartika"/>
+        <a:font script="Laoo" typeface="DokChampa"/>
+        <a:font script="Sinh" typeface="Iskoola Pota"/>
+        <a:font script="Mong" typeface="Mongolian Baiti"/>
+        <a:font script="Viet" typeface="Arial"/>
+        <a:font script="Uigh" typeface="Microsoft Uighur"/>
+        <a:font script="Geor" typeface="Sylfaen"/>
+        <a:font script="Armn" typeface="Arial"/>
+        <a:font script="Bugi" typeface="Leelawadee UI"/>
+        <a:font script="Bopo" typeface="Microsoft JhengHei"/>
+        <a:font script="Java" typeface="Javanese Text"/>
+        <a:font script="Lisu" typeface="Segoe UI"/>
+        <a:font script="Mymr" typeface="Myanmar Text"/>
+        <a:font script="Nkoo" typeface="Ebrima"/>
+        <a:font script="Olck" typeface="Nirmala UI"/>
+        <a:font script="Osma" typeface="Ebrima"/>
+        <a:font script="Phag" typeface="Phagspa"/>
+        <a:font script="Syrn" typeface="Estrangelo Edessa"/>
+        <a:font script="Syrj" typeface="Estrangelo Edessa"/>
+        <a:font script="Syre" typeface="Estrangelo Edessa"/>
+        <a:font script="Sora" typeface="Nirmala UI"/>
+        <a:font script="Tale" typeface="Microsoft Tai Le"/>
+        <a:font script="Talu" typeface="Microsoft New Tai Lue"/>
+        <a:font script="Tfng" typeface="Ebrima"/>
+      </a:minorFont>
+    </a:fontScheme>
+    <a:fmtScheme name="Office">
+      <a:fillStyleLst>
+        <a:solidFill>
+          <a:schemeClr val="phClr"/>
+        </a:solidFill>
+        <a:gradFill rotWithShape="1">
+          <a:gsLst>
+            <a:gs pos="0">
+              <a:schemeClr val="phClr">
+                <a:lumMod val="110000"/>
+                <a:satMod val="105000"/>
+                <a:tint val="67000"/>
+              </a:schemeClr>
+            </a:gs>
+            <a:gs pos="50000">
+              <a:schemeClr val="phClr">
+                <a:lumMod val="105000"/>
+                <a:satMod val="103000"/>
+                <a:tint val="73000"/>
+              </a:schemeClr>
+            </a:gs>
+            <a:gs pos="100000">
+              <a:schemeClr val="phClr">
+                <a:lumMod val="105000"/>
+                <a:satMod val="109000"/>
+                <a:tint val="81000"/>
+              </a:schemeClr>
+            </a:gs>
+          </a:gsLst>
+          <a:lin ang="5400000" scaled="0"/>
+        </a:gradFill>
+        <a:gradFill rotWithShape="1">
+          <a:gsLst>
+            <a:gs pos="0">
+              <a:schemeClr val="phClr">
+                <a:satMod val="103000"/>
+                <a:lumMod val="102000"/>
+                <a:tint val="94000"/>
+              </a:schemeClr>
+            </a:gs>
+            <a:gs pos="50000">
+              <a:schemeClr val="phClr">
+                <a:satMod val="110000"/>
+                <a:lumMod val="100000"/>
+                <a:shade val="100000"/>
+              </a:schemeClr>
+            </a:gs>
+            <a:gs pos="100000">
+              <a:schemeClr val="phClr">
+                <a:lumMod val="99000"/>
+                <a:satMod val="120000"/>
+                <a:shade val="78000"/>
+              </a:schemeClr>
+            </a:gs>
+          </a:gsLst>
+          <a:lin ang="5400000" scaled="0"/>
+        </a:gradFill>
+      </a:fillStyleLst>
+      <a:lnStyleLst>
+        <a:ln w="12700" cap="flat" cmpd="sng" algn="ctr">
+          <a:solidFill>
+            <a:schemeClr val="phClr"/>
+          </a:solidFill>
+          <a:prstDash val="solid"/>
+          <a:miter lim="800000"/>
+        </a:ln>
+        <a:ln w="19050" cap="flat" cmpd="sng" algn="ctr">
+          <a:solidFill>
+            <a:schemeClr val="phClr"/>
+          </a:solidFill>
+          <a:prstDash val="solid"/>
+          <a:miter lim="800000"/>
+        </a:ln>
+        <a:ln w="25400" cap="flat" cmpd="sng" algn="ctr">
+          <a:solidFill>
+            <a:schemeClr val="phClr"/>
+          </a:solidFill>
+          <a:prstDash val="solid"/>
+          <a:miter lim="800000"/>
+        </a:ln>
+      </a:lnStyleLst>
+      <a:effectStyleLst>
+        <a:effectStyle>
+          <a:effectLst/>
+        </a:effectStyle>
+        <a:effectStyle>
+          <a:effectLst/>
+        </a:effectStyle>
+        <a:effectStyle>
+          <a:effectLst>
+            <a:outerShdw blurRad="57150" dist="19050" dir="5400000" algn="ctr" rotWithShape="0">
+              <a:srgbClr val="000000">
+                <a:alpha val="63000"/>
+              </a:srgbClr>
+            </a:outerShdw>
+          </a:effectLst>
+        </a:effectStyle>
+      </a:effectStyleLst>
+      <a:bgFillStyleLst>
+        <a:solidFill>
+          <a:schemeClr val="phClr"/>
+        </a:solidFill>
+        <a:solidFill>
+          <a:schemeClr val="phClr">
+            <a:tint val="95000"/>
+            <a:satMod val="170000"/>
+          </a:schemeClr>
+        </a:solidFill>
+        <a:gradFill rotWithShape="1">
+          <a:gsLst>
+            <a:gs pos="0">
+              <a:schemeClr val="phClr">
+                <a:tint val="93000"/>
+                <a:satMod val="150000"/>
+                <a:shade val="98000"/>
+                <a:lumMod val="102000"/>
+              </a:schemeClr>
+            </a:gs>
+            <a:gs pos="50000">
+              <a:schemeClr val="phClr">
+                <a:tint val="98000"/>
+                <a:satMod val="130000"/>
+                <a:shade val="90000"/>
+                <a:lumMod val="103000"/>
+              </a:schemeClr>
+            </a:gs>
+            <a:gs pos="100000">
+              <a:schemeClr val="phClr">
+                <a:shade val="63000"/>
+                <a:satMod val="120000"/>
+              </a:schemeClr>
+            </a:gs>
+          </a:gsLst>
+          <a:lin ang="5400000" scaled="0"/>
+        </a:gradFill>
+      </a:bgFillStyleLst>
+    </a:fmtScheme>
+  </a:themeElements>
+  <a:objectDefaults>
+    <a:lnDef>
+      <a:spPr/>
+      <a:bodyPr/>
+      <a:lstStyle/>
+      <a:style>
+        <a:lnRef idx="2">
+          <a:schemeClr val="accent1"/>
+        </a:lnRef>
+        <a:fillRef idx="0">
+          <a:schemeClr val="accent1"/>
+        </a:fillRef>
+        <a:effectRef idx="1">
+          <a:schemeClr val="accent1"/>
+        </a:effectRef>
+        <a:fontRef idx="minor">
+          <a:schemeClr val="tx1"/>
+        </a:fontRef>
+      </a:style>
+    </a:lnDef>
+  </a:objectDefaults>
+  <a:extraClrSchemeLst/>
+  <a:extLst>
+    <a:ext uri="{05A4C25C-085E-4340-85A3-A5531E510DB2}">
+      <thm15:themeFamily xmlns:thm15="http://schemas.microsoft.com/office/thememl/2012/main" name="Office Theme" id="{2E142A2C-CD16-42D6-873A-C26D2A0506FA}" vid="{1BDDFF52-6CD6-40A5-AB3C-68EB2F1E4D0A}"/>
+    </a:ext>
+  </a:extLst>
+</a:theme>
 </file>